--- a/Course content/Slides/Topic 7 - Dimensionality reduction.pptx
+++ b/Course content/Slides/Topic 7 - Dimensionality reduction.pptx
@@ -5,7 +5,7 @@
     <p:sldMasterId id="2147483648" r:id="rId1"/>
   </p:sldMasterIdLst>
   <p:notesMasterIdLst>
-    <p:notesMasterId r:id="rId18"/>
+    <p:notesMasterId r:id="rId17"/>
   </p:notesMasterIdLst>
   <p:sldIdLst>
     <p:sldId id="278" r:id="rId2"/>
@@ -19,11 +19,10 @@
     <p:sldId id="286" r:id="rId10"/>
     <p:sldId id="287" r:id="rId11"/>
     <p:sldId id="288" r:id="rId12"/>
-    <p:sldId id="289" r:id="rId13"/>
-    <p:sldId id="290" r:id="rId14"/>
-    <p:sldId id="291" r:id="rId15"/>
-    <p:sldId id="292" r:id="rId16"/>
-    <p:sldId id="293" r:id="rId17"/>
+    <p:sldId id="290" r:id="rId13"/>
+    <p:sldId id="291" r:id="rId14"/>
+    <p:sldId id="292" r:id="rId15"/>
+    <p:sldId id="293" r:id="rId16"/>
   </p:sldIdLst>
   <p:sldSz cx="12192000" cy="6858000"/>
   <p:notesSz cx="6858000" cy="9144000"/>
@@ -223,7 +222,7 @@
           <a:p>
             <a:fld id="{B9B1DC7F-8587-4047-9A5D-1FCB6614CAE0}" type="datetimeFigureOut">
               <a:rPr lang="en-US" smtClean="0"/>
-              <a:t>11/4/2022</a:t>
+              <a:t>11/8/2022</a:t>
             </a:fld>
             <a:endParaRPr lang="en-US"/>
           </a:p>
@@ -637,7 +636,7 @@
           <a:p>
             <a:fld id="{A7DB5662-7327-465C-9A70-AD96B7A8D67A}" type="datetimeFigureOut">
               <a:rPr lang="en-US" smtClean="0"/>
-              <a:t>11/4/2022</a:t>
+              <a:t>11/8/2022</a:t>
             </a:fld>
             <a:endParaRPr lang="en-US"/>
           </a:p>
@@ -835,7 +834,7 @@
           <a:p>
             <a:fld id="{A7DB5662-7327-465C-9A70-AD96B7A8D67A}" type="datetimeFigureOut">
               <a:rPr lang="en-US" smtClean="0"/>
-              <a:t>11/4/2022</a:t>
+              <a:t>11/8/2022</a:t>
             </a:fld>
             <a:endParaRPr lang="en-US"/>
           </a:p>
@@ -1043,7 +1042,7 @@
           <a:p>
             <a:fld id="{A7DB5662-7327-465C-9A70-AD96B7A8D67A}" type="datetimeFigureOut">
               <a:rPr lang="en-US" smtClean="0"/>
-              <a:t>11/4/2022</a:t>
+              <a:t>11/8/2022</a:t>
             </a:fld>
             <a:endParaRPr lang="en-US"/>
           </a:p>
@@ -1241,7 +1240,7 @@
           <a:p>
             <a:fld id="{A7DB5662-7327-465C-9A70-AD96B7A8D67A}" type="datetimeFigureOut">
               <a:rPr lang="en-US" smtClean="0"/>
-              <a:t>11/4/2022</a:t>
+              <a:t>11/8/2022</a:t>
             </a:fld>
             <a:endParaRPr lang="en-US"/>
           </a:p>
@@ -1516,7 +1515,7 @@
           <a:p>
             <a:fld id="{A7DB5662-7327-465C-9A70-AD96B7A8D67A}" type="datetimeFigureOut">
               <a:rPr lang="en-US" smtClean="0"/>
-              <a:t>11/4/2022</a:t>
+              <a:t>11/8/2022</a:t>
             </a:fld>
             <a:endParaRPr lang="en-US"/>
           </a:p>
@@ -1781,7 +1780,7 @@
           <a:p>
             <a:fld id="{A7DB5662-7327-465C-9A70-AD96B7A8D67A}" type="datetimeFigureOut">
               <a:rPr lang="en-US" smtClean="0"/>
-              <a:t>11/4/2022</a:t>
+              <a:t>11/8/2022</a:t>
             </a:fld>
             <a:endParaRPr lang="en-US"/>
           </a:p>
@@ -2193,7 +2192,7 @@
           <a:p>
             <a:fld id="{A7DB5662-7327-465C-9A70-AD96B7A8D67A}" type="datetimeFigureOut">
               <a:rPr lang="en-US" smtClean="0"/>
-              <a:t>11/4/2022</a:t>
+              <a:t>11/8/2022</a:t>
             </a:fld>
             <a:endParaRPr lang="en-US"/>
           </a:p>
@@ -2334,7 +2333,7 @@
           <a:p>
             <a:fld id="{A7DB5662-7327-465C-9A70-AD96B7A8D67A}" type="datetimeFigureOut">
               <a:rPr lang="en-US" smtClean="0"/>
-              <a:t>11/4/2022</a:t>
+              <a:t>11/8/2022</a:t>
             </a:fld>
             <a:endParaRPr lang="en-US"/>
           </a:p>
@@ -2447,7 +2446,7 @@
           <a:p>
             <a:fld id="{A7DB5662-7327-465C-9A70-AD96B7A8D67A}" type="datetimeFigureOut">
               <a:rPr lang="en-US" smtClean="0"/>
-              <a:t>11/4/2022</a:t>
+              <a:t>11/8/2022</a:t>
             </a:fld>
             <a:endParaRPr lang="en-US"/>
           </a:p>
@@ -2758,7 +2757,7 @@
           <a:p>
             <a:fld id="{A7DB5662-7327-465C-9A70-AD96B7A8D67A}" type="datetimeFigureOut">
               <a:rPr lang="en-US" smtClean="0"/>
-              <a:t>11/4/2022</a:t>
+              <a:t>11/8/2022</a:t>
             </a:fld>
             <a:endParaRPr lang="en-US"/>
           </a:p>
@@ -3046,7 +3045,7 @@
           <a:p>
             <a:fld id="{A7DB5662-7327-465C-9A70-AD96B7A8D67A}" type="datetimeFigureOut">
               <a:rPr lang="en-US" smtClean="0"/>
-              <a:t>11/4/2022</a:t>
+              <a:t>11/8/2022</a:t>
             </a:fld>
             <a:endParaRPr lang="en-US"/>
           </a:p>
@@ -3287,7 +3286,7 @@
           <a:p>
             <a:fld id="{A7DB5662-7327-465C-9A70-AD96B7A8D67A}" type="datetimeFigureOut">
               <a:rPr lang="en-US" smtClean="0"/>
-              <a:t>11/4/2022</a:t>
+              <a:t>11/8/2022</a:t>
             </a:fld>
             <a:endParaRPr lang="en-US"/>
           </a:p>
@@ -22036,7 +22035,7 @@
             <p:spPr>
               <a:xfrm>
                 <a:off x="927557" y="1920898"/>
-                <a:ext cx="10610987" cy="4235134"/>
+                <a:ext cx="10610987" cy="3773469"/>
               </a:xfrm>
               <a:prstGeom prst="rect">
                 <a:avLst/>
@@ -22245,7 +22244,7 @@
                   <a:rPr lang="en-US" sz="2000" dirty="0">
                     <a:latin typeface="+mj-lt"/>
                   </a:rPr>
-                  <a:t>The ide ais that the </a:t>
+                  <a:t>Again, the idea is that the </a:t>
                 </a:r>
                 <a:r>
                   <a:rPr lang="en-US" sz="2000" i="1" dirty="0">
@@ -22269,40 +22268,7 @@
                   <a:rPr lang="en-US" sz="2000" dirty="0">
                     <a:latin typeface="+mj-lt"/>
                   </a:rPr>
-                  <a:t>-dimensional space, but not all dimensions are equally interesting. Interesting is a way of referring to the amount that the observations vary along each dimension</a:t>
-                </a:r>
-              </a:p>
-              <a:p>
-                <a:pPr marL="285750" indent="-285750">
-                  <a:lnSpc>
-                    <a:spcPct val="150000"/>
-                  </a:lnSpc>
-                  <a:buFont typeface="Wingdings" panose="05000000000000000000" pitchFamily="2" charset="2"/>
-                  <a:buChar char="§"/>
-                </a:pPr>
-                <a:r>
-                  <a:rPr lang="en-US" sz="2000" dirty="0">
-                    <a:latin typeface="+mj-lt"/>
-                  </a:rPr>
-                  <a:t>Each of the dimensions found by PCA is a </a:t>
-                </a:r>
-                <a:r>
-                  <a:rPr lang="en-US" sz="2000" b="1" dirty="0">
-                    <a:latin typeface="+mj-lt"/>
-                  </a:rPr>
-                  <a:t>linear combination of the </a:t>
-                </a:r>
-                <a:r>
-                  <a:rPr lang="en-US" sz="2000" b="1" i="1" dirty="0">
-                    <a:latin typeface="+mj-lt"/>
-                  </a:rPr>
-                  <a:t>p</a:t>
-                </a:r>
-                <a:r>
-                  <a:rPr lang="en-US" sz="2000" b="1" dirty="0">
-                    <a:latin typeface="+mj-lt"/>
-                  </a:rPr>
-                  <a:t> features</a:t>
+                  <a:t>-dimensional space, but not all dimensions are equally interesting (a way of referring to the amount that the observations vary along each dimension)</a:t>
                 </a:r>
               </a:p>
             </p:txBody>
@@ -22326,7 +22292,7 @@
             <p:spPr>
               <a:xfrm>
                 <a:off x="927557" y="1920898"/>
-                <a:ext cx="10610987" cy="4235134"/>
+                <a:ext cx="10610987" cy="3773469"/>
               </a:xfrm>
               <a:prstGeom prst="rect">
                 <a:avLst/>
@@ -22334,7 +22300,7 @@
               <a:blipFill>
                 <a:blip r:embed="rId2"/>
                 <a:stretch>
-                  <a:fillRect l="-517" b="-1583"/>
+                  <a:fillRect l="-517" b="-1939"/>
                 </a:stretch>
               </a:blipFill>
             </p:spPr>
@@ -22765,7 +22731,7 @@
             <p:spPr>
               <a:xfrm>
                 <a:off x="927557" y="1920898"/>
-                <a:ext cx="10610987" cy="3796680"/>
+                <a:ext cx="10610987" cy="4258345"/>
               </a:xfrm>
               <a:prstGeom prst="rect">
                 <a:avLst/>
@@ -22777,6 +22743,39 @@
                 <a:spAutoFit/>
               </a:bodyPr>
               <a:lstStyle/>
+              <a:p>
+                <a:pPr marL="285750" indent="-285750">
+                  <a:lnSpc>
+                    <a:spcPct val="150000"/>
+                  </a:lnSpc>
+                  <a:buFont typeface="Wingdings" panose="05000000000000000000" pitchFamily="2" charset="2"/>
+                  <a:buChar char="§"/>
+                </a:pPr>
+                <a:r>
+                  <a:rPr lang="en-US" sz="2000" dirty="0">
+                    <a:latin typeface="+mj-lt"/>
+                  </a:rPr>
+                  <a:t>Each of the dimensions found by PCA is a </a:t>
+                </a:r>
+                <a:r>
+                  <a:rPr lang="en-US" sz="2000" b="1" dirty="0">
+                    <a:latin typeface="+mj-lt"/>
+                  </a:rPr>
+                  <a:t>linear combination of the </a:t>
+                </a:r>
+                <a:r>
+                  <a:rPr lang="en-US" sz="2000" b="1" i="1" dirty="0">
+                    <a:latin typeface="+mj-lt"/>
+                  </a:rPr>
+                  <a:t>p</a:t>
+                </a:r>
+                <a:r>
+                  <a:rPr lang="en-US" sz="2000" b="1" dirty="0">
+                    <a:latin typeface="+mj-lt"/>
+                  </a:rPr>
+                  <a:t> features</a:t>
+                </a:r>
+              </a:p>
               <a:p>
                 <a:pPr marL="285750" indent="-285750">
                   <a:lnSpc>
@@ -22810,13 +22809,19 @@
                       </m:sSubPr>
                       <m:e>
                         <m:r>
-                          <a:rPr lang="en-US" sz="2000" b="1" i="1" smtClean="0">
+                          <a:rPr lang="es-ES" sz="2000" b="1" i="1" smtClean="0">
                             <a:latin typeface="Cambria Math" panose="02040503050406030204" pitchFamily="18" charset="0"/>
                           </a:rPr>
-                          <m:t>𝒁</m:t>
+                          <m:t>𝒛</m:t>
                         </m:r>
                       </m:e>
                       <m:sub>
+                        <m:r>
+                          <a:rPr lang="es-ES" sz="2000" b="1" i="1" smtClean="0">
+                            <a:latin typeface="Cambria Math" panose="02040503050406030204" pitchFamily="18" charset="0"/>
+                          </a:rPr>
+                          <m:t>𝒊</m:t>
+                        </m:r>
                         <m:r>
                           <a:rPr lang="en-US" sz="2000" b="1" i="1" smtClean="0">
                             <a:latin typeface="Cambria Math" panose="02040503050406030204" pitchFamily="18" charset="0"/>
@@ -22874,20 +22879,26 @@
                     <m:sSub>
                       <m:sSubPr>
                         <m:ctrlPr>
-                          <a:rPr lang="en-US" sz="2000" b="1" i="1">
+                          <a:rPr lang="en-US" sz="2000" b="1" i="1" smtClean="0">
                             <a:latin typeface="Cambria Math" panose="02040503050406030204" pitchFamily="18" charset="0"/>
                           </a:rPr>
                         </m:ctrlPr>
                       </m:sSubPr>
                       <m:e>
                         <m:r>
-                          <a:rPr lang="en-US" sz="2000" b="1" i="1" smtClean="0">
+                          <a:rPr lang="es-ES" sz="2000" b="1" i="1" smtClean="0">
                             <a:latin typeface="Cambria Math" panose="02040503050406030204" pitchFamily="18" charset="0"/>
                           </a:rPr>
-                          <m:t>𝑿</m:t>
+                          <m:t>𝒙</m:t>
                         </m:r>
                       </m:e>
                       <m:sub>
+                        <m:r>
+                          <a:rPr lang="es-ES" sz="2000" b="1" i="1" smtClean="0">
+                            <a:latin typeface="Cambria Math" panose="02040503050406030204" pitchFamily="18" charset="0"/>
+                          </a:rPr>
+                          <m:t>𝒊</m:t>
+                        </m:r>
                         <m:r>
                           <a:rPr lang="en-US" sz="2000" b="1" i="1">
                             <a:latin typeface="Cambria Math" panose="02040503050406030204" pitchFamily="18" charset="0"/>
@@ -22949,13 +22960,19 @@
                       </m:sSubPr>
                       <m:e>
                         <m:r>
-                          <a:rPr lang="en-US" sz="2000" b="1" i="1" smtClean="0">
+                          <a:rPr lang="es-ES" sz="2000" b="1" i="1" smtClean="0">
                             <a:latin typeface="Cambria Math" panose="02040503050406030204" pitchFamily="18" charset="0"/>
                           </a:rPr>
-                          <m:t>𝑿</m:t>
+                          <m:t>𝒙</m:t>
                         </m:r>
                       </m:e>
                       <m:sub>
+                        <m:r>
+                          <a:rPr lang="es-ES" sz="2000" b="1" i="1" smtClean="0">
+                            <a:latin typeface="Cambria Math" panose="02040503050406030204" pitchFamily="18" charset="0"/>
+                          </a:rPr>
+                          <m:t>𝒊</m:t>
+                        </m:r>
                         <m:r>
                           <a:rPr lang="en-US" sz="2000" b="1" i="1" smtClean="0">
                             <a:latin typeface="Cambria Math" panose="02040503050406030204" pitchFamily="18" charset="0"/>
@@ -23027,13 +23044,19 @@
                       </m:sSubPr>
                       <m:e>
                         <m:r>
-                          <a:rPr lang="en-US" sz="2000" b="1" i="1" smtClean="0">
+                          <a:rPr lang="es-ES" sz="2000" b="1" i="1" smtClean="0">
                             <a:latin typeface="Cambria Math" panose="02040503050406030204" pitchFamily="18" charset="0"/>
                           </a:rPr>
-                          <m:t>𝑿</m:t>
+                          <m:t>𝒙</m:t>
                         </m:r>
                       </m:e>
                       <m:sub>
+                        <m:r>
+                          <a:rPr lang="es-ES" sz="2000" b="1" i="1" smtClean="0">
+                            <a:latin typeface="Cambria Math" panose="02040503050406030204" pitchFamily="18" charset="0"/>
+                          </a:rPr>
+                          <m:t>𝒊</m:t>
+                        </m:r>
                         <m:r>
                           <a:rPr lang="en-US" sz="2000" b="1" i="1" smtClean="0">
                             <a:latin typeface="Cambria Math" panose="02040503050406030204" pitchFamily="18" charset="0"/>
@@ -23616,1296 +23639,6 @@
             <p:spPr>
               <a:xfrm>
                 <a:off x="927557" y="1920898"/>
-                <a:ext cx="10610987" cy="3796680"/>
-              </a:xfrm>
-              <a:prstGeom prst="rect">
-                <a:avLst/>
-              </a:prstGeom>
-              <a:blipFill>
-                <a:blip r:embed="rId2"/>
-                <a:stretch>
-                  <a:fillRect l="-574"/>
-                </a:stretch>
-              </a:blipFill>
-            </p:spPr>
-            <p:txBody>
-              <a:bodyPr/>
-              <a:lstStyle/>
-              <a:p>
-                <a:r>
-                  <a:rPr lang="en-US">
-                    <a:noFill/>
-                  </a:rPr>
-                  <a:t> </a:t>
-                </a:r>
-              </a:p>
-            </p:txBody>
-          </p:sp>
-        </mc:Fallback>
-      </mc:AlternateContent>
-    </p:spTree>
-    <p:extLst>
-      <p:ext uri="{BB962C8B-B14F-4D97-AF65-F5344CB8AC3E}">
-        <p14:creationId xmlns:p14="http://schemas.microsoft.com/office/powerpoint/2010/main" val="144432870"/>
-      </p:ext>
-    </p:extLst>
-  </p:cSld>
-  <p:clrMapOvr>
-    <a:masterClrMapping/>
-  </p:clrMapOvr>
-</p:sld>
-</file>
-
-<file path=ppt/slides/slide12.xml><?xml version="1.0" encoding="utf-8"?>
-<p:sld xmlns:a="http://schemas.openxmlformats.org/drawingml/2006/main" xmlns:r="http://schemas.openxmlformats.org/officeDocument/2006/relationships" xmlns:p="http://schemas.openxmlformats.org/presentationml/2006/main">
-  <p:cSld>
-    <p:spTree>
-      <p:nvGrpSpPr>
-        <p:cNvPr id="1" name=""/>
-        <p:cNvGrpSpPr/>
-        <p:nvPr/>
-      </p:nvGrpSpPr>
-      <p:grpSpPr>
-        <a:xfrm>
-          <a:off x="0" y="0"/>
-          <a:ext cx="0" cy="0"/>
-          <a:chOff x="0" y="0"/>
-          <a:chExt cx="0" cy="0"/>
-        </a:xfrm>
-      </p:grpSpPr>
-      <p:sp>
-        <p:nvSpPr>
-          <p:cNvPr id="2" name="Title 1">
-            <a:extLst>
-              <a:ext uri="{FF2B5EF4-FFF2-40B4-BE49-F238E27FC236}">
-                <a16:creationId xmlns:a16="http://schemas.microsoft.com/office/drawing/2014/main" id="{31C29F6F-54A2-5964-F2B2-982952460386}"/>
-              </a:ext>
-            </a:extLst>
-          </p:cNvPr>
-          <p:cNvSpPr>
-            <a:spLocks noGrp="1"/>
-          </p:cNvSpPr>
-          <p:nvPr>
-            <p:ph type="title"/>
-          </p:nvPr>
-        </p:nvSpPr>
-        <p:spPr/>
-        <p:txBody>
-          <a:bodyPr>
-            <a:normAutofit/>
-          </a:bodyPr>
-          <a:lstStyle/>
-          <a:p>
-            <a:r>
-              <a:rPr lang="en-US" sz="4000" dirty="0"/>
-              <a:t>Principal Component Analysis (PCA)</a:t>
-            </a:r>
-          </a:p>
-        </p:txBody>
-      </p:sp>
-      <p:sp>
-        <p:nvSpPr>
-          <p:cNvPr id="4" name="Rectángulo 3">
-            <a:extLst>
-              <a:ext uri="{FF2B5EF4-FFF2-40B4-BE49-F238E27FC236}">
-                <a16:creationId xmlns:a16="http://schemas.microsoft.com/office/drawing/2014/main" id="{7BF95E35-4D9C-7F59-F308-C61FF9CD1B58}"/>
-              </a:ext>
-            </a:extLst>
-          </p:cNvPr>
-          <p:cNvSpPr/>
-          <p:nvPr/>
-        </p:nvSpPr>
-        <p:spPr>
-          <a:xfrm>
-            <a:off x="0" y="0"/>
-            <a:ext cx="374469" cy="6858000"/>
-          </a:xfrm>
-          <a:prstGeom prst="rect">
-            <a:avLst/>
-          </a:prstGeom>
-        </p:spPr>
-        <p:style>
-          <a:lnRef idx="2">
-            <a:schemeClr val="accent2">
-              <a:shade val="50000"/>
-            </a:schemeClr>
-          </a:lnRef>
-          <a:fillRef idx="1">
-            <a:schemeClr val="accent2"/>
-          </a:fillRef>
-          <a:effectRef idx="0">
-            <a:schemeClr val="accent2"/>
-          </a:effectRef>
-          <a:fontRef idx="minor">
-            <a:schemeClr val="lt1"/>
-          </a:fontRef>
-        </p:style>
-        <p:txBody>
-          <a:bodyPr rtlCol="0" anchor="ctr"/>
-          <a:lstStyle/>
-          <a:p>
-            <a:pPr algn="ctr"/>
-            <a:endParaRPr lang="es-ES"/>
-          </a:p>
-        </p:txBody>
-      </p:sp>
-      <p:sp>
-        <p:nvSpPr>
-          <p:cNvPr id="6" name="Rectangle 143">
-            <a:extLst>
-              <a:ext uri="{FF2B5EF4-FFF2-40B4-BE49-F238E27FC236}">
-                <a16:creationId xmlns:a16="http://schemas.microsoft.com/office/drawing/2014/main" id="{C9A975F5-C7DC-9274-20CA-B5939A2A86BD}"/>
-              </a:ext>
-            </a:extLst>
-          </p:cNvPr>
-          <p:cNvSpPr>
-            <a:spLocks noChangeArrowheads="1"/>
-          </p:cNvSpPr>
-          <p:nvPr/>
-        </p:nvSpPr>
-        <p:spPr bwMode="auto">
-          <a:xfrm>
-            <a:off x="448342" y="6549317"/>
-            <a:ext cx="5730175" cy="261610"/>
-          </a:xfrm>
-          <a:prstGeom prst="rect">
-            <a:avLst/>
-          </a:prstGeom>
-          <a:noFill/>
-          <a:ln>
-            <a:noFill/>
-          </a:ln>
-          <a:effectLst/>
-          <a:extLst>
-            <a:ext uri="{909E8E84-426E-40DD-AFC4-6F175D3DCCD1}">
-              <a14:hiddenFill xmlns:a14="http://schemas.microsoft.com/office/drawing/2010/main">
-                <a:solidFill>
-                  <a:schemeClr val="accent1"/>
-                </a:solidFill>
-              </a14:hiddenFill>
-            </a:ext>
-            <a:ext uri="{91240B29-F687-4F45-9708-019B960494DF}">
-              <a14:hiddenLine xmlns:a14="http://schemas.microsoft.com/office/drawing/2010/main" w="9525">
-                <a:solidFill>
-                  <a:schemeClr val="tx1"/>
-                </a:solidFill>
-                <a:miter lim="800000"/>
-                <a:headEnd/>
-                <a:tailEnd/>
-              </a14:hiddenLine>
-            </a:ext>
-            <a:ext uri="{AF507438-7753-43E0-B8FC-AC1667EBCBE1}">
-              <a14:hiddenEffects xmlns:a14="http://schemas.microsoft.com/office/drawing/2010/main">
-                <a:effectLst>
-                  <a:outerShdw dist="35921" dir="2700000" algn="ctr" rotWithShape="0">
-                    <a:schemeClr val="bg2"/>
-                  </a:outerShdw>
-                </a:effectLst>
-              </a14:hiddenEffects>
-            </a:ext>
-          </a:extLst>
-        </p:spPr>
-        <p:txBody>
-          <a:bodyPr vert="horz" wrap="square" lIns="91440" tIns="45720" rIns="91440" bIns="45720" numCol="1" anchor="ctr" anchorCtr="0" compatLnSpc="1">
-            <a:prstTxWarp prst="textNoShape">
-              <a:avLst/>
-            </a:prstTxWarp>
-            <a:spAutoFit/>
-          </a:bodyPr>
-          <a:lstStyle/>
-          <a:p>
-            <a:pPr marL="0" marR="0" lvl="0" indent="0" algn="l" defTabSz="914400" rtl="0" eaLnBrk="0" fontAlgn="base" latinLnBrk="0" hangingPunct="0">
-              <a:lnSpc>
-                <a:spcPct val="100000"/>
-              </a:lnSpc>
-              <a:spcBef>
-                <a:spcPct val="0"/>
-              </a:spcBef>
-              <a:spcAft>
-                <a:spcPct val="0"/>
-              </a:spcAft>
-              <a:buClrTx/>
-              <a:buSzTx/>
-              <a:buFontTx/>
-              <a:buNone/>
-              <a:tabLst/>
-            </a:pPr>
-            <a:r>
-              <a:rPr kumimoji="0" lang="en-US" altLang="es-ES" sz="1100" b="0" i="0" u="none" strike="noStrike" cap="none" normalizeH="0" baseline="0" dirty="0">
-                <a:ln>
-                  <a:noFill/>
-                </a:ln>
-                <a:solidFill>
-                  <a:srgbClr val="F4A200"/>
-                </a:solidFill>
-                <a:effectLst/>
-                <a:latin typeface="Arial" panose="020B0604020202020204" pitchFamily="34" charset="0"/>
-                <a:ea typeface="Myriad Pro Light"/>
-                <a:cs typeface="Times New Roman" panose="02020603050405020304" pitchFamily="18" charset="0"/>
-              </a:rPr>
-              <a:t>Master in Quantitative Economic Analysis </a:t>
-            </a:r>
-            <a:r>
-              <a:rPr kumimoji="0" lang="en-US" altLang="es-ES" sz="1100" b="0" i="0" u="none" strike="noStrike" cap="none" normalizeH="0" baseline="0" dirty="0" err="1">
-                <a:ln>
-                  <a:noFill/>
-                </a:ln>
-                <a:solidFill>
-                  <a:srgbClr val="F4A200"/>
-                </a:solidFill>
-                <a:effectLst/>
-                <a:latin typeface="Arial" panose="020B0604020202020204" pitchFamily="34" charset="0"/>
-                <a:ea typeface="Myriad Pro Light"/>
-                <a:cs typeface="Times New Roman" panose="02020603050405020304" pitchFamily="18" charset="0"/>
-              </a:rPr>
-              <a:t>MQuEA</a:t>
-            </a:r>
-            <a:endParaRPr kumimoji="0" lang="es-ES" altLang="es-ES" sz="300" b="0" i="0" u="none" strike="noStrike" cap="none" normalizeH="0" baseline="0" dirty="0">
-              <a:ln>
-                <a:noFill/>
-              </a:ln>
-              <a:solidFill>
-                <a:schemeClr val="tx1"/>
-              </a:solidFill>
-              <a:effectLst/>
-              <a:latin typeface="Arial" panose="020B0604020202020204" pitchFamily="34" charset="0"/>
-            </a:endParaRPr>
-          </a:p>
-        </p:txBody>
-      </p:sp>
-      <p:sp>
-        <p:nvSpPr>
-          <p:cNvPr id="7" name="Rectangle 143">
-            <a:extLst>
-              <a:ext uri="{FF2B5EF4-FFF2-40B4-BE49-F238E27FC236}">
-                <a16:creationId xmlns:a16="http://schemas.microsoft.com/office/drawing/2014/main" id="{2BE2E3EB-749E-E562-030D-C3F46E714169}"/>
-              </a:ext>
-            </a:extLst>
-          </p:cNvPr>
-          <p:cNvSpPr>
-            <a:spLocks noChangeArrowheads="1"/>
-          </p:cNvSpPr>
-          <p:nvPr/>
-        </p:nvSpPr>
-        <p:spPr bwMode="auto">
-          <a:xfrm>
-            <a:off x="6186394" y="6559955"/>
-            <a:ext cx="5730175" cy="261610"/>
-          </a:xfrm>
-          <a:prstGeom prst="rect">
-            <a:avLst/>
-          </a:prstGeom>
-          <a:noFill/>
-          <a:ln>
-            <a:noFill/>
-          </a:ln>
-          <a:effectLst/>
-          <a:extLst>
-            <a:ext uri="{909E8E84-426E-40DD-AFC4-6F175D3DCCD1}">
-              <a14:hiddenFill xmlns:a14="http://schemas.microsoft.com/office/drawing/2010/main">
-                <a:solidFill>
-                  <a:schemeClr val="accent1"/>
-                </a:solidFill>
-              </a14:hiddenFill>
-            </a:ext>
-            <a:ext uri="{91240B29-F687-4F45-9708-019B960494DF}">
-              <a14:hiddenLine xmlns:a14="http://schemas.microsoft.com/office/drawing/2010/main" w="9525">
-                <a:solidFill>
-                  <a:schemeClr val="tx1"/>
-                </a:solidFill>
-                <a:miter lim="800000"/>
-                <a:headEnd/>
-                <a:tailEnd/>
-              </a14:hiddenLine>
-            </a:ext>
-            <a:ext uri="{AF507438-7753-43E0-B8FC-AC1667EBCBE1}">
-              <a14:hiddenEffects xmlns:a14="http://schemas.microsoft.com/office/drawing/2010/main">
-                <a:effectLst>
-                  <a:outerShdw dist="35921" dir="2700000" algn="ctr" rotWithShape="0">
-                    <a:schemeClr val="bg2"/>
-                  </a:outerShdw>
-                </a:effectLst>
-              </a14:hiddenEffects>
-            </a:ext>
-          </a:extLst>
-        </p:spPr>
-        <p:txBody>
-          <a:bodyPr vert="horz" wrap="square" lIns="91440" tIns="45720" rIns="91440" bIns="45720" numCol="1" anchor="ctr" anchorCtr="0" compatLnSpc="1">
-            <a:prstTxWarp prst="textNoShape">
-              <a:avLst/>
-            </a:prstTxWarp>
-            <a:spAutoFit/>
-          </a:bodyPr>
-          <a:lstStyle/>
-          <a:p>
-            <a:pPr marL="0" marR="0" lvl="0" indent="0" algn="r" defTabSz="914400" rtl="0" eaLnBrk="0" fontAlgn="base" latinLnBrk="0" hangingPunct="0">
-              <a:lnSpc>
-                <a:spcPct val="100000"/>
-              </a:lnSpc>
-              <a:spcBef>
-                <a:spcPct val="0"/>
-              </a:spcBef>
-              <a:spcAft>
-                <a:spcPct val="0"/>
-              </a:spcAft>
-              <a:buClrTx/>
-              <a:buSzTx/>
-              <a:buFontTx/>
-              <a:buNone/>
-              <a:tabLst/>
-            </a:pPr>
-            <a:r>
-              <a:rPr kumimoji="0" lang="en-US" altLang="es-ES" sz="1100" b="0" i="0" u="none" strike="noStrike" cap="none" normalizeH="0" baseline="0" dirty="0">
-                <a:ln>
-                  <a:noFill/>
-                </a:ln>
-                <a:solidFill>
-                  <a:srgbClr val="F4A200"/>
-                </a:solidFill>
-                <a:effectLst/>
-                <a:latin typeface="Arial" panose="020B0604020202020204" pitchFamily="34" charset="0"/>
-                <a:ea typeface="Myriad Pro Light"/>
-                <a:cs typeface="Times New Roman" panose="02020603050405020304" pitchFamily="18" charset="0"/>
-              </a:rPr>
-              <a:t>Universidad </a:t>
-            </a:r>
-            <a:r>
-              <a:rPr kumimoji="0" lang="en-US" altLang="es-ES" sz="1100" b="0" i="0" u="none" strike="noStrike" cap="none" normalizeH="0" baseline="0" dirty="0" err="1">
-                <a:ln>
-                  <a:noFill/>
-                </a:ln>
-                <a:solidFill>
-                  <a:srgbClr val="F4A200"/>
-                </a:solidFill>
-                <a:effectLst/>
-                <a:latin typeface="Arial" panose="020B0604020202020204" pitchFamily="34" charset="0"/>
-                <a:ea typeface="Myriad Pro Light"/>
-                <a:cs typeface="Times New Roman" panose="02020603050405020304" pitchFamily="18" charset="0"/>
-              </a:rPr>
-              <a:t>Aut</a:t>
-            </a:r>
-            <a:r>
-              <a:rPr lang="en-US" altLang="es-ES" sz="1100" dirty="0" err="1">
-                <a:solidFill>
-                  <a:srgbClr val="F4A200"/>
-                </a:solidFill>
-                <a:latin typeface="Arial" panose="020B0604020202020204" pitchFamily="34" charset="0"/>
-                <a:ea typeface="Myriad Pro Light"/>
-                <a:cs typeface="Times New Roman" panose="02020603050405020304" pitchFamily="18" charset="0"/>
-              </a:rPr>
-              <a:t>ó</a:t>
-            </a:r>
-            <a:r>
-              <a:rPr kumimoji="0" lang="en-US" altLang="es-ES" sz="1100" b="0" i="0" u="none" strike="noStrike" cap="none" normalizeH="0" baseline="0" dirty="0" err="1">
-                <a:ln>
-                  <a:noFill/>
-                </a:ln>
-                <a:solidFill>
-                  <a:srgbClr val="F4A200"/>
-                </a:solidFill>
-                <a:effectLst/>
-                <a:latin typeface="Arial" panose="020B0604020202020204" pitchFamily="34" charset="0"/>
-                <a:ea typeface="Myriad Pro Light"/>
-                <a:cs typeface="Times New Roman" panose="02020603050405020304" pitchFamily="18" charset="0"/>
-              </a:rPr>
-              <a:t>noma</a:t>
-            </a:r>
-            <a:r>
-              <a:rPr kumimoji="0" lang="en-US" altLang="es-ES" sz="1100" b="0" i="0" u="none" strike="noStrike" cap="none" normalizeH="0" baseline="0" dirty="0">
-                <a:ln>
-                  <a:noFill/>
-                </a:ln>
-                <a:solidFill>
-                  <a:srgbClr val="F4A200"/>
-                </a:solidFill>
-                <a:effectLst/>
-                <a:latin typeface="Arial" panose="020B0604020202020204" pitchFamily="34" charset="0"/>
-                <a:ea typeface="Myriad Pro Light"/>
-                <a:cs typeface="Times New Roman" panose="02020603050405020304" pitchFamily="18" charset="0"/>
-              </a:rPr>
-              <a:t> de Madrid</a:t>
-            </a:r>
-            <a:endParaRPr kumimoji="0" lang="es-ES" altLang="es-ES" sz="300" b="0" i="0" u="none" strike="noStrike" cap="none" normalizeH="0" baseline="0" dirty="0">
-              <a:ln>
-                <a:noFill/>
-              </a:ln>
-              <a:solidFill>
-                <a:schemeClr val="tx1"/>
-              </a:solidFill>
-              <a:effectLst/>
-              <a:latin typeface="Arial" panose="020B0604020202020204" pitchFamily="34" charset="0"/>
-            </a:endParaRPr>
-          </a:p>
-        </p:txBody>
-      </p:sp>
-      <mc:AlternateContent xmlns:mc="http://schemas.openxmlformats.org/markup-compatibility/2006">
-        <mc:Choice xmlns:a14="http://schemas.microsoft.com/office/drawing/2010/main" Requires="a14">
-          <p:sp>
-            <p:nvSpPr>
-              <p:cNvPr id="3" name="TextBox 2">
-                <a:extLst>
-                  <a:ext uri="{FF2B5EF4-FFF2-40B4-BE49-F238E27FC236}">
-                    <a16:creationId xmlns:a16="http://schemas.microsoft.com/office/drawing/2014/main" id="{07C8DDDE-8C83-1AC8-8FA2-895D71DAD748}"/>
-                  </a:ext>
-                </a:extLst>
-              </p:cNvPr>
-              <p:cNvSpPr txBox="1"/>
-              <p:nvPr/>
-            </p:nvSpPr>
-            <p:spPr>
-              <a:xfrm>
-                <a:off x="927557" y="1920898"/>
-                <a:ext cx="10610987" cy="4258345"/>
-              </a:xfrm>
-              <a:prstGeom prst="rect">
-                <a:avLst/>
-              </a:prstGeom>
-              <a:noFill/>
-            </p:spPr>
-            <p:txBody>
-              <a:bodyPr wrap="square" rtlCol="0">
-                <a:spAutoFit/>
-              </a:bodyPr>
-              <a:lstStyle/>
-              <a:p>
-                <a:pPr marL="285750" indent="-285750">
-                  <a:lnSpc>
-                    <a:spcPct val="150000"/>
-                  </a:lnSpc>
-                  <a:buFont typeface="Wingdings" panose="05000000000000000000" pitchFamily="2" charset="2"/>
-                  <a:buChar char="§"/>
-                </a:pPr>
-                <a:r>
-                  <a:rPr lang="en-US" sz="2000" dirty="0">
-                    <a:latin typeface="+mj-lt"/>
-                  </a:rPr>
-                  <a:t>The first principal component is the normalized linear combination of the features:</a:t>
-                </a:r>
-              </a:p>
-              <a:p>
-                <a:pPr algn="ctr">
-                  <a:lnSpc>
-                    <a:spcPct val="150000"/>
-                  </a:lnSpc>
-                </a:pPr>
-                <a14:m>
-                  <m:oMath xmlns:m="http://schemas.openxmlformats.org/officeDocument/2006/math">
-                    <m:sSub>
-                      <m:sSubPr>
-                        <m:ctrlPr>
-                          <a:rPr lang="en-US" sz="2000" b="1" i="1" smtClean="0">
-                            <a:latin typeface="Cambria Math" panose="02040503050406030204" pitchFamily="18" charset="0"/>
-                          </a:rPr>
-                        </m:ctrlPr>
-                      </m:sSubPr>
-                      <m:e>
-                        <m:r>
-                          <a:rPr lang="en-US" sz="2000" b="1" i="1" smtClean="0">
-                            <a:latin typeface="Cambria Math" panose="02040503050406030204" pitchFamily="18" charset="0"/>
-                          </a:rPr>
-                          <m:t>𝒁</m:t>
-                        </m:r>
-                      </m:e>
-                      <m:sub>
-                        <m:r>
-                          <a:rPr lang="en-US" sz="2000" b="1" i="1" smtClean="0">
-                            <a:latin typeface="Cambria Math" panose="02040503050406030204" pitchFamily="18" charset="0"/>
-                          </a:rPr>
-                          <m:t>𝟏</m:t>
-                        </m:r>
-                      </m:sub>
-                    </m:sSub>
-                    <m:r>
-                      <a:rPr lang="en-US" sz="2000" b="1" i="1" smtClean="0">
-                        <a:latin typeface="Cambria Math" panose="02040503050406030204" pitchFamily="18" charset="0"/>
-                      </a:rPr>
-                      <m:t>=</m:t>
-                    </m:r>
-                    <m:sSub>
-                      <m:sSubPr>
-                        <m:ctrlPr>
-                          <a:rPr lang="en-US" sz="2000" b="1" i="1">
-                            <a:latin typeface="Cambria Math" panose="02040503050406030204" pitchFamily="18" charset="0"/>
-                          </a:rPr>
-                        </m:ctrlPr>
-                      </m:sSubPr>
-                      <m:e>
-                        <m:r>
-                          <a:rPr lang="en-US" sz="2000" b="1" i="1" smtClean="0">
-                            <a:latin typeface="Cambria Math" panose="02040503050406030204" pitchFamily="18" charset="0"/>
-                            <a:sym typeface="Symbol" panose="05050102010706020507" pitchFamily="18" charset="2"/>
-                          </a:rPr>
-                          <m:t></m:t>
-                        </m:r>
-                      </m:e>
-                      <m:sub>
-                        <m:r>
-                          <a:rPr lang="en-US" sz="2000" b="1" i="1" smtClean="0">
-                            <a:latin typeface="Cambria Math" panose="02040503050406030204" pitchFamily="18" charset="0"/>
-                          </a:rPr>
-                          <m:t>𝟏</m:t>
-                        </m:r>
-                        <m:r>
-                          <a:rPr lang="en-US" sz="2000" b="1" i="1">
-                            <a:latin typeface="Cambria Math" panose="02040503050406030204" pitchFamily="18" charset="0"/>
-                          </a:rPr>
-                          <m:t>𝟏</m:t>
-                        </m:r>
-                      </m:sub>
-                    </m:sSub>
-                  </m:oMath>
-                </a14:m>
-                <a:r>
-                  <a:rPr lang="en-US" sz="2000" b="1" dirty="0"/>
-                  <a:t> </a:t>
-                </a:r>
-                <a14:m>
-                  <m:oMath xmlns:m="http://schemas.openxmlformats.org/officeDocument/2006/math">
-                    <m:sSub>
-                      <m:sSubPr>
-                        <m:ctrlPr>
-                          <a:rPr lang="en-US" sz="2000" b="1" i="1">
-                            <a:latin typeface="Cambria Math" panose="02040503050406030204" pitchFamily="18" charset="0"/>
-                          </a:rPr>
-                        </m:ctrlPr>
-                      </m:sSubPr>
-                      <m:e>
-                        <m:r>
-                          <a:rPr lang="en-US" sz="2000" b="1" i="1" smtClean="0">
-                            <a:latin typeface="Cambria Math" panose="02040503050406030204" pitchFamily="18" charset="0"/>
-                          </a:rPr>
-                          <m:t>𝑿</m:t>
-                        </m:r>
-                      </m:e>
-                      <m:sub>
-                        <m:r>
-                          <a:rPr lang="en-US" sz="2000" b="1" i="1">
-                            <a:latin typeface="Cambria Math" panose="02040503050406030204" pitchFamily="18" charset="0"/>
-                          </a:rPr>
-                          <m:t>𝟏</m:t>
-                        </m:r>
-                      </m:sub>
-                    </m:sSub>
-                  </m:oMath>
-                </a14:m>
-                <a:r>
-                  <a:rPr lang="en-US" sz="2000" b="1" dirty="0">
-                    <a:latin typeface="+mj-lt"/>
-                  </a:rPr>
-                  <a:t>+</a:t>
-                </a:r>
-                <a14:m>
-                  <m:oMath xmlns:m="http://schemas.openxmlformats.org/officeDocument/2006/math">
-                    <m:sSub>
-                      <m:sSubPr>
-                        <m:ctrlPr>
-                          <a:rPr lang="en-US" sz="2000" b="1" i="1">
-                            <a:latin typeface="Cambria Math" panose="02040503050406030204" pitchFamily="18" charset="0"/>
-                          </a:rPr>
-                        </m:ctrlPr>
-                      </m:sSubPr>
-                      <m:e>
-                        <m:r>
-                          <a:rPr lang="en-US" sz="2000" b="1" i="1">
-                            <a:latin typeface="Cambria Math" panose="02040503050406030204" pitchFamily="18" charset="0"/>
-                            <a:sym typeface="Symbol" panose="05050102010706020507" pitchFamily="18" charset="2"/>
-                          </a:rPr>
-                          <m:t></m:t>
-                        </m:r>
-                      </m:e>
-                      <m:sub>
-                        <m:r>
-                          <a:rPr lang="en-US" sz="2000" b="1" i="1" smtClean="0">
-                            <a:latin typeface="Cambria Math" panose="02040503050406030204" pitchFamily="18" charset="0"/>
-                            <a:sym typeface="Symbol" panose="05050102010706020507" pitchFamily="18" charset="2"/>
-                          </a:rPr>
-                          <m:t>𝟐</m:t>
-                        </m:r>
-                        <m:r>
-                          <a:rPr lang="en-US" sz="2000" b="1" i="1">
-                            <a:latin typeface="Cambria Math" panose="02040503050406030204" pitchFamily="18" charset="0"/>
-                          </a:rPr>
-                          <m:t>𝟏</m:t>
-                        </m:r>
-                      </m:sub>
-                    </m:sSub>
-                    <m:sSub>
-                      <m:sSubPr>
-                        <m:ctrlPr>
-                          <a:rPr lang="en-US" sz="2000" b="1" i="1">
-                            <a:latin typeface="Cambria Math" panose="02040503050406030204" pitchFamily="18" charset="0"/>
-                          </a:rPr>
-                        </m:ctrlPr>
-                      </m:sSubPr>
-                      <m:e>
-                        <m:r>
-                          <a:rPr lang="en-US" sz="2000" b="1" i="1" smtClean="0">
-                            <a:latin typeface="Cambria Math" panose="02040503050406030204" pitchFamily="18" charset="0"/>
-                          </a:rPr>
-                          <m:t>𝑿</m:t>
-                        </m:r>
-                      </m:e>
-                      <m:sub>
-                        <m:r>
-                          <a:rPr lang="en-US" sz="2000" b="1" i="1" smtClean="0">
-                            <a:latin typeface="Cambria Math" panose="02040503050406030204" pitchFamily="18" charset="0"/>
-                          </a:rPr>
-                          <m:t>𝟐</m:t>
-                        </m:r>
-                      </m:sub>
-                    </m:sSub>
-                  </m:oMath>
-                </a14:m>
-                <a:r>
-                  <a:rPr lang="en-US" sz="2000" b="1" dirty="0">
-                    <a:latin typeface="+mj-lt"/>
-                  </a:rPr>
-                  <a:t>+…</a:t>
-                </a:r>
-                <a:r>
-                  <a:rPr lang="en-US" sz="2000" b="1" dirty="0"/>
-                  <a:t> </a:t>
-                </a:r>
-                <a14:m>
-                  <m:oMath xmlns:m="http://schemas.openxmlformats.org/officeDocument/2006/math">
-                    <m:sSub>
-                      <m:sSubPr>
-                        <m:ctrlPr>
-                          <a:rPr lang="en-US" sz="2000" b="1" i="1">
-                            <a:latin typeface="Cambria Math" panose="02040503050406030204" pitchFamily="18" charset="0"/>
-                          </a:rPr>
-                        </m:ctrlPr>
-                      </m:sSubPr>
-                      <m:e>
-                        <m:r>
-                          <a:rPr lang="en-US" sz="2000" b="1" i="1" smtClean="0">
-                            <a:latin typeface="Cambria Math" panose="02040503050406030204" pitchFamily="18" charset="0"/>
-                          </a:rPr>
-                          <m:t>+</m:t>
-                        </m:r>
-                        <m:r>
-                          <a:rPr lang="en-US" sz="2000" b="1" i="1">
-                            <a:latin typeface="Cambria Math" panose="02040503050406030204" pitchFamily="18" charset="0"/>
-                            <a:sym typeface="Symbol" panose="05050102010706020507" pitchFamily="18" charset="2"/>
-                          </a:rPr>
-                          <m:t></m:t>
-                        </m:r>
-                      </m:e>
-                      <m:sub>
-                        <m:r>
-                          <a:rPr lang="en-US" sz="2000" b="1" i="1" smtClean="0">
-                            <a:latin typeface="Cambria Math" panose="02040503050406030204" pitchFamily="18" charset="0"/>
-                            <a:sym typeface="Symbol" panose="05050102010706020507" pitchFamily="18" charset="2"/>
-                          </a:rPr>
-                          <m:t>𝒑</m:t>
-                        </m:r>
-                        <m:r>
-                          <a:rPr lang="en-US" sz="2000" b="1" i="1">
-                            <a:latin typeface="Cambria Math" panose="02040503050406030204" pitchFamily="18" charset="0"/>
-                          </a:rPr>
-                          <m:t>𝟏</m:t>
-                        </m:r>
-                      </m:sub>
-                    </m:sSub>
-                    <m:sSub>
-                      <m:sSubPr>
-                        <m:ctrlPr>
-                          <a:rPr lang="en-US" sz="2000" b="1" i="1">
-                            <a:latin typeface="Cambria Math" panose="02040503050406030204" pitchFamily="18" charset="0"/>
-                          </a:rPr>
-                        </m:ctrlPr>
-                      </m:sSubPr>
-                      <m:e>
-                        <m:r>
-                          <a:rPr lang="en-US" sz="2000" b="1" i="1" smtClean="0">
-                            <a:latin typeface="Cambria Math" panose="02040503050406030204" pitchFamily="18" charset="0"/>
-                          </a:rPr>
-                          <m:t>𝑿</m:t>
-                        </m:r>
-                      </m:e>
-                      <m:sub>
-                        <m:r>
-                          <a:rPr lang="en-US" sz="2000" b="1" i="1" smtClean="0">
-                            <a:latin typeface="Cambria Math" panose="02040503050406030204" pitchFamily="18" charset="0"/>
-                          </a:rPr>
-                          <m:t>𝒑</m:t>
-                        </m:r>
-                      </m:sub>
-                    </m:sSub>
-                  </m:oMath>
-                </a14:m>
-                <a:endParaRPr lang="en-US" sz="2000" b="1" dirty="0">
-                  <a:latin typeface="+mj-lt"/>
-                </a:endParaRPr>
-              </a:p>
-              <a:p>
-                <a:pPr>
-                  <a:lnSpc>
-                    <a:spcPct val="150000"/>
-                  </a:lnSpc>
-                </a:pPr>
-                <a:r>
-                  <a:rPr lang="en-US" sz="2000" dirty="0">
-                    <a:latin typeface="+mj-lt"/>
-                  </a:rPr>
-                  <a:t>that has the largest variance. Normalize means that </a:t>
-                </a:r>
-                <a14:m>
-                  <m:oMath xmlns:m="http://schemas.openxmlformats.org/officeDocument/2006/math">
-                    <m:nary>
-                      <m:naryPr>
-                        <m:chr m:val="∑"/>
-                        <m:limLoc m:val="subSup"/>
-                        <m:ctrlPr>
-                          <a:rPr lang="en-US" sz="2000" i="1" smtClean="0">
-                            <a:latin typeface="Cambria Math" panose="02040503050406030204" pitchFamily="18" charset="0"/>
-                          </a:rPr>
-                        </m:ctrlPr>
-                      </m:naryPr>
-                      <m:sub>
-                        <m:r>
-                          <m:rPr>
-                            <m:brk m:alnAt="25"/>
-                          </m:rPr>
-                          <a:rPr lang="en-US" sz="2000" b="0" i="1" smtClean="0">
-                            <a:latin typeface="Cambria Math" panose="02040503050406030204" pitchFamily="18" charset="0"/>
-                          </a:rPr>
-                          <m:t>𝑗</m:t>
-                        </m:r>
-                        <m:r>
-                          <a:rPr lang="en-US" sz="2000" b="0" i="1" smtClean="0">
-                            <a:latin typeface="Cambria Math" panose="02040503050406030204" pitchFamily="18" charset="0"/>
-                          </a:rPr>
-                          <m:t>=1</m:t>
-                        </m:r>
-                      </m:sub>
-                      <m:sup>
-                        <m:r>
-                          <a:rPr lang="en-US" sz="2000" b="0" i="1" smtClean="0">
-                            <a:latin typeface="Cambria Math" panose="02040503050406030204" pitchFamily="18" charset="0"/>
-                          </a:rPr>
-                          <m:t>𝑝</m:t>
-                        </m:r>
-                      </m:sup>
-                      <m:e>
-                        <m:sSubSup>
-                          <m:sSubSupPr>
-                            <m:ctrlPr>
-                              <a:rPr lang="en-US" sz="2000" i="1" smtClean="0">
-                                <a:latin typeface="Cambria Math" panose="02040503050406030204" pitchFamily="18" charset="0"/>
-                              </a:rPr>
-                            </m:ctrlPr>
-                          </m:sSubSupPr>
-                          <m:e>
-                            <m:r>
-                              <a:rPr lang="en-US" sz="2000" i="1" smtClean="0">
-                                <a:latin typeface="Cambria Math" panose="02040503050406030204" pitchFamily="18" charset="0"/>
-                                <a:sym typeface="Symbol" panose="05050102010706020507" pitchFamily="18" charset="2"/>
-                              </a:rPr>
-                              <m:t></m:t>
-                            </m:r>
-                          </m:e>
-                          <m:sub>
-                            <m:r>
-                              <a:rPr lang="en-US" sz="2000" b="0" i="1" smtClean="0">
-                                <a:latin typeface="Cambria Math" panose="02040503050406030204" pitchFamily="18" charset="0"/>
-                              </a:rPr>
-                              <m:t>𝑗</m:t>
-                            </m:r>
-                            <m:r>
-                              <a:rPr lang="en-US" sz="2000" b="0" i="1" smtClean="0">
-                                <a:latin typeface="Cambria Math" panose="02040503050406030204" pitchFamily="18" charset="0"/>
-                              </a:rPr>
-                              <m:t>1</m:t>
-                            </m:r>
-                          </m:sub>
-                          <m:sup>
-                            <m:r>
-                              <a:rPr lang="en-US" sz="2000" b="0" i="1" smtClean="0">
-                                <a:latin typeface="Cambria Math" panose="02040503050406030204" pitchFamily="18" charset="0"/>
-                              </a:rPr>
-                              <m:t>2</m:t>
-                            </m:r>
-                          </m:sup>
-                        </m:sSubSup>
-                        <m:r>
-                          <a:rPr lang="en-US" sz="2000" b="0" i="1" smtClean="0">
-                            <a:latin typeface="Cambria Math" panose="02040503050406030204" pitchFamily="18" charset="0"/>
-                          </a:rPr>
-                          <m:t>=1</m:t>
-                        </m:r>
-                      </m:e>
-                    </m:nary>
-                  </m:oMath>
-                </a14:m>
-                <a:endParaRPr lang="en-US" sz="2000" dirty="0">
-                  <a:latin typeface="+mj-lt"/>
-                </a:endParaRPr>
-              </a:p>
-              <a:p>
-                <a:pPr marL="342900" indent="-342900">
-                  <a:lnSpc>
-                    <a:spcPct val="150000"/>
-                  </a:lnSpc>
-                  <a:buFont typeface="Wingdings" panose="05000000000000000000" pitchFamily="2" charset="2"/>
-                  <a:buChar char="§"/>
-                </a:pPr>
-                <a:r>
-                  <a:rPr lang="en-US" sz="2000" dirty="0">
-                    <a:latin typeface="+mj-lt"/>
-                  </a:rPr>
-                  <a:t>To find the first principal component, the following optimization problem (maximize sample variance) is solved:</a:t>
-                </a:r>
-              </a:p>
-              <a:p>
-                <a:pPr>
-                  <a:lnSpc>
-                    <a:spcPct val="150000"/>
-                  </a:lnSpc>
-                </a:pPr>
-                <a14:m>
-                  <m:oMathPara xmlns:m="http://schemas.openxmlformats.org/officeDocument/2006/math">
-                    <m:oMathParaPr>
-                      <m:jc m:val="centerGroup"/>
-                    </m:oMathParaPr>
-                    <m:oMath xmlns:m="http://schemas.openxmlformats.org/officeDocument/2006/math">
-                      <m:func>
-                        <m:funcPr>
-                          <m:ctrlPr>
-                            <a:rPr lang="en-US" sz="2000" i="1" smtClean="0">
-                              <a:latin typeface="Cambria Math" panose="02040503050406030204" pitchFamily="18" charset="0"/>
-                            </a:rPr>
-                          </m:ctrlPr>
-                        </m:funcPr>
-                        <m:fName>
-                          <m:limLow>
-                            <m:limLowPr>
-                              <m:ctrlPr>
-                                <a:rPr lang="en-US" sz="2000" i="1" smtClean="0">
-                                  <a:latin typeface="Cambria Math" panose="02040503050406030204" pitchFamily="18" charset="0"/>
-                                </a:rPr>
-                              </m:ctrlPr>
-                            </m:limLowPr>
-                            <m:e>
-                              <m:r>
-                                <m:rPr>
-                                  <m:sty m:val="p"/>
-                                </m:rPr>
-                                <a:rPr lang="en-US" sz="2000" i="0" smtClean="0">
-                                  <a:latin typeface="Cambria Math" panose="02040503050406030204" pitchFamily="18" charset="0"/>
-                                </a:rPr>
-                                <m:t>max</m:t>
-                              </m:r>
-                            </m:e>
-                            <m:lim>
-                              <m:sSub>
-                                <m:sSubPr>
-                                  <m:ctrlPr>
-                                    <a:rPr lang="en-US" sz="2000" b="1" i="1">
-                                      <a:latin typeface="Cambria Math" panose="02040503050406030204" pitchFamily="18" charset="0"/>
-                                    </a:rPr>
-                                  </m:ctrlPr>
-                                </m:sSubPr>
-                                <m:e>
-                                  <m:r>
-                                    <a:rPr lang="en-US" sz="2000" b="1" i="1">
-                                      <a:latin typeface="Cambria Math" panose="02040503050406030204" pitchFamily="18" charset="0"/>
-                                      <a:sym typeface="Symbol" panose="05050102010706020507" pitchFamily="18" charset="2"/>
-                                    </a:rPr>
-                                    <m:t></m:t>
-                                  </m:r>
-                                </m:e>
-                                <m:sub>
-                                  <m:r>
-                                    <a:rPr lang="en-US" sz="2000" b="1" i="1">
-                                      <a:latin typeface="Cambria Math" panose="02040503050406030204" pitchFamily="18" charset="0"/>
-                                    </a:rPr>
-                                    <m:t>𝟏𝟏</m:t>
-                                  </m:r>
-                                </m:sub>
-                              </m:sSub>
-                              <m:r>
-                                <a:rPr lang="en-US" sz="2000" b="0" i="1" smtClean="0">
-                                  <a:latin typeface="Cambria Math" panose="02040503050406030204" pitchFamily="18" charset="0"/>
-                                </a:rPr>
-                                <m:t>,</m:t>
-                              </m:r>
-                              <m:r>
-                                <a:rPr lang="en-US" sz="2000" b="1" i="1" smtClean="0">
-                                  <a:latin typeface="Cambria Math" panose="02040503050406030204" pitchFamily="18" charset="0"/>
-                                </a:rPr>
-                                <m:t>…,</m:t>
-                              </m:r>
-                              <m:sSub>
-                                <m:sSubPr>
-                                  <m:ctrlPr>
-                                    <a:rPr lang="en-US" sz="2000" b="1" i="1">
-                                      <a:latin typeface="Cambria Math" panose="02040503050406030204" pitchFamily="18" charset="0"/>
-                                    </a:rPr>
-                                  </m:ctrlPr>
-                                </m:sSubPr>
-                                <m:e>
-                                  <m:r>
-                                    <a:rPr lang="en-US" sz="2000" b="1" i="1">
-                                      <a:latin typeface="Cambria Math" panose="02040503050406030204" pitchFamily="18" charset="0"/>
-                                      <a:sym typeface="Symbol" panose="05050102010706020507" pitchFamily="18" charset="2"/>
-                                    </a:rPr>
-                                    <m:t></m:t>
-                                  </m:r>
-                                </m:e>
-                                <m:sub>
-                                  <m:r>
-                                    <a:rPr lang="en-US" sz="2000" b="1" i="1" smtClean="0">
-                                      <a:latin typeface="Cambria Math" panose="02040503050406030204" pitchFamily="18" charset="0"/>
-                                      <a:sym typeface="Symbol" panose="05050102010706020507" pitchFamily="18" charset="2"/>
-                                    </a:rPr>
-                                    <m:t>𝒑</m:t>
-                                  </m:r>
-                                  <m:r>
-                                    <a:rPr lang="en-US" sz="2000" b="1" i="1">
-                                      <a:latin typeface="Cambria Math" panose="02040503050406030204" pitchFamily="18" charset="0"/>
-                                    </a:rPr>
-                                    <m:t>𝟏</m:t>
-                                  </m:r>
-                                </m:sub>
-                              </m:sSub>
-                            </m:lim>
-                          </m:limLow>
-                        </m:fName>
-                        <m:e>
-                          <m:d>
-                            <m:dPr>
-                              <m:begChr m:val="{"/>
-                              <m:endChr m:val="}"/>
-                              <m:ctrlPr>
-                                <a:rPr lang="en-US" sz="2000" i="1" smtClean="0">
-                                  <a:latin typeface="Cambria Math" panose="02040503050406030204" pitchFamily="18" charset="0"/>
-                                </a:rPr>
-                              </m:ctrlPr>
-                            </m:dPr>
-                            <m:e>
-                              <m:f>
-                                <m:fPr>
-                                  <m:ctrlPr>
-                                    <a:rPr lang="en-US" sz="2000" i="1" smtClean="0">
-                                      <a:latin typeface="Cambria Math" panose="02040503050406030204" pitchFamily="18" charset="0"/>
-                                    </a:rPr>
-                                  </m:ctrlPr>
-                                </m:fPr>
-                                <m:num>
-                                  <m:r>
-                                    <a:rPr lang="en-US" sz="2000" b="0" i="1" smtClean="0">
-                                      <a:latin typeface="Cambria Math" panose="02040503050406030204" pitchFamily="18" charset="0"/>
-                                    </a:rPr>
-                                    <m:t>1</m:t>
-                                  </m:r>
-                                </m:num>
-                                <m:den>
-                                  <m:r>
-                                    <a:rPr lang="en-US" sz="2000" b="0" i="1" smtClean="0">
-                                      <a:latin typeface="Cambria Math" panose="02040503050406030204" pitchFamily="18" charset="0"/>
-                                    </a:rPr>
-                                    <m:t>𝑛</m:t>
-                                  </m:r>
-                                </m:den>
-                              </m:f>
-                              <m:nary>
-                                <m:naryPr>
-                                  <m:chr m:val="∑"/>
-                                  <m:ctrlPr>
-                                    <a:rPr lang="en-US" sz="2000" i="1" smtClean="0">
-                                      <a:latin typeface="Cambria Math" panose="02040503050406030204" pitchFamily="18" charset="0"/>
-                                    </a:rPr>
-                                  </m:ctrlPr>
-                                </m:naryPr>
-                                <m:sub>
-                                  <m:r>
-                                    <m:rPr>
-                                      <m:brk m:alnAt="23"/>
-                                    </m:rPr>
-                                    <a:rPr lang="en-US" sz="2000" b="0" i="1" smtClean="0">
-                                      <a:latin typeface="Cambria Math" panose="02040503050406030204" pitchFamily="18" charset="0"/>
-                                    </a:rPr>
-                                    <m:t>𝑛</m:t>
-                                  </m:r>
-                                  <m:r>
-                                    <a:rPr lang="en-US" sz="2000" b="0" i="1" smtClean="0">
-                                      <a:latin typeface="Cambria Math" panose="02040503050406030204" pitchFamily="18" charset="0"/>
-                                    </a:rPr>
-                                    <m:t>=1</m:t>
-                                  </m:r>
-                                </m:sub>
-                                <m:sup>
-                                  <m:r>
-                                    <a:rPr lang="en-US" sz="2000" b="0" i="1" smtClean="0">
-                                      <a:latin typeface="Cambria Math" panose="02040503050406030204" pitchFamily="18" charset="0"/>
-                                    </a:rPr>
-                                    <m:t>𝑛</m:t>
-                                  </m:r>
-                                </m:sup>
-                                <m:e>
-                                  <m:sSup>
-                                    <m:sSupPr>
-                                      <m:ctrlPr>
-                                        <a:rPr lang="en-US" sz="2000" i="1" smtClean="0">
-                                          <a:latin typeface="Cambria Math" panose="02040503050406030204" pitchFamily="18" charset="0"/>
-                                        </a:rPr>
-                                      </m:ctrlPr>
-                                    </m:sSupPr>
-                                    <m:e>
-                                      <m:d>
-                                        <m:dPr>
-                                          <m:ctrlPr>
-                                            <a:rPr lang="en-US" sz="2000" i="1" smtClean="0">
-                                              <a:latin typeface="Cambria Math" panose="02040503050406030204" pitchFamily="18" charset="0"/>
-                                            </a:rPr>
-                                          </m:ctrlPr>
-                                        </m:dPr>
-                                        <m:e>
-                                          <m:nary>
-                                            <m:naryPr>
-                                              <m:chr m:val="∑"/>
-                                              <m:ctrlPr>
-                                                <a:rPr lang="en-US" sz="2000" i="1" smtClean="0">
-                                                  <a:latin typeface="Cambria Math" panose="02040503050406030204" pitchFamily="18" charset="0"/>
-                                                </a:rPr>
-                                              </m:ctrlPr>
-                                            </m:naryPr>
-                                            <m:sub>
-                                              <m:r>
-                                                <m:rPr>
-                                                  <m:brk m:alnAt="23"/>
-                                                </m:rPr>
-                                                <a:rPr lang="en-US" sz="2000" b="0" i="1" smtClean="0">
-                                                  <a:latin typeface="Cambria Math" panose="02040503050406030204" pitchFamily="18" charset="0"/>
-                                                </a:rPr>
-                                                <m:t>𝑗</m:t>
-                                              </m:r>
-                                              <m:r>
-                                                <a:rPr lang="en-US" sz="2000" b="0" i="1" smtClean="0">
-                                                  <a:latin typeface="Cambria Math" panose="02040503050406030204" pitchFamily="18" charset="0"/>
-                                                </a:rPr>
-                                                <m:t>=1</m:t>
-                                              </m:r>
-                                            </m:sub>
-                                            <m:sup>
-                                              <m:r>
-                                                <a:rPr lang="en-US" sz="2000" b="0" i="1" smtClean="0">
-                                                  <a:latin typeface="Cambria Math" panose="02040503050406030204" pitchFamily="18" charset="0"/>
-                                                </a:rPr>
-                                                <m:t>𝑝</m:t>
-                                              </m:r>
-                                            </m:sup>
-                                            <m:e>
-                                              <m:sSub>
-                                                <m:sSubPr>
-                                                  <m:ctrlPr>
-                                                    <a:rPr lang="en-US" sz="2000" b="1" i="1">
-                                                      <a:latin typeface="Cambria Math" panose="02040503050406030204" pitchFamily="18" charset="0"/>
-                                                    </a:rPr>
-                                                  </m:ctrlPr>
-                                                </m:sSubPr>
-                                                <m:e>
-                                                  <m:r>
-                                                    <a:rPr lang="en-US" sz="2000" b="1" i="1">
-                                                      <a:latin typeface="Cambria Math" panose="02040503050406030204" pitchFamily="18" charset="0"/>
-                                                      <a:sym typeface="Symbol" panose="05050102010706020507" pitchFamily="18" charset="2"/>
-                                                    </a:rPr>
-                                                    <m:t></m:t>
-                                                  </m:r>
-                                                </m:e>
-                                                <m:sub>
-                                                  <m:r>
-                                                    <a:rPr lang="en-US" sz="2000" b="1" i="1" smtClean="0">
-                                                      <a:latin typeface="Cambria Math" panose="02040503050406030204" pitchFamily="18" charset="0"/>
-                                                      <a:sym typeface="Symbol" panose="05050102010706020507" pitchFamily="18" charset="2"/>
-                                                    </a:rPr>
-                                                    <m:t>𝒋</m:t>
-                                                  </m:r>
-                                                  <m:r>
-                                                    <a:rPr lang="en-US" sz="2000" b="1" i="1">
-                                                      <a:latin typeface="Cambria Math" panose="02040503050406030204" pitchFamily="18" charset="0"/>
-                                                    </a:rPr>
-                                                    <m:t>𝟏</m:t>
-                                                  </m:r>
-                                                </m:sub>
-                                              </m:sSub>
-                                              <m:sSub>
-                                                <m:sSubPr>
-                                                  <m:ctrlPr>
-                                                    <a:rPr lang="en-US" sz="2000" b="1" i="1">
-                                                      <a:latin typeface="Cambria Math" panose="02040503050406030204" pitchFamily="18" charset="0"/>
-                                                    </a:rPr>
-                                                  </m:ctrlPr>
-                                                </m:sSubPr>
-                                                <m:e>
-                                                  <m:r>
-                                                    <a:rPr lang="en-US" sz="2000" b="1" i="1" smtClean="0">
-                                                      <a:latin typeface="Cambria Math" panose="02040503050406030204" pitchFamily="18" charset="0"/>
-                                                    </a:rPr>
-                                                    <m:t>𝒙</m:t>
-                                                  </m:r>
-                                                </m:e>
-                                                <m:sub>
-                                                  <m:r>
-                                                    <a:rPr lang="en-US" sz="2000" b="1" i="1" smtClean="0">
-                                                      <a:latin typeface="Cambria Math" panose="02040503050406030204" pitchFamily="18" charset="0"/>
-                                                      <a:sym typeface="Symbol" panose="05050102010706020507" pitchFamily="18" charset="2"/>
-                                                    </a:rPr>
-                                                    <m:t>𝒊𝒋</m:t>
-                                                  </m:r>
-                                                </m:sub>
-                                              </m:sSub>
-                                            </m:e>
-                                          </m:nary>
-                                        </m:e>
-                                      </m:d>
-                                    </m:e>
-                                    <m:sup>
-                                      <m:r>
-                                        <a:rPr lang="en-US" sz="2000" b="0" i="1" smtClean="0">
-                                          <a:latin typeface="Cambria Math" panose="02040503050406030204" pitchFamily="18" charset="0"/>
-                                        </a:rPr>
-                                        <m:t>2</m:t>
-                                      </m:r>
-                                    </m:sup>
-                                  </m:sSup>
-                                </m:e>
-                              </m:nary>
-                            </m:e>
-                          </m:d>
-                        </m:e>
-                      </m:func>
-                      <m:r>
-                        <a:rPr lang="en-US" sz="2000" b="0" i="1" smtClean="0">
-                          <a:latin typeface="Cambria Math" panose="02040503050406030204" pitchFamily="18" charset="0"/>
-                        </a:rPr>
-                        <m:t>𝑠𝑢𝑏𝑗𝑒𝑐𝑡</m:t>
-                      </m:r>
-                      <m:r>
-                        <a:rPr lang="en-US" sz="2000" b="0" i="1" smtClean="0">
-                          <a:latin typeface="Cambria Math" panose="02040503050406030204" pitchFamily="18" charset="0"/>
-                        </a:rPr>
-                        <m:t> </m:t>
-                      </m:r>
-                      <m:r>
-                        <a:rPr lang="en-US" sz="2000" b="0" i="1" smtClean="0">
-                          <a:latin typeface="Cambria Math" panose="02040503050406030204" pitchFamily="18" charset="0"/>
-                        </a:rPr>
-                        <m:t>𝑡𝑜</m:t>
-                      </m:r>
-                      <m:nary>
-                        <m:naryPr>
-                          <m:chr m:val="∑"/>
-                          <m:limLoc m:val="subSup"/>
-                          <m:ctrlPr>
-                            <a:rPr lang="en-US" sz="2000" i="1">
-                              <a:latin typeface="Cambria Math" panose="02040503050406030204" pitchFamily="18" charset="0"/>
-                            </a:rPr>
-                          </m:ctrlPr>
-                        </m:naryPr>
-                        <m:sub>
-                          <m:r>
-                            <m:rPr>
-                              <m:brk m:alnAt="25"/>
-                            </m:rPr>
-                            <a:rPr lang="en-US" sz="2000" i="1">
-                              <a:latin typeface="Cambria Math" panose="02040503050406030204" pitchFamily="18" charset="0"/>
-                            </a:rPr>
-                            <m:t>𝑗</m:t>
-                          </m:r>
-                          <m:r>
-                            <a:rPr lang="en-US" sz="2000" i="1">
-                              <a:latin typeface="Cambria Math" panose="02040503050406030204" pitchFamily="18" charset="0"/>
-                            </a:rPr>
-                            <m:t>=1</m:t>
-                          </m:r>
-                        </m:sub>
-                        <m:sup>
-                          <m:r>
-                            <a:rPr lang="en-US" sz="2000" i="1">
-                              <a:latin typeface="Cambria Math" panose="02040503050406030204" pitchFamily="18" charset="0"/>
-                            </a:rPr>
-                            <m:t>𝑝</m:t>
-                          </m:r>
-                        </m:sup>
-                        <m:e>
-                          <m:sSubSup>
-                            <m:sSubSupPr>
-                              <m:ctrlPr>
-                                <a:rPr lang="en-US" sz="2000" i="1">
-                                  <a:latin typeface="Cambria Math" panose="02040503050406030204" pitchFamily="18" charset="0"/>
-                                </a:rPr>
-                              </m:ctrlPr>
-                            </m:sSubSupPr>
-                            <m:e>
-                              <m:r>
-                                <a:rPr lang="en-US" sz="2000" i="1">
-                                  <a:latin typeface="Cambria Math" panose="02040503050406030204" pitchFamily="18" charset="0"/>
-                                  <a:sym typeface="Symbol" panose="05050102010706020507" pitchFamily="18" charset="2"/>
-                                </a:rPr>
-                                <m:t></m:t>
-                              </m:r>
-                            </m:e>
-                            <m:sub>
-                              <m:r>
-                                <a:rPr lang="en-US" sz="2000" i="1">
-                                  <a:latin typeface="Cambria Math" panose="02040503050406030204" pitchFamily="18" charset="0"/>
-                                </a:rPr>
-                                <m:t>𝑗</m:t>
-                              </m:r>
-                              <m:r>
-                                <a:rPr lang="en-US" sz="2000" i="1">
-                                  <a:latin typeface="Cambria Math" panose="02040503050406030204" pitchFamily="18" charset="0"/>
-                                </a:rPr>
-                                <m:t>1</m:t>
-                              </m:r>
-                            </m:sub>
-                            <m:sup>
-                              <m:r>
-                                <a:rPr lang="en-US" sz="2000" i="1">
-                                  <a:latin typeface="Cambria Math" panose="02040503050406030204" pitchFamily="18" charset="0"/>
-                                </a:rPr>
-                                <m:t>2</m:t>
-                              </m:r>
-                            </m:sup>
-                          </m:sSubSup>
-                          <m:r>
-                            <a:rPr lang="en-US" sz="2000" i="1">
-                              <a:latin typeface="Cambria Math" panose="02040503050406030204" pitchFamily="18" charset="0"/>
-                            </a:rPr>
-                            <m:t>=1</m:t>
-                          </m:r>
-                        </m:e>
-                      </m:nary>
-                    </m:oMath>
-                  </m:oMathPara>
-                </a14:m>
-                <a:endParaRPr lang="en-US" sz="2000" dirty="0">
-                  <a:latin typeface="+mj-lt"/>
-                </a:endParaRPr>
-              </a:p>
-            </p:txBody>
-          </p:sp>
-        </mc:Choice>
-        <mc:Fallback>
-          <p:sp>
-            <p:nvSpPr>
-              <p:cNvPr id="3" name="TextBox 2">
-                <a:extLst>
-                  <a:ext uri="{FF2B5EF4-FFF2-40B4-BE49-F238E27FC236}">
-                    <a16:creationId xmlns:a16="http://schemas.microsoft.com/office/drawing/2014/main" id="{07C8DDDE-8C83-1AC8-8FA2-895D71DAD748}"/>
-                  </a:ext>
-                </a:extLst>
-              </p:cNvPr>
-              <p:cNvSpPr txBox="1">
-                <a:spLocks noRot="1" noChangeAspect="1" noMove="1" noResize="1" noEditPoints="1" noAdjustHandles="1" noChangeArrowheads="1" noChangeShapeType="1" noTextEdit="1"/>
-              </p:cNvSpPr>
-              <p:nvPr/>
-            </p:nvSpPr>
-            <p:spPr>
-              <a:xfrm>
-                <a:off x="927557" y="1920898"/>
                 <a:ext cx="10610987" cy="4258345"/>
               </a:xfrm>
               <a:prstGeom prst="rect">
@@ -24933,10 +23666,185 @@
           </p:sp>
         </mc:Fallback>
       </mc:AlternateContent>
+      <p:cxnSp>
+        <p:nvCxnSpPr>
+          <p:cNvPr id="8" name="Straight Arrow Connector 7">
+            <a:extLst>
+              <a:ext uri="{FF2B5EF4-FFF2-40B4-BE49-F238E27FC236}">
+                <a16:creationId xmlns:a16="http://schemas.microsoft.com/office/drawing/2014/main" id="{E78D6BB9-A238-FD33-A925-FB07E58A7116}"/>
+              </a:ext>
+            </a:extLst>
+          </p:cNvPr>
+          <p:cNvCxnSpPr/>
+          <p:nvPr/>
+        </p:nvCxnSpPr>
+        <p:spPr>
+          <a:xfrm>
+            <a:off x="2341916" y="4808820"/>
+            <a:ext cx="1526193" cy="223666"/>
+          </a:xfrm>
+          <a:prstGeom prst="straightConnector1">
+            <a:avLst/>
+          </a:prstGeom>
+          <a:ln>
+            <a:solidFill>
+              <a:srgbClr val="FF0000"/>
+            </a:solidFill>
+            <a:tailEnd type="triangle"/>
+          </a:ln>
+        </p:spPr>
+        <p:style>
+          <a:lnRef idx="1">
+            <a:schemeClr val="accent1"/>
+          </a:lnRef>
+          <a:fillRef idx="0">
+            <a:schemeClr val="accent1"/>
+          </a:fillRef>
+          <a:effectRef idx="0">
+            <a:schemeClr val="accent1"/>
+          </a:effectRef>
+          <a:fontRef idx="minor">
+            <a:schemeClr val="tx1"/>
+          </a:fontRef>
+        </p:style>
+      </p:cxnSp>
+      <p:sp>
+        <p:nvSpPr>
+          <p:cNvPr id="9" name="TextBox 8">
+            <a:extLst>
+              <a:ext uri="{FF2B5EF4-FFF2-40B4-BE49-F238E27FC236}">
+                <a16:creationId xmlns:a16="http://schemas.microsoft.com/office/drawing/2014/main" id="{AED52BA1-913E-8452-C64A-2852B1BC2DA8}"/>
+              </a:ext>
+            </a:extLst>
+          </p:cNvPr>
+          <p:cNvSpPr txBox="1"/>
+          <p:nvPr/>
+        </p:nvSpPr>
+        <p:spPr>
+          <a:xfrm>
+            <a:off x="653456" y="4486477"/>
+            <a:ext cx="1576627" cy="523220"/>
+          </a:xfrm>
+          <a:prstGeom prst="rect">
+            <a:avLst/>
+          </a:prstGeom>
+          <a:noFill/>
+        </p:spPr>
+        <p:txBody>
+          <a:bodyPr wrap="square" rtlCol="0">
+            <a:spAutoFit/>
+          </a:bodyPr>
+          <a:lstStyle/>
+          <a:p>
+            <a:pPr algn="ctr"/>
+            <a:r>
+              <a:rPr lang="es-ES" sz="1400" dirty="0" err="1">
+                <a:solidFill>
+                  <a:srgbClr val="FF0000"/>
+                </a:solidFill>
+              </a:rPr>
+              <a:t>sample</a:t>
+            </a:r>
+            <a:r>
+              <a:rPr lang="es-ES" sz="1400" dirty="0">
+                <a:solidFill>
+                  <a:srgbClr val="FF0000"/>
+                </a:solidFill>
+              </a:rPr>
+              <a:t> </a:t>
+            </a:r>
+            <a:r>
+              <a:rPr lang="es-ES" sz="1400" dirty="0" err="1">
+                <a:solidFill>
+                  <a:srgbClr val="FF0000"/>
+                </a:solidFill>
+              </a:rPr>
+              <a:t>variance</a:t>
+            </a:r>
+            <a:r>
+              <a:rPr lang="es-ES" sz="1400" dirty="0">
+                <a:solidFill>
+                  <a:srgbClr val="FF0000"/>
+                </a:solidFill>
+              </a:rPr>
+              <a:t> </a:t>
+            </a:r>
+            <a:r>
+              <a:rPr lang="es-ES" sz="1400" dirty="0" err="1">
+                <a:solidFill>
+                  <a:srgbClr val="FF0000"/>
+                </a:solidFill>
+              </a:rPr>
+              <a:t>of</a:t>
+            </a:r>
+            <a:r>
+              <a:rPr lang="es-ES" sz="1400" dirty="0">
+                <a:solidFill>
+                  <a:srgbClr val="FF0000"/>
+                </a:solidFill>
+              </a:rPr>
+              <a:t> </a:t>
+            </a:r>
+            <a:r>
+              <a:rPr lang="es-ES" sz="1400" dirty="0" err="1">
+                <a:solidFill>
+                  <a:srgbClr val="FF0000"/>
+                </a:solidFill>
+              </a:rPr>
+              <a:t>the</a:t>
+            </a:r>
+            <a:r>
+              <a:rPr lang="es-ES" sz="1400" dirty="0">
+                <a:solidFill>
+                  <a:srgbClr val="FF0000"/>
+                </a:solidFill>
+              </a:rPr>
+              <a:t> n </a:t>
+            </a:r>
+            <a:r>
+              <a:rPr lang="es-ES" sz="1400" dirty="0" err="1">
+                <a:solidFill>
+                  <a:srgbClr val="FF0000"/>
+                </a:solidFill>
+              </a:rPr>
+              <a:t>values</a:t>
+            </a:r>
+            <a:r>
+              <a:rPr lang="es-ES" sz="1400" dirty="0">
+                <a:solidFill>
+                  <a:srgbClr val="FF0000"/>
+                </a:solidFill>
+              </a:rPr>
+              <a:t> </a:t>
+            </a:r>
+            <a:r>
+              <a:rPr lang="es-ES" sz="1400" dirty="0" err="1">
+                <a:solidFill>
+                  <a:srgbClr val="FF0000"/>
+                </a:solidFill>
+              </a:rPr>
+              <a:t>of</a:t>
+            </a:r>
+            <a:r>
+              <a:rPr lang="es-ES" sz="1400" dirty="0">
+                <a:solidFill>
+                  <a:srgbClr val="FF0000"/>
+                </a:solidFill>
+              </a:rPr>
+              <a:t> zi1</a:t>
+            </a:r>
+            <a:endParaRPr lang="en-US" sz="1400" dirty="0">
+              <a:solidFill>
+                <a:srgbClr val="FF0000"/>
+              </a:solidFill>
+            </a:endParaRPr>
+          </a:p>
+        </p:txBody>
+      </p:sp>
     </p:spTree>
     <p:extLst>
       <p:ext uri="{BB962C8B-B14F-4D97-AF65-F5344CB8AC3E}">
-        <p14:creationId xmlns:p14="http://schemas.microsoft.com/office/powerpoint/2010/main" val="668555244"/>
+        <p14:creationId xmlns:p14="http://schemas.microsoft.com/office/powerpoint/2010/main" val="144432870"/>
       </p:ext>
     </p:extLst>
   </p:cSld>
@@ -24946,7 +23854,7 @@
 </p:sld>
 </file>
 
-<file path=ppt/slides/slide13.xml><?xml version="1.0" encoding="utf-8"?>
+<file path=ppt/slides/slide12.xml><?xml version="1.0" encoding="utf-8"?>
 <p:sld xmlns:a="http://schemas.openxmlformats.org/drawingml/2006/main" xmlns:r="http://schemas.openxmlformats.org/officeDocument/2006/relationships" xmlns:p="http://schemas.openxmlformats.org/presentationml/2006/main">
   <p:cSld>
     <p:spTree>
@@ -25389,10 +24297,10 @@
                       </m:sSubPr>
                       <m:e>
                         <m:r>
-                          <a:rPr lang="en-US" sz="2000" b="0" i="1" smtClean="0">
+                          <a:rPr lang="es-ES" sz="2000" b="0" i="1" smtClean="0">
                             <a:latin typeface="Cambria Math" panose="02040503050406030204" pitchFamily="18" charset="0"/>
                           </a:rPr>
-                          <m:t>𝑍</m:t>
+                          <m:t>𝑧</m:t>
                         </m:r>
                       </m:e>
                       <m:sub>
@@ -25445,10 +24353,10 @@
                       </m:sSubPr>
                       <m:e>
                         <m:r>
-                          <a:rPr lang="en-US" sz="2000" b="0" i="1" smtClean="0">
+                          <a:rPr lang="es-ES" sz="2000" b="0" i="1" smtClean="0">
                             <a:latin typeface="Cambria Math" panose="02040503050406030204" pitchFamily="18" charset="0"/>
                           </a:rPr>
-                          <m:t>𝑋</m:t>
+                          <m:t>𝑥</m:t>
                         </m:r>
                       </m:e>
                       <m:sub>
@@ -25476,10 +24384,10 @@
                       </m:sSubPr>
                       <m:e>
                         <m:r>
-                          <a:rPr lang="en-US" sz="2000" i="1">
+                          <a:rPr lang="es-ES" sz="2000" b="0" i="1" smtClean="0">
                             <a:latin typeface="Cambria Math" panose="02040503050406030204" pitchFamily="18" charset="0"/>
                           </a:rPr>
-                          <m:t>𝑋</m:t>
+                          <m:t>𝑥</m:t>
                         </m:r>
                       </m:e>
                       <m:sub>
@@ -25507,10 +24415,10 @@
                       </m:sSubPr>
                       <m:e>
                         <m:r>
-                          <a:rPr lang="en-US" sz="2000" i="1">
+                          <a:rPr lang="es-ES" sz="2000" b="0" i="1" smtClean="0">
                             <a:latin typeface="Cambria Math" panose="02040503050406030204" pitchFamily="18" charset="0"/>
                           </a:rPr>
-                          <m:t>𝑋</m:t>
+                          <m:t>𝑥</m:t>
                         </m:r>
                       </m:e>
                       <m:sub>
@@ -25531,7 +24439,7 @@
                   <a:t> that has maximal variance out of all linear combinations that </a:t>
                 </a:r>
                 <a:r>
-                  <a:rPr lang="en-US" sz="2000" b="1" dirty="0">
+                  <a:rPr lang="en-US" sz="2000" b="1" u="sng" dirty="0">
                     <a:latin typeface="+mj-lt"/>
                   </a:rPr>
                   <a:t>are uncorrelated with </a:t>
@@ -25541,22 +24449,22 @@
                     <m:sSub>
                       <m:sSubPr>
                         <m:ctrlPr>
-                          <a:rPr lang="en-US" sz="2000" b="1" i="1">
+                          <a:rPr lang="en-US" sz="2000" b="1" i="1" u="sng">
                             <a:latin typeface="Cambria Math" panose="02040503050406030204" pitchFamily="18" charset="0"/>
                           </a:rPr>
                         </m:ctrlPr>
                       </m:sSubPr>
                       <m:e>
                         <m:r>
-                          <a:rPr lang="en-US" sz="2000" b="1" i="1" smtClean="0">
+                          <a:rPr lang="es-ES" sz="2000" b="1" i="1" u="sng" smtClean="0">
                             <a:latin typeface="Cambria Math" panose="02040503050406030204" pitchFamily="18" charset="0"/>
                           </a:rPr>
-                          <m:t>𝒁</m:t>
+                          <m:t>𝒛</m:t>
                         </m:r>
                       </m:e>
                       <m:sub>
                         <m:r>
-                          <a:rPr lang="en-US" sz="2000" b="1" i="1">
+                          <a:rPr lang="en-US" sz="2000" b="1" i="1" u="sng">
                             <a:latin typeface="Cambria Math" panose="02040503050406030204" pitchFamily="18" charset="0"/>
                           </a:rPr>
                           <m:t>𝟏</m:t>
@@ -25565,7 +24473,7 @@
                     </m:sSub>
                   </m:oMath>
                 </a14:m>
-                <a:endParaRPr lang="en-US" sz="2000" b="1" dirty="0">
+                <a:endParaRPr lang="en-US" sz="2000" b="1" u="sng" dirty="0">
                   <a:latin typeface="+mj-lt"/>
                 </a:endParaRPr>
               </a:p>
@@ -25595,10 +24503,10 @@
                       </m:sSubPr>
                       <m:e>
                         <m:r>
-                          <a:rPr lang="en-US" sz="2000" b="0" i="1" smtClean="0">
+                          <a:rPr lang="es-ES" sz="2000" b="0" i="1" smtClean="0">
                             <a:latin typeface="Cambria Math" panose="02040503050406030204" pitchFamily="18" charset="0"/>
                           </a:rPr>
-                          <m:t>𝑍</m:t>
+                          <m:t>𝑧</m:t>
                         </m:r>
                       </m:e>
                       <m:sub>
@@ -25630,10 +24538,10 @@
                       </m:sSubPr>
                       <m:e>
                         <m:r>
-                          <a:rPr lang="en-US" sz="2000" b="0" i="1">
+                          <a:rPr lang="es-ES" sz="2000" b="0" i="1" smtClean="0">
                             <a:latin typeface="Cambria Math" panose="02040503050406030204" pitchFamily="18" charset="0"/>
                           </a:rPr>
-                          <m:t>𝑍</m:t>
+                          <m:t>𝑧</m:t>
                         </m:r>
                       </m:e>
                       <m:sub>
@@ -25687,7 +24595,19 @@
                   <a:rPr lang="en-US" sz="2000" dirty="0">
                     <a:latin typeface="+mj-lt"/>
                   </a:rPr>
-                  <a:t> to be orthogonal (perpendicular) to the direction of </a:t>
+                  <a:t> to be </a:t>
+                </a:r>
+                <a:r>
+                  <a:rPr lang="en-US" sz="2000" b="1" dirty="0">
+                    <a:latin typeface="+mj-lt"/>
+                  </a:rPr>
+                  <a:t>orthogonal </a:t>
+                </a:r>
+                <a:r>
+                  <a:rPr lang="en-US" sz="2000" dirty="0">
+                    <a:latin typeface="+mj-lt"/>
+                  </a:rPr>
+                  <a:t>(perpendicular) to the direction of </a:t>
                 </a:r>
                 <a14:m>
                   <m:oMath xmlns:m="http://schemas.openxmlformats.org/officeDocument/2006/math">
@@ -25767,7 +24687,7 @@
               <a:blipFill>
                 <a:blip r:embed="rId2"/>
                 <a:stretch>
-                  <a:fillRect l="-517" b="-1939"/>
+                  <a:fillRect l="-517" r="-632" b="-1939"/>
                 </a:stretch>
               </a:blipFill>
             </p:spPr>
@@ -25799,7 +24719,7 @@
 </p:sld>
 </file>
 
-<file path=ppt/slides/slide14.xml><?xml version="1.0" encoding="utf-8"?>
+<file path=ppt/slides/slide13.xml><?xml version="1.0" encoding="utf-8"?>
 <p:sld xmlns:a="http://schemas.openxmlformats.org/drawingml/2006/main" xmlns:r="http://schemas.openxmlformats.org/officeDocument/2006/relationships" xmlns:p="http://schemas.openxmlformats.org/presentationml/2006/main">
   <p:cSld>
     <p:spTree>
@@ -26224,7 +25144,7 @@
 </p:sld>
 </file>
 
-<file path=ppt/slides/slide15.xml><?xml version="1.0" encoding="utf-8"?>
+<file path=ppt/slides/slide14.xml><?xml version="1.0" encoding="utf-8"?>
 <p:sld xmlns:a="http://schemas.openxmlformats.org/drawingml/2006/main" xmlns:r="http://schemas.openxmlformats.org/officeDocument/2006/relationships" xmlns:p="http://schemas.openxmlformats.org/presentationml/2006/main">
   <p:cSld>
     <p:spTree>
@@ -26621,7 +25541,7 @@
         <p:spPr>
           <a:xfrm>
             <a:off x="927557" y="1920898"/>
-            <a:ext cx="10610987" cy="2814617"/>
+            <a:ext cx="10610987" cy="3276282"/>
           </a:xfrm>
           <a:prstGeom prst="rect">
             <a:avLst/>
@@ -26702,7 +25622,22 @@
               <a:rPr lang="en-US" sz="2000" dirty="0">
                 <a:latin typeface="+mj-lt"/>
               </a:rPr>
-              <a:t>(PVE) by each principal component (al PVEs sum up to 1).</a:t>
+              <a:t>(PVE) by each principal component (al PVEs sum up to 1)…</a:t>
+            </a:r>
+          </a:p>
+          <a:p>
+            <a:pPr marL="285750" indent="-285750">
+              <a:lnSpc>
+                <a:spcPct val="150000"/>
+              </a:lnSpc>
+              <a:buFont typeface="Wingdings" panose="05000000000000000000" pitchFamily="2" charset="2"/>
+              <a:buChar char="§"/>
+            </a:pPr>
+            <a:r>
+              <a:rPr lang="en-US" sz="2000" dirty="0">
+                <a:latin typeface="+mj-lt"/>
+              </a:rPr>
+              <a:t>… and keeping a number of PC that gather a reasonable amount of variance</a:t>
             </a:r>
           </a:p>
         </p:txBody>
@@ -26720,7 +25655,7 @@
 </p:sld>
 </file>
 
-<file path=ppt/slides/slide16.xml><?xml version="1.0" encoding="utf-8"?>
+<file path=ppt/slides/slide15.xml><?xml version="1.0" encoding="utf-8"?>
 <p:sld xmlns:a="http://schemas.openxmlformats.org/drawingml/2006/main" xmlns:r="http://schemas.openxmlformats.org/officeDocument/2006/relationships" xmlns:p="http://schemas.openxmlformats.org/presentationml/2006/main">
   <p:cSld>
     <p:spTree>
@@ -28052,7 +26987,7 @@
           <a:p>
             <a:pPr>
               <a:lnSpc>
-                <a:spcPct val="100000"/>
+                <a:spcPct val="150000"/>
               </a:lnSpc>
               <a:buFont typeface="Wingdings" panose="05000000000000000000" pitchFamily="2" charset="2"/>
               <a:buChar char="§"/>
@@ -28067,7 +27002,7 @@
           <a:p>
             <a:pPr>
               <a:lnSpc>
-                <a:spcPct val="100000"/>
+                <a:spcPct val="150000"/>
               </a:lnSpc>
               <a:buFont typeface="Wingdings" panose="05000000000000000000" pitchFamily="2" charset="2"/>
               <a:buChar char="§"/>
@@ -28094,13 +27029,13 @@
           <a:p>
             <a:pPr lvl="1">
               <a:lnSpc>
-                <a:spcPct val="100000"/>
+                <a:spcPct val="150000"/>
               </a:lnSpc>
               <a:buFont typeface="Wingdings" panose="05000000000000000000" pitchFamily="2" charset="2"/>
               <a:buChar char="§"/>
             </a:pPr>
             <a:r>
-              <a:rPr lang="en-US" sz="1400" dirty="0">
+              <a:rPr lang="en-US" sz="1600" dirty="0">
                 <a:latin typeface="+mj-lt"/>
               </a:rPr>
               <a:t>The ratio between observations and features may be too small, meaning lots of features for just ‘a few’ observations. Thus, the more dimensions, the more overfitting</a:t>
@@ -28109,13 +27044,13 @@
           <a:p>
             <a:pPr lvl="1">
               <a:lnSpc>
-                <a:spcPct val="100000"/>
+                <a:spcPct val="150000"/>
               </a:lnSpc>
               <a:buFont typeface="Wingdings" panose="05000000000000000000" pitchFamily="2" charset="2"/>
               <a:buChar char="§"/>
             </a:pPr>
             <a:r>
-              <a:rPr lang="en-US" sz="1400" dirty="0">
+              <a:rPr lang="en-US" sz="1600" dirty="0">
                 <a:latin typeface="+mj-lt"/>
               </a:rPr>
               <a:t>In high-dimensional datasets it is more probable that the observations are ‘far away’ from each other, because they can differ in more aspects (data become sparse). Therefore, it will be difficult to predict new instances because any new instance will be far away from an already known (training) one</a:t>
@@ -28124,7 +27059,7 @@
           <a:p>
             <a:pPr>
               <a:lnSpc>
-                <a:spcPct val="100000"/>
+                <a:spcPct val="150000"/>
               </a:lnSpc>
               <a:buFont typeface="Wingdings" panose="05000000000000000000" pitchFamily="2" charset="2"/>
               <a:buChar char="§"/>
@@ -29097,7 +28032,7 @@
           <a:p>
             <a:pPr>
               <a:lnSpc>
-                <a:spcPct val="100000"/>
+                <a:spcPct val="150000"/>
               </a:lnSpc>
               <a:buFont typeface="Wingdings" panose="05000000000000000000" pitchFamily="2" charset="2"/>
               <a:buChar char="§"/>
@@ -29112,13 +28047,13 @@
           <a:p>
             <a:pPr lvl="1">
               <a:lnSpc>
-                <a:spcPct val="100000"/>
+                <a:spcPct val="150000"/>
               </a:lnSpc>
               <a:buFont typeface="Wingdings" panose="05000000000000000000" pitchFamily="2" charset="2"/>
               <a:buChar char="§"/>
             </a:pPr>
             <a:r>
-              <a:rPr lang="en-US" sz="1400" dirty="0">
+              <a:rPr lang="en-US" sz="1600" dirty="0">
                 <a:latin typeface="+mj-lt"/>
               </a:rPr>
               <a:t>Pixels on the image borders are not relevant because they usually are white</a:t>
@@ -29127,13 +28062,13 @@
           <a:p>
             <a:pPr lvl="1">
               <a:lnSpc>
-                <a:spcPct val="100000"/>
+                <a:spcPct val="150000"/>
               </a:lnSpc>
               <a:buFont typeface="Wingdings" panose="05000000000000000000" pitchFamily="2" charset="2"/>
               <a:buChar char="§"/>
             </a:pPr>
             <a:r>
-              <a:rPr lang="en-US" sz="1400" dirty="0">
+              <a:rPr lang="en-US" sz="1600" dirty="0">
                 <a:latin typeface="+mj-lt"/>
               </a:rPr>
               <a:t>Two neighbor pixels are often high correlated, we could merge them into a single one (taking the mean, for instance)</a:t>
@@ -29142,7 +28077,7 @@
           <a:p>
             <a:pPr>
               <a:lnSpc>
-                <a:spcPct val="100000"/>
+                <a:spcPct val="150000"/>
               </a:lnSpc>
               <a:buFont typeface="Wingdings" panose="05000000000000000000" pitchFamily="2" charset="2"/>
               <a:buChar char="§"/>
@@ -29151,13 +28086,34 @@
               <a:rPr lang="en-US" sz="1800" dirty="0">
                 <a:latin typeface="+mj-lt"/>
               </a:rPr>
-              <a:t>Therefore, all training instances may lie within a much lower-dimensional subspace of the high-dimensional space, within loosing much information.</a:t>
+              <a:t>Therefore, all </a:t>
             </a:r>
+            <a:r>
+              <a:rPr lang="en-US" sz="1800" b="1" dirty="0">
+                <a:latin typeface="+mj-lt"/>
+              </a:rPr>
+              <a:t>training instances may lie within a much lower-dimensional subspace</a:t>
+            </a:r>
+            <a:r>
+              <a:rPr lang="en-US" sz="1800" dirty="0">
+                <a:latin typeface="+mj-lt"/>
+              </a:rPr>
+              <a:t> of the high-dimensional space, </a:t>
+            </a:r>
+            <a:r>
+              <a:rPr lang="en-US" sz="1800" b="1" dirty="0">
+                <a:latin typeface="+mj-lt"/>
+              </a:rPr>
+              <a:t>without loosing much information</a:t>
+            </a:r>
+            <a:endParaRPr lang="en-US" sz="1800" dirty="0">
+              <a:latin typeface="+mj-lt"/>
+            </a:endParaRPr>
           </a:p>
           <a:p>
             <a:pPr lvl="1">
               <a:lnSpc>
-                <a:spcPct val="100000"/>
+                <a:spcPct val="150000"/>
               </a:lnSpc>
               <a:buFont typeface="Wingdings" panose="05000000000000000000" pitchFamily="2" charset="2"/>
               <a:buChar char="§"/>

--- a/Course content/Slides/Topic 7 - Dimensionality reduction.pptx
+++ b/Course content/Slides/Topic 7 - Dimensionality reduction.pptx
@@ -5,7 +5,7 @@
     <p:sldMasterId id="2147483648" r:id="rId1"/>
   </p:sldMasterIdLst>
   <p:notesMasterIdLst>
-    <p:notesMasterId r:id="rId17"/>
+    <p:notesMasterId r:id="rId16"/>
   </p:notesMasterIdLst>
   <p:sldIdLst>
     <p:sldId id="278" r:id="rId2"/>
@@ -13,16 +13,15 @@
     <p:sldId id="258" r:id="rId4"/>
     <p:sldId id="280" r:id="rId5"/>
     <p:sldId id="281" r:id="rId6"/>
-    <p:sldId id="282" r:id="rId7"/>
-    <p:sldId id="283" r:id="rId8"/>
-    <p:sldId id="284" r:id="rId9"/>
-    <p:sldId id="286" r:id="rId10"/>
-    <p:sldId id="287" r:id="rId11"/>
-    <p:sldId id="288" r:id="rId12"/>
-    <p:sldId id="290" r:id="rId13"/>
-    <p:sldId id="291" r:id="rId14"/>
-    <p:sldId id="292" r:id="rId15"/>
-    <p:sldId id="293" r:id="rId16"/>
+    <p:sldId id="284" r:id="rId7"/>
+    <p:sldId id="286" r:id="rId8"/>
+    <p:sldId id="287" r:id="rId9"/>
+    <p:sldId id="288" r:id="rId10"/>
+    <p:sldId id="290" r:id="rId11"/>
+    <p:sldId id="292" r:id="rId12"/>
+    <p:sldId id="294" r:id="rId13"/>
+    <p:sldId id="295" r:id="rId14"/>
+    <p:sldId id="293" r:id="rId15"/>
   </p:sldIdLst>
   <p:sldSz cx="12192000" cy="6858000"/>
   <p:notesSz cx="6858000" cy="9144000"/>
@@ -140,6 +139,328 @@
 </p:presentation>
 </file>
 
+<file path=ppt/revisionInfo.xml><?xml version="1.0" encoding="utf-8"?>
+<p1510:revInfo xmlns:a="http://schemas.openxmlformats.org/drawingml/2006/main" xmlns:r="http://schemas.openxmlformats.org/officeDocument/2006/relationships" xmlns:p1510="http://schemas.microsoft.com/office/powerpoint/2015/10/main">
+  <p1510:revLst>
+    <p1510:client id="{C6B80D17-39A7-49D1-A96C-D7F73E9814D9}" v="53" dt="2023-11-15T13:09:48.104"/>
+  </p1510:revLst>
+</p1510:revInfo>
+</file>
+
+<file path=ppt/changesInfos/changesInfo1.xml><?xml version="1.0" encoding="utf-8"?>
+<pc:chgInfo xmlns:a="http://schemas.openxmlformats.org/drawingml/2006/main" xmlns:r="http://schemas.openxmlformats.org/officeDocument/2006/relationships" xmlns:ac="http://schemas.microsoft.com/office/drawing/2013/main/command" xmlns:pc="http://schemas.microsoft.com/office/powerpoint/2013/main/command">
+  <pc:docChgLst>
+    <pc:chgData name="Javier Bas Vicente" userId="96bf8a96-3310-496c-8c7e-8a087f977faa" providerId="ADAL" clId="{C6B80D17-39A7-49D1-A96C-D7F73E9814D9}"/>
+    <pc:docChg chg="undo redo custSel addSld delSld modSld">
+      <pc:chgData name="Javier Bas Vicente" userId="96bf8a96-3310-496c-8c7e-8a087f977faa" providerId="ADAL" clId="{C6B80D17-39A7-49D1-A96C-D7F73E9814D9}" dt="2023-11-15T13:16:46.321" v="1329" actId="404"/>
+      <pc:docMkLst>
+        <pc:docMk/>
+      </pc:docMkLst>
+      <pc:sldChg chg="modSp mod">
+        <pc:chgData name="Javier Bas Vicente" userId="96bf8a96-3310-496c-8c7e-8a087f977faa" providerId="ADAL" clId="{C6B80D17-39A7-49D1-A96C-D7F73E9814D9}" dt="2023-11-15T13:16:46.321" v="1329" actId="404"/>
+        <pc:sldMkLst>
+          <pc:docMk/>
+          <pc:sldMk cId="3676436470" sldId="279"/>
+        </pc:sldMkLst>
+        <pc:spChg chg="mod">
+          <ac:chgData name="Javier Bas Vicente" userId="96bf8a96-3310-496c-8c7e-8a087f977faa" providerId="ADAL" clId="{C6B80D17-39A7-49D1-A96C-D7F73E9814D9}" dt="2023-11-15T13:16:46.321" v="1329" actId="404"/>
+          <ac:spMkLst>
+            <pc:docMk/>
+            <pc:sldMk cId="3676436470" sldId="279"/>
+            <ac:spMk id="152" creationId="{B7719AE7-5D76-3CA6-C03E-F772C1896EF4}"/>
+          </ac:spMkLst>
+        </pc:spChg>
+      </pc:sldChg>
+      <pc:sldChg chg="addSp delSp modSp mod">
+        <pc:chgData name="Javier Bas Vicente" userId="96bf8a96-3310-496c-8c7e-8a087f977faa" providerId="ADAL" clId="{C6B80D17-39A7-49D1-A96C-D7F73E9814D9}" dt="2023-11-15T12:53:58.293" v="1221" actId="20577"/>
+        <pc:sldMkLst>
+          <pc:docMk/>
+          <pc:sldMk cId="130533904" sldId="281"/>
+        </pc:sldMkLst>
+        <pc:spChg chg="add mod">
+          <ac:chgData name="Javier Bas Vicente" userId="96bf8a96-3310-496c-8c7e-8a087f977faa" providerId="ADAL" clId="{C6B80D17-39A7-49D1-A96C-D7F73E9814D9}" dt="2023-11-15T12:49:12.197" v="819" actId="208"/>
+          <ac:spMkLst>
+            <pc:docMk/>
+            <pc:sldMk cId="130533904" sldId="281"/>
+            <ac:spMk id="3" creationId="{1363874D-6B03-E8B8-21AD-92D5E492549D}"/>
+          </ac:spMkLst>
+        </pc:spChg>
+        <pc:spChg chg="add mod">
+          <ac:chgData name="Javier Bas Vicente" userId="96bf8a96-3310-496c-8c7e-8a087f977faa" providerId="ADAL" clId="{C6B80D17-39A7-49D1-A96C-D7F73E9814D9}" dt="2023-11-15T12:49:20.540" v="914" actId="1038"/>
+          <ac:spMkLst>
+            <pc:docMk/>
+            <pc:sldMk cId="130533904" sldId="281"/>
+            <ac:spMk id="5" creationId="{162B3E94-1C8C-4103-567F-16183FE4D170}"/>
+          </ac:spMkLst>
+        </pc:spChg>
+        <pc:spChg chg="mod">
+          <ac:chgData name="Javier Bas Vicente" userId="96bf8a96-3310-496c-8c7e-8a087f977faa" providerId="ADAL" clId="{C6B80D17-39A7-49D1-A96C-D7F73E9814D9}" dt="2023-11-15T12:53:58.293" v="1221" actId="20577"/>
+          <ac:spMkLst>
+            <pc:docMk/>
+            <pc:sldMk cId="130533904" sldId="281"/>
+            <ac:spMk id="16" creationId="{BAC32C6D-ECA0-4721-80B6-3F6ECFCC367C}"/>
+          </ac:spMkLst>
+        </pc:spChg>
+        <pc:spChg chg="del">
+          <ac:chgData name="Javier Bas Vicente" userId="96bf8a96-3310-496c-8c7e-8a087f977faa" providerId="ADAL" clId="{C6B80D17-39A7-49D1-A96C-D7F73E9814D9}" dt="2023-11-15T12:48:28.342" v="814" actId="478"/>
+          <ac:spMkLst>
+            <pc:docMk/>
+            <pc:sldMk cId="130533904" sldId="281"/>
+            <ac:spMk id="17" creationId="{244D8090-B349-5945-C647-12C1D9809D40}"/>
+          </ac:spMkLst>
+        </pc:spChg>
+        <pc:picChg chg="mod">
+          <ac:chgData name="Javier Bas Vicente" userId="96bf8a96-3310-496c-8c7e-8a087f977faa" providerId="ADAL" clId="{C6B80D17-39A7-49D1-A96C-D7F73E9814D9}" dt="2023-11-15T12:48:25.425" v="813" actId="1036"/>
+          <ac:picMkLst>
+            <pc:docMk/>
+            <pc:sldMk cId="130533904" sldId="281"/>
+            <ac:picMk id="11" creationId="{F32F3845-2297-96B3-25B8-A016A7C0ECC5}"/>
+          </ac:picMkLst>
+        </pc:picChg>
+        <pc:picChg chg="mod">
+          <ac:chgData name="Javier Bas Vicente" userId="96bf8a96-3310-496c-8c7e-8a087f977faa" providerId="ADAL" clId="{C6B80D17-39A7-49D1-A96C-D7F73E9814D9}" dt="2023-11-15T12:48:25.425" v="813" actId="1036"/>
+          <ac:picMkLst>
+            <pc:docMk/>
+            <pc:sldMk cId="130533904" sldId="281"/>
+            <ac:picMk id="13" creationId="{1290990F-372D-1A3D-959B-D22AA56E9300}"/>
+          </ac:picMkLst>
+        </pc:picChg>
+      </pc:sldChg>
+      <pc:sldChg chg="addSp modSp del mod">
+        <pc:chgData name="Javier Bas Vicente" userId="96bf8a96-3310-496c-8c7e-8a087f977faa" providerId="ADAL" clId="{C6B80D17-39A7-49D1-A96C-D7F73E9814D9}" dt="2023-11-15T12:54:38.250" v="1224" actId="47"/>
+        <pc:sldMkLst>
+          <pc:docMk/>
+          <pc:sldMk cId="3051451219" sldId="282"/>
+        </pc:sldMkLst>
+        <pc:spChg chg="mod">
+          <ac:chgData name="Javier Bas Vicente" userId="96bf8a96-3310-496c-8c7e-8a087f977faa" providerId="ADAL" clId="{C6B80D17-39A7-49D1-A96C-D7F73E9814D9}" dt="2023-11-15T12:51:14.643" v="1136" actId="20577"/>
+          <ac:spMkLst>
+            <pc:docMk/>
+            <pc:sldMk cId="3051451219" sldId="282"/>
+            <ac:spMk id="3" creationId="{07C8DDDE-8C83-1AC8-8FA2-895D71DAD748}"/>
+          </ac:spMkLst>
+        </pc:spChg>
+        <pc:cxnChg chg="add mod">
+          <ac:chgData name="Javier Bas Vicente" userId="96bf8a96-3310-496c-8c7e-8a087f977faa" providerId="ADAL" clId="{C6B80D17-39A7-49D1-A96C-D7F73E9814D9}" dt="2023-11-15T12:51:00.705" v="1083" actId="14100"/>
+          <ac:cxnSpMkLst>
+            <pc:docMk/>
+            <pc:sldMk cId="3051451219" sldId="282"/>
+            <ac:cxnSpMk id="9" creationId="{CA7F21D0-EBB2-6271-6BBF-34CA96B149F7}"/>
+          </ac:cxnSpMkLst>
+        </pc:cxnChg>
+        <pc:cxnChg chg="add mod">
+          <ac:chgData name="Javier Bas Vicente" userId="96bf8a96-3310-496c-8c7e-8a087f977faa" providerId="ADAL" clId="{C6B80D17-39A7-49D1-A96C-D7F73E9814D9}" dt="2023-11-15T12:51:30.726" v="1219" actId="14100"/>
+          <ac:cxnSpMkLst>
+            <pc:docMk/>
+            <pc:sldMk cId="3051451219" sldId="282"/>
+            <ac:cxnSpMk id="12" creationId="{757B9E34-61DF-7376-1A62-B28ABFF25BDC}"/>
+          </ac:cxnSpMkLst>
+        </pc:cxnChg>
+      </pc:sldChg>
+      <pc:sldChg chg="del">
+        <pc:chgData name="Javier Bas Vicente" userId="96bf8a96-3310-496c-8c7e-8a087f977faa" providerId="ADAL" clId="{C6B80D17-39A7-49D1-A96C-D7F73E9814D9}" dt="2023-11-15T12:54:39.179" v="1225" actId="47"/>
+        <pc:sldMkLst>
+          <pc:docMk/>
+          <pc:sldMk cId="1989458114" sldId="283"/>
+        </pc:sldMkLst>
+      </pc:sldChg>
+      <pc:sldChg chg="modSp mod">
+        <pc:chgData name="Javier Bas Vicente" userId="96bf8a96-3310-496c-8c7e-8a087f977faa" providerId="ADAL" clId="{C6B80D17-39A7-49D1-A96C-D7F73E9814D9}" dt="2023-11-15T11:02:46.865" v="3" actId="20577"/>
+        <pc:sldMkLst>
+          <pc:docMk/>
+          <pc:sldMk cId="190966088" sldId="284"/>
+        </pc:sldMkLst>
+        <pc:spChg chg="mod">
+          <ac:chgData name="Javier Bas Vicente" userId="96bf8a96-3310-496c-8c7e-8a087f977faa" providerId="ADAL" clId="{C6B80D17-39A7-49D1-A96C-D7F73E9814D9}" dt="2023-11-15T11:02:46.865" v="3" actId="20577"/>
+          <ac:spMkLst>
+            <pc:docMk/>
+            <pc:sldMk cId="190966088" sldId="284"/>
+            <ac:spMk id="3" creationId="{07C8DDDE-8C83-1AC8-8FA2-895D71DAD748}"/>
+          </ac:spMkLst>
+        </pc:spChg>
+      </pc:sldChg>
+      <pc:sldChg chg="modSp mod">
+        <pc:chgData name="Javier Bas Vicente" userId="96bf8a96-3310-496c-8c7e-8a087f977faa" providerId="ADAL" clId="{C6B80D17-39A7-49D1-A96C-D7F73E9814D9}" dt="2023-11-15T11:05:21.966" v="34" actId="20577"/>
+        <pc:sldMkLst>
+          <pc:docMk/>
+          <pc:sldMk cId="3468408143" sldId="287"/>
+        </pc:sldMkLst>
+        <pc:spChg chg="mod">
+          <ac:chgData name="Javier Bas Vicente" userId="96bf8a96-3310-496c-8c7e-8a087f977faa" providerId="ADAL" clId="{C6B80D17-39A7-49D1-A96C-D7F73E9814D9}" dt="2023-11-15T11:05:21.966" v="34" actId="20577"/>
+          <ac:spMkLst>
+            <pc:docMk/>
+            <pc:sldMk cId="3468408143" sldId="287"/>
+            <ac:spMk id="3" creationId="{07C8DDDE-8C83-1AC8-8FA2-895D71DAD748}"/>
+          </ac:spMkLst>
+        </pc:spChg>
+      </pc:sldChg>
+      <pc:sldChg chg="addSp modSp mod">
+        <pc:chgData name="Javier Bas Vicente" userId="96bf8a96-3310-496c-8c7e-8a087f977faa" providerId="ADAL" clId="{C6B80D17-39A7-49D1-A96C-D7F73E9814D9}" dt="2023-11-15T13:09:48.104" v="1264" actId="20577"/>
+        <pc:sldMkLst>
+          <pc:docMk/>
+          <pc:sldMk cId="144432870" sldId="288"/>
+        </pc:sldMkLst>
+        <pc:spChg chg="mod">
+          <ac:chgData name="Javier Bas Vicente" userId="96bf8a96-3310-496c-8c7e-8a087f977faa" providerId="ADAL" clId="{C6B80D17-39A7-49D1-A96C-D7F73E9814D9}" dt="2023-11-15T13:09:48.104" v="1264" actId="20577"/>
+          <ac:spMkLst>
+            <pc:docMk/>
+            <pc:sldMk cId="144432870" sldId="288"/>
+            <ac:spMk id="3" creationId="{07C8DDDE-8C83-1AC8-8FA2-895D71DAD748}"/>
+          </ac:spMkLst>
+        </pc:spChg>
+        <pc:spChg chg="mod">
+          <ac:chgData name="Javier Bas Vicente" userId="96bf8a96-3310-496c-8c7e-8a087f977faa" providerId="ADAL" clId="{C6B80D17-39A7-49D1-A96C-D7F73E9814D9}" dt="2023-11-15T11:30:53.371" v="165" actId="14100"/>
+          <ac:spMkLst>
+            <pc:docMk/>
+            <pc:sldMk cId="144432870" sldId="288"/>
+            <ac:spMk id="9" creationId="{AED52BA1-913E-8452-C64A-2852B1BC2DA8}"/>
+          </ac:spMkLst>
+        </pc:spChg>
+        <pc:spChg chg="add mod">
+          <ac:chgData name="Javier Bas Vicente" userId="96bf8a96-3310-496c-8c7e-8a087f977faa" providerId="ADAL" clId="{C6B80D17-39A7-49D1-A96C-D7F73E9814D9}" dt="2023-11-15T13:06:31.392" v="1262" actId="6549"/>
+          <ac:spMkLst>
+            <pc:docMk/>
+            <pc:sldMk cId="144432870" sldId="288"/>
+            <ac:spMk id="12" creationId="{72CC70DC-81FF-4A12-B63C-A1CF19BD06BF}"/>
+          </ac:spMkLst>
+        </pc:spChg>
+        <pc:cxnChg chg="add mod">
+          <ac:chgData name="Javier Bas Vicente" userId="96bf8a96-3310-496c-8c7e-8a087f977faa" providerId="ADAL" clId="{C6B80D17-39A7-49D1-A96C-D7F73E9814D9}" dt="2023-11-15T13:06:19.204" v="1226" actId="14100"/>
+          <ac:cxnSpMkLst>
+            <pc:docMk/>
+            <pc:sldMk cId="144432870" sldId="288"/>
+            <ac:cxnSpMk id="5" creationId="{D909AEAD-0F8C-2DE5-3BB2-E9AA6BF2F711}"/>
+          </ac:cxnSpMkLst>
+        </pc:cxnChg>
+      </pc:sldChg>
+      <pc:sldChg chg="modSp">
+        <pc:chgData name="Javier Bas Vicente" userId="96bf8a96-3310-496c-8c7e-8a087f977faa" providerId="ADAL" clId="{C6B80D17-39A7-49D1-A96C-D7F73E9814D9}" dt="2023-11-15T11:37:28.789" v="192" actId="113"/>
+        <pc:sldMkLst>
+          <pc:docMk/>
+          <pc:sldMk cId="3703413204" sldId="290"/>
+        </pc:sldMkLst>
+        <pc:spChg chg="mod">
+          <ac:chgData name="Javier Bas Vicente" userId="96bf8a96-3310-496c-8c7e-8a087f977faa" providerId="ADAL" clId="{C6B80D17-39A7-49D1-A96C-D7F73E9814D9}" dt="2023-11-15T11:37:28.789" v="192" actId="113"/>
+          <ac:spMkLst>
+            <pc:docMk/>
+            <pc:sldMk cId="3703413204" sldId="290"/>
+            <ac:spMk id="3" creationId="{07C8DDDE-8C83-1AC8-8FA2-895D71DAD748}"/>
+          </ac:spMkLst>
+        </pc:spChg>
+      </pc:sldChg>
+      <pc:sldChg chg="del">
+        <pc:chgData name="Javier Bas Vicente" userId="96bf8a96-3310-496c-8c7e-8a087f977faa" providerId="ADAL" clId="{C6B80D17-39A7-49D1-A96C-D7F73E9814D9}" dt="2023-11-15T11:39:07.270" v="193" actId="47"/>
+        <pc:sldMkLst>
+          <pc:docMk/>
+          <pc:sldMk cId="1700027110" sldId="291"/>
+        </pc:sldMkLst>
+      </pc:sldChg>
+      <pc:sldChg chg="modSp mod">
+        <pc:chgData name="Javier Bas Vicente" userId="96bf8a96-3310-496c-8c7e-8a087f977faa" providerId="ADAL" clId="{C6B80D17-39A7-49D1-A96C-D7F73E9814D9}" dt="2023-11-15T11:40:55.346" v="306" actId="20577"/>
+        <pc:sldMkLst>
+          <pc:docMk/>
+          <pc:sldMk cId="3912862118" sldId="292"/>
+        </pc:sldMkLst>
+        <pc:spChg chg="mod">
+          <ac:chgData name="Javier Bas Vicente" userId="96bf8a96-3310-496c-8c7e-8a087f977faa" providerId="ADAL" clId="{C6B80D17-39A7-49D1-A96C-D7F73E9814D9}" dt="2023-11-15T11:40:55.346" v="306" actId="20577"/>
+          <ac:spMkLst>
+            <pc:docMk/>
+            <pc:sldMk cId="3912862118" sldId="292"/>
+            <ac:spMk id="3" creationId="{07C8DDDE-8C83-1AC8-8FA2-895D71DAD748}"/>
+          </ac:spMkLst>
+        </pc:spChg>
+      </pc:sldChg>
+      <pc:sldChg chg="addSp delSp modSp add mod">
+        <pc:chgData name="Javier Bas Vicente" userId="96bf8a96-3310-496c-8c7e-8a087f977faa" providerId="ADAL" clId="{C6B80D17-39A7-49D1-A96C-D7F73E9814D9}" dt="2023-11-15T11:47:09.401" v="537" actId="1076"/>
+        <pc:sldMkLst>
+          <pc:docMk/>
+          <pc:sldMk cId="4108215469" sldId="294"/>
+        </pc:sldMkLst>
+        <pc:spChg chg="mod">
+          <ac:chgData name="Javier Bas Vicente" userId="96bf8a96-3310-496c-8c7e-8a087f977faa" providerId="ADAL" clId="{C6B80D17-39A7-49D1-A96C-D7F73E9814D9}" dt="2023-11-15T11:47:06.136" v="535" actId="20577"/>
+          <ac:spMkLst>
+            <pc:docMk/>
+            <pc:sldMk cId="4108215469" sldId="294"/>
+            <ac:spMk id="3" creationId="{07C8DDDE-8C83-1AC8-8FA2-895D71DAD748}"/>
+          </ac:spMkLst>
+        </pc:spChg>
+        <pc:picChg chg="add mod">
+          <ac:chgData name="Javier Bas Vicente" userId="96bf8a96-3310-496c-8c7e-8a087f977faa" providerId="ADAL" clId="{C6B80D17-39A7-49D1-A96C-D7F73E9814D9}" dt="2023-11-15T11:47:09.401" v="537" actId="1076"/>
+          <ac:picMkLst>
+            <pc:docMk/>
+            <pc:sldMk cId="4108215469" sldId="294"/>
+            <ac:picMk id="8" creationId="{F0EC4594-E793-1001-D481-6041602BB59B}"/>
+          </ac:picMkLst>
+        </pc:picChg>
+        <pc:picChg chg="add mod">
+          <ac:chgData name="Javier Bas Vicente" userId="96bf8a96-3310-496c-8c7e-8a087f977faa" providerId="ADAL" clId="{C6B80D17-39A7-49D1-A96C-D7F73E9814D9}" dt="2023-11-15T11:47:03.247" v="534" actId="1076"/>
+          <ac:picMkLst>
+            <pc:docMk/>
+            <pc:sldMk cId="4108215469" sldId="294"/>
+            <ac:picMk id="10" creationId="{491A617E-1CE6-0194-4C8B-0F05C4639547}"/>
+          </ac:picMkLst>
+        </pc:picChg>
+        <pc:picChg chg="add del mod">
+          <ac:chgData name="Javier Bas Vicente" userId="96bf8a96-3310-496c-8c7e-8a087f977faa" providerId="ADAL" clId="{C6B80D17-39A7-49D1-A96C-D7F73E9814D9}" dt="2023-11-15T11:46:48.099" v="512" actId="478"/>
+          <ac:picMkLst>
+            <pc:docMk/>
+            <pc:sldMk cId="4108215469" sldId="294"/>
+            <ac:picMk id="12" creationId="{18711438-9479-7457-110D-4EE9B3FD2F4C}"/>
+          </ac:picMkLst>
+        </pc:picChg>
+      </pc:sldChg>
+      <pc:sldChg chg="addSp delSp modSp add mod">
+        <pc:chgData name="Javier Bas Vicente" userId="96bf8a96-3310-496c-8c7e-8a087f977faa" providerId="ADAL" clId="{C6B80D17-39A7-49D1-A96C-D7F73E9814D9}" dt="2023-11-15T11:49:08.575" v="624" actId="20577"/>
+        <pc:sldMkLst>
+          <pc:docMk/>
+          <pc:sldMk cId="788736684" sldId="295"/>
+        </pc:sldMkLst>
+        <pc:spChg chg="mod">
+          <ac:chgData name="Javier Bas Vicente" userId="96bf8a96-3310-496c-8c7e-8a087f977faa" providerId="ADAL" clId="{C6B80D17-39A7-49D1-A96C-D7F73E9814D9}" dt="2023-11-15T11:49:08.575" v="624" actId="20577"/>
+          <ac:spMkLst>
+            <pc:docMk/>
+            <pc:sldMk cId="788736684" sldId="295"/>
+            <ac:spMk id="3" creationId="{07C8DDDE-8C83-1AC8-8FA2-895D71DAD748}"/>
+          </ac:spMkLst>
+        </pc:spChg>
+        <pc:picChg chg="del">
+          <ac:chgData name="Javier Bas Vicente" userId="96bf8a96-3310-496c-8c7e-8a087f977faa" providerId="ADAL" clId="{C6B80D17-39A7-49D1-A96C-D7F73E9814D9}" dt="2023-11-15T11:46:35.276" v="488" actId="478"/>
+          <ac:picMkLst>
+            <pc:docMk/>
+            <pc:sldMk cId="788736684" sldId="295"/>
+            <ac:picMk id="8" creationId="{F0EC4594-E793-1001-D481-6041602BB59B}"/>
+          </ac:picMkLst>
+        </pc:picChg>
+        <pc:picChg chg="add mod">
+          <ac:chgData name="Javier Bas Vicente" userId="96bf8a96-3310-496c-8c7e-8a087f977faa" providerId="ADAL" clId="{C6B80D17-39A7-49D1-A96C-D7F73E9814D9}" dt="2023-11-15T11:48:30.906" v="603" actId="1038"/>
+          <ac:picMkLst>
+            <pc:docMk/>
+            <pc:sldMk cId="788736684" sldId="295"/>
+            <ac:picMk id="9" creationId="{096D8394-73F4-459D-ED65-06E54CF72E83}"/>
+          </ac:picMkLst>
+        </pc:picChg>
+        <pc:picChg chg="del">
+          <ac:chgData name="Javier Bas Vicente" userId="96bf8a96-3310-496c-8c7e-8a087f977faa" providerId="ADAL" clId="{C6B80D17-39A7-49D1-A96C-D7F73E9814D9}" dt="2023-11-15T11:46:31.698" v="486" actId="478"/>
+          <ac:picMkLst>
+            <pc:docMk/>
+            <pc:sldMk cId="788736684" sldId="295"/>
+            <ac:picMk id="10" creationId="{491A617E-1CE6-0194-4C8B-0F05C4639547}"/>
+          </ac:picMkLst>
+        </pc:picChg>
+        <pc:picChg chg="mod">
+          <ac:chgData name="Javier Bas Vicente" userId="96bf8a96-3310-496c-8c7e-8a087f977faa" providerId="ADAL" clId="{C6B80D17-39A7-49D1-A96C-D7F73E9814D9}" dt="2023-11-15T11:48:19.120" v="586" actId="14100"/>
+          <ac:picMkLst>
+            <pc:docMk/>
+            <pc:sldMk cId="788736684" sldId="295"/>
+            <ac:picMk id="12" creationId="{18711438-9479-7457-110D-4EE9B3FD2F4C}"/>
+          </ac:picMkLst>
+        </pc:picChg>
+      </pc:sldChg>
+    </pc:docChg>
+  </pc:docChgLst>
+</pc:chgInfo>
+</file>
+
 <file path=ppt/notesMasters/notesMaster1.xml><?xml version="1.0" encoding="utf-8"?>
 <p:notesMaster xmlns:a="http://schemas.openxmlformats.org/drawingml/2006/main" xmlns:r="http://schemas.openxmlformats.org/officeDocument/2006/relationships" xmlns:p="http://schemas.openxmlformats.org/presentationml/2006/main">
   <p:cSld>
@@ -222,7 +543,7 @@
           <a:p>
             <a:fld id="{B9B1DC7F-8587-4047-9A5D-1FCB6614CAE0}" type="datetimeFigureOut">
               <a:rPr lang="en-US" smtClean="0"/>
-              <a:t>11/8/2022</a:t>
+              <a:t>11/15/2023</a:t>
             </a:fld>
             <a:endParaRPr lang="en-US"/>
           </a:p>
@@ -636,7 +957,7 @@
           <a:p>
             <a:fld id="{A7DB5662-7327-465C-9A70-AD96B7A8D67A}" type="datetimeFigureOut">
               <a:rPr lang="en-US" smtClean="0"/>
-              <a:t>11/8/2022</a:t>
+              <a:t>11/15/2023</a:t>
             </a:fld>
             <a:endParaRPr lang="en-US"/>
           </a:p>
@@ -834,7 +1155,7 @@
           <a:p>
             <a:fld id="{A7DB5662-7327-465C-9A70-AD96B7A8D67A}" type="datetimeFigureOut">
               <a:rPr lang="en-US" smtClean="0"/>
-              <a:t>11/8/2022</a:t>
+              <a:t>11/15/2023</a:t>
             </a:fld>
             <a:endParaRPr lang="en-US"/>
           </a:p>
@@ -1042,7 +1363,7 @@
           <a:p>
             <a:fld id="{A7DB5662-7327-465C-9A70-AD96B7A8D67A}" type="datetimeFigureOut">
               <a:rPr lang="en-US" smtClean="0"/>
-              <a:t>11/8/2022</a:t>
+              <a:t>11/15/2023</a:t>
             </a:fld>
             <a:endParaRPr lang="en-US"/>
           </a:p>
@@ -1240,7 +1561,7 @@
           <a:p>
             <a:fld id="{A7DB5662-7327-465C-9A70-AD96B7A8D67A}" type="datetimeFigureOut">
               <a:rPr lang="en-US" smtClean="0"/>
-              <a:t>11/8/2022</a:t>
+              <a:t>11/15/2023</a:t>
             </a:fld>
             <a:endParaRPr lang="en-US"/>
           </a:p>
@@ -1515,7 +1836,7 @@
           <a:p>
             <a:fld id="{A7DB5662-7327-465C-9A70-AD96B7A8D67A}" type="datetimeFigureOut">
               <a:rPr lang="en-US" smtClean="0"/>
-              <a:t>11/8/2022</a:t>
+              <a:t>11/15/2023</a:t>
             </a:fld>
             <a:endParaRPr lang="en-US"/>
           </a:p>
@@ -1780,7 +2101,7 @@
           <a:p>
             <a:fld id="{A7DB5662-7327-465C-9A70-AD96B7A8D67A}" type="datetimeFigureOut">
               <a:rPr lang="en-US" smtClean="0"/>
-              <a:t>11/8/2022</a:t>
+              <a:t>11/15/2023</a:t>
             </a:fld>
             <a:endParaRPr lang="en-US"/>
           </a:p>
@@ -2192,7 +2513,7 @@
           <a:p>
             <a:fld id="{A7DB5662-7327-465C-9A70-AD96B7A8D67A}" type="datetimeFigureOut">
               <a:rPr lang="en-US" smtClean="0"/>
-              <a:t>11/8/2022</a:t>
+              <a:t>11/15/2023</a:t>
             </a:fld>
             <a:endParaRPr lang="en-US"/>
           </a:p>
@@ -2333,7 +2654,7 @@
           <a:p>
             <a:fld id="{A7DB5662-7327-465C-9A70-AD96B7A8D67A}" type="datetimeFigureOut">
               <a:rPr lang="en-US" smtClean="0"/>
-              <a:t>11/8/2022</a:t>
+              <a:t>11/15/2023</a:t>
             </a:fld>
             <a:endParaRPr lang="en-US"/>
           </a:p>
@@ -2446,7 +2767,7 @@
           <a:p>
             <a:fld id="{A7DB5662-7327-465C-9A70-AD96B7A8D67A}" type="datetimeFigureOut">
               <a:rPr lang="en-US" smtClean="0"/>
-              <a:t>11/8/2022</a:t>
+              <a:t>11/15/2023</a:t>
             </a:fld>
             <a:endParaRPr lang="en-US"/>
           </a:p>
@@ -2757,7 +3078,7 @@
           <a:p>
             <a:fld id="{A7DB5662-7327-465C-9A70-AD96B7A8D67A}" type="datetimeFigureOut">
               <a:rPr lang="en-US" smtClean="0"/>
-              <a:t>11/8/2022</a:t>
+              <a:t>11/15/2023</a:t>
             </a:fld>
             <a:endParaRPr lang="en-US"/>
           </a:p>
@@ -3045,7 +3366,7 @@
           <a:p>
             <a:fld id="{A7DB5662-7327-465C-9A70-AD96B7A8D67A}" type="datetimeFigureOut">
               <a:rPr lang="en-US" smtClean="0"/>
-              <a:t>11/8/2022</a:t>
+              <a:t>11/15/2023</a:t>
             </a:fld>
             <a:endParaRPr lang="en-US"/>
           </a:p>
@@ -3286,7 +3607,7 @@
           <a:p>
             <a:fld id="{A7DB5662-7327-465C-9A70-AD96B7A8D67A}" type="datetimeFigureOut">
               <a:rPr lang="en-US" smtClean="0"/>
-              <a:t>11/8/2022</a:t>
+              <a:t>11/15/2023</a:t>
             </a:fld>
             <a:endParaRPr lang="en-US"/>
           </a:p>
@@ -22018,2226 +22339,8 @@
           </a:p>
         </p:txBody>
       </p:sp>
-      <mc:AlternateContent xmlns:mc="http://schemas.openxmlformats.org/markup-compatibility/2006">
-        <mc:Choice xmlns:a14="http://schemas.microsoft.com/office/drawing/2010/main" Requires="a14">
-          <p:sp>
-            <p:nvSpPr>
-              <p:cNvPr id="3" name="TextBox 2">
-                <a:extLst>
-                  <a:ext uri="{FF2B5EF4-FFF2-40B4-BE49-F238E27FC236}">
-                    <a16:creationId xmlns:a16="http://schemas.microsoft.com/office/drawing/2014/main" id="{07C8DDDE-8C83-1AC8-8FA2-895D71DAD748}"/>
-                  </a:ext>
-                </a:extLst>
-              </p:cNvPr>
-              <p:cNvSpPr txBox="1"/>
-              <p:nvPr/>
-            </p:nvSpPr>
-            <p:spPr>
-              <a:xfrm>
-                <a:off x="927557" y="1920898"/>
-                <a:ext cx="10610987" cy="3773469"/>
-              </a:xfrm>
-              <a:prstGeom prst="rect">
-                <a:avLst/>
-              </a:prstGeom>
-              <a:noFill/>
-            </p:spPr>
-            <p:txBody>
-              <a:bodyPr wrap="square" rtlCol="0">
-                <a:spAutoFit/>
-              </a:bodyPr>
-              <a:lstStyle/>
-              <a:p>
-                <a:pPr marL="285750" indent="-285750">
-                  <a:lnSpc>
-                    <a:spcPct val="150000"/>
-                  </a:lnSpc>
-                  <a:buFont typeface="Wingdings" panose="05000000000000000000" pitchFamily="2" charset="2"/>
-                  <a:buChar char="§"/>
-                </a:pPr>
-                <a:r>
-                  <a:rPr lang="en-US" sz="2000" dirty="0">
-                    <a:latin typeface="+mj-lt"/>
-                  </a:rPr>
-                  <a:t>Suppose we want to visualize </a:t>
-                </a:r>
-                <a:r>
-                  <a:rPr lang="en-US" sz="2000" i="1" dirty="0">
-                    <a:latin typeface="+mj-lt"/>
-                  </a:rPr>
-                  <a:t>n</a:t>
-                </a:r>
-                <a:r>
-                  <a:rPr lang="en-US" sz="2000" dirty="0">
-                    <a:latin typeface="+mj-lt"/>
-                  </a:rPr>
-                  <a:t> observations describe by a set of </a:t>
-                </a:r>
-                <a:r>
-                  <a:rPr lang="en-US" sz="2000" i="1" dirty="0">
-                    <a:latin typeface="+mj-lt"/>
-                  </a:rPr>
-                  <a:t>p</a:t>
-                </a:r>
-                <a:r>
-                  <a:rPr lang="en-US" sz="2000" dirty="0">
-                    <a:latin typeface="+mj-lt"/>
-                  </a:rPr>
-                  <a:t> features </a:t>
-                </a:r>
-                <a14:m>
-                  <m:oMath xmlns:m="http://schemas.openxmlformats.org/officeDocument/2006/math">
-                    <m:sSub>
-                      <m:sSubPr>
-                        <m:ctrlPr>
-                          <a:rPr lang="en-US" sz="2000" i="1" smtClean="0">
-                            <a:latin typeface="Cambria Math" panose="02040503050406030204" pitchFamily="18" charset="0"/>
-                          </a:rPr>
-                        </m:ctrlPr>
-                      </m:sSubPr>
-                      <m:e>
-                        <m:r>
-                          <a:rPr lang="en-US" sz="2000" b="0" i="1" smtClean="0">
-                            <a:latin typeface="Cambria Math" panose="02040503050406030204" pitchFamily="18" charset="0"/>
-                          </a:rPr>
-                          <m:t>𝑋</m:t>
-                        </m:r>
-                      </m:e>
-                      <m:sub>
-                        <m:r>
-                          <a:rPr lang="en-US" sz="2000" b="0" i="1" smtClean="0">
-                            <a:latin typeface="Cambria Math" panose="02040503050406030204" pitchFamily="18" charset="0"/>
-                          </a:rPr>
-                          <m:t>1</m:t>
-                        </m:r>
-                      </m:sub>
-                    </m:sSub>
-                    <m:r>
-                      <a:rPr lang="en-US" sz="2000" b="0" i="1" smtClean="0">
-                        <a:latin typeface="Cambria Math" panose="02040503050406030204" pitchFamily="18" charset="0"/>
-                      </a:rPr>
-                      <m:t>,</m:t>
-                    </m:r>
-                    <m:sSub>
-                      <m:sSubPr>
-                        <m:ctrlPr>
-                          <a:rPr lang="en-US" sz="2000" i="1">
-                            <a:latin typeface="Cambria Math" panose="02040503050406030204" pitchFamily="18" charset="0"/>
-                          </a:rPr>
-                        </m:ctrlPr>
-                      </m:sSubPr>
-                      <m:e>
-                        <m:r>
-                          <a:rPr lang="en-US" sz="2000" i="1">
-                            <a:latin typeface="Cambria Math" panose="02040503050406030204" pitchFamily="18" charset="0"/>
-                          </a:rPr>
-                          <m:t>𝑋</m:t>
-                        </m:r>
-                      </m:e>
-                      <m:sub>
-                        <m:r>
-                          <a:rPr lang="en-US" sz="2000" b="0" i="1" smtClean="0">
-                            <a:latin typeface="Cambria Math" panose="02040503050406030204" pitchFamily="18" charset="0"/>
-                          </a:rPr>
-                          <m:t>2</m:t>
-                        </m:r>
-                      </m:sub>
-                    </m:sSub>
-                    <m:r>
-                      <a:rPr lang="en-US" sz="2000" b="0" i="1" smtClean="0">
-                        <a:latin typeface="Cambria Math" panose="02040503050406030204" pitchFamily="18" charset="0"/>
-                      </a:rPr>
-                      <m:t>,…,</m:t>
-                    </m:r>
-                    <m:sSub>
-                      <m:sSubPr>
-                        <m:ctrlPr>
-                          <a:rPr lang="en-US" sz="2000" i="1">
-                            <a:latin typeface="Cambria Math" panose="02040503050406030204" pitchFamily="18" charset="0"/>
-                          </a:rPr>
-                        </m:ctrlPr>
-                      </m:sSubPr>
-                      <m:e>
-                        <m:r>
-                          <a:rPr lang="en-US" sz="2000" i="1">
-                            <a:latin typeface="Cambria Math" panose="02040503050406030204" pitchFamily="18" charset="0"/>
-                          </a:rPr>
-                          <m:t>𝑋</m:t>
-                        </m:r>
-                      </m:e>
-                      <m:sub>
-                        <m:r>
-                          <a:rPr lang="en-US" sz="2000" b="0" i="1" smtClean="0">
-                            <a:latin typeface="Cambria Math" panose="02040503050406030204" pitchFamily="18" charset="0"/>
-                          </a:rPr>
-                          <m:t>𝑝</m:t>
-                        </m:r>
-                      </m:sub>
-                    </m:sSub>
-                  </m:oMath>
-                </a14:m>
-                <a:r>
-                  <a:rPr lang="en-US" sz="2000" dirty="0">
-                    <a:latin typeface="+mj-lt"/>
-                  </a:rPr>
-                  <a:t> using scatterplots. This task may become infeasible since there are </a:t>
-                </a:r>
-                <a14:m>
-                  <m:oMath xmlns:m="http://schemas.openxmlformats.org/officeDocument/2006/math">
-                    <m:r>
-                      <a:rPr lang="en-US" sz="2000" b="0" i="1" smtClean="0">
-                        <a:latin typeface="Cambria Math" panose="02040503050406030204" pitchFamily="18" charset="0"/>
-                      </a:rPr>
-                      <m:t>𝑝</m:t>
-                    </m:r>
-                    <m:r>
-                      <a:rPr lang="en-US" sz="2000" b="0" i="1" smtClean="0">
-                        <a:latin typeface="Cambria Math" panose="02040503050406030204" pitchFamily="18" charset="0"/>
-                      </a:rPr>
-                      <m:t>(</m:t>
-                    </m:r>
-                    <m:r>
-                      <a:rPr lang="en-US" sz="2000" b="0" i="1" smtClean="0">
-                        <a:latin typeface="Cambria Math" panose="02040503050406030204" pitchFamily="18" charset="0"/>
-                      </a:rPr>
-                      <m:t>𝑝</m:t>
-                    </m:r>
-                    <m:r>
-                      <a:rPr lang="en-US" sz="2000" b="0" i="1" smtClean="0">
-                        <a:latin typeface="Cambria Math" panose="02040503050406030204" pitchFamily="18" charset="0"/>
-                      </a:rPr>
-                      <m:t>−1)/2</m:t>
-                    </m:r>
-                  </m:oMath>
-                </a14:m>
-                <a:r>
-                  <a:rPr lang="en-US" sz="2000" dirty="0">
-                    <a:latin typeface="+mj-lt"/>
-                  </a:rPr>
-                  <a:t> scatterplots. If p =10, there would be 45 plots</a:t>
-                </a:r>
-              </a:p>
-              <a:p>
-                <a:pPr marL="285750" indent="-285750">
-                  <a:lnSpc>
-                    <a:spcPct val="150000"/>
-                  </a:lnSpc>
-                  <a:buFont typeface="Wingdings" panose="05000000000000000000" pitchFamily="2" charset="2"/>
-                  <a:buChar char="§"/>
-                </a:pPr>
-                <a:r>
-                  <a:rPr lang="en-US" sz="2000" dirty="0">
-                    <a:latin typeface="+mj-lt"/>
-                  </a:rPr>
-                  <a:t>It would be great if could capture a low-dimensional representation of the data that captures as much information as possible. This is precisely what PCA does</a:t>
-                </a:r>
-              </a:p>
-              <a:p>
-                <a:pPr marL="285750" indent="-285750">
-                  <a:lnSpc>
-                    <a:spcPct val="150000"/>
-                  </a:lnSpc>
-                  <a:buFont typeface="Wingdings" panose="05000000000000000000" pitchFamily="2" charset="2"/>
-                  <a:buChar char="§"/>
-                </a:pPr>
-                <a:r>
-                  <a:rPr lang="en-US" sz="2000" dirty="0">
-                    <a:latin typeface="+mj-lt"/>
-                  </a:rPr>
-                  <a:t>Again, the idea is that the </a:t>
-                </a:r>
-                <a:r>
-                  <a:rPr lang="en-US" sz="2000" i="1" dirty="0">
-                    <a:latin typeface="+mj-lt"/>
-                  </a:rPr>
-                  <a:t>n</a:t>
-                </a:r>
-                <a:r>
-                  <a:rPr lang="en-US" sz="2000" dirty="0">
-                    <a:latin typeface="+mj-lt"/>
-                  </a:rPr>
-                  <a:t> observations live in a </a:t>
-                </a:r>
-                <a:r>
-                  <a:rPr lang="en-US" sz="2000" i="1" dirty="0">
-                    <a:latin typeface="+mj-lt"/>
-                  </a:rPr>
-                  <a:t>p</a:t>
-                </a:r>
-                <a:r>
-                  <a:rPr lang="en-US" sz="2000" dirty="0">
-                    <a:latin typeface="+mj-lt"/>
-                  </a:rPr>
-                  <a:t>-dimensional space, but not all dimensions are equally interesting (a way of referring to the amount that the observations vary along each dimension)</a:t>
-                </a:r>
-              </a:p>
-            </p:txBody>
-          </p:sp>
-        </mc:Choice>
-        <mc:Fallback>
-          <p:sp>
-            <p:nvSpPr>
-              <p:cNvPr id="3" name="TextBox 2">
-                <a:extLst>
-                  <a:ext uri="{FF2B5EF4-FFF2-40B4-BE49-F238E27FC236}">
-                    <a16:creationId xmlns:a16="http://schemas.microsoft.com/office/drawing/2014/main" id="{07C8DDDE-8C83-1AC8-8FA2-895D71DAD748}"/>
-                  </a:ext>
-                </a:extLst>
-              </p:cNvPr>
-              <p:cNvSpPr txBox="1">
-                <a:spLocks noRot="1" noChangeAspect="1" noMove="1" noResize="1" noEditPoints="1" noAdjustHandles="1" noChangeArrowheads="1" noChangeShapeType="1" noTextEdit="1"/>
-              </p:cNvSpPr>
-              <p:nvPr/>
-            </p:nvSpPr>
-            <p:spPr>
-              <a:xfrm>
-                <a:off x="927557" y="1920898"/>
-                <a:ext cx="10610987" cy="3773469"/>
-              </a:xfrm>
-              <a:prstGeom prst="rect">
-                <a:avLst/>
-              </a:prstGeom>
-              <a:blipFill>
-                <a:blip r:embed="rId2"/>
-                <a:stretch>
-                  <a:fillRect l="-517" b="-1939"/>
-                </a:stretch>
-              </a:blipFill>
-            </p:spPr>
-            <p:txBody>
-              <a:bodyPr/>
-              <a:lstStyle/>
-              <a:p>
-                <a:r>
-                  <a:rPr lang="en-US">
-                    <a:noFill/>
-                  </a:rPr>
-                  <a:t> </a:t>
-                </a:r>
-              </a:p>
-            </p:txBody>
-          </p:sp>
-        </mc:Fallback>
-      </mc:AlternateContent>
-    </p:spTree>
-    <p:extLst>
-      <p:ext uri="{BB962C8B-B14F-4D97-AF65-F5344CB8AC3E}">
-        <p14:creationId xmlns:p14="http://schemas.microsoft.com/office/powerpoint/2010/main" val="3468408143"/>
-      </p:ext>
-    </p:extLst>
-  </p:cSld>
-  <p:clrMapOvr>
-    <a:masterClrMapping/>
-  </p:clrMapOvr>
-</p:sld>
-</file>
-
-<file path=ppt/slides/slide11.xml><?xml version="1.0" encoding="utf-8"?>
-<p:sld xmlns:a="http://schemas.openxmlformats.org/drawingml/2006/main" xmlns:r="http://schemas.openxmlformats.org/officeDocument/2006/relationships" xmlns:p="http://schemas.openxmlformats.org/presentationml/2006/main">
-  <p:cSld>
-    <p:spTree>
-      <p:nvGrpSpPr>
-        <p:cNvPr id="1" name=""/>
-        <p:cNvGrpSpPr/>
-        <p:nvPr/>
-      </p:nvGrpSpPr>
-      <p:grpSpPr>
-        <a:xfrm>
-          <a:off x="0" y="0"/>
-          <a:ext cx="0" cy="0"/>
-          <a:chOff x="0" y="0"/>
-          <a:chExt cx="0" cy="0"/>
-        </a:xfrm>
-      </p:grpSpPr>
-      <p:sp>
-        <p:nvSpPr>
-          <p:cNvPr id="2" name="Title 1">
-            <a:extLst>
-              <a:ext uri="{FF2B5EF4-FFF2-40B4-BE49-F238E27FC236}">
-                <a16:creationId xmlns:a16="http://schemas.microsoft.com/office/drawing/2014/main" id="{31C29F6F-54A2-5964-F2B2-982952460386}"/>
-              </a:ext>
-            </a:extLst>
-          </p:cNvPr>
-          <p:cNvSpPr>
-            <a:spLocks noGrp="1"/>
-          </p:cNvSpPr>
-          <p:nvPr>
-            <p:ph type="title"/>
-          </p:nvPr>
-        </p:nvSpPr>
-        <p:spPr/>
-        <p:txBody>
-          <a:bodyPr>
-            <a:normAutofit/>
-          </a:bodyPr>
-          <a:lstStyle/>
-          <a:p>
-            <a:r>
-              <a:rPr lang="en-US" sz="4000" dirty="0"/>
-              <a:t>Principal Component Analysis (PCA)</a:t>
-            </a:r>
-          </a:p>
-        </p:txBody>
-      </p:sp>
-      <p:sp>
-        <p:nvSpPr>
-          <p:cNvPr id="4" name="Rectángulo 3">
-            <a:extLst>
-              <a:ext uri="{FF2B5EF4-FFF2-40B4-BE49-F238E27FC236}">
-                <a16:creationId xmlns:a16="http://schemas.microsoft.com/office/drawing/2014/main" id="{7BF95E35-4D9C-7F59-F308-C61FF9CD1B58}"/>
-              </a:ext>
-            </a:extLst>
-          </p:cNvPr>
-          <p:cNvSpPr/>
-          <p:nvPr/>
-        </p:nvSpPr>
-        <p:spPr>
-          <a:xfrm>
-            <a:off x="0" y="0"/>
-            <a:ext cx="374469" cy="6858000"/>
-          </a:xfrm>
-          <a:prstGeom prst="rect">
-            <a:avLst/>
-          </a:prstGeom>
-        </p:spPr>
-        <p:style>
-          <a:lnRef idx="2">
-            <a:schemeClr val="accent2">
-              <a:shade val="50000"/>
-            </a:schemeClr>
-          </a:lnRef>
-          <a:fillRef idx="1">
-            <a:schemeClr val="accent2"/>
-          </a:fillRef>
-          <a:effectRef idx="0">
-            <a:schemeClr val="accent2"/>
-          </a:effectRef>
-          <a:fontRef idx="minor">
-            <a:schemeClr val="lt1"/>
-          </a:fontRef>
-        </p:style>
-        <p:txBody>
-          <a:bodyPr rtlCol="0" anchor="ctr"/>
-          <a:lstStyle/>
-          <a:p>
-            <a:pPr algn="ctr"/>
-            <a:endParaRPr lang="es-ES"/>
-          </a:p>
-        </p:txBody>
-      </p:sp>
-      <p:sp>
-        <p:nvSpPr>
-          <p:cNvPr id="6" name="Rectangle 143">
-            <a:extLst>
-              <a:ext uri="{FF2B5EF4-FFF2-40B4-BE49-F238E27FC236}">
-                <a16:creationId xmlns:a16="http://schemas.microsoft.com/office/drawing/2014/main" id="{C9A975F5-C7DC-9274-20CA-B5939A2A86BD}"/>
-              </a:ext>
-            </a:extLst>
-          </p:cNvPr>
-          <p:cNvSpPr>
-            <a:spLocks noChangeArrowheads="1"/>
-          </p:cNvSpPr>
-          <p:nvPr/>
-        </p:nvSpPr>
-        <p:spPr bwMode="auto">
-          <a:xfrm>
-            <a:off x="448342" y="6549317"/>
-            <a:ext cx="5730175" cy="261610"/>
-          </a:xfrm>
-          <a:prstGeom prst="rect">
-            <a:avLst/>
-          </a:prstGeom>
-          <a:noFill/>
-          <a:ln>
-            <a:noFill/>
-          </a:ln>
-          <a:effectLst/>
-          <a:extLst>
-            <a:ext uri="{909E8E84-426E-40DD-AFC4-6F175D3DCCD1}">
-              <a14:hiddenFill xmlns:a14="http://schemas.microsoft.com/office/drawing/2010/main">
-                <a:solidFill>
-                  <a:schemeClr val="accent1"/>
-                </a:solidFill>
-              </a14:hiddenFill>
-            </a:ext>
-            <a:ext uri="{91240B29-F687-4F45-9708-019B960494DF}">
-              <a14:hiddenLine xmlns:a14="http://schemas.microsoft.com/office/drawing/2010/main" w="9525">
-                <a:solidFill>
-                  <a:schemeClr val="tx1"/>
-                </a:solidFill>
-                <a:miter lim="800000"/>
-                <a:headEnd/>
-                <a:tailEnd/>
-              </a14:hiddenLine>
-            </a:ext>
-            <a:ext uri="{AF507438-7753-43E0-B8FC-AC1667EBCBE1}">
-              <a14:hiddenEffects xmlns:a14="http://schemas.microsoft.com/office/drawing/2010/main">
-                <a:effectLst>
-                  <a:outerShdw dist="35921" dir="2700000" algn="ctr" rotWithShape="0">
-                    <a:schemeClr val="bg2"/>
-                  </a:outerShdw>
-                </a:effectLst>
-              </a14:hiddenEffects>
-            </a:ext>
-          </a:extLst>
-        </p:spPr>
-        <p:txBody>
-          <a:bodyPr vert="horz" wrap="square" lIns="91440" tIns="45720" rIns="91440" bIns="45720" numCol="1" anchor="ctr" anchorCtr="0" compatLnSpc="1">
-            <a:prstTxWarp prst="textNoShape">
-              <a:avLst/>
-            </a:prstTxWarp>
-            <a:spAutoFit/>
-          </a:bodyPr>
-          <a:lstStyle/>
-          <a:p>
-            <a:pPr marL="0" marR="0" lvl="0" indent="0" algn="l" defTabSz="914400" rtl="0" eaLnBrk="0" fontAlgn="base" latinLnBrk="0" hangingPunct="0">
-              <a:lnSpc>
-                <a:spcPct val="100000"/>
-              </a:lnSpc>
-              <a:spcBef>
-                <a:spcPct val="0"/>
-              </a:spcBef>
-              <a:spcAft>
-                <a:spcPct val="0"/>
-              </a:spcAft>
-              <a:buClrTx/>
-              <a:buSzTx/>
-              <a:buFontTx/>
-              <a:buNone/>
-              <a:tabLst/>
-            </a:pPr>
-            <a:r>
-              <a:rPr kumimoji="0" lang="en-US" altLang="es-ES" sz="1100" b="0" i="0" u="none" strike="noStrike" cap="none" normalizeH="0" baseline="0" dirty="0">
-                <a:ln>
-                  <a:noFill/>
-                </a:ln>
-                <a:solidFill>
-                  <a:srgbClr val="F4A200"/>
-                </a:solidFill>
-                <a:effectLst/>
-                <a:latin typeface="Arial" panose="020B0604020202020204" pitchFamily="34" charset="0"/>
-                <a:ea typeface="Myriad Pro Light"/>
-                <a:cs typeface="Times New Roman" panose="02020603050405020304" pitchFamily="18" charset="0"/>
-              </a:rPr>
-              <a:t>Master in Quantitative Economic Analysis </a:t>
-            </a:r>
-            <a:r>
-              <a:rPr kumimoji="0" lang="en-US" altLang="es-ES" sz="1100" b="0" i="0" u="none" strike="noStrike" cap="none" normalizeH="0" baseline="0" dirty="0" err="1">
-                <a:ln>
-                  <a:noFill/>
-                </a:ln>
-                <a:solidFill>
-                  <a:srgbClr val="F4A200"/>
-                </a:solidFill>
-                <a:effectLst/>
-                <a:latin typeface="Arial" panose="020B0604020202020204" pitchFamily="34" charset="0"/>
-                <a:ea typeface="Myriad Pro Light"/>
-                <a:cs typeface="Times New Roman" panose="02020603050405020304" pitchFamily="18" charset="0"/>
-              </a:rPr>
-              <a:t>MQuEA</a:t>
-            </a:r>
-            <a:endParaRPr kumimoji="0" lang="es-ES" altLang="es-ES" sz="300" b="0" i="0" u="none" strike="noStrike" cap="none" normalizeH="0" baseline="0" dirty="0">
-              <a:ln>
-                <a:noFill/>
-              </a:ln>
-              <a:solidFill>
-                <a:schemeClr val="tx1"/>
-              </a:solidFill>
-              <a:effectLst/>
-              <a:latin typeface="Arial" panose="020B0604020202020204" pitchFamily="34" charset="0"/>
-            </a:endParaRPr>
-          </a:p>
-        </p:txBody>
-      </p:sp>
-      <p:sp>
-        <p:nvSpPr>
-          <p:cNvPr id="7" name="Rectangle 143">
-            <a:extLst>
-              <a:ext uri="{FF2B5EF4-FFF2-40B4-BE49-F238E27FC236}">
-                <a16:creationId xmlns:a16="http://schemas.microsoft.com/office/drawing/2014/main" id="{2BE2E3EB-749E-E562-030D-C3F46E714169}"/>
-              </a:ext>
-            </a:extLst>
-          </p:cNvPr>
-          <p:cNvSpPr>
-            <a:spLocks noChangeArrowheads="1"/>
-          </p:cNvSpPr>
-          <p:nvPr/>
-        </p:nvSpPr>
-        <p:spPr bwMode="auto">
-          <a:xfrm>
-            <a:off x="6186394" y="6559955"/>
-            <a:ext cx="5730175" cy="261610"/>
-          </a:xfrm>
-          <a:prstGeom prst="rect">
-            <a:avLst/>
-          </a:prstGeom>
-          <a:noFill/>
-          <a:ln>
-            <a:noFill/>
-          </a:ln>
-          <a:effectLst/>
-          <a:extLst>
-            <a:ext uri="{909E8E84-426E-40DD-AFC4-6F175D3DCCD1}">
-              <a14:hiddenFill xmlns:a14="http://schemas.microsoft.com/office/drawing/2010/main">
-                <a:solidFill>
-                  <a:schemeClr val="accent1"/>
-                </a:solidFill>
-              </a14:hiddenFill>
-            </a:ext>
-            <a:ext uri="{91240B29-F687-4F45-9708-019B960494DF}">
-              <a14:hiddenLine xmlns:a14="http://schemas.microsoft.com/office/drawing/2010/main" w="9525">
-                <a:solidFill>
-                  <a:schemeClr val="tx1"/>
-                </a:solidFill>
-                <a:miter lim="800000"/>
-                <a:headEnd/>
-                <a:tailEnd/>
-              </a14:hiddenLine>
-            </a:ext>
-            <a:ext uri="{AF507438-7753-43E0-B8FC-AC1667EBCBE1}">
-              <a14:hiddenEffects xmlns:a14="http://schemas.microsoft.com/office/drawing/2010/main">
-                <a:effectLst>
-                  <a:outerShdw dist="35921" dir="2700000" algn="ctr" rotWithShape="0">
-                    <a:schemeClr val="bg2"/>
-                  </a:outerShdw>
-                </a:effectLst>
-              </a14:hiddenEffects>
-            </a:ext>
-          </a:extLst>
-        </p:spPr>
-        <p:txBody>
-          <a:bodyPr vert="horz" wrap="square" lIns="91440" tIns="45720" rIns="91440" bIns="45720" numCol="1" anchor="ctr" anchorCtr="0" compatLnSpc="1">
-            <a:prstTxWarp prst="textNoShape">
-              <a:avLst/>
-            </a:prstTxWarp>
-            <a:spAutoFit/>
-          </a:bodyPr>
-          <a:lstStyle/>
-          <a:p>
-            <a:pPr marL="0" marR="0" lvl="0" indent="0" algn="r" defTabSz="914400" rtl="0" eaLnBrk="0" fontAlgn="base" latinLnBrk="0" hangingPunct="0">
-              <a:lnSpc>
-                <a:spcPct val="100000"/>
-              </a:lnSpc>
-              <a:spcBef>
-                <a:spcPct val="0"/>
-              </a:spcBef>
-              <a:spcAft>
-                <a:spcPct val="0"/>
-              </a:spcAft>
-              <a:buClrTx/>
-              <a:buSzTx/>
-              <a:buFontTx/>
-              <a:buNone/>
-              <a:tabLst/>
-            </a:pPr>
-            <a:r>
-              <a:rPr kumimoji="0" lang="en-US" altLang="es-ES" sz="1100" b="0" i="0" u="none" strike="noStrike" cap="none" normalizeH="0" baseline="0" dirty="0">
-                <a:ln>
-                  <a:noFill/>
-                </a:ln>
-                <a:solidFill>
-                  <a:srgbClr val="F4A200"/>
-                </a:solidFill>
-                <a:effectLst/>
-                <a:latin typeface="Arial" panose="020B0604020202020204" pitchFamily="34" charset="0"/>
-                <a:ea typeface="Myriad Pro Light"/>
-                <a:cs typeface="Times New Roman" panose="02020603050405020304" pitchFamily="18" charset="0"/>
-              </a:rPr>
-              <a:t>Universidad </a:t>
-            </a:r>
-            <a:r>
-              <a:rPr kumimoji="0" lang="en-US" altLang="es-ES" sz="1100" b="0" i="0" u="none" strike="noStrike" cap="none" normalizeH="0" baseline="0" dirty="0" err="1">
-                <a:ln>
-                  <a:noFill/>
-                </a:ln>
-                <a:solidFill>
-                  <a:srgbClr val="F4A200"/>
-                </a:solidFill>
-                <a:effectLst/>
-                <a:latin typeface="Arial" panose="020B0604020202020204" pitchFamily="34" charset="0"/>
-                <a:ea typeface="Myriad Pro Light"/>
-                <a:cs typeface="Times New Roman" panose="02020603050405020304" pitchFamily="18" charset="0"/>
-              </a:rPr>
-              <a:t>Aut</a:t>
-            </a:r>
-            <a:r>
-              <a:rPr lang="en-US" altLang="es-ES" sz="1100" dirty="0" err="1">
-                <a:solidFill>
-                  <a:srgbClr val="F4A200"/>
-                </a:solidFill>
-                <a:latin typeface="Arial" panose="020B0604020202020204" pitchFamily="34" charset="0"/>
-                <a:ea typeface="Myriad Pro Light"/>
-                <a:cs typeface="Times New Roman" panose="02020603050405020304" pitchFamily="18" charset="0"/>
-              </a:rPr>
-              <a:t>ó</a:t>
-            </a:r>
-            <a:r>
-              <a:rPr kumimoji="0" lang="en-US" altLang="es-ES" sz="1100" b="0" i="0" u="none" strike="noStrike" cap="none" normalizeH="0" baseline="0" dirty="0" err="1">
-                <a:ln>
-                  <a:noFill/>
-                </a:ln>
-                <a:solidFill>
-                  <a:srgbClr val="F4A200"/>
-                </a:solidFill>
-                <a:effectLst/>
-                <a:latin typeface="Arial" panose="020B0604020202020204" pitchFamily="34" charset="0"/>
-                <a:ea typeface="Myriad Pro Light"/>
-                <a:cs typeface="Times New Roman" panose="02020603050405020304" pitchFamily="18" charset="0"/>
-              </a:rPr>
-              <a:t>noma</a:t>
-            </a:r>
-            <a:r>
-              <a:rPr kumimoji="0" lang="en-US" altLang="es-ES" sz="1100" b="0" i="0" u="none" strike="noStrike" cap="none" normalizeH="0" baseline="0" dirty="0">
-                <a:ln>
-                  <a:noFill/>
-                </a:ln>
-                <a:solidFill>
-                  <a:srgbClr val="F4A200"/>
-                </a:solidFill>
-                <a:effectLst/>
-                <a:latin typeface="Arial" panose="020B0604020202020204" pitchFamily="34" charset="0"/>
-                <a:ea typeface="Myriad Pro Light"/>
-                <a:cs typeface="Times New Roman" panose="02020603050405020304" pitchFamily="18" charset="0"/>
-              </a:rPr>
-              <a:t> de Madrid</a:t>
-            </a:r>
-            <a:endParaRPr kumimoji="0" lang="es-ES" altLang="es-ES" sz="300" b="0" i="0" u="none" strike="noStrike" cap="none" normalizeH="0" baseline="0" dirty="0">
-              <a:ln>
-                <a:noFill/>
-              </a:ln>
-              <a:solidFill>
-                <a:schemeClr val="tx1"/>
-              </a:solidFill>
-              <a:effectLst/>
-              <a:latin typeface="Arial" panose="020B0604020202020204" pitchFamily="34" charset="0"/>
-            </a:endParaRPr>
-          </a:p>
-        </p:txBody>
-      </p:sp>
-      <mc:AlternateContent xmlns:mc="http://schemas.openxmlformats.org/markup-compatibility/2006">
-        <mc:Choice xmlns:a14="http://schemas.microsoft.com/office/drawing/2010/main" Requires="a14">
-          <p:sp>
-            <p:nvSpPr>
-              <p:cNvPr id="3" name="TextBox 2">
-                <a:extLst>
-                  <a:ext uri="{FF2B5EF4-FFF2-40B4-BE49-F238E27FC236}">
-                    <a16:creationId xmlns:a16="http://schemas.microsoft.com/office/drawing/2014/main" id="{07C8DDDE-8C83-1AC8-8FA2-895D71DAD748}"/>
-                  </a:ext>
-                </a:extLst>
-              </p:cNvPr>
-              <p:cNvSpPr txBox="1"/>
-              <p:nvPr/>
-            </p:nvSpPr>
-            <p:spPr>
-              <a:xfrm>
-                <a:off x="927557" y="1920898"/>
-                <a:ext cx="10610987" cy="4258345"/>
-              </a:xfrm>
-              <a:prstGeom prst="rect">
-                <a:avLst/>
-              </a:prstGeom>
-              <a:noFill/>
-            </p:spPr>
-            <p:txBody>
-              <a:bodyPr wrap="square" rtlCol="0">
-                <a:spAutoFit/>
-              </a:bodyPr>
-              <a:lstStyle/>
-              <a:p>
-                <a:pPr marL="285750" indent="-285750">
-                  <a:lnSpc>
-                    <a:spcPct val="150000"/>
-                  </a:lnSpc>
-                  <a:buFont typeface="Wingdings" panose="05000000000000000000" pitchFamily="2" charset="2"/>
-                  <a:buChar char="§"/>
-                </a:pPr>
-                <a:r>
-                  <a:rPr lang="en-US" sz="2000" dirty="0">
-                    <a:latin typeface="+mj-lt"/>
-                  </a:rPr>
-                  <a:t>Each of the dimensions found by PCA is a </a:t>
-                </a:r>
-                <a:r>
-                  <a:rPr lang="en-US" sz="2000" b="1" dirty="0">
-                    <a:latin typeface="+mj-lt"/>
-                  </a:rPr>
-                  <a:t>linear combination of the </a:t>
-                </a:r>
-                <a:r>
-                  <a:rPr lang="en-US" sz="2000" b="1" i="1" dirty="0">
-                    <a:latin typeface="+mj-lt"/>
-                  </a:rPr>
-                  <a:t>p</a:t>
-                </a:r>
-                <a:r>
-                  <a:rPr lang="en-US" sz="2000" b="1" dirty="0">
-                    <a:latin typeface="+mj-lt"/>
-                  </a:rPr>
-                  <a:t> features</a:t>
-                </a:r>
-              </a:p>
-              <a:p>
-                <a:pPr marL="285750" indent="-285750">
-                  <a:lnSpc>
-                    <a:spcPct val="150000"/>
-                  </a:lnSpc>
-                  <a:buFont typeface="Wingdings" panose="05000000000000000000" pitchFamily="2" charset="2"/>
-                  <a:buChar char="§"/>
-                </a:pPr>
-                <a:r>
-                  <a:rPr lang="en-US" sz="2000" dirty="0">
-                    <a:latin typeface="+mj-lt"/>
-                  </a:rPr>
-                  <a:t>The first principal component is the normalized linear combination of the features:</a:t>
-                </a:r>
-              </a:p>
-              <a:p>
-                <a:pPr algn="ctr">
-                  <a:lnSpc>
-                    <a:spcPct val="150000"/>
-                  </a:lnSpc>
-                </a:pPr>
-                <a14:m>
-                  <m:oMath xmlns:m="http://schemas.openxmlformats.org/officeDocument/2006/math">
-                    <m:sSub>
-                      <m:sSubPr>
-                        <m:ctrlPr>
-                          <a:rPr lang="en-US" sz="2000" b="1" i="1" smtClean="0">
-                            <a:latin typeface="Cambria Math" panose="02040503050406030204" pitchFamily="18" charset="0"/>
-                          </a:rPr>
-                        </m:ctrlPr>
-                      </m:sSubPr>
-                      <m:e>
-                        <m:r>
-                          <a:rPr lang="es-ES" sz="2000" b="1" i="1" smtClean="0">
-                            <a:latin typeface="Cambria Math" panose="02040503050406030204" pitchFamily="18" charset="0"/>
-                          </a:rPr>
-                          <m:t>𝒛</m:t>
-                        </m:r>
-                      </m:e>
-                      <m:sub>
-                        <m:r>
-                          <a:rPr lang="es-ES" sz="2000" b="1" i="1" smtClean="0">
-                            <a:latin typeface="Cambria Math" panose="02040503050406030204" pitchFamily="18" charset="0"/>
-                          </a:rPr>
-                          <m:t>𝒊</m:t>
-                        </m:r>
-                        <m:r>
-                          <a:rPr lang="en-US" sz="2000" b="1" i="1" smtClean="0">
-                            <a:latin typeface="Cambria Math" panose="02040503050406030204" pitchFamily="18" charset="0"/>
-                          </a:rPr>
-                          <m:t>𝟏</m:t>
-                        </m:r>
-                      </m:sub>
-                    </m:sSub>
-                    <m:r>
-                      <a:rPr lang="en-US" sz="2000" b="1" i="1" smtClean="0">
-                        <a:latin typeface="Cambria Math" panose="02040503050406030204" pitchFamily="18" charset="0"/>
-                      </a:rPr>
-                      <m:t>=</m:t>
-                    </m:r>
-                    <m:sSub>
-                      <m:sSubPr>
-                        <m:ctrlPr>
-                          <a:rPr lang="en-US" sz="2000" b="1" i="1">
-                            <a:latin typeface="Cambria Math" panose="02040503050406030204" pitchFamily="18" charset="0"/>
-                          </a:rPr>
-                        </m:ctrlPr>
-                      </m:sSubPr>
-                      <m:e>
-                        <m:r>
-                          <a:rPr lang="en-US" sz="2000" b="1" i="1" smtClean="0">
-                            <a:latin typeface="Cambria Math" panose="02040503050406030204" pitchFamily="18" charset="0"/>
-                            <a:sym typeface="Symbol" panose="05050102010706020507" pitchFamily="18" charset="2"/>
-                          </a:rPr>
-                          <m:t></m:t>
-                        </m:r>
-                      </m:e>
-                      <m:sub>
-                        <m:r>
-                          <a:rPr lang="en-US" sz="2000" b="1" i="1" smtClean="0">
-                            <a:latin typeface="Cambria Math" panose="02040503050406030204" pitchFamily="18" charset="0"/>
-                          </a:rPr>
-                          <m:t>𝟏</m:t>
-                        </m:r>
-                        <m:r>
-                          <a:rPr lang="en-US" sz="2000" b="1" i="1">
-                            <a:latin typeface="Cambria Math" panose="02040503050406030204" pitchFamily="18" charset="0"/>
-                          </a:rPr>
-                          <m:t>𝟏</m:t>
-                        </m:r>
-                      </m:sub>
-                    </m:sSub>
-                  </m:oMath>
-                </a14:m>
-                <a:r>
-                  <a:rPr lang="en-US" sz="2000" b="1" dirty="0"/>
-                  <a:t> </a:t>
-                </a:r>
-                <a14:m>
-                  <m:oMath xmlns:m="http://schemas.openxmlformats.org/officeDocument/2006/math">
-                    <m:sSub>
-                      <m:sSubPr>
-                        <m:ctrlPr>
-                          <a:rPr lang="en-US" sz="2000" b="1" i="1" smtClean="0">
-                            <a:latin typeface="Cambria Math" panose="02040503050406030204" pitchFamily="18" charset="0"/>
-                          </a:rPr>
-                        </m:ctrlPr>
-                      </m:sSubPr>
-                      <m:e>
-                        <m:r>
-                          <a:rPr lang="es-ES" sz="2000" b="1" i="1" smtClean="0">
-                            <a:latin typeface="Cambria Math" panose="02040503050406030204" pitchFamily="18" charset="0"/>
-                          </a:rPr>
-                          <m:t>𝒙</m:t>
-                        </m:r>
-                      </m:e>
-                      <m:sub>
-                        <m:r>
-                          <a:rPr lang="es-ES" sz="2000" b="1" i="1" smtClean="0">
-                            <a:latin typeface="Cambria Math" panose="02040503050406030204" pitchFamily="18" charset="0"/>
-                          </a:rPr>
-                          <m:t>𝒊</m:t>
-                        </m:r>
-                        <m:r>
-                          <a:rPr lang="en-US" sz="2000" b="1" i="1">
-                            <a:latin typeface="Cambria Math" panose="02040503050406030204" pitchFamily="18" charset="0"/>
-                          </a:rPr>
-                          <m:t>𝟏</m:t>
-                        </m:r>
-                      </m:sub>
-                    </m:sSub>
-                  </m:oMath>
-                </a14:m>
-                <a:r>
-                  <a:rPr lang="en-US" sz="2000" b="1" dirty="0">
-                    <a:latin typeface="+mj-lt"/>
-                  </a:rPr>
-                  <a:t>+</a:t>
-                </a:r>
-                <a14:m>
-                  <m:oMath xmlns:m="http://schemas.openxmlformats.org/officeDocument/2006/math">
-                    <m:sSub>
-                      <m:sSubPr>
-                        <m:ctrlPr>
-                          <a:rPr lang="en-US" sz="2000" b="1" i="1">
-                            <a:latin typeface="Cambria Math" panose="02040503050406030204" pitchFamily="18" charset="0"/>
-                          </a:rPr>
-                        </m:ctrlPr>
-                      </m:sSubPr>
-                      <m:e>
-                        <m:r>
-                          <a:rPr lang="en-US" sz="2000" b="1" i="1">
-                            <a:latin typeface="Cambria Math" panose="02040503050406030204" pitchFamily="18" charset="0"/>
-                            <a:sym typeface="Symbol" panose="05050102010706020507" pitchFamily="18" charset="2"/>
-                          </a:rPr>
-                          <m:t></m:t>
-                        </m:r>
-                      </m:e>
-                      <m:sub>
-                        <m:r>
-                          <a:rPr lang="en-US" sz="2000" b="1" i="1" smtClean="0">
-                            <a:latin typeface="Cambria Math" panose="02040503050406030204" pitchFamily="18" charset="0"/>
-                            <a:sym typeface="Symbol" panose="05050102010706020507" pitchFamily="18" charset="2"/>
-                          </a:rPr>
-                          <m:t>𝟐</m:t>
-                        </m:r>
-                        <m:r>
-                          <a:rPr lang="en-US" sz="2000" b="1" i="1">
-                            <a:latin typeface="Cambria Math" panose="02040503050406030204" pitchFamily="18" charset="0"/>
-                          </a:rPr>
-                          <m:t>𝟏</m:t>
-                        </m:r>
-                      </m:sub>
-                    </m:sSub>
-                    <m:sSub>
-                      <m:sSubPr>
-                        <m:ctrlPr>
-                          <a:rPr lang="en-US" sz="2000" b="1" i="1">
-                            <a:latin typeface="Cambria Math" panose="02040503050406030204" pitchFamily="18" charset="0"/>
-                          </a:rPr>
-                        </m:ctrlPr>
-                      </m:sSubPr>
-                      <m:e>
-                        <m:r>
-                          <a:rPr lang="es-ES" sz="2000" b="1" i="1" smtClean="0">
-                            <a:latin typeface="Cambria Math" panose="02040503050406030204" pitchFamily="18" charset="0"/>
-                          </a:rPr>
-                          <m:t>𝒙</m:t>
-                        </m:r>
-                      </m:e>
-                      <m:sub>
-                        <m:r>
-                          <a:rPr lang="es-ES" sz="2000" b="1" i="1" smtClean="0">
-                            <a:latin typeface="Cambria Math" panose="02040503050406030204" pitchFamily="18" charset="0"/>
-                          </a:rPr>
-                          <m:t>𝒊</m:t>
-                        </m:r>
-                        <m:r>
-                          <a:rPr lang="en-US" sz="2000" b="1" i="1" smtClean="0">
-                            <a:latin typeface="Cambria Math" panose="02040503050406030204" pitchFamily="18" charset="0"/>
-                          </a:rPr>
-                          <m:t>𝟐</m:t>
-                        </m:r>
-                      </m:sub>
-                    </m:sSub>
-                  </m:oMath>
-                </a14:m>
-                <a:r>
-                  <a:rPr lang="en-US" sz="2000" b="1" dirty="0">
-                    <a:latin typeface="+mj-lt"/>
-                  </a:rPr>
-                  <a:t>+…</a:t>
-                </a:r>
-                <a:r>
-                  <a:rPr lang="en-US" sz="2000" b="1" dirty="0"/>
-                  <a:t> </a:t>
-                </a:r>
-                <a14:m>
-                  <m:oMath xmlns:m="http://schemas.openxmlformats.org/officeDocument/2006/math">
-                    <m:sSub>
-                      <m:sSubPr>
-                        <m:ctrlPr>
-                          <a:rPr lang="en-US" sz="2000" b="1" i="1">
-                            <a:latin typeface="Cambria Math" panose="02040503050406030204" pitchFamily="18" charset="0"/>
-                          </a:rPr>
-                        </m:ctrlPr>
-                      </m:sSubPr>
-                      <m:e>
-                        <m:r>
-                          <a:rPr lang="en-US" sz="2000" b="1" i="1" smtClean="0">
-                            <a:latin typeface="Cambria Math" panose="02040503050406030204" pitchFamily="18" charset="0"/>
-                          </a:rPr>
-                          <m:t>+</m:t>
-                        </m:r>
-                        <m:r>
-                          <a:rPr lang="en-US" sz="2000" b="1" i="1">
-                            <a:latin typeface="Cambria Math" panose="02040503050406030204" pitchFamily="18" charset="0"/>
-                            <a:sym typeface="Symbol" panose="05050102010706020507" pitchFamily="18" charset="2"/>
-                          </a:rPr>
-                          <m:t></m:t>
-                        </m:r>
-                      </m:e>
-                      <m:sub>
-                        <m:r>
-                          <a:rPr lang="en-US" sz="2000" b="1" i="1" smtClean="0">
-                            <a:latin typeface="Cambria Math" panose="02040503050406030204" pitchFamily="18" charset="0"/>
-                            <a:sym typeface="Symbol" panose="05050102010706020507" pitchFamily="18" charset="2"/>
-                          </a:rPr>
-                          <m:t>𝒑</m:t>
-                        </m:r>
-                        <m:r>
-                          <a:rPr lang="en-US" sz="2000" b="1" i="1">
-                            <a:latin typeface="Cambria Math" panose="02040503050406030204" pitchFamily="18" charset="0"/>
-                          </a:rPr>
-                          <m:t>𝟏</m:t>
-                        </m:r>
-                      </m:sub>
-                    </m:sSub>
-                    <m:sSub>
-                      <m:sSubPr>
-                        <m:ctrlPr>
-                          <a:rPr lang="en-US" sz="2000" b="1" i="1">
-                            <a:latin typeface="Cambria Math" panose="02040503050406030204" pitchFamily="18" charset="0"/>
-                          </a:rPr>
-                        </m:ctrlPr>
-                      </m:sSubPr>
-                      <m:e>
-                        <m:r>
-                          <a:rPr lang="es-ES" sz="2000" b="1" i="1" smtClean="0">
-                            <a:latin typeface="Cambria Math" panose="02040503050406030204" pitchFamily="18" charset="0"/>
-                          </a:rPr>
-                          <m:t>𝒙</m:t>
-                        </m:r>
-                      </m:e>
-                      <m:sub>
-                        <m:r>
-                          <a:rPr lang="es-ES" sz="2000" b="1" i="1" smtClean="0">
-                            <a:latin typeface="Cambria Math" panose="02040503050406030204" pitchFamily="18" charset="0"/>
-                          </a:rPr>
-                          <m:t>𝒊</m:t>
-                        </m:r>
-                        <m:r>
-                          <a:rPr lang="en-US" sz="2000" b="1" i="1" smtClean="0">
-                            <a:latin typeface="Cambria Math" panose="02040503050406030204" pitchFamily="18" charset="0"/>
-                          </a:rPr>
-                          <m:t>𝒑</m:t>
-                        </m:r>
-                      </m:sub>
-                    </m:sSub>
-                  </m:oMath>
-                </a14:m>
-                <a:endParaRPr lang="en-US" sz="2000" b="1" dirty="0">
-                  <a:latin typeface="+mj-lt"/>
-                </a:endParaRPr>
-              </a:p>
-              <a:p>
-                <a:pPr>
-                  <a:lnSpc>
-                    <a:spcPct val="150000"/>
-                  </a:lnSpc>
-                </a:pPr>
-                <a:r>
-                  <a:rPr lang="en-US" sz="2000" dirty="0">
-                    <a:latin typeface="+mj-lt"/>
-                  </a:rPr>
-                  <a:t>that has the largest variance. Normalize means that </a:t>
-                </a:r>
-                <a14:m>
-                  <m:oMath xmlns:m="http://schemas.openxmlformats.org/officeDocument/2006/math">
-                    <m:nary>
-                      <m:naryPr>
-                        <m:chr m:val="∑"/>
-                        <m:limLoc m:val="subSup"/>
-                        <m:ctrlPr>
-                          <a:rPr lang="en-US" sz="2000" i="1" smtClean="0">
-                            <a:latin typeface="Cambria Math" panose="02040503050406030204" pitchFamily="18" charset="0"/>
-                          </a:rPr>
-                        </m:ctrlPr>
-                      </m:naryPr>
-                      <m:sub>
-                        <m:r>
-                          <m:rPr>
-                            <m:brk m:alnAt="25"/>
-                          </m:rPr>
-                          <a:rPr lang="en-US" sz="2000" b="0" i="1" smtClean="0">
-                            <a:latin typeface="Cambria Math" panose="02040503050406030204" pitchFamily="18" charset="0"/>
-                          </a:rPr>
-                          <m:t>𝑗</m:t>
-                        </m:r>
-                        <m:r>
-                          <a:rPr lang="en-US" sz="2000" b="0" i="1" smtClean="0">
-                            <a:latin typeface="Cambria Math" panose="02040503050406030204" pitchFamily="18" charset="0"/>
-                          </a:rPr>
-                          <m:t>=1</m:t>
-                        </m:r>
-                      </m:sub>
-                      <m:sup>
-                        <m:r>
-                          <a:rPr lang="en-US" sz="2000" b="0" i="1" smtClean="0">
-                            <a:latin typeface="Cambria Math" panose="02040503050406030204" pitchFamily="18" charset="0"/>
-                          </a:rPr>
-                          <m:t>𝑝</m:t>
-                        </m:r>
-                      </m:sup>
-                      <m:e>
-                        <m:sSubSup>
-                          <m:sSubSupPr>
-                            <m:ctrlPr>
-                              <a:rPr lang="en-US" sz="2000" i="1" smtClean="0">
-                                <a:latin typeface="Cambria Math" panose="02040503050406030204" pitchFamily="18" charset="0"/>
-                              </a:rPr>
-                            </m:ctrlPr>
-                          </m:sSubSupPr>
-                          <m:e>
-                            <m:r>
-                              <a:rPr lang="en-US" sz="2000" i="1" smtClean="0">
-                                <a:latin typeface="Cambria Math" panose="02040503050406030204" pitchFamily="18" charset="0"/>
-                                <a:sym typeface="Symbol" panose="05050102010706020507" pitchFamily="18" charset="2"/>
-                              </a:rPr>
-                              <m:t></m:t>
-                            </m:r>
-                          </m:e>
-                          <m:sub>
-                            <m:r>
-                              <a:rPr lang="en-US" sz="2000" b="0" i="1" smtClean="0">
-                                <a:latin typeface="Cambria Math" panose="02040503050406030204" pitchFamily="18" charset="0"/>
-                              </a:rPr>
-                              <m:t>𝑗</m:t>
-                            </m:r>
-                            <m:r>
-                              <a:rPr lang="en-US" sz="2000" b="0" i="1" smtClean="0">
-                                <a:latin typeface="Cambria Math" panose="02040503050406030204" pitchFamily="18" charset="0"/>
-                              </a:rPr>
-                              <m:t>1</m:t>
-                            </m:r>
-                          </m:sub>
-                          <m:sup>
-                            <m:r>
-                              <a:rPr lang="en-US" sz="2000" b="0" i="1" smtClean="0">
-                                <a:latin typeface="Cambria Math" panose="02040503050406030204" pitchFamily="18" charset="0"/>
-                              </a:rPr>
-                              <m:t>2</m:t>
-                            </m:r>
-                          </m:sup>
-                        </m:sSubSup>
-                        <m:r>
-                          <a:rPr lang="en-US" sz="2000" b="0" i="1" smtClean="0">
-                            <a:latin typeface="Cambria Math" panose="02040503050406030204" pitchFamily="18" charset="0"/>
-                          </a:rPr>
-                          <m:t>=1</m:t>
-                        </m:r>
-                      </m:e>
-                    </m:nary>
-                  </m:oMath>
-                </a14:m>
-                <a:endParaRPr lang="en-US" sz="2000" dirty="0">
-                  <a:latin typeface="+mj-lt"/>
-                </a:endParaRPr>
-              </a:p>
-              <a:p>
-                <a:pPr marL="342900" indent="-342900">
-                  <a:lnSpc>
-                    <a:spcPct val="150000"/>
-                  </a:lnSpc>
-                  <a:buFont typeface="Wingdings" panose="05000000000000000000" pitchFamily="2" charset="2"/>
-                  <a:buChar char="§"/>
-                </a:pPr>
-                <a:r>
-                  <a:rPr lang="en-US" sz="2000" dirty="0">
-                    <a:latin typeface="+mj-lt"/>
-                  </a:rPr>
-                  <a:t>To find the first principal component, the following optimization problem is solved:</a:t>
-                </a:r>
-              </a:p>
-              <a:p>
-                <a:pPr>
-                  <a:lnSpc>
-                    <a:spcPct val="150000"/>
-                  </a:lnSpc>
-                </a:pPr>
-                <a14:m>
-                  <m:oMathPara xmlns:m="http://schemas.openxmlformats.org/officeDocument/2006/math">
-                    <m:oMathParaPr>
-                      <m:jc m:val="centerGroup"/>
-                    </m:oMathParaPr>
-                    <m:oMath xmlns:m="http://schemas.openxmlformats.org/officeDocument/2006/math">
-                      <m:func>
-                        <m:funcPr>
-                          <m:ctrlPr>
-                            <a:rPr lang="en-US" sz="2000" i="1" smtClean="0">
-                              <a:latin typeface="Cambria Math" panose="02040503050406030204" pitchFamily="18" charset="0"/>
-                            </a:rPr>
-                          </m:ctrlPr>
-                        </m:funcPr>
-                        <m:fName>
-                          <m:limLow>
-                            <m:limLowPr>
-                              <m:ctrlPr>
-                                <a:rPr lang="en-US" sz="2000" i="1" smtClean="0">
-                                  <a:latin typeface="Cambria Math" panose="02040503050406030204" pitchFamily="18" charset="0"/>
-                                </a:rPr>
-                              </m:ctrlPr>
-                            </m:limLowPr>
-                            <m:e>
-                              <m:r>
-                                <m:rPr>
-                                  <m:sty m:val="p"/>
-                                </m:rPr>
-                                <a:rPr lang="en-US" sz="2000" i="0" smtClean="0">
-                                  <a:latin typeface="Cambria Math" panose="02040503050406030204" pitchFamily="18" charset="0"/>
-                                </a:rPr>
-                                <m:t>max</m:t>
-                              </m:r>
-                            </m:e>
-                            <m:lim>
-                              <m:sSub>
-                                <m:sSubPr>
-                                  <m:ctrlPr>
-                                    <a:rPr lang="en-US" sz="2000" b="1" i="1">
-                                      <a:latin typeface="Cambria Math" panose="02040503050406030204" pitchFamily="18" charset="0"/>
-                                    </a:rPr>
-                                  </m:ctrlPr>
-                                </m:sSubPr>
-                                <m:e>
-                                  <m:r>
-                                    <a:rPr lang="en-US" sz="2000" b="1" i="1">
-                                      <a:latin typeface="Cambria Math" panose="02040503050406030204" pitchFamily="18" charset="0"/>
-                                      <a:sym typeface="Symbol" panose="05050102010706020507" pitchFamily="18" charset="2"/>
-                                    </a:rPr>
-                                    <m:t></m:t>
-                                  </m:r>
-                                </m:e>
-                                <m:sub>
-                                  <m:r>
-                                    <a:rPr lang="en-US" sz="2000" b="1" i="1">
-                                      <a:latin typeface="Cambria Math" panose="02040503050406030204" pitchFamily="18" charset="0"/>
-                                    </a:rPr>
-                                    <m:t>𝟏𝟏</m:t>
-                                  </m:r>
-                                </m:sub>
-                              </m:sSub>
-                              <m:r>
-                                <a:rPr lang="en-US" sz="2000" b="0" i="1" smtClean="0">
-                                  <a:latin typeface="Cambria Math" panose="02040503050406030204" pitchFamily="18" charset="0"/>
-                                </a:rPr>
-                                <m:t>,</m:t>
-                              </m:r>
-                              <m:r>
-                                <a:rPr lang="en-US" sz="2000" b="1" i="1" smtClean="0">
-                                  <a:latin typeface="Cambria Math" panose="02040503050406030204" pitchFamily="18" charset="0"/>
-                                </a:rPr>
-                                <m:t>…,</m:t>
-                              </m:r>
-                              <m:sSub>
-                                <m:sSubPr>
-                                  <m:ctrlPr>
-                                    <a:rPr lang="en-US" sz="2000" b="1" i="1">
-                                      <a:latin typeface="Cambria Math" panose="02040503050406030204" pitchFamily="18" charset="0"/>
-                                    </a:rPr>
-                                  </m:ctrlPr>
-                                </m:sSubPr>
-                                <m:e>
-                                  <m:r>
-                                    <a:rPr lang="en-US" sz="2000" b="1" i="1">
-                                      <a:latin typeface="Cambria Math" panose="02040503050406030204" pitchFamily="18" charset="0"/>
-                                      <a:sym typeface="Symbol" panose="05050102010706020507" pitchFamily="18" charset="2"/>
-                                    </a:rPr>
-                                    <m:t></m:t>
-                                  </m:r>
-                                </m:e>
-                                <m:sub>
-                                  <m:r>
-                                    <a:rPr lang="en-US" sz="2000" b="1" i="1" smtClean="0">
-                                      <a:latin typeface="Cambria Math" panose="02040503050406030204" pitchFamily="18" charset="0"/>
-                                      <a:sym typeface="Symbol" panose="05050102010706020507" pitchFamily="18" charset="2"/>
-                                    </a:rPr>
-                                    <m:t>𝒑</m:t>
-                                  </m:r>
-                                  <m:r>
-                                    <a:rPr lang="en-US" sz="2000" b="1" i="1">
-                                      <a:latin typeface="Cambria Math" panose="02040503050406030204" pitchFamily="18" charset="0"/>
-                                    </a:rPr>
-                                    <m:t>𝟏</m:t>
-                                  </m:r>
-                                </m:sub>
-                              </m:sSub>
-                            </m:lim>
-                          </m:limLow>
-                        </m:fName>
-                        <m:e>
-                          <m:d>
-                            <m:dPr>
-                              <m:begChr m:val="{"/>
-                              <m:endChr m:val="}"/>
-                              <m:ctrlPr>
-                                <a:rPr lang="en-US" sz="2000" i="1" smtClean="0">
-                                  <a:latin typeface="Cambria Math" panose="02040503050406030204" pitchFamily="18" charset="0"/>
-                                </a:rPr>
-                              </m:ctrlPr>
-                            </m:dPr>
-                            <m:e>
-                              <m:f>
-                                <m:fPr>
-                                  <m:ctrlPr>
-                                    <a:rPr lang="en-US" sz="2000" i="1" smtClean="0">
-                                      <a:latin typeface="Cambria Math" panose="02040503050406030204" pitchFamily="18" charset="0"/>
-                                    </a:rPr>
-                                  </m:ctrlPr>
-                                </m:fPr>
-                                <m:num>
-                                  <m:r>
-                                    <a:rPr lang="en-US" sz="2000" b="0" i="1" smtClean="0">
-                                      <a:latin typeface="Cambria Math" panose="02040503050406030204" pitchFamily="18" charset="0"/>
-                                    </a:rPr>
-                                    <m:t>1</m:t>
-                                  </m:r>
-                                </m:num>
-                                <m:den>
-                                  <m:r>
-                                    <a:rPr lang="en-US" sz="2000" b="0" i="1" smtClean="0">
-                                      <a:latin typeface="Cambria Math" panose="02040503050406030204" pitchFamily="18" charset="0"/>
-                                    </a:rPr>
-                                    <m:t>𝑛</m:t>
-                                  </m:r>
-                                </m:den>
-                              </m:f>
-                              <m:nary>
-                                <m:naryPr>
-                                  <m:chr m:val="∑"/>
-                                  <m:ctrlPr>
-                                    <a:rPr lang="en-US" sz="2000" i="1" smtClean="0">
-                                      <a:latin typeface="Cambria Math" panose="02040503050406030204" pitchFamily="18" charset="0"/>
-                                    </a:rPr>
-                                  </m:ctrlPr>
-                                </m:naryPr>
-                                <m:sub>
-                                  <m:r>
-                                    <m:rPr>
-                                      <m:brk m:alnAt="23"/>
-                                    </m:rPr>
-                                    <a:rPr lang="en-US" sz="2000" b="0" i="1" smtClean="0">
-                                      <a:latin typeface="Cambria Math" panose="02040503050406030204" pitchFamily="18" charset="0"/>
-                                    </a:rPr>
-                                    <m:t>𝑛</m:t>
-                                  </m:r>
-                                  <m:r>
-                                    <a:rPr lang="en-US" sz="2000" b="0" i="1" smtClean="0">
-                                      <a:latin typeface="Cambria Math" panose="02040503050406030204" pitchFamily="18" charset="0"/>
-                                    </a:rPr>
-                                    <m:t>=1</m:t>
-                                  </m:r>
-                                </m:sub>
-                                <m:sup>
-                                  <m:r>
-                                    <a:rPr lang="en-US" sz="2000" b="0" i="1" smtClean="0">
-                                      <a:latin typeface="Cambria Math" panose="02040503050406030204" pitchFamily="18" charset="0"/>
-                                    </a:rPr>
-                                    <m:t>𝑛</m:t>
-                                  </m:r>
-                                </m:sup>
-                                <m:e>
-                                  <m:sSup>
-                                    <m:sSupPr>
-                                      <m:ctrlPr>
-                                        <a:rPr lang="en-US" sz="2000" i="1" smtClean="0">
-                                          <a:latin typeface="Cambria Math" panose="02040503050406030204" pitchFamily="18" charset="0"/>
-                                        </a:rPr>
-                                      </m:ctrlPr>
-                                    </m:sSupPr>
-                                    <m:e>
-                                      <m:d>
-                                        <m:dPr>
-                                          <m:ctrlPr>
-                                            <a:rPr lang="en-US" sz="2000" i="1" smtClean="0">
-                                              <a:latin typeface="Cambria Math" panose="02040503050406030204" pitchFamily="18" charset="0"/>
-                                            </a:rPr>
-                                          </m:ctrlPr>
-                                        </m:dPr>
-                                        <m:e>
-                                          <m:nary>
-                                            <m:naryPr>
-                                              <m:chr m:val="∑"/>
-                                              <m:ctrlPr>
-                                                <a:rPr lang="en-US" sz="2000" i="1" smtClean="0">
-                                                  <a:latin typeface="Cambria Math" panose="02040503050406030204" pitchFamily="18" charset="0"/>
-                                                </a:rPr>
-                                              </m:ctrlPr>
-                                            </m:naryPr>
-                                            <m:sub>
-                                              <m:r>
-                                                <m:rPr>
-                                                  <m:brk m:alnAt="23"/>
-                                                </m:rPr>
-                                                <a:rPr lang="en-US" sz="2000" b="0" i="1" smtClean="0">
-                                                  <a:latin typeface="Cambria Math" panose="02040503050406030204" pitchFamily="18" charset="0"/>
-                                                </a:rPr>
-                                                <m:t>𝑗</m:t>
-                                              </m:r>
-                                              <m:r>
-                                                <a:rPr lang="en-US" sz="2000" b="0" i="1" smtClean="0">
-                                                  <a:latin typeface="Cambria Math" panose="02040503050406030204" pitchFamily="18" charset="0"/>
-                                                </a:rPr>
-                                                <m:t>=1</m:t>
-                                              </m:r>
-                                            </m:sub>
-                                            <m:sup>
-                                              <m:r>
-                                                <a:rPr lang="en-US" sz="2000" b="0" i="1" smtClean="0">
-                                                  <a:latin typeface="Cambria Math" panose="02040503050406030204" pitchFamily="18" charset="0"/>
-                                                </a:rPr>
-                                                <m:t>𝑝</m:t>
-                                              </m:r>
-                                            </m:sup>
-                                            <m:e>
-                                              <m:sSub>
-                                                <m:sSubPr>
-                                                  <m:ctrlPr>
-                                                    <a:rPr lang="en-US" sz="2000" b="1" i="1">
-                                                      <a:latin typeface="Cambria Math" panose="02040503050406030204" pitchFamily="18" charset="0"/>
-                                                    </a:rPr>
-                                                  </m:ctrlPr>
-                                                </m:sSubPr>
-                                                <m:e>
-                                                  <m:r>
-                                                    <a:rPr lang="en-US" sz="2000" b="1" i="1">
-                                                      <a:latin typeface="Cambria Math" panose="02040503050406030204" pitchFamily="18" charset="0"/>
-                                                      <a:sym typeface="Symbol" panose="05050102010706020507" pitchFamily="18" charset="2"/>
-                                                    </a:rPr>
-                                                    <m:t></m:t>
-                                                  </m:r>
-                                                </m:e>
-                                                <m:sub>
-                                                  <m:r>
-                                                    <a:rPr lang="en-US" sz="2000" b="1" i="1" smtClean="0">
-                                                      <a:latin typeface="Cambria Math" panose="02040503050406030204" pitchFamily="18" charset="0"/>
-                                                      <a:sym typeface="Symbol" panose="05050102010706020507" pitchFamily="18" charset="2"/>
-                                                    </a:rPr>
-                                                    <m:t>𝒋</m:t>
-                                                  </m:r>
-                                                  <m:r>
-                                                    <a:rPr lang="en-US" sz="2000" b="1" i="1">
-                                                      <a:latin typeface="Cambria Math" panose="02040503050406030204" pitchFamily="18" charset="0"/>
-                                                    </a:rPr>
-                                                    <m:t>𝟏</m:t>
-                                                  </m:r>
-                                                </m:sub>
-                                              </m:sSub>
-                                              <m:sSub>
-                                                <m:sSubPr>
-                                                  <m:ctrlPr>
-                                                    <a:rPr lang="en-US" sz="2000" b="1" i="1">
-                                                      <a:latin typeface="Cambria Math" panose="02040503050406030204" pitchFamily="18" charset="0"/>
-                                                    </a:rPr>
-                                                  </m:ctrlPr>
-                                                </m:sSubPr>
-                                                <m:e>
-                                                  <m:r>
-                                                    <a:rPr lang="en-US" sz="2000" b="1" i="1" smtClean="0">
-                                                      <a:latin typeface="Cambria Math" panose="02040503050406030204" pitchFamily="18" charset="0"/>
-                                                    </a:rPr>
-                                                    <m:t>𝒙</m:t>
-                                                  </m:r>
-                                                </m:e>
-                                                <m:sub>
-                                                  <m:r>
-                                                    <a:rPr lang="en-US" sz="2000" b="1" i="1" smtClean="0">
-                                                      <a:latin typeface="Cambria Math" panose="02040503050406030204" pitchFamily="18" charset="0"/>
-                                                      <a:sym typeface="Symbol" panose="05050102010706020507" pitchFamily="18" charset="2"/>
-                                                    </a:rPr>
-                                                    <m:t>𝒊𝒋</m:t>
-                                                  </m:r>
-                                                </m:sub>
-                                              </m:sSub>
-                                            </m:e>
-                                          </m:nary>
-                                        </m:e>
-                                      </m:d>
-                                    </m:e>
-                                    <m:sup>
-                                      <m:r>
-                                        <a:rPr lang="en-US" sz="2000" b="0" i="1" smtClean="0">
-                                          <a:latin typeface="Cambria Math" panose="02040503050406030204" pitchFamily="18" charset="0"/>
-                                        </a:rPr>
-                                        <m:t>2</m:t>
-                                      </m:r>
-                                    </m:sup>
-                                  </m:sSup>
-                                </m:e>
-                              </m:nary>
-                            </m:e>
-                          </m:d>
-                        </m:e>
-                      </m:func>
-                      <m:r>
-                        <a:rPr lang="en-US" sz="2000" b="0" i="1" smtClean="0">
-                          <a:latin typeface="Cambria Math" panose="02040503050406030204" pitchFamily="18" charset="0"/>
-                        </a:rPr>
-                        <m:t>𝑠𝑢𝑏𝑗𝑒𝑐𝑡</m:t>
-                      </m:r>
-                      <m:r>
-                        <a:rPr lang="en-US" sz="2000" b="0" i="1" smtClean="0">
-                          <a:latin typeface="Cambria Math" panose="02040503050406030204" pitchFamily="18" charset="0"/>
-                        </a:rPr>
-                        <m:t> </m:t>
-                      </m:r>
-                      <m:r>
-                        <a:rPr lang="en-US" sz="2000" b="0" i="1" smtClean="0">
-                          <a:latin typeface="Cambria Math" panose="02040503050406030204" pitchFamily="18" charset="0"/>
-                        </a:rPr>
-                        <m:t>𝑡𝑜</m:t>
-                      </m:r>
-                      <m:nary>
-                        <m:naryPr>
-                          <m:chr m:val="∑"/>
-                          <m:limLoc m:val="subSup"/>
-                          <m:ctrlPr>
-                            <a:rPr lang="en-US" sz="2000" i="1">
-                              <a:latin typeface="Cambria Math" panose="02040503050406030204" pitchFamily="18" charset="0"/>
-                            </a:rPr>
-                          </m:ctrlPr>
-                        </m:naryPr>
-                        <m:sub>
-                          <m:r>
-                            <m:rPr>
-                              <m:brk m:alnAt="25"/>
-                            </m:rPr>
-                            <a:rPr lang="en-US" sz="2000" i="1">
-                              <a:latin typeface="Cambria Math" panose="02040503050406030204" pitchFamily="18" charset="0"/>
-                            </a:rPr>
-                            <m:t>𝑗</m:t>
-                          </m:r>
-                          <m:r>
-                            <a:rPr lang="en-US" sz="2000" i="1">
-                              <a:latin typeface="Cambria Math" panose="02040503050406030204" pitchFamily="18" charset="0"/>
-                            </a:rPr>
-                            <m:t>=1</m:t>
-                          </m:r>
-                        </m:sub>
-                        <m:sup>
-                          <m:r>
-                            <a:rPr lang="en-US" sz="2000" i="1">
-                              <a:latin typeface="Cambria Math" panose="02040503050406030204" pitchFamily="18" charset="0"/>
-                            </a:rPr>
-                            <m:t>𝑝</m:t>
-                          </m:r>
-                        </m:sup>
-                        <m:e>
-                          <m:sSubSup>
-                            <m:sSubSupPr>
-                              <m:ctrlPr>
-                                <a:rPr lang="en-US" sz="2000" i="1">
-                                  <a:latin typeface="Cambria Math" panose="02040503050406030204" pitchFamily="18" charset="0"/>
-                                </a:rPr>
-                              </m:ctrlPr>
-                            </m:sSubSupPr>
-                            <m:e>
-                              <m:r>
-                                <a:rPr lang="en-US" sz="2000" i="1">
-                                  <a:latin typeface="Cambria Math" panose="02040503050406030204" pitchFamily="18" charset="0"/>
-                                  <a:sym typeface="Symbol" panose="05050102010706020507" pitchFamily="18" charset="2"/>
-                                </a:rPr>
-                                <m:t></m:t>
-                              </m:r>
-                            </m:e>
-                            <m:sub>
-                              <m:r>
-                                <a:rPr lang="en-US" sz="2000" i="1">
-                                  <a:latin typeface="Cambria Math" panose="02040503050406030204" pitchFamily="18" charset="0"/>
-                                </a:rPr>
-                                <m:t>𝑗</m:t>
-                              </m:r>
-                              <m:r>
-                                <a:rPr lang="en-US" sz="2000" i="1">
-                                  <a:latin typeface="Cambria Math" panose="02040503050406030204" pitchFamily="18" charset="0"/>
-                                </a:rPr>
-                                <m:t>1</m:t>
-                              </m:r>
-                            </m:sub>
-                            <m:sup>
-                              <m:r>
-                                <a:rPr lang="en-US" sz="2000" i="1">
-                                  <a:latin typeface="Cambria Math" panose="02040503050406030204" pitchFamily="18" charset="0"/>
-                                </a:rPr>
-                                <m:t>2</m:t>
-                              </m:r>
-                            </m:sup>
-                          </m:sSubSup>
-                          <m:r>
-                            <a:rPr lang="en-US" sz="2000" i="1">
-                              <a:latin typeface="Cambria Math" panose="02040503050406030204" pitchFamily="18" charset="0"/>
-                            </a:rPr>
-                            <m:t>=1</m:t>
-                          </m:r>
-                        </m:e>
-                      </m:nary>
-                    </m:oMath>
-                  </m:oMathPara>
-                </a14:m>
-                <a:endParaRPr lang="en-US" sz="2000" dirty="0">
-                  <a:latin typeface="+mj-lt"/>
-                </a:endParaRPr>
-              </a:p>
-            </p:txBody>
-          </p:sp>
-        </mc:Choice>
-        <mc:Fallback>
-          <p:sp>
-            <p:nvSpPr>
-              <p:cNvPr id="3" name="TextBox 2">
-                <a:extLst>
-                  <a:ext uri="{FF2B5EF4-FFF2-40B4-BE49-F238E27FC236}">
-                    <a16:creationId xmlns:a16="http://schemas.microsoft.com/office/drawing/2014/main" id="{07C8DDDE-8C83-1AC8-8FA2-895D71DAD748}"/>
-                  </a:ext>
-                </a:extLst>
-              </p:cNvPr>
-              <p:cNvSpPr txBox="1">
-                <a:spLocks noRot="1" noChangeAspect="1" noMove="1" noResize="1" noEditPoints="1" noAdjustHandles="1" noChangeArrowheads="1" noChangeShapeType="1" noTextEdit="1"/>
-              </p:cNvSpPr>
-              <p:nvPr/>
-            </p:nvSpPr>
-            <p:spPr>
-              <a:xfrm>
-                <a:off x="927557" y="1920898"/>
-                <a:ext cx="10610987" cy="4258345"/>
-              </a:xfrm>
-              <a:prstGeom prst="rect">
-                <a:avLst/>
-              </a:prstGeom>
-              <a:blipFill>
-                <a:blip r:embed="rId2"/>
-                <a:stretch>
-                  <a:fillRect l="-574"/>
-                </a:stretch>
-              </a:blipFill>
-            </p:spPr>
-            <p:txBody>
-              <a:bodyPr/>
-              <a:lstStyle/>
-              <a:p>
-                <a:r>
-                  <a:rPr lang="en-US">
-                    <a:noFill/>
-                  </a:rPr>
-                  <a:t> </a:t>
-                </a:r>
-              </a:p>
-            </p:txBody>
-          </p:sp>
-        </mc:Fallback>
-      </mc:AlternateContent>
-      <p:cxnSp>
-        <p:nvCxnSpPr>
-          <p:cNvPr id="8" name="Straight Arrow Connector 7">
-            <a:extLst>
-              <a:ext uri="{FF2B5EF4-FFF2-40B4-BE49-F238E27FC236}">
-                <a16:creationId xmlns:a16="http://schemas.microsoft.com/office/drawing/2014/main" id="{E78D6BB9-A238-FD33-A925-FB07E58A7116}"/>
-              </a:ext>
-            </a:extLst>
-          </p:cNvPr>
-          <p:cNvCxnSpPr/>
-          <p:nvPr/>
-        </p:nvCxnSpPr>
-        <p:spPr>
-          <a:xfrm>
-            <a:off x="2341916" y="4808820"/>
-            <a:ext cx="1526193" cy="223666"/>
-          </a:xfrm>
-          <a:prstGeom prst="straightConnector1">
-            <a:avLst/>
-          </a:prstGeom>
-          <a:ln>
-            <a:solidFill>
-              <a:srgbClr val="FF0000"/>
-            </a:solidFill>
-            <a:tailEnd type="triangle"/>
-          </a:ln>
-        </p:spPr>
-        <p:style>
-          <a:lnRef idx="1">
-            <a:schemeClr val="accent1"/>
-          </a:lnRef>
-          <a:fillRef idx="0">
-            <a:schemeClr val="accent1"/>
-          </a:fillRef>
-          <a:effectRef idx="0">
-            <a:schemeClr val="accent1"/>
-          </a:effectRef>
-          <a:fontRef idx="minor">
-            <a:schemeClr val="tx1"/>
-          </a:fontRef>
-        </p:style>
-      </p:cxnSp>
-      <p:sp>
-        <p:nvSpPr>
-          <p:cNvPr id="9" name="TextBox 8">
-            <a:extLst>
-              <a:ext uri="{FF2B5EF4-FFF2-40B4-BE49-F238E27FC236}">
-                <a16:creationId xmlns:a16="http://schemas.microsoft.com/office/drawing/2014/main" id="{AED52BA1-913E-8452-C64A-2852B1BC2DA8}"/>
-              </a:ext>
-            </a:extLst>
-          </p:cNvPr>
-          <p:cNvSpPr txBox="1"/>
-          <p:nvPr/>
-        </p:nvSpPr>
-        <p:spPr>
-          <a:xfrm>
-            <a:off x="653456" y="4486477"/>
-            <a:ext cx="1576627" cy="523220"/>
-          </a:xfrm>
-          <a:prstGeom prst="rect">
-            <a:avLst/>
-          </a:prstGeom>
-          <a:noFill/>
-        </p:spPr>
-        <p:txBody>
-          <a:bodyPr wrap="square" rtlCol="0">
-            <a:spAutoFit/>
-          </a:bodyPr>
-          <a:lstStyle/>
-          <a:p>
-            <a:pPr algn="ctr"/>
-            <a:r>
-              <a:rPr lang="es-ES" sz="1400" dirty="0" err="1">
-                <a:solidFill>
-                  <a:srgbClr val="FF0000"/>
-                </a:solidFill>
-              </a:rPr>
-              <a:t>sample</a:t>
-            </a:r>
-            <a:r>
-              <a:rPr lang="es-ES" sz="1400" dirty="0">
-                <a:solidFill>
-                  <a:srgbClr val="FF0000"/>
-                </a:solidFill>
-              </a:rPr>
-              <a:t> </a:t>
-            </a:r>
-            <a:r>
-              <a:rPr lang="es-ES" sz="1400" dirty="0" err="1">
-                <a:solidFill>
-                  <a:srgbClr val="FF0000"/>
-                </a:solidFill>
-              </a:rPr>
-              <a:t>variance</a:t>
-            </a:r>
-            <a:r>
-              <a:rPr lang="es-ES" sz="1400" dirty="0">
-                <a:solidFill>
-                  <a:srgbClr val="FF0000"/>
-                </a:solidFill>
-              </a:rPr>
-              <a:t> </a:t>
-            </a:r>
-            <a:r>
-              <a:rPr lang="es-ES" sz="1400" dirty="0" err="1">
-                <a:solidFill>
-                  <a:srgbClr val="FF0000"/>
-                </a:solidFill>
-              </a:rPr>
-              <a:t>of</a:t>
-            </a:r>
-            <a:r>
-              <a:rPr lang="es-ES" sz="1400" dirty="0">
-                <a:solidFill>
-                  <a:srgbClr val="FF0000"/>
-                </a:solidFill>
-              </a:rPr>
-              <a:t> </a:t>
-            </a:r>
-            <a:r>
-              <a:rPr lang="es-ES" sz="1400" dirty="0" err="1">
-                <a:solidFill>
-                  <a:srgbClr val="FF0000"/>
-                </a:solidFill>
-              </a:rPr>
-              <a:t>the</a:t>
-            </a:r>
-            <a:r>
-              <a:rPr lang="es-ES" sz="1400" dirty="0">
-                <a:solidFill>
-                  <a:srgbClr val="FF0000"/>
-                </a:solidFill>
-              </a:rPr>
-              <a:t> n </a:t>
-            </a:r>
-            <a:r>
-              <a:rPr lang="es-ES" sz="1400" dirty="0" err="1">
-                <a:solidFill>
-                  <a:srgbClr val="FF0000"/>
-                </a:solidFill>
-              </a:rPr>
-              <a:t>values</a:t>
-            </a:r>
-            <a:r>
-              <a:rPr lang="es-ES" sz="1400" dirty="0">
-                <a:solidFill>
-                  <a:srgbClr val="FF0000"/>
-                </a:solidFill>
-              </a:rPr>
-              <a:t> </a:t>
-            </a:r>
-            <a:r>
-              <a:rPr lang="es-ES" sz="1400" dirty="0" err="1">
-                <a:solidFill>
-                  <a:srgbClr val="FF0000"/>
-                </a:solidFill>
-              </a:rPr>
-              <a:t>of</a:t>
-            </a:r>
-            <a:r>
-              <a:rPr lang="es-ES" sz="1400" dirty="0">
-                <a:solidFill>
-                  <a:srgbClr val="FF0000"/>
-                </a:solidFill>
-              </a:rPr>
-              <a:t> zi1</a:t>
-            </a:r>
-            <a:endParaRPr lang="en-US" sz="1400" dirty="0">
-              <a:solidFill>
-                <a:srgbClr val="FF0000"/>
-              </a:solidFill>
-            </a:endParaRPr>
-          </a:p>
-        </p:txBody>
-      </p:sp>
-    </p:spTree>
-    <p:extLst>
-      <p:ext uri="{BB962C8B-B14F-4D97-AF65-F5344CB8AC3E}">
-        <p14:creationId xmlns:p14="http://schemas.microsoft.com/office/powerpoint/2010/main" val="144432870"/>
-      </p:ext>
-    </p:extLst>
-  </p:cSld>
-  <p:clrMapOvr>
-    <a:masterClrMapping/>
-  </p:clrMapOvr>
-</p:sld>
-</file>
-
-<file path=ppt/slides/slide12.xml><?xml version="1.0" encoding="utf-8"?>
-<p:sld xmlns:a="http://schemas.openxmlformats.org/drawingml/2006/main" xmlns:r="http://schemas.openxmlformats.org/officeDocument/2006/relationships" xmlns:p="http://schemas.openxmlformats.org/presentationml/2006/main">
-  <p:cSld>
-    <p:spTree>
-      <p:nvGrpSpPr>
-        <p:cNvPr id="1" name=""/>
-        <p:cNvGrpSpPr/>
-        <p:nvPr/>
-      </p:nvGrpSpPr>
-      <p:grpSpPr>
-        <a:xfrm>
-          <a:off x="0" y="0"/>
-          <a:ext cx="0" cy="0"/>
-          <a:chOff x="0" y="0"/>
-          <a:chExt cx="0" cy="0"/>
-        </a:xfrm>
-      </p:grpSpPr>
-      <p:sp>
-        <p:nvSpPr>
-          <p:cNvPr id="2" name="Title 1">
-            <a:extLst>
-              <a:ext uri="{FF2B5EF4-FFF2-40B4-BE49-F238E27FC236}">
-                <a16:creationId xmlns:a16="http://schemas.microsoft.com/office/drawing/2014/main" id="{31C29F6F-54A2-5964-F2B2-982952460386}"/>
-              </a:ext>
-            </a:extLst>
-          </p:cNvPr>
-          <p:cNvSpPr>
-            <a:spLocks noGrp="1"/>
-          </p:cNvSpPr>
-          <p:nvPr>
-            <p:ph type="title"/>
-          </p:nvPr>
-        </p:nvSpPr>
-        <p:spPr/>
-        <p:txBody>
-          <a:bodyPr>
-            <a:normAutofit/>
-          </a:bodyPr>
-          <a:lstStyle/>
-          <a:p>
-            <a:r>
-              <a:rPr lang="en-US" sz="4000" dirty="0"/>
-              <a:t>Principal Component Analysis (PCA)</a:t>
-            </a:r>
-          </a:p>
-        </p:txBody>
-      </p:sp>
-      <p:sp>
-        <p:nvSpPr>
-          <p:cNvPr id="4" name="Rectángulo 3">
-            <a:extLst>
-              <a:ext uri="{FF2B5EF4-FFF2-40B4-BE49-F238E27FC236}">
-                <a16:creationId xmlns:a16="http://schemas.microsoft.com/office/drawing/2014/main" id="{7BF95E35-4D9C-7F59-F308-C61FF9CD1B58}"/>
-              </a:ext>
-            </a:extLst>
-          </p:cNvPr>
-          <p:cNvSpPr/>
-          <p:nvPr/>
-        </p:nvSpPr>
-        <p:spPr>
-          <a:xfrm>
-            <a:off x="0" y="0"/>
-            <a:ext cx="374469" cy="6858000"/>
-          </a:xfrm>
-          <a:prstGeom prst="rect">
-            <a:avLst/>
-          </a:prstGeom>
-        </p:spPr>
-        <p:style>
-          <a:lnRef idx="2">
-            <a:schemeClr val="accent2">
-              <a:shade val="50000"/>
-            </a:schemeClr>
-          </a:lnRef>
-          <a:fillRef idx="1">
-            <a:schemeClr val="accent2"/>
-          </a:fillRef>
-          <a:effectRef idx="0">
-            <a:schemeClr val="accent2"/>
-          </a:effectRef>
-          <a:fontRef idx="minor">
-            <a:schemeClr val="lt1"/>
-          </a:fontRef>
-        </p:style>
-        <p:txBody>
-          <a:bodyPr rtlCol="0" anchor="ctr"/>
-          <a:lstStyle/>
-          <a:p>
-            <a:pPr algn="ctr"/>
-            <a:endParaRPr lang="es-ES"/>
-          </a:p>
-        </p:txBody>
-      </p:sp>
-      <p:sp>
-        <p:nvSpPr>
-          <p:cNvPr id="6" name="Rectangle 143">
-            <a:extLst>
-              <a:ext uri="{FF2B5EF4-FFF2-40B4-BE49-F238E27FC236}">
-                <a16:creationId xmlns:a16="http://schemas.microsoft.com/office/drawing/2014/main" id="{C9A975F5-C7DC-9274-20CA-B5939A2A86BD}"/>
-              </a:ext>
-            </a:extLst>
-          </p:cNvPr>
-          <p:cNvSpPr>
-            <a:spLocks noChangeArrowheads="1"/>
-          </p:cNvSpPr>
-          <p:nvPr/>
-        </p:nvSpPr>
-        <p:spPr bwMode="auto">
-          <a:xfrm>
-            <a:off x="448342" y="6549317"/>
-            <a:ext cx="5730175" cy="261610"/>
-          </a:xfrm>
-          <a:prstGeom prst="rect">
-            <a:avLst/>
-          </a:prstGeom>
-          <a:noFill/>
-          <a:ln>
-            <a:noFill/>
-          </a:ln>
-          <a:effectLst/>
-          <a:extLst>
-            <a:ext uri="{909E8E84-426E-40DD-AFC4-6F175D3DCCD1}">
-              <a14:hiddenFill xmlns:a14="http://schemas.microsoft.com/office/drawing/2010/main">
-                <a:solidFill>
-                  <a:schemeClr val="accent1"/>
-                </a:solidFill>
-              </a14:hiddenFill>
-            </a:ext>
-            <a:ext uri="{91240B29-F687-4F45-9708-019B960494DF}">
-              <a14:hiddenLine xmlns:a14="http://schemas.microsoft.com/office/drawing/2010/main" w="9525">
-                <a:solidFill>
-                  <a:schemeClr val="tx1"/>
-                </a:solidFill>
-                <a:miter lim="800000"/>
-                <a:headEnd/>
-                <a:tailEnd/>
-              </a14:hiddenLine>
-            </a:ext>
-            <a:ext uri="{AF507438-7753-43E0-B8FC-AC1667EBCBE1}">
-              <a14:hiddenEffects xmlns:a14="http://schemas.microsoft.com/office/drawing/2010/main">
-                <a:effectLst>
-                  <a:outerShdw dist="35921" dir="2700000" algn="ctr" rotWithShape="0">
-                    <a:schemeClr val="bg2"/>
-                  </a:outerShdw>
-                </a:effectLst>
-              </a14:hiddenEffects>
-            </a:ext>
-          </a:extLst>
-        </p:spPr>
-        <p:txBody>
-          <a:bodyPr vert="horz" wrap="square" lIns="91440" tIns="45720" rIns="91440" bIns="45720" numCol="1" anchor="ctr" anchorCtr="0" compatLnSpc="1">
-            <a:prstTxWarp prst="textNoShape">
-              <a:avLst/>
-            </a:prstTxWarp>
-            <a:spAutoFit/>
-          </a:bodyPr>
-          <a:lstStyle/>
-          <a:p>
-            <a:pPr marL="0" marR="0" lvl="0" indent="0" algn="l" defTabSz="914400" rtl="0" eaLnBrk="0" fontAlgn="base" latinLnBrk="0" hangingPunct="0">
-              <a:lnSpc>
-                <a:spcPct val="100000"/>
-              </a:lnSpc>
-              <a:spcBef>
-                <a:spcPct val="0"/>
-              </a:spcBef>
-              <a:spcAft>
-                <a:spcPct val="0"/>
-              </a:spcAft>
-              <a:buClrTx/>
-              <a:buSzTx/>
-              <a:buFontTx/>
-              <a:buNone/>
-              <a:tabLst/>
-            </a:pPr>
-            <a:r>
-              <a:rPr kumimoji="0" lang="en-US" altLang="es-ES" sz="1100" b="0" i="0" u="none" strike="noStrike" cap="none" normalizeH="0" baseline="0" dirty="0">
-                <a:ln>
-                  <a:noFill/>
-                </a:ln>
-                <a:solidFill>
-                  <a:srgbClr val="F4A200"/>
-                </a:solidFill>
-                <a:effectLst/>
-                <a:latin typeface="Arial" panose="020B0604020202020204" pitchFamily="34" charset="0"/>
-                <a:ea typeface="Myriad Pro Light"/>
-                <a:cs typeface="Times New Roman" panose="02020603050405020304" pitchFamily="18" charset="0"/>
-              </a:rPr>
-              <a:t>Master in Quantitative Economic Analysis </a:t>
-            </a:r>
-            <a:r>
-              <a:rPr kumimoji="0" lang="en-US" altLang="es-ES" sz="1100" b="0" i="0" u="none" strike="noStrike" cap="none" normalizeH="0" baseline="0" dirty="0" err="1">
-                <a:ln>
-                  <a:noFill/>
-                </a:ln>
-                <a:solidFill>
-                  <a:srgbClr val="F4A200"/>
-                </a:solidFill>
-                <a:effectLst/>
-                <a:latin typeface="Arial" panose="020B0604020202020204" pitchFamily="34" charset="0"/>
-                <a:ea typeface="Myriad Pro Light"/>
-                <a:cs typeface="Times New Roman" panose="02020603050405020304" pitchFamily="18" charset="0"/>
-              </a:rPr>
-              <a:t>MQuEA</a:t>
-            </a:r>
-            <a:endParaRPr kumimoji="0" lang="es-ES" altLang="es-ES" sz="300" b="0" i="0" u="none" strike="noStrike" cap="none" normalizeH="0" baseline="0" dirty="0">
-              <a:ln>
-                <a:noFill/>
-              </a:ln>
-              <a:solidFill>
-                <a:schemeClr val="tx1"/>
-              </a:solidFill>
-              <a:effectLst/>
-              <a:latin typeface="Arial" panose="020B0604020202020204" pitchFamily="34" charset="0"/>
-            </a:endParaRPr>
-          </a:p>
-        </p:txBody>
-      </p:sp>
-      <p:sp>
-        <p:nvSpPr>
-          <p:cNvPr id="7" name="Rectangle 143">
-            <a:extLst>
-              <a:ext uri="{FF2B5EF4-FFF2-40B4-BE49-F238E27FC236}">
-                <a16:creationId xmlns:a16="http://schemas.microsoft.com/office/drawing/2014/main" id="{2BE2E3EB-749E-E562-030D-C3F46E714169}"/>
-              </a:ext>
-            </a:extLst>
-          </p:cNvPr>
-          <p:cNvSpPr>
-            <a:spLocks noChangeArrowheads="1"/>
-          </p:cNvSpPr>
-          <p:nvPr/>
-        </p:nvSpPr>
-        <p:spPr bwMode="auto">
-          <a:xfrm>
-            <a:off x="6186394" y="6559955"/>
-            <a:ext cx="5730175" cy="261610"/>
-          </a:xfrm>
-          <a:prstGeom prst="rect">
-            <a:avLst/>
-          </a:prstGeom>
-          <a:noFill/>
-          <a:ln>
-            <a:noFill/>
-          </a:ln>
-          <a:effectLst/>
-          <a:extLst>
-            <a:ext uri="{909E8E84-426E-40DD-AFC4-6F175D3DCCD1}">
-              <a14:hiddenFill xmlns:a14="http://schemas.microsoft.com/office/drawing/2010/main">
-                <a:solidFill>
-                  <a:schemeClr val="accent1"/>
-                </a:solidFill>
-              </a14:hiddenFill>
-            </a:ext>
-            <a:ext uri="{91240B29-F687-4F45-9708-019B960494DF}">
-              <a14:hiddenLine xmlns:a14="http://schemas.microsoft.com/office/drawing/2010/main" w="9525">
-                <a:solidFill>
-                  <a:schemeClr val="tx1"/>
-                </a:solidFill>
-                <a:miter lim="800000"/>
-                <a:headEnd/>
-                <a:tailEnd/>
-              </a14:hiddenLine>
-            </a:ext>
-            <a:ext uri="{AF507438-7753-43E0-B8FC-AC1667EBCBE1}">
-              <a14:hiddenEffects xmlns:a14="http://schemas.microsoft.com/office/drawing/2010/main">
-                <a:effectLst>
-                  <a:outerShdw dist="35921" dir="2700000" algn="ctr" rotWithShape="0">
-                    <a:schemeClr val="bg2"/>
-                  </a:outerShdw>
-                </a:effectLst>
-              </a14:hiddenEffects>
-            </a:ext>
-          </a:extLst>
-        </p:spPr>
-        <p:txBody>
-          <a:bodyPr vert="horz" wrap="square" lIns="91440" tIns="45720" rIns="91440" bIns="45720" numCol="1" anchor="ctr" anchorCtr="0" compatLnSpc="1">
-            <a:prstTxWarp prst="textNoShape">
-              <a:avLst/>
-            </a:prstTxWarp>
-            <a:spAutoFit/>
-          </a:bodyPr>
-          <a:lstStyle/>
-          <a:p>
-            <a:pPr marL="0" marR="0" lvl="0" indent="0" algn="r" defTabSz="914400" rtl="0" eaLnBrk="0" fontAlgn="base" latinLnBrk="0" hangingPunct="0">
-              <a:lnSpc>
-                <a:spcPct val="100000"/>
-              </a:lnSpc>
-              <a:spcBef>
-                <a:spcPct val="0"/>
-              </a:spcBef>
-              <a:spcAft>
-                <a:spcPct val="0"/>
-              </a:spcAft>
-              <a:buClrTx/>
-              <a:buSzTx/>
-              <a:buFontTx/>
-              <a:buNone/>
-              <a:tabLst/>
-            </a:pPr>
-            <a:r>
-              <a:rPr kumimoji="0" lang="en-US" altLang="es-ES" sz="1100" b="0" i="0" u="none" strike="noStrike" cap="none" normalizeH="0" baseline="0" dirty="0">
-                <a:ln>
-                  <a:noFill/>
-                </a:ln>
-                <a:solidFill>
-                  <a:srgbClr val="F4A200"/>
-                </a:solidFill>
-                <a:effectLst/>
-                <a:latin typeface="Arial" panose="020B0604020202020204" pitchFamily="34" charset="0"/>
-                <a:ea typeface="Myriad Pro Light"/>
-                <a:cs typeface="Times New Roman" panose="02020603050405020304" pitchFamily="18" charset="0"/>
-              </a:rPr>
-              <a:t>Universidad </a:t>
-            </a:r>
-            <a:r>
-              <a:rPr kumimoji="0" lang="en-US" altLang="es-ES" sz="1100" b="0" i="0" u="none" strike="noStrike" cap="none" normalizeH="0" baseline="0" dirty="0" err="1">
-                <a:ln>
-                  <a:noFill/>
-                </a:ln>
-                <a:solidFill>
-                  <a:srgbClr val="F4A200"/>
-                </a:solidFill>
-                <a:effectLst/>
-                <a:latin typeface="Arial" panose="020B0604020202020204" pitchFamily="34" charset="0"/>
-                <a:ea typeface="Myriad Pro Light"/>
-                <a:cs typeface="Times New Roman" panose="02020603050405020304" pitchFamily="18" charset="0"/>
-              </a:rPr>
-              <a:t>Aut</a:t>
-            </a:r>
-            <a:r>
-              <a:rPr lang="en-US" altLang="es-ES" sz="1100" dirty="0" err="1">
-                <a:solidFill>
-                  <a:srgbClr val="F4A200"/>
-                </a:solidFill>
-                <a:latin typeface="Arial" panose="020B0604020202020204" pitchFamily="34" charset="0"/>
-                <a:ea typeface="Myriad Pro Light"/>
-                <a:cs typeface="Times New Roman" panose="02020603050405020304" pitchFamily="18" charset="0"/>
-              </a:rPr>
-              <a:t>ó</a:t>
-            </a:r>
-            <a:r>
-              <a:rPr kumimoji="0" lang="en-US" altLang="es-ES" sz="1100" b="0" i="0" u="none" strike="noStrike" cap="none" normalizeH="0" baseline="0" dirty="0" err="1">
-                <a:ln>
-                  <a:noFill/>
-                </a:ln>
-                <a:solidFill>
-                  <a:srgbClr val="F4A200"/>
-                </a:solidFill>
-                <a:effectLst/>
-                <a:latin typeface="Arial" panose="020B0604020202020204" pitchFamily="34" charset="0"/>
-                <a:ea typeface="Myriad Pro Light"/>
-                <a:cs typeface="Times New Roman" panose="02020603050405020304" pitchFamily="18" charset="0"/>
-              </a:rPr>
-              <a:t>noma</a:t>
-            </a:r>
-            <a:r>
-              <a:rPr kumimoji="0" lang="en-US" altLang="es-ES" sz="1100" b="0" i="0" u="none" strike="noStrike" cap="none" normalizeH="0" baseline="0" dirty="0">
-                <a:ln>
-                  <a:noFill/>
-                </a:ln>
-                <a:solidFill>
-                  <a:srgbClr val="F4A200"/>
-                </a:solidFill>
-                <a:effectLst/>
-                <a:latin typeface="Arial" panose="020B0604020202020204" pitchFamily="34" charset="0"/>
-                <a:ea typeface="Myriad Pro Light"/>
-                <a:cs typeface="Times New Roman" panose="02020603050405020304" pitchFamily="18" charset="0"/>
-              </a:rPr>
-              <a:t> de Madrid</a:t>
-            </a:r>
-            <a:endParaRPr kumimoji="0" lang="es-ES" altLang="es-ES" sz="300" b="0" i="0" u="none" strike="noStrike" cap="none" normalizeH="0" baseline="0" dirty="0">
-              <a:ln>
-                <a:noFill/>
-              </a:ln>
-              <a:solidFill>
-                <a:schemeClr val="tx1"/>
-              </a:solidFill>
-              <a:effectLst/>
-              <a:latin typeface="Arial" panose="020B0604020202020204" pitchFamily="34" charset="0"/>
-            </a:endParaRPr>
-          </a:p>
-        </p:txBody>
-      </p:sp>
-      <mc:AlternateContent xmlns:mc="http://schemas.openxmlformats.org/markup-compatibility/2006">
-        <mc:Choice xmlns:a14="http://schemas.microsoft.com/office/drawing/2010/main" Requires="a14">
+      <mc:AlternateContent xmlns:mc="http://schemas.openxmlformats.org/markup-compatibility/2006" xmlns:a14="http://schemas.microsoft.com/office/drawing/2010/main">
+        <mc:Choice Requires="a14">
           <p:sp>
             <p:nvSpPr>
               <p:cNvPr id="3" name="TextBox 2">
@@ -24595,7 +22698,7 @@
                   <a:rPr lang="en-US" sz="2000" dirty="0">
                     <a:latin typeface="+mj-lt"/>
                   </a:rPr>
-                  <a:t> to be </a:t>
+                  <a:t> (loading vector 1) to be </a:t>
                 </a:r>
                 <a:r>
                   <a:rPr lang="en-US" sz="2000" b="1" dirty="0">
@@ -24639,6 +22742,16 @@
                     </m:sSub>
                   </m:oMath>
                 </a14:m>
+                <a:r>
+                  <a:rPr lang="en-US" sz="2000" dirty="0">
+                    <a:latin typeface="+mj-lt"/>
+                  </a:rPr>
+                  <a:t> </a:t>
+                </a:r>
+                <a:r>
+                  <a:rPr lang="en-US" sz="2000" dirty="0"/>
+                  <a:t>(loading vector 2)</a:t>
+                </a:r>
                 <a:endParaRPr lang="en-US" sz="2000" dirty="0">
                   <a:latin typeface="+mj-lt"/>
                 </a:endParaRPr>
@@ -24661,7 +22774,7 @@
             </p:txBody>
           </p:sp>
         </mc:Choice>
-        <mc:Fallback>
+        <mc:Fallback xmlns="">
           <p:sp>
             <p:nvSpPr>
               <p:cNvPr id="3" name="TextBox 2">
@@ -24719,432 +22832,7 @@
 </p:sld>
 </file>
 
-<file path=ppt/slides/slide13.xml><?xml version="1.0" encoding="utf-8"?>
-<p:sld xmlns:a="http://schemas.openxmlformats.org/drawingml/2006/main" xmlns:r="http://schemas.openxmlformats.org/officeDocument/2006/relationships" xmlns:p="http://schemas.openxmlformats.org/presentationml/2006/main">
-  <p:cSld>
-    <p:spTree>
-      <p:nvGrpSpPr>
-        <p:cNvPr id="1" name=""/>
-        <p:cNvGrpSpPr/>
-        <p:nvPr/>
-      </p:nvGrpSpPr>
-      <p:grpSpPr>
-        <a:xfrm>
-          <a:off x="0" y="0"/>
-          <a:ext cx="0" cy="0"/>
-          <a:chOff x="0" y="0"/>
-          <a:chExt cx="0" cy="0"/>
-        </a:xfrm>
-      </p:grpSpPr>
-      <p:sp>
-        <p:nvSpPr>
-          <p:cNvPr id="2" name="Title 1">
-            <a:extLst>
-              <a:ext uri="{FF2B5EF4-FFF2-40B4-BE49-F238E27FC236}">
-                <a16:creationId xmlns:a16="http://schemas.microsoft.com/office/drawing/2014/main" id="{31C29F6F-54A2-5964-F2B2-982952460386}"/>
-              </a:ext>
-            </a:extLst>
-          </p:cNvPr>
-          <p:cNvSpPr>
-            <a:spLocks noGrp="1"/>
-          </p:cNvSpPr>
-          <p:nvPr>
-            <p:ph type="title"/>
-          </p:nvPr>
-        </p:nvSpPr>
-        <p:spPr/>
-        <p:txBody>
-          <a:bodyPr>
-            <a:normAutofit/>
-          </a:bodyPr>
-          <a:lstStyle/>
-          <a:p>
-            <a:r>
-              <a:rPr lang="en-US" sz="4000" dirty="0"/>
-              <a:t>Principal Component Analysis (PCA)</a:t>
-            </a:r>
-          </a:p>
-        </p:txBody>
-      </p:sp>
-      <p:sp>
-        <p:nvSpPr>
-          <p:cNvPr id="4" name="Rectángulo 3">
-            <a:extLst>
-              <a:ext uri="{FF2B5EF4-FFF2-40B4-BE49-F238E27FC236}">
-                <a16:creationId xmlns:a16="http://schemas.microsoft.com/office/drawing/2014/main" id="{7BF95E35-4D9C-7F59-F308-C61FF9CD1B58}"/>
-              </a:ext>
-            </a:extLst>
-          </p:cNvPr>
-          <p:cNvSpPr/>
-          <p:nvPr/>
-        </p:nvSpPr>
-        <p:spPr>
-          <a:xfrm>
-            <a:off x="0" y="0"/>
-            <a:ext cx="374469" cy="6858000"/>
-          </a:xfrm>
-          <a:prstGeom prst="rect">
-            <a:avLst/>
-          </a:prstGeom>
-        </p:spPr>
-        <p:style>
-          <a:lnRef idx="2">
-            <a:schemeClr val="accent2">
-              <a:shade val="50000"/>
-            </a:schemeClr>
-          </a:lnRef>
-          <a:fillRef idx="1">
-            <a:schemeClr val="accent2"/>
-          </a:fillRef>
-          <a:effectRef idx="0">
-            <a:schemeClr val="accent2"/>
-          </a:effectRef>
-          <a:fontRef idx="minor">
-            <a:schemeClr val="lt1"/>
-          </a:fontRef>
-        </p:style>
-        <p:txBody>
-          <a:bodyPr rtlCol="0" anchor="ctr"/>
-          <a:lstStyle/>
-          <a:p>
-            <a:pPr algn="ctr"/>
-            <a:endParaRPr lang="es-ES"/>
-          </a:p>
-        </p:txBody>
-      </p:sp>
-      <p:sp>
-        <p:nvSpPr>
-          <p:cNvPr id="6" name="Rectangle 143">
-            <a:extLst>
-              <a:ext uri="{FF2B5EF4-FFF2-40B4-BE49-F238E27FC236}">
-                <a16:creationId xmlns:a16="http://schemas.microsoft.com/office/drawing/2014/main" id="{C9A975F5-C7DC-9274-20CA-B5939A2A86BD}"/>
-              </a:ext>
-            </a:extLst>
-          </p:cNvPr>
-          <p:cNvSpPr>
-            <a:spLocks noChangeArrowheads="1"/>
-          </p:cNvSpPr>
-          <p:nvPr/>
-        </p:nvSpPr>
-        <p:spPr bwMode="auto">
-          <a:xfrm>
-            <a:off x="448342" y="6549317"/>
-            <a:ext cx="5730175" cy="261610"/>
-          </a:xfrm>
-          <a:prstGeom prst="rect">
-            <a:avLst/>
-          </a:prstGeom>
-          <a:noFill/>
-          <a:ln>
-            <a:noFill/>
-          </a:ln>
-          <a:effectLst/>
-          <a:extLst>
-            <a:ext uri="{909E8E84-426E-40DD-AFC4-6F175D3DCCD1}">
-              <a14:hiddenFill xmlns:a14="http://schemas.microsoft.com/office/drawing/2010/main">
-                <a:solidFill>
-                  <a:schemeClr val="accent1"/>
-                </a:solidFill>
-              </a14:hiddenFill>
-            </a:ext>
-            <a:ext uri="{91240B29-F687-4F45-9708-019B960494DF}">
-              <a14:hiddenLine xmlns:a14="http://schemas.microsoft.com/office/drawing/2010/main" w="9525">
-                <a:solidFill>
-                  <a:schemeClr val="tx1"/>
-                </a:solidFill>
-                <a:miter lim="800000"/>
-                <a:headEnd/>
-                <a:tailEnd/>
-              </a14:hiddenLine>
-            </a:ext>
-            <a:ext uri="{AF507438-7753-43E0-B8FC-AC1667EBCBE1}">
-              <a14:hiddenEffects xmlns:a14="http://schemas.microsoft.com/office/drawing/2010/main">
-                <a:effectLst>
-                  <a:outerShdw dist="35921" dir="2700000" algn="ctr" rotWithShape="0">
-                    <a:schemeClr val="bg2"/>
-                  </a:outerShdw>
-                </a:effectLst>
-              </a14:hiddenEffects>
-            </a:ext>
-          </a:extLst>
-        </p:spPr>
-        <p:txBody>
-          <a:bodyPr vert="horz" wrap="square" lIns="91440" tIns="45720" rIns="91440" bIns="45720" numCol="1" anchor="ctr" anchorCtr="0" compatLnSpc="1">
-            <a:prstTxWarp prst="textNoShape">
-              <a:avLst/>
-            </a:prstTxWarp>
-            <a:spAutoFit/>
-          </a:bodyPr>
-          <a:lstStyle/>
-          <a:p>
-            <a:pPr marL="0" marR="0" lvl="0" indent="0" algn="l" defTabSz="914400" rtl="0" eaLnBrk="0" fontAlgn="base" latinLnBrk="0" hangingPunct="0">
-              <a:lnSpc>
-                <a:spcPct val="100000"/>
-              </a:lnSpc>
-              <a:spcBef>
-                <a:spcPct val="0"/>
-              </a:spcBef>
-              <a:spcAft>
-                <a:spcPct val="0"/>
-              </a:spcAft>
-              <a:buClrTx/>
-              <a:buSzTx/>
-              <a:buFontTx/>
-              <a:buNone/>
-              <a:tabLst/>
-            </a:pPr>
-            <a:r>
-              <a:rPr kumimoji="0" lang="en-US" altLang="es-ES" sz="1100" b="0" i="0" u="none" strike="noStrike" cap="none" normalizeH="0" baseline="0" dirty="0">
-                <a:ln>
-                  <a:noFill/>
-                </a:ln>
-                <a:solidFill>
-                  <a:srgbClr val="F4A200"/>
-                </a:solidFill>
-                <a:effectLst/>
-                <a:latin typeface="Arial" panose="020B0604020202020204" pitchFamily="34" charset="0"/>
-                <a:ea typeface="Myriad Pro Light"/>
-                <a:cs typeface="Times New Roman" panose="02020603050405020304" pitchFamily="18" charset="0"/>
-              </a:rPr>
-              <a:t>Master in Quantitative Economic Analysis </a:t>
-            </a:r>
-            <a:r>
-              <a:rPr kumimoji="0" lang="en-US" altLang="es-ES" sz="1100" b="0" i="0" u="none" strike="noStrike" cap="none" normalizeH="0" baseline="0" dirty="0" err="1">
-                <a:ln>
-                  <a:noFill/>
-                </a:ln>
-                <a:solidFill>
-                  <a:srgbClr val="F4A200"/>
-                </a:solidFill>
-                <a:effectLst/>
-                <a:latin typeface="Arial" panose="020B0604020202020204" pitchFamily="34" charset="0"/>
-                <a:ea typeface="Myriad Pro Light"/>
-                <a:cs typeface="Times New Roman" panose="02020603050405020304" pitchFamily="18" charset="0"/>
-              </a:rPr>
-              <a:t>MQuEA</a:t>
-            </a:r>
-            <a:endParaRPr kumimoji="0" lang="es-ES" altLang="es-ES" sz="300" b="0" i="0" u="none" strike="noStrike" cap="none" normalizeH="0" baseline="0" dirty="0">
-              <a:ln>
-                <a:noFill/>
-              </a:ln>
-              <a:solidFill>
-                <a:schemeClr val="tx1"/>
-              </a:solidFill>
-              <a:effectLst/>
-              <a:latin typeface="Arial" panose="020B0604020202020204" pitchFamily="34" charset="0"/>
-            </a:endParaRPr>
-          </a:p>
-        </p:txBody>
-      </p:sp>
-      <p:sp>
-        <p:nvSpPr>
-          <p:cNvPr id="7" name="Rectangle 143">
-            <a:extLst>
-              <a:ext uri="{FF2B5EF4-FFF2-40B4-BE49-F238E27FC236}">
-                <a16:creationId xmlns:a16="http://schemas.microsoft.com/office/drawing/2014/main" id="{2BE2E3EB-749E-E562-030D-C3F46E714169}"/>
-              </a:ext>
-            </a:extLst>
-          </p:cNvPr>
-          <p:cNvSpPr>
-            <a:spLocks noChangeArrowheads="1"/>
-          </p:cNvSpPr>
-          <p:nvPr/>
-        </p:nvSpPr>
-        <p:spPr bwMode="auto">
-          <a:xfrm>
-            <a:off x="6186394" y="6559955"/>
-            <a:ext cx="5730175" cy="261610"/>
-          </a:xfrm>
-          <a:prstGeom prst="rect">
-            <a:avLst/>
-          </a:prstGeom>
-          <a:noFill/>
-          <a:ln>
-            <a:noFill/>
-          </a:ln>
-          <a:effectLst/>
-          <a:extLst>
-            <a:ext uri="{909E8E84-426E-40DD-AFC4-6F175D3DCCD1}">
-              <a14:hiddenFill xmlns:a14="http://schemas.microsoft.com/office/drawing/2010/main">
-                <a:solidFill>
-                  <a:schemeClr val="accent1"/>
-                </a:solidFill>
-              </a14:hiddenFill>
-            </a:ext>
-            <a:ext uri="{91240B29-F687-4F45-9708-019B960494DF}">
-              <a14:hiddenLine xmlns:a14="http://schemas.microsoft.com/office/drawing/2010/main" w="9525">
-                <a:solidFill>
-                  <a:schemeClr val="tx1"/>
-                </a:solidFill>
-                <a:miter lim="800000"/>
-                <a:headEnd/>
-                <a:tailEnd/>
-              </a14:hiddenLine>
-            </a:ext>
-            <a:ext uri="{AF507438-7753-43E0-B8FC-AC1667EBCBE1}">
-              <a14:hiddenEffects xmlns:a14="http://schemas.microsoft.com/office/drawing/2010/main">
-                <a:effectLst>
-                  <a:outerShdw dist="35921" dir="2700000" algn="ctr" rotWithShape="0">
-                    <a:schemeClr val="bg2"/>
-                  </a:outerShdw>
-                </a:effectLst>
-              </a14:hiddenEffects>
-            </a:ext>
-          </a:extLst>
-        </p:spPr>
-        <p:txBody>
-          <a:bodyPr vert="horz" wrap="square" lIns="91440" tIns="45720" rIns="91440" bIns="45720" numCol="1" anchor="ctr" anchorCtr="0" compatLnSpc="1">
-            <a:prstTxWarp prst="textNoShape">
-              <a:avLst/>
-            </a:prstTxWarp>
-            <a:spAutoFit/>
-          </a:bodyPr>
-          <a:lstStyle/>
-          <a:p>
-            <a:pPr marL="0" marR="0" lvl="0" indent="0" algn="r" defTabSz="914400" rtl="0" eaLnBrk="0" fontAlgn="base" latinLnBrk="0" hangingPunct="0">
-              <a:lnSpc>
-                <a:spcPct val="100000"/>
-              </a:lnSpc>
-              <a:spcBef>
-                <a:spcPct val="0"/>
-              </a:spcBef>
-              <a:spcAft>
-                <a:spcPct val="0"/>
-              </a:spcAft>
-              <a:buClrTx/>
-              <a:buSzTx/>
-              <a:buFontTx/>
-              <a:buNone/>
-              <a:tabLst/>
-            </a:pPr>
-            <a:r>
-              <a:rPr kumimoji="0" lang="en-US" altLang="es-ES" sz="1100" b="0" i="0" u="none" strike="noStrike" cap="none" normalizeH="0" baseline="0" dirty="0">
-                <a:ln>
-                  <a:noFill/>
-                </a:ln>
-                <a:solidFill>
-                  <a:srgbClr val="F4A200"/>
-                </a:solidFill>
-                <a:effectLst/>
-                <a:latin typeface="Arial" panose="020B0604020202020204" pitchFamily="34" charset="0"/>
-                <a:ea typeface="Myriad Pro Light"/>
-                <a:cs typeface="Times New Roman" panose="02020603050405020304" pitchFamily="18" charset="0"/>
-              </a:rPr>
-              <a:t>Universidad </a:t>
-            </a:r>
-            <a:r>
-              <a:rPr kumimoji="0" lang="en-US" altLang="es-ES" sz="1100" b="0" i="0" u="none" strike="noStrike" cap="none" normalizeH="0" baseline="0" dirty="0" err="1">
-                <a:ln>
-                  <a:noFill/>
-                </a:ln>
-                <a:solidFill>
-                  <a:srgbClr val="F4A200"/>
-                </a:solidFill>
-                <a:effectLst/>
-                <a:latin typeface="Arial" panose="020B0604020202020204" pitchFamily="34" charset="0"/>
-                <a:ea typeface="Myriad Pro Light"/>
-                <a:cs typeface="Times New Roman" panose="02020603050405020304" pitchFamily="18" charset="0"/>
-              </a:rPr>
-              <a:t>Aut</a:t>
-            </a:r>
-            <a:r>
-              <a:rPr lang="en-US" altLang="es-ES" sz="1100" dirty="0" err="1">
-                <a:solidFill>
-                  <a:srgbClr val="F4A200"/>
-                </a:solidFill>
-                <a:latin typeface="Arial" panose="020B0604020202020204" pitchFamily="34" charset="0"/>
-                <a:ea typeface="Myriad Pro Light"/>
-                <a:cs typeface="Times New Roman" panose="02020603050405020304" pitchFamily="18" charset="0"/>
-              </a:rPr>
-              <a:t>ó</a:t>
-            </a:r>
-            <a:r>
-              <a:rPr kumimoji="0" lang="en-US" altLang="es-ES" sz="1100" b="0" i="0" u="none" strike="noStrike" cap="none" normalizeH="0" baseline="0" dirty="0" err="1">
-                <a:ln>
-                  <a:noFill/>
-                </a:ln>
-                <a:solidFill>
-                  <a:srgbClr val="F4A200"/>
-                </a:solidFill>
-                <a:effectLst/>
-                <a:latin typeface="Arial" panose="020B0604020202020204" pitchFamily="34" charset="0"/>
-                <a:ea typeface="Myriad Pro Light"/>
-                <a:cs typeface="Times New Roman" panose="02020603050405020304" pitchFamily="18" charset="0"/>
-              </a:rPr>
-              <a:t>noma</a:t>
-            </a:r>
-            <a:r>
-              <a:rPr kumimoji="0" lang="en-US" altLang="es-ES" sz="1100" b="0" i="0" u="none" strike="noStrike" cap="none" normalizeH="0" baseline="0" dirty="0">
-                <a:ln>
-                  <a:noFill/>
-                </a:ln>
-                <a:solidFill>
-                  <a:srgbClr val="F4A200"/>
-                </a:solidFill>
-                <a:effectLst/>
-                <a:latin typeface="Arial" panose="020B0604020202020204" pitchFamily="34" charset="0"/>
-                <a:ea typeface="Myriad Pro Light"/>
-                <a:cs typeface="Times New Roman" panose="02020603050405020304" pitchFamily="18" charset="0"/>
-              </a:rPr>
-              <a:t> de Madrid</a:t>
-            </a:r>
-            <a:endParaRPr kumimoji="0" lang="es-ES" altLang="es-ES" sz="300" b="0" i="0" u="none" strike="noStrike" cap="none" normalizeH="0" baseline="0" dirty="0">
-              <a:ln>
-                <a:noFill/>
-              </a:ln>
-              <a:solidFill>
-                <a:schemeClr val="tx1"/>
-              </a:solidFill>
-              <a:effectLst/>
-              <a:latin typeface="Arial" panose="020B0604020202020204" pitchFamily="34" charset="0"/>
-            </a:endParaRPr>
-          </a:p>
-        </p:txBody>
-      </p:sp>
-      <p:pic>
-        <p:nvPicPr>
-          <p:cNvPr id="8" name="Picture 7">
-            <a:extLst>
-              <a:ext uri="{FF2B5EF4-FFF2-40B4-BE49-F238E27FC236}">
-                <a16:creationId xmlns:a16="http://schemas.microsoft.com/office/drawing/2014/main" id="{7FA37D29-40C9-38A9-3512-4DA97C452353}"/>
-              </a:ext>
-            </a:extLst>
-          </p:cNvPr>
-          <p:cNvPicPr>
-            <a:picLocks noChangeAspect="1"/>
-          </p:cNvPicPr>
-          <p:nvPr/>
-        </p:nvPicPr>
-        <p:blipFill>
-          <a:blip r:embed="rId2"/>
-          <a:stretch>
-            <a:fillRect/>
-          </a:stretch>
-        </p:blipFill>
-        <p:spPr>
-          <a:xfrm>
-            <a:off x="2926080" y="1920898"/>
-            <a:ext cx="6339840" cy="3849189"/>
-          </a:xfrm>
-          <a:prstGeom prst="rect">
-            <a:avLst/>
-          </a:prstGeom>
-        </p:spPr>
-      </p:pic>
-    </p:spTree>
-    <p:extLst>
-      <p:ext uri="{BB962C8B-B14F-4D97-AF65-F5344CB8AC3E}">
-        <p14:creationId xmlns:p14="http://schemas.microsoft.com/office/powerpoint/2010/main" val="1700027110"/>
-      </p:ext>
-    </p:extLst>
-  </p:cSld>
-  <p:clrMapOvr>
-    <a:masterClrMapping/>
-  </p:clrMapOvr>
-</p:sld>
-</file>
-
-<file path=ppt/slides/slide14.xml><?xml version="1.0" encoding="utf-8"?>
+<file path=ppt/slides/slide11.xml><?xml version="1.0" encoding="utf-8"?>
 <p:sld xmlns:a="http://schemas.openxmlformats.org/drawingml/2006/main" xmlns:r="http://schemas.openxmlformats.org/officeDocument/2006/relationships" xmlns:p="http://schemas.openxmlformats.org/presentationml/2006/main">
   <p:cSld>
     <p:spTree>
@@ -25541,7 +23229,7 @@
         <p:spPr>
           <a:xfrm>
             <a:off x="927557" y="1920898"/>
-            <a:ext cx="10610987" cy="3276282"/>
+            <a:ext cx="10610987" cy="3737946"/>
           </a:xfrm>
           <a:prstGeom prst="rect">
             <a:avLst/>
@@ -25565,7 +23253,7 @@
               <a:rPr lang="en-US" sz="2000" dirty="0">
                 <a:latin typeface="+mj-lt"/>
               </a:rPr>
-              <a:t>It is important to scale each variable individually before computing PCA </a:t>
+              <a:t>It is important to center each variable individually before computing PCA (this way we totally focus on variance). Scale may be needed if expressed in different units.</a:t>
             </a:r>
           </a:p>
           <a:p>
@@ -25580,7 +23268,7 @@
               <a:rPr lang="en-US" sz="2000" dirty="0">
                 <a:latin typeface="+mj-lt"/>
               </a:rPr>
-              <a:t>Each vector (loading vector) composing the principal component is unique</a:t>
+              <a:t>Each loading vector composing the principal component is unique</a:t>
             </a:r>
           </a:p>
           <a:p>
@@ -25637,7 +23325,7 @@
               <a:rPr lang="en-US" sz="2000" dirty="0">
                 <a:latin typeface="+mj-lt"/>
               </a:rPr>
-              <a:t>… and keeping a number of PC that gather a reasonable amount of variance</a:t>
+              <a:t>… and keeping a number of PC that gathers a reasonable amount of variance</a:t>
             </a:r>
           </a:p>
         </p:txBody>
@@ -25655,7 +23343,1143 @@
 </p:sld>
 </file>
 
-<file path=ppt/slides/slide15.xml><?xml version="1.0" encoding="utf-8"?>
+<file path=ppt/slides/slide12.xml><?xml version="1.0" encoding="utf-8"?>
+<p:sld xmlns:a="http://schemas.openxmlformats.org/drawingml/2006/main" xmlns:r="http://schemas.openxmlformats.org/officeDocument/2006/relationships" xmlns:p="http://schemas.openxmlformats.org/presentationml/2006/main">
+  <p:cSld>
+    <p:spTree>
+      <p:nvGrpSpPr>
+        <p:cNvPr id="1" name=""/>
+        <p:cNvGrpSpPr/>
+        <p:nvPr/>
+      </p:nvGrpSpPr>
+      <p:grpSpPr>
+        <a:xfrm>
+          <a:off x="0" y="0"/>
+          <a:ext cx="0" cy="0"/>
+          <a:chOff x="0" y="0"/>
+          <a:chExt cx="0" cy="0"/>
+        </a:xfrm>
+      </p:grpSpPr>
+      <p:sp>
+        <p:nvSpPr>
+          <p:cNvPr id="2" name="Title 1">
+            <a:extLst>
+              <a:ext uri="{FF2B5EF4-FFF2-40B4-BE49-F238E27FC236}">
+                <a16:creationId xmlns:a16="http://schemas.microsoft.com/office/drawing/2014/main" id="{31C29F6F-54A2-5964-F2B2-982952460386}"/>
+              </a:ext>
+            </a:extLst>
+          </p:cNvPr>
+          <p:cNvSpPr>
+            <a:spLocks noGrp="1"/>
+          </p:cNvSpPr>
+          <p:nvPr>
+            <p:ph type="title"/>
+          </p:nvPr>
+        </p:nvSpPr>
+        <p:spPr/>
+        <p:txBody>
+          <a:bodyPr>
+            <a:normAutofit/>
+          </a:bodyPr>
+          <a:lstStyle/>
+          <a:p>
+            <a:r>
+              <a:rPr lang="en-US" sz="4000" dirty="0"/>
+              <a:t>Principal Component Analysis (PCA)</a:t>
+            </a:r>
+          </a:p>
+        </p:txBody>
+      </p:sp>
+      <p:sp>
+        <p:nvSpPr>
+          <p:cNvPr id="4" name="Rectángulo 3">
+            <a:extLst>
+              <a:ext uri="{FF2B5EF4-FFF2-40B4-BE49-F238E27FC236}">
+                <a16:creationId xmlns:a16="http://schemas.microsoft.com/office/drawing/2014/main" id="{7BF95E35-4D9C-7F59-F308-C61FF9CD1B58}"/>
+              </a:ext>
+            </a:extLst>
+          </p:cNvPr>
+          <p:cNvSpPr/>
+          <p:nvPr/>
+        </p:nvSpPr>
+        <p:spPr>
+          <a:xfrm>
+            <a:off x="0" y="0"/>
+            <a:ext cx="374469" cy="6858000"/>
+          </a:xfrm>
+          <a:prstGeom prst="rect">
+            <a:avLst/>
+          </a:prstGeom>
+        </p:spPr>
+        <p:style>
+          <a:lnRef idx="2">
+            <a:schemeClr val="accent2">
+              <a:shade val="50000"/>
+            </a:schemeClr>
+          </a:lnRef>
+          <a:fillRef idx="1">
+            <a:schemeClr val="accent2"/>
+          </a:fillRef>
+          <a:effectRef idx="0">
+            <a:schemeClr val="accent2"/>
+          </a:effectRef>
+          <a:fontRef idx="minor">
+            <a:schemeClr val="lt1"/>
+          </a:fontRef>
+        </p:style>
+        <p:txBody>
+          <a:bodyPr rtlCol="0" anchor="ctr"/>
+          <a:lstStyle/>
+          <a:p>
+            <a:pPr algn="ctr"/>
+            <a:endParaRPr lang="es-ES"/>
+          </a:p>
+        </p:txBody>
+      </p:sp>
+      <p:sp>
+        <p:nvSpPr>
+          <p:cNvPr id="6" name="Rectangle 143">
+            <a:extLst>
+              <a:ext uri="{FF2B5EF4-FFF2-40B4-BE49-F238E27FC236}">
+                <a16:creationId xmlns:a16="http://schemas.microsoft.com/office/drawing/2014/main" id="{C9A975F5-C7DC-9274-20CA-B5939A2A86BD}"/>
+              </a:ext>
+            </a:extLst>
+          </p:cNvPr>
+          <p:cNvSpPr>
+            <a:spLocks noChangeArrowheads="1"/>
+          </p:cNvSpPr>
+          <p:nvPr/>
+        </p:nvSpPr>
+        <p:spPr bwMode="auto">
+          <a:xfrm>
+            <a:off x="448342" y="6549317"/>
+            <a:ext cx="5730175" cy="261610"/>
+          </a:xfrm>
+          <a:prstGeom prst="rect">
+            <a:avLst/>
+          </a:prstGeom>
+          <a:noFill/>
+          <a:ln>
+            <a:noFill/>
+          </a:ln>
+          <a:effectLst/>
+          <a:extLst>
+            <a:ext uri="{909E8E84-426E-40DD-AFC4-6F175D3DCCD1}">
+              <a14:hiddenFill xmlns:a14="http://schemas.microsoft.com/office/drawing/2010/main">
+                <a:solidFill>
+                  <a:schemeClr val="accent1"/>
+                </a:solidFill>
+              </a14:hiddenFill>
+            </a:ext>
+            <a:ext uri="{91240B29-F687-4F45-9708-019B960494DF}">
+              <a14:hiddenLine xmlns:a14="http://schemas.microsoft.com/office/drawing/2010/main" w="9525">
+                <a:solidFill>
+                  <a:schemeClr val="tx1"/>
+                </a:solidFill>
+                <a:miter lim="800000"/>
+                <a:headEnd/>
+                <a:tailEnd/>
+              </a14:hiddenLine>
+            </a:ext>
+            <a:ext uri="{AF507438-7753-43E0-B8FC-AC1667EBCBE1}">
+              <a14:hiddenEffects xmlns:a14="http://schemas.microsoft.com/office/drawing/2010/main">
+                <a:effectLst>
+                  <a:outerShdw dist="35921" dir="2700000" algn="ctr" rotWithShape="0">
+                    <a:schemeClr val="bg2"/>
+                  </a:outerShdw>
+                </a:effectLst>
+              </a14:hiddenEffects>
+            </a:ext>
+          </a:extLst>
+        </p:spPr>
+        <p:txBody>
+          <a:bodyPr vert="horz" wrap="square" lIns="91440" tIns="45720" rIns="91440" bIns="45720" numCol="1" anchor="ctr" anchorCtr="0" compatLnSpc="1">
+            <a:prstTxWarp prst="textNoShape">
+              <a:avLst/>
+            </a:prstTxWarp>
+            <a:spAutoFit/>
+          </a:bodyPr>
+          <a:lstStyle/>
+          <a:p>
+            <a:pPr marL="0" marR="0" lvl="0" indent="0" algn="l" defTabSz="914400" rtl="0" eaLnBrk="0" fontAlgn="base" latinLnBrk="0" hangingPunct="0">
+              <a:lnSpc>
+                <a:spcPct val="100000"/>
+              </a:lnSpc>
+              <a:spcBef>
+                <a:spcPct val="0"/>
+              </a:spcBef>
+              <a:spcAft>
+                <a:spcPct val="0"/>
+              </a:spcAft>
+              <a:buClrTx/>
+              <a:buSzTx/>
+              <a:buFontTx/>
+              <a:buNone/>
+              <a:tabLst/>
+            </a:pPr>
+            <a:r>
+              <a:rPr kumimoji="0" lang="en-US" altLang="es-ES" sz="1100" b="0" i="0" u="none" strike="noStrike" cap="none" normalizeH="0" baseline="0" dirty="0">
+                <a:ln>
+                  <a:noFill/>
+                </a:ln>
+                <a:solidFill>
+                  <a:srgbClr val="F4A200"/>
+                </a:solidFill>
+                <a:effectLst/>
+                <a:latin typeface="Arial" panose="020B0604020202020204" pitchFamily="34" charset="0"/>
+                <a:ea typeface="Myriad Pro Light"/>
+                <a:cs typeface="Times New Roman" panose="02020603050405020304" pitchFamily="18" charset="0"/>
+              </a:rPr>
+              <a:t>Master in Quantitative Economic Analysis </a:t>
+            </a:r>
+            <a:r>
+              <a:rPr kumimoji="0" lang="en-US" altLang="es-ES" sz="1100" b="0" i="0" u="none" strike="noStrike" cap="none" normalizeH="0" baseline="0" dirty="0" err="1">
+                <a:ln>
+                  <a:noFill/>
+                </a:ln>
+                <a:solidFill>
+                  <a:srgbClr val="F4A200"/>
+                </a:solidFill>
+                <a:effectLst/>
+                <a:latin typeface="Arial" panose="020B0604020202020204" pitchFamily="34" charset="0"/>
+                <a:ea typeface="Myriad Pro Light"/>
+                <a:cs typeface="Times New Roman" panose="02020603050405020304" pitchFamily="18" charset="0"/>
+              </a:rPr>
+              <a:t>MQuEA</a:t>
+            </a:r>
+            <a:endParaRPr kumimoji="0" lang="es-ES" altLang="es-ES" sz="300" b="0" i="0" u="none" strike="noStrike" cap="none" normalizeH="0" baseline="0" dirty="0">
+              <a:ln>
+                <a:noFill/>
+              </a:ln>
+              <a:solidFill>
+                <a:schemeClr val="tx1"/>
+              </a:solidFill>
+              <a:effectLst/>
+              <a:latin typeface="Arial" panose="020B0604020202020204" pitchFamily="34" charset="0"/>
+            </a:endParaRPr>
+          </a:p>
+        </p:txBody>
+      </p:sp>
+      <p:sp>
+        <p:nvSpPr>
+          <p:cNvPr id="7" name="Rectangle 143">
+            <a:extLst>
+              <a:ext uri="{FF2B5EF4-FFF2-40B4-BE49-F238E27FC236}">
+                <a16:creationId xmlns:a16="http://schemas.microsoft.com/office/drawing/2014/main" id="{2BE2E3EB-749E-E562-030D-C3F46E714169}"/>
+              </a:ext>
+            </a:extLst>
+          </p:cNvPr>
+          <p:cNvSpPr>
+            <a:spLocks noChangeArrowheads="1"/>
+          </p:cNvSpPr>
+          <p:nvPr/>
+        </p:nvSpPr>
+        <p:spPr bwMode="auto">
+          <a:xfrm>
+            <a:off x="6186394" y="6559955"/>
+            <a:ext cx="5730175" cy="261610"/>
+          </a:xfrm>
+          <a:prstGeom prst="rect">
+            <a:avLst/>
+          </a:prstGeom>
+          <a:noFill/>
+          <a:ln>
+            <a:noFill/>
+          </a:ln>
+          <a:effectLst/>
+          <a:extLst>
+            <a:ext uri="{909E8E84-426E-40DD-AFC4-6F175D3DCCD1}">
+              <a14:hiddenFill xmlns:a14="http://schemas.microsoft.com/office/drawing/2010/main">
+                <a:solidFill>
+                  <a:schemeClr val="accent1"/>
+                </a:solidFill>
+              </a14:hiddenFill>
+            </a:ext>
+            <a:ext uri="{91240B29-F687-4F45-9708-019B960494DF}">
+              <a14:hiddenLine xmlns:a14="http://schemas.microsoft.com/office/drawing/2010/main" w="9525">
+                <a:solidFill>
+                  <a:schemeClr val="tx1"/>
+                </a:solidFill>
+                <a:miter lim="800000"/>
+                <a:headEnd/>
+                <a:tailEnd/>
+              </a14:hiddenLine>
+            </a:ext>
+            <a:ext uri="{AF507438-7753-43E0-B8FC-AC1667EBCBE1}">
+              <a14:hiddenEffects xmlns:a14="http://schemas.microsoft.com/office/drawing/2010/main">
+                <a:effectLst>
+                  <a:outerShdw dist="35921" dir="2700000" algn="ctr" rotWithShape="0">
+                    <a:schemeClr val="bg2"/>
+                  </a:outerShdw>
+                </a:effectLst>
+              </a14:hiddenEffects>
+            </a:ext>
+          </a:extLst>
+        </p:spPr>
+        <p:txBody>
+          <a:bodyPr vert="horz" wrap="square" lIns="91440" tIns="45720" rIns="91440" bIns="45720" numCol="1" anchor="ctr" anchorCtr="0" compatLnSpc="1">
+            <a:prstTxWarp prst="textNoShape">
+              <a:avLst/>
+            </a:prstTxWarp>
+            <a:spAutoFit/>
+          </a:bodyPr>
+          <a:lstStyle/>
+          <a:p>
+            <a:pPr marL="0" marR="0" lvl="0" indent="0" algn="r" defTabSz="914400" rtl="0" eaLnBrk="0" fontAlgn="base" latinLnBrk="0" hangingPunct="0">
+              <a:lnSpc>
+                <a:spcPct val="100000"/>
+              </a:lnSpc>
+              <a:spcBef>
+                <a:spcPct val="0"/>
+              </a:spcBef>
+              <a:spcAft>
+                <a:spcPct val="0"/>
+              </a:spcAft>
+              <a:buClrTx/>
+              <a:buSzTx/>
+              <a:buFontTx/>
+              <a:buNone/>
+              <a:tabLst/>
+            </a:pPr>
+            <a:r>
+              <a:rPr kumimoji="0" lang="en-US" altLang="es-ES" sz="1100" b="0" i="0" u="none" strike="noStrike" cap="none" normalizeH="0" baseline="0" dirty="0">
+                <a:ln>
+                  <a:noFill/>
+                </a:ln>
+                <a:solidFill>
+                  <a:srgbClr val="F4A200"/>
+                </a:solidFill>
+                <a:effectLst/>
+                <a:latin typeface="Arial" panose="020B0604020202020204" pitchFamily="34" charset="0"/>
+                <a:ea typeface="Myriad Pro Light"/>
+                <a:cs typeface="Times New Roman" panose="02020603050405020304" pitchFamily="18" charset="0"/>
+              </a:rPr>
+              <a:t>Universidad </a:t>
+            </a:r>
+            <a:r>
+              <a:rPr kumimoji="0" lang="en-US" altLang="es-ES" sz="1100" b="0" i="0" u="none" strike="noStrike" cap="none" normalizeH="0" baseline="0" dirty="0" err="1">
+                <a:ln>
+                  <a:noFill/>
+                </a:ln>
+                <a:solidFill>
+                  <a:srgbClr val="F4A200"/>
+                </a:solidFill>
+                <a:effectLst/>
+                <a:latin typeface="Arial" panose="020B0604020202020204" pitchFamily="34" charset="0"/>
+                <a:ea typeface="Myriad Pro Light"/>
+                <a:cs typeface="Times New Roman" panose="02020603050405020304" pitchFamily="18" charset="0"/>
+              </a:rPr>
+              <a:t>Aut</a:t>
+            </a:r>
+            <a:r>
+              <a:rPr lang="en-US" altLang="es-ES" sz="1100" dirty="0" err="1">
+                <a:solidFill>
+                  <a:srgbClr val="F4A200"/>
+                </a:solidFill>
+                <a:latin typeface="Arial" panose="020B0604020202020204" pitchFamily="34" charset="0"/>
+                <a:ea typeface="Myriad Pro Light"/>
+                <a:cs typeface="Times New Roman" panose="02020603050405020304" pitchFamily="18" charset="0"/>
+              </a:rPr>
+              <a:t>ó</a:t>
+            </a:r>
+            <a:r>
+              <a:rPr kumimoji="0" lang="en-US" altLang="es-ES" sz="1100" b="0" i="0" u="none" strike="noStrike" cap="none" normalizeH="0" baseline="0" dirty="0" err="1">
+                <a:ln>
+                  <a:noFill/>
+                </a:ln>
+                <a:solidFill>
+                  <a:srgbClr val="F4A200"/>
+                </a:solidFill>
+                <a:effectLst/>
+                <a:latin typeface="Arial" panose="020B0604020202020204" pitchFamily="34" charset="0"/>
+                <a:ea typeface="Myriad Pro Light"/>
+                <a:cs typeface="Times New Roman" panose="02020603050405020304" pitchFamily="18" charset="0"/>
+              </a:rPr>
+              <a:t>noma</a:t>
+            </a:r>
+            <a:r>
+              <a:rPr kumimoji="0" lang="en-US" altLang="es-ES" sz="1100" b="0" i="0" u="none" strike="noStrike" cap="none" normalizeH="0" baseline="0" dirty="0">
+                <a:ln>
+                  <a:noFill/>
+                </a:ln>
+                <a:solidFill>
+                  <a:srgbClr val="F4A200"/>
+                </a:solidFill>
+                <a:effectLst/>
+                <a:latin typeface="Arial" panose="020B0604020202020204" pitchFamily="34" charset="0"/>
+                <a:ea typeface="Myriad Pro Light"/>
+                <a:cs typeface="Times New Roman" panose="02020603050405020304" pitchFamily="18" charset="0"/>
+              </a:rPr>
+              <a:t> de Madrid</a:t>
+            </a:r>
+            <a:endParaRPr kumimoji="0" lang="es-ES" altLang="es-ES" sz="300" b="0" i="0" u="none" strike="noStrike" cap="none" normalizeH="0" baseline="0" dirty="0">
+              <a:ln>
+                <a:noFill/>
+              </a:ln>
+              <a:solidFill>
+                <a:schemeClr val="tx1"/>
+              </a:solidFill>
+              <a:effectLst/>
+              <a:latin typeface="Arial" panose="020B0604020202020204" pitchFamily="34" charset="0"/>
+            </a:endParaRPr>
+          </a:p>
+        </p:txBody>
+      </p:sp>
+      <p:sp>
+        <p:nvSpPr>
+          <p:cNvPr id="3" name="TextBox 2">
+            <a:extLst>
+              <a:ext uri="{FF2B5EF4-FFF2-40B4-BE49-F238E27FC236}">
+                <a16:creationId xmlns:a16="http://schemas.microsoft.com/office/drawing/2014/main" id="{07C8DDDE-8C83-1AC8-8FA2-895D71DAD748}"/>
+              </a:ext>
+            </a:extLst>
+          </p:cNvPr>
+          <p:cNvSpPr txBox="1"/>
+          <p:nvPr/>
+        </p:nvSpPr>
+        <p:spPr>
+          <a:xfrm>
+            <a:off x="927557" y="1920898"/>
+            <a:ext cx="10610987" cy="3737946"/>
+          </a:xfrm>
+          <a:prstGeom prst="rect">
+            <a:avLst/>
+          </a:prstGeom>
+          <a:noFill/>
+        </p:spPr>
+        <p:txBody>
+          <a:bodyPr wrap="square" rtlCol="0">
+            <a:spAutoFit/>
+          </a:bodyPr>
+          <a:lstStyle/>
+          <a:p>
+            <a:pPr marL="285750" indent="-285750">
+              <a:lnSpc>
+                <a:spcPct val="150000"/>
+              </a:lnSpc>
+              <a:buFont typeface="Wingdings" panose="05000000000000000000" pitchFamily="2" charset="2"/>
+              <a:buChar char="§"/>
+            </a:pPr>
+            <a:r>
+              <a:rPr lang="en-US" sz="2000" dirty="0">
+                <a:latin typeface="+mj-lt"/>
+              </a:rPr>
+              <a:t>The total variance present in a data set (assuming that the variables have been centered to have mean zero) is defined as</a:t>
+            </a:r>
+          </a:p>
+          <a:p>
+            <a:pPr marL="285750" indent="-285750">
+              <a:lnSpc>
+                <a:spcPct val="150000"/>
+              </a:lnSpc>
+              <a:buFont typeface="Wingdings" panose="05000000000000000000" pitchFamily="2" charset="2"/>
+              <a:buChar char="§"/>
+            </a:pPr>
+            <a:endParaRPr lang="en-US" sz="2000" dirty="0">
+              <a:latin typeface="+mj-lt"/>
+            </a:endParaRPr>
+          </a:p>
+          <a:p>
+            <a:pPr marL="285750" indent="-285750">
+              <a:lnSpc>
+                <a:spcPct val="150000"/>
+              </a:lnSpc>
+              <a:buFont typeface="Wingdings" panose="05000000000000000000" pitchFamily="2" charset="2"/>
+              <a:buChar char="§"/>
+            </a:pPr>
+            <a:endParaRPr lang="en-US" sz="2000" dirty="0">
+              <a:latin typeface="+mj-lt"/>
+            </a:endParaRPr>
+          </a:p>
+          <a:p>
+            <a:pPr marL="285750" indent="-285750">
+              <a:lnSpc>
+                <a:spcPct val="150000"/>
+              </a:lnSpc>
+              <a:buFont typeface="Wingdings" panose="05000000000000000000" pitchFamily="2" charset="2"/>
+              <a:buChar char="§"/>
+            </a:pPr>
+            <a:endParaRPr lang="en-US" sz="2000" dirty="0">
+              <a:latin typeface="+mj-lt"/>
+            </a:endParaRPr>
+          </a:p>
+          <a:p>
+            <a:pPr marL="285750" indent="-285750">
+              <a:lnSpc>
+                <a:spcPct val="150000"/>
+              </a:lnSpc>
+              <a:buFont typeface="Wingdings" panose="05000000000000000000" pitchFamily="2" charset="2"/>
+              <a:buChar char="§"/>
+            </a:pPr>
+            <a:r>
+              <a:rPr lang="en-US" sz="2000" dirty="0">
+                <a:latin typeface="+mj-lt"/>
+              </a:rPr>
+              <a:t>And the variance explained by the </a:t>
+            </a:r>
+            <a:r>
+              <a:rPr lang="en-US" sz="2000" dirty="0" err="1">
+                <a:latin typeface="+mj-lt"/>
+              </a:rPr>
+              <a:t>mth</a:t>
+            </a:r>
+            <a:r>
+              <a:rPr lang="en-US" sz="2000" dirty="0">
+                <a:latin typeface="+mj-lt"/>
+              </a:rPr>
+              <a:t> principal component is</a:t>
+            </a:r>
+          </a:p>
+          <a:p>
+            <a:pPr marL="285750" indent="-285750">
+              <a:lnSpc>
+                <a:spcPct val="150000"/>
+              </a:lnSpc>
+              <a:buFont typeface="Wingdings" panose="05000000000000000000" pitchFamily="2" charset="2"/>
+              <a:buChar char="§"/>
+            </a:pPr>
+            <a:endParaRPr lang="en-US" sz="2000" dirty="0">
+              <a:latin typeface="+mj-lt"/>
+            </a:endParaRPr>
+          </a:p>
+          <a:p>
+            <a:pPr marL="285750" indent="-285750">
+              <a:lnSpc>
+                <a:spcPct val="150000"/>
+              </a:lnSpc>
+              <a:buFont typeface="Wingdings" panose="05000000000000000000" pitchFamily="2" charset="2"/>
+              <a:buChar char="§"/>
+            </a:pPr>
+            <a:endParaRPr lang="en-US" sz="2000" dirty="0">
+              <a:latin typeface="+mj-lt"/>
+            </a:endParaRPr>
+          </a:p>
+        </p:txBody>
+      </p:sp>
+      <p:pic>
+        <p:nvPicPr>
+          <p:cNvPr id="8" name="Picture 7">
+            <a:extLst>
+              <a:ext uri="{FF2B5EF4-FFF2-40B4-BE49-F238E27FC236}">
+                <a16:creationId xmlns:a16="http://schemas.microsoft.com/office/drawing/2014/main" id="{F0EC4594-E793-1001-D481-6041602BB59B}"/>
+              </a:ext>
+            </a:extLst>
+          </p:cNvPr>
+          <p:cNvPicPr>
+            <a:picLocks noChangeAspect="1"/>
+          </p:cNvPicPr>
+          <p:nvPr/>
+        </p:nvPicPr>
+        <p:blipFill>
+          <a:blip r:embed="rId2"/>
+          <a:stretch>
+            <a:fillRect/>
+          </a:stretch>
+        </p:blipFill>
+        <p:spPr>
+          <a:xfrm>
+            <a:off x="4275771" y="3094206"/>
+            <a:ext cx="3640455" cy="965835"/>
+          </a:xfrm>
+          <a:prstGeom prst="rect">
+            <a:avLst/>
+          </a:prstGeom>
+        </p:spPr>
+      </p:pic>
+      <p:pic>
+        <p:nvPicPr>
+          <p:cNvPr id="10" name="Picture 9">
+            <a:extLst>
+              <a:ext uri="{FF2B5EF4-FFF2-40B4-BE49-F238E27FC236}">
+                <a16:creationId xmlns:a16="http://schemas.microsoft.com/office/drawing/2014/main" id="{491A617E-1CE6-0194-4C8B-0F05C4639547}"/>
+              </a:ext>
+            </a:extLst>
+          </p:cNvPr>
+          <p:cNvPicPr>
+            <a:picLocks noChangeAspect="1"/>
+          </p:cNvPicPr>
+          <p:nvPr/>
+        </p:nvPicPr>
+        <p:blipFill>
+          <a:blip r:embed="rId3"/>
+          <a:stretch>
+            <a:fillRect/>
+          </a:stretch>
+        </p:blipFill>
+        <p:spPr>
+          <a:xfrm>
+            <a:off x="4662725" y="5070788"/>
+            <a:ext cx="2866549" cy="1188720"/>
+          </a:xfrm>
+          <a:prstGeom prst="rect">
+            <a:avLst/>
+          </a:prstGeom>
+        </p:spPr>
+      </p:pic>
+    </p:spTree>
+    <p:extLst>
+      <p:ext uri="{BB962C8B-B14F-4D97-AF65-F5344CB8AC3E}">
+        <p14:creationId xmlns:p14="http://schemas.microsoft.com/office/powerpoint/2010/main" val="4108215469"/>
+      </p:ext>
+    </p:extLst>
+  </p:cSld>
+  <p:clrMapOvr>
+    <a:masterClrMapping/>
+  </p:clrMapOvr>
+</p:sld>
+</file>
+
+<file path=ppt/slides/slide13.xml><?xml version="1.0" encoding="utf-8"?>
+<p:sld xmlns:a="http://schemas.openxmlformats.org/drawingml/2006/main" xmlns:r="http://schemas.openxmlformats.org/officeDocument/2006/relationships" xmlns:p="http://schemas.openxmlformats.org/presentationml/2006/main">
+  <p:cSld>
+    <p:spTree>
+      <p:nvGrpSpPr>
+        <p:cNvPr id="1" name=""/>
+        <p:cNvGrpSpPr/>
+        <p:nvPr/>
+      </p:nvGrpSpPr>
+      <p:grpSpPr>
+        <a:xfrm>
+          <a:off x="0" y="0"/>
+          <a:ext cx="0" cy="0"/>
+          <a:chOff x="0" y="0"/>
+          <a:chExt cx="0" cy="0"/>
+        </a:xfrm>
+      </p:grpSpPr>
+      <p:sp>
+        <p:nvSpPr>
+          <p:cNvPr id="2" name="Title 1">
+            <a:extLst>
+              <a:ext uri="{FF2B5EF4-FFF2-40B4-BE49-F238E27FC236}">
+                <a16:creationId xmlns:a16="http://schemas.microsoft.com/office/drawing/2014/main" id="{31C29F6F-54A2-5964-F2B2-982952460386}"/>
+              </a:ext>
+            </a:extLst>
+          </p:cNvPr>
+          <p:cNvSpPr>
+            <a:spLocks noGrp="1"/>
+          </p:cNvSpPr>
+          <p:nvPr>
+            <p:ph type="title"/>
+          </p:nvPr>
+        </p:nvSpPr>
+        <p:spPr/>
+        <p:txBody>
+          <a:bodyPr>
+            <a:normAutofit/>
+          </a:bodyPr>
+          <a:lstStyle/>
+          <a:p>
+            <a:r>
+              <a:rPr lang="en-US" sz="4000" dirty="0"/>
+              <a:t>Principal Component Analysis (PCA)</a:t>
+            </a:r>
+          </a:p>
+        </p:txBody>
+      </p:sp>
+      <p:sp>
+        <p:nvSpPr>
+          <p:cNvPr id="4" name="Rectángulo 3">
+            <a:extLst>
+              <a:ext uri="{FF2B5EF4-FFF2-40B4-BE49-F238E27FC236}">
+                <a16:creationId xmlns:a16="http://schemas.microsoft.com/office/drawing/2014/main" id="{7BF95E35-4D9C-7F59-F308-C61FF9CD1B58}"/>
+              </a:ext>
+            </a:extLst>
+          </p:cNvPr>
+          <p:cNvSpPr/>
+          <p:nvPr/>
+        </p:nvSpPr>
+        <p:spPr>
+          <a:xfrm>
+            <a:off x="0" y="0"/>
+            <a:ext cx="374469" cy="6858000"/>
+          </a:xfrm>
+          <a:prstGeom prst="rect">
+            <a:avLst/>
+          </a:prstGeom>
+        </p:spPr>
+        <p:style>
+          <a:lnRef idx="2">
+            <a:schemeClr val="accent2">
+              <a:shade val="50000"/>
+            </a:schemeClr>
+          </a:lnRef>
+          <a:fillRef idx="1">
+            <a:schemeClr val="accent2"/>
+          </a:fillRef>
+          <a:effectRef idx="0">
+            <a:schemeClr val="accent2"/>
+          </a:effectRef>
+          <a:fontRef idx="minor">
+            <a:schemeClr val="lt1"/>
+          </a:fontRef>
+        </p:style>
+        <p:txBody>
+          <a:bodyPr rtlCol="0" anchor="ctr"/>
+          <a:lstStyle/>
+          <a:p>
+            <a:pPr algn="ctr"/>
+            <a:endParaRPr lang="es-ES"/>
+          </a:p>
+        </p:txBody>
+      </p:sp>
+      <p:sp>
+        <p:nvSpPr>
+          <p:cNvPr id="6" name="Rectangle 143">
+            <a:extLst>
+              <a:ext uri="{FF2B5EF4-FFF2-40B4-BE49-F238E27FC236}">
+                <a16:creationId xmlns:a16="http://schemas.microsoft.com/office/drawing/2014/main" id="{C9A975F5-C7DC-9274-20CA-B5939A2A86BD}"/>
+              </a:ext>
+            </a:extLst>
+          </p:cNvPr>
+          <p:cNvSpPr>
+            <a:spLocks noChangeArrowheads="1"/>
+          </p:cNvSpPr>
+          <p:nvPr/>
+        </p:nvSpPr>
+        <p:spPr bwMode="auto">
+          <a:xfrm>
+            <a:off x="448342" y="6549317"/>
+            <a:ext cx="5730175" cy="261610"/>
+          </a:xfrm>
+          <a:prstGeom prst="rect">
+            <a:avLst/>
+          </a:prstGeom>
+          <a:noFill/>
+          <a:ln>
+            <a:noFill/>
+          </a:ln>
+          <a:effectLst/>
+          <a:extLst>
+            <a:ext uri="{909E8E84-426E-40DD-AFC4-6F175D3DCCD1}">
+              <a14:hiddenFill xmlns:a14="http://schemas.microsoft.com/office/drawing/2010/main">
+                <a:solidFill>
+                  <a:schemeClr val="accent1"/>
+                </a:solidFill>
+              </a14:hiddenFill>
+            </a:ext>
+            <a:ext uri="{91240B29-F687-4F45-9708-019B960494DF}">
+              <a14:hiddenLine xmlns:a14="http://schemas.microsoft.com/office/drawing/2010/main" w="9525">
+                <a:solidFill>
+                  <a:schemeClr val="tx1"/>
+                </a:solidFill>
+                <a:miter lim="800000"/>
+                <a:headEnd/>
+                <a:tailEnd/>
+              </a14:hiddenLine>
+            </a:ext>
+            <a:ext uri="{AF507438-7753-43E0-B8FC-AC1667EBCBE1}">
+              <a14:hiddenEffects xmlns:a14="http://schemas.microsoft.com/office/drawing/2010/main">
+                <a:effectLst>
+                  <a:outerShdw dist="35921" dir="2700000" algn="ctr" rotWithShape="0">
+                    <a:schemeClr val="bg2"/>
+                  </a:outerShdw>
+                </a:effectLst>
+              </a14:hiddenEffects>
+            </a:ext>
+          </a:extLst>
+        </p:spPr>
+        <p:txBody>
+          <a:bodyPr vert="horz" wrap="square" lIns="91440" tIns="45720" rIns="91440" bIns="45720" numCol="1" anchor="ctr" anchorCtr="0" compatLnSpc="1">
+            <a:prstTxWarp prst="textNoShape">
+              <a:avLst/>
+            </a:prstTxWarp>
+            <a:spAutoFit/>
+          </a:bodyPr>
+          <a:lstStyle/>
+          <a:p>
+            <a:pPr marL="0" marR="0" lvl="0" indent="0" algn="l" defTabSz="914400" rtl="0" eaLnBrk="0" fontAlgn="base" latinLnBrk="0" hangingPunct="0">
+              <a:lnSpc>
+                <a:spcPct val="100000"/>
+              </a:lnSpc>
+              <a:spcBef>
+                <a:spcPct val="0"/>
+              </a:spcBef>
+              <a:spcAft>
+                <a:spcPct val="0"/>
+              </a:spcAft>
+              <a:buClrTx/>
+              <a:buSzTx/>
+              <a:buFontTx/>
+              <a:buNone/>
+              <a:tabLst/>
+            </a:pPr>
+            <a:r>
+              <a:rPr kumimoji="0" lang="en-US" altLang="es-ES" sz="1100" b="0" i="0" u="none" strike="noStrike" cap="none" normalizeH="0" baseline="0" dirty="0">
+                <a:ln>
+                  <a:noFill/>
+                </a:ln>
+                <a:solidFill>
+                  <a:srgbClr val="F4A200"/>
+                </a:solidFill>
+                <a:effectLst/>
+                <a:latin typeface="Arial" panose="020B0604020202020204" pitchFamily="34" charset="0"/>
+                <a:ea typeface="Myriad Pro Light"/>
+                <a:cs typeface="Times New Roman" panose="02020603050405020304" pitchFamily="18" charset="0"/>
+              </a:rPr>
+              <a:t>Master in Quantitative Economic Analysis </a:t>
+            </a:r>
+            <a:r>
+              <a:rPr kumimoji="0" lang="en-US" altLang="es-ES" sz="1100" b="0" i="0" u="none" strike="noStrike" cap="none" normalizeH="0" baseline="0" dirty="0" err="1">
+                <a:ln>
+                  <a:noFill/>
+                </a:ln>
+                <a:solidFill>
+                  <a:srgbClr val="F4A200"/>
+                </a:solidFill>
+                <a:effectLst/>
+                <a:latin typeface="Arial" panose="020B0604020202020204" pitchFamily="34" charset="0"/>
+                <a:ea typeface="Myriad Pro Light"/>
+                <a:cs typeface="Times New Roman" panose="02020603050405020304" pitchFamily="18" charset="0"/>
+              </a:rPr>
+              <a:t>MQuEA</a:t>
+            </a:r>
+            <a:endParaRPr kumimoji="0" lang="es-ES" altLang="es-ES" sz="300" b="0" i="0" u="none" strike="noStrike" cap="none" normalizeH="0" baseline="0" dirty="0">
+              <a:ln>
+                <a:noFill/>
+              </a:ln>
+              <a:solidFill>
+                <a:schemeClr val="tx1"/>
+              </a:solidFill>
+              <a:effectLst/>
+              <a:latin typeface="Arial" panose="020B0604020202020204" pitchFamily="34" charset="0"/>
+            </a:endParaRPr>
+          </a:p>
+        </p:txBody>
+      </p:sp>
+      <p:sp>
+        <p:nvSpPr>
+          <p:cNvPr id="7" name="Rectangle 143">
+            <a:extLst>
+              <a:ext uri="{FF2B5EF4-FFF2-40B4-BE49-F238E27FC236}">
+                <a16:creationId xmlns:a16="http://schemas.microsoft.com/office/drawing/2014/main" id="{2BE2E3EB-749E-E562-030D-C3F46E714169}"/>
+              </a:ext>
+            </a:extLst>
+          </p:cNvPr>
+          <p:cNvSpPr>
+            <a:spLocks noChangeArrowheads="1"/>
+          </p:cNvSpPr>
+          <p:nvPr/>
+        </p:nvSpPr>
+        <p:spPr bwMode="auto">
+          <a:xfrm>
+            <a:off x="6186394" y="6559955"/>
+            <a:ext cx="5730175" cy="261610"/>
+          </a:xfrm>
+          <a:prstGeom prst="rect">
+            <a:avLst/>
+          </a:prstGeom>
+          <a:noFill/>
+          <a:ln>
+            <a:noFill/>
+          </a:ln>
+          <a:effectLst/>
+          <a:extLst>
+            <a:ext uri="{909E8E84-426E-40DD-AFC4-6F175D3DCCD1}">
+              <a14:hiddenFill xmlns:a14="http://schemas.microsoft.com/office/drawing/2010/main">
+                <a:solidFill>
+                  <a:schemeClr val="accent1"/>
+                </a:solidFill>
+              </a14:hiddenFill>
+            </a:ext>
+            <a:ext uri="{91240B29-F687-4F45-9708-019B960494DF}">
+              <a14:hiddenLine xmlns:a14="http://schemas.microsoft.com/office/drawing/2010/main" w="9525">
+                <a:solidFill>
+                  <a:schemeClr val="tx1"/>
+                </a:solidFill>
+                <a:miter lim="800000"/>
+                <a:headEnd/>
+                <a:tailEnd/>
+              </a14:hiddenLine>
+            </a:ext>
+            <a:ext uri="{AF507438-7753-43E0-B8FC-AC1667EBCBE1}">
+              <a14:hiddenEffects xmlns:a14="http://schemas.microsoft.com/office/drawing/2010/main">
+                <a:effectLst>
+                  <a:outerShdw dist="35921" dir="2700000" algn="ctr" rotWithShape="0">
+                    <a:schemeClr val="bg2"/>
+                  </a:outerShdw>
+                </a:effectLst>
+              </a14:hiddenEffects>
+            </a:ext>
+          </a:extLst>
+        </p:spPr>
+        <p:txBody>
+          <a:bodyPr vert="horz" wrap="square" lIns="91440" tIns="45720" rIns="91440" bIns="45720" numCol="1" anchor="ctr" anchorCtr="0" compatLnSpc="1">
+            <a:prstTxWarp prst="textNoShape">
+              <a:avLst/>
+            </a:prstTxWarp>
+            <a:spAutoFit/>
+          </a:bodyPr>
+          <a:lstStyle/>
+          <a:p>
+            <a:pPr marL="0" marR="0" lvl="0" indent="0" algn="r" defTabSz="914400" rtl="0" eaLnBrk="0" fontAlgn="base" latinLnBrk="0" hangingPunct="0">
+              <a:lnSpc>
+                <a:spcPct val="100000"/>
+              </a:lnSpc>
+              <a:spcBef>
+                <a:spcPct val="0"/>
+              </a:spcBef>
+              <a:spcAft>
+                <a:spcPct val="0"/>
+              </a:spcAft>
+              <a:buClrTx/>
+              <a:buSzTx/>
+              <a:buFontTx/>
+              <a:buNone/>
+              <a:tabLst/>
+            </a:pPr>
+            <a:r>
+              <a:rPr kumimoji="0" lang="en-US" altLang="es-ES" sz="1100" b="0" i="0" u="none" strike="noStrike" cap="none" normalizeH="0" baseline="0" dirty="0">
+                <a:ln>
+                  <a:noFill/>
+                </a:ln>
+                <a:solidFill>
+                  <a:srgbClr val="F4A200"/>
+                </a:solidFill>
+                <a:effectLst/>
+                <a:latin typeface="Arial" panose="020B0604020202020204" pitchFamily="34" charset="0"/>
+                <a:ea typeface="Myriad Pro Light"/>
+                <a:cs typeface="Times New Roman" panose="02020603050405020304" pitchFamily="18" charset="0"/>
+              </a:rPr>
+              <a:t>Universidad </a:t>
+            </a:r>
+            <a:r>
+              <a:rPr kumimoji="0" lang="en-US" altLang="es-ES" sz="1100" b="0" i="0" u="none" strike="noStrike" cap="none" normalizeH="0" baseline="0" dirty="0" err="1">
+                <a:ln>
+                  <a:noFill/>
+                </a:ln>
+                <a:solidFill>
+                  <a:srgbClr val="F4A200"/>
+                </a:solidFill>
+                <a:effectLst/>
+                <a:latin typeface="Arial" panose="020B0604020202020204" pitchFamily="34" charset="0"/>
+                <a:ea typeface="Myriad Pro Light"/>
+                <a:cs typeface="Times New Roman" panose="02020603050405020304" pitchFamily="18" charset="0"/>
+              </a:rPr>
+              <a:t>Aut</a:t>
+            </a:r>
+            <a:r>
+              <a:rPr lang="en-US" altLang="es-ES" sz="1100" dirty="0" err="1">
+                <a:solidFill>
+                  <a:srgbClr val="F4A200"/>
+                </a:solidFill>
+                <a:latin typeface="Arial" panose="020B0604020202020204" pitchFamily="34" charset="0"/>
+                <a:ea typeface="Myriad Pro Light"/>
+                <a:cs typeface="Times New Roman" panose="02020603050405020304" pitchFamily="18" charset="0"/>
+              </a:rPr>
+              <a:t>ó</a:t>
+            </a:r>
+            <a:r>
+              <a:rPr kumimoji="0" lang="en-US" altLang="es-ES" sz="1100" b="0" i="0" u="none" strike="noStrike" cap="none" normalizeH="0" baseline="0" dirty="0" err="1">
+                <a:ln>
+                  <a:noFill/>
+                </a:ln>
+                <a:solidFill>
+                  <a:srgbClr val="F4A200"/>
+                </a:solidFill>
+                <a:effectLst/>
+                <a:latin typeface="Arial" panose="020B0604020202020204" pitchFamily="34" charset="0"/>
+                <a:ea typeface="Myriad Pro Light"/>
+                <a:cs typeface="Times New Roman" panose="02020603050405020304" pitchFamily="18" charset="0"/>
+              </a:rPr>
+              <a:t>noma</a:t>
+            </a:r>
+            <a:r>
+              <a:rPr kumimoji="0" lang="en-US" altLang="es-ES" sz="1100" b="0" i="0" u="none" strike="noStrike" cap="none" normalizeH="0" baseline="0" dirty="0">
+                <a:ln>
+                  <a:noFill/>
+                </a:ln>
+                <a:solidFill>
+                  <a:srgbClr val="F4A200"/>
+                </a:solidFill>
+                <a:effectLst/>
+                <a:latin typeface="Arial" panose="020B0604020202020204" pitchFamily="34" charset="0"/>
+                <a:ea typeface="Myriad Pro Light"/>
+                <a:cs typeface="Times New Roman" panose="02020603050405020304" pitchFamily="18" charset="0"/>
+              </a:rPr>
+              <a:t> de Madrid</a:t>
+            </a:r>
+            <a:endParaRPr kumimoji="0" lang="es-ES" altLang="es-ES" sz="300" b="0" i="0" u="none" strike="noStrike" cap="none" normalizeH="0" baseline="0" dirty="0">
+              <a:ln>
+                <a:noFill/>
+              </a:ln>
+              <a:solidFill>
+                <a:schemeClr val="tx1"/>
+              </a:solidFill>
+              <a:effectLst/>
+              <a:latin typeface="Arial" panose="020B0604020202020204" pitchFamily="34" charset="0"/>
+            </a:endParaRPr>
+          </a:p>
+        </p:txBody>
+      </p:sp>
+      <p:sp>
+        <p:nvSpPr>
+          <p:cNvPr id="3" name="TextBox 2">
+            <a:extLst>
+              <a:ext uri="{FF2B5EF4-FFF2-40B4-BE49-F238E27FC236}">
+                <a16:creationId xmlns:a16="http://schemas.microsoft.com/office/drawing/2014/main" id="{07C8DDDE-8C83-1AC8-8FA2-895D71DAD748}"/>
+              </a:ext>
+            </a:extLst>
+          </p:cNvPr>
+          <p:cNvSpPr txBox="1"/>
+          <p:nvPr/>
+        </p:nvSpPr>
+        <p:spPr>
+          <a:xfrm>
+            <a:off x="927557" y="1920898"/>
+            <a:ext cx="10610987" cy="2352952"/>
+          </a:xfrm>
+          <a:prstGeom prst="rect">
+            <a:avLst/>
+          </a:prstGeom>
+          <a:noFill/>
+        </p:spPr>
+        <p:txBody>
+          <a:bodyPr wrap="square" rtlCol="0">
+            <a:spAutoFit/>
+          </a:bodyPr>
+          <a:lstStyle/>
+          <a:p>
+            <a:pPr marL="285750" indent="-285750">
+              <a:lnSpc>
+                <a:spcPct val="150000"/>
+              </a:lnSpc>
+              <a:buFont typeface="Wingdings" panose="05000000000000000000" pitchFamily="2" charset="2"/>
+              <a:buChar char="§"/>
+            </a:pPr>
+            <a:r>
+              <a:rPr lang="en-US" sz="2000" dirty="0">
+                <a:latin typeface="+mj-lt"/>
+              </a:rPr>
+              <a:t>It can be shown that </a:t>
+            </a:r>
+          </a:p>
+          <a:p>
+            <a:pPr marL="285750" indent="-285750">
+              <a:lnSpc>
+                <a:spcPct val="150000"/>
+              </a:lnSpc>
+              <a:buFont typeface="Wingdings" panose="05000000000000000000" pitchFamily="2" charset="2"/>
+              <a:buChar char="§"/>
+            </a:pPr>
+            <a:endParaRPr lang="en-US" sz="2000" dirty="0">
+              <a:latin typeface="+mj-lt"/>
+            </a:endParaRPr>
+          </a:p>
+          <a:p>
+            <a:pPr marL="285750" indent="-285750">
+              <a:lnSpc>
+                <a:spcPct val="150000"/>
+              </a:lnSpc>
+              <a:buFont typeface="Wingdings" panose="05000000000000000000" pitchFamily="2" charset="2"/>
+              <a:buChar char="§"/>
+            </a:pPr>
+            <a:r>
+              <a:rPr lang="en-US" sz="2000" dirty="0">
+                <a:latin typeface="+mj-lt"/>
+              </a:rPr>
+              <a:t>Therefore, the PVE of the </a:t>
+            </a:r>
+            <a:r>
+              <a:rPr lang="en-US" sz="2000" dirty="0" err="1">
+                <a:latin typeface="+mj-lt"/>
+              </a:rPr>
+              <a:t>mth</a:t>
+            </a:r>
+            <a:r>
+              <a:rPr lang="en-US" sz="2000" dirty="0">
+                <a:latin typeface="+mj-lt"/>
+              </a:rPr>
+              <a:t> principal component is given by the following positive quantity between 0 and 1.</a:t>
+            </a:r>
+          </a:p>
+          <a:p>
+            <a:pPr marL="285750" indent="-285750">
+              <a:lnSpc>
+                <a:spcPct val="150000"/>
+              </a:lnSpc>
+              <a:buFont typeface="Wingdings" panose="05000000000000000000" pitchFamily="2" charset="2"/>
+              <a:buChar char="§"/>
+            </a:pPr>
+            <a:endParaRPr lang="en-US" sz="2000" dirty="0">
+              <a:latin typeface="+mj-lt"/>
+            </a:endParaRPr>
+          </a:p>
+        </p:txBody>
+      </p:sp>
+      <p:pic>
+        <p:nvPicPr>
+          <p:cNvPr id="12" name="Picture 11">
+            <a:extLst>
+              <a:ext uri="{FF2B5EF4-FFF2-40B4-BE49-F238E27FC236}">
+                <a16:creationId xmlns:a16="http://schemas.microsoft.com/office/drawing/2014/main" id="{18711438-9479-7457-110D-4EE9B3FD2F4C}"/>
+              </a:ext>
+            </a:extLst>
+          </p:cNvPr>
+          <p:cNvPicPr>
+            <a:picLocks noChangeAspect="1"/>
+          </p:cNvPicPr>
+          <p:nvPr/>
+        </p:nvPicPr>
+        <p:blipFill>
+          <a:blip r:embed="rId2"/>
+          <a:stretch>
+            <a:fillRect/>
+          </a:stretch>
+        </p:blipFill>
+        <p:spPr>
+          <a:xfrm>
+            <a:off x="3482714" y="1920897"/>
+            <a:ext cx="3855720" cy="534353"/>
+          </a:xfrm>
+          <a:prstGeom prst="rect">
+            <a:avLst/>
+          </a:prstGeom>
+        </p:spPr>
+      </p:pic>
+      <p:pic>
+        <p:nvPicPr>
+          <p:cNvPr id="9" name="Picture 8">
+            <a:extLst>
+              <a:ext uri="{FF2B5EF4-FFF2-40B4-BE49-F238E27FC236}">
+                <a16:creationId xmlns:a16="http://schemas.microsoft.com/office/drawing/2014/main" id="{096D8394-73F4-459D-ED65-06E54CF72E83}"/>
+              </a:ext>
+            </a:extLst>
+          </p:cNvPr>
+          <p:cNvPicPr>
+            <a:picLocks noChangeAspect="1"/>
+          </p:cNvPicPr>
+          <p:nvPr/>
+        </p:nvPicPr>
+        <p:blipFill>
+          <a:blip r:embed="rId3"/>
+          <a:stretch>
+            <a:fillRect/>
+          </a:stretch>
+        </p:blipFill>
+        <p:spPr>
+          <a:xfrm>
+            <a:off x="4898161" y="3856361"/>
+            <a:ext cx="2414588" cy="1214438"/>
+          </a:xfrm>
+          <a:prstGeom prst="rect">
+            <a:avLst/>
+          </a:prstGeom>
+        </p:spPr>
+      </p:pic>
+    </p:spTree>
+    <p:extLst>
+      <p:ext uri="{BB962C8B-B14F-4D97-AF65-F5344CB8AC3E}">
+        <p14:creationId xmlns:p14="http://schemas.microsoft.com/office/powerpoint/2010/main" val="788736684"/>
+      </p:ext>
+    </p:extLst>
+  </p:cSld>
+  <p:clrMapOvr>
+    <a:masterClrMapping/>
+  </p:clrMapOvr>
+</p:sld>
+</file>
+
+<file path=ppt/slides/slide14.xml><?xml version="1.0" encoding="utf-8"?>
 <p:sld xmlns:a="http://schemas.openxmlformats.org/drawingml/2006/main" xmlns:r="http://schemas.openxmlformats.org/officeDocument/2006/relationships" xmlns:p="http://schemas.openxmlformats.org/presentationml/2006/main">
   <p:cSld>
     <p:spTree>
@@ -26501,7 +25325,7 @@
                 <a:latin typeface="+mj-lt"/>
                 <a:cs typeface="Times New Roman" panose="02020603050405020304" pitchFamily="18" charset="0"/>
               </a:rPr>
-              <a:t>Projection and Manifold</a:t>
+              <a:t>Projection</a:t>
             </a:r>
           </a:p>
           <a:p>
@@ -26519,13 +25343,9 @@
               </a:rPr>
               <a:t>Principal Component Analysis (PCA)</a:t>
             </a:r>
-            <a:endParaRPr lang="en-US" dirty="0">
-              <a:latin typeface="+mj-lt"/>
-              <a:cs typeface="Times New Roman" panose="02020603050405020304" pitchFamily="18" charset="0"/>
-            </a:endParaRPr>
           </a:p>
           <a:p>
-            <a:pPr marL="457200" indent="-457200" algn="l">
+            <a:pPr marL="914400" lvl="1" indent="-457200" algn="l">
               <a:lnSpc>
                 <a:spcPct val="100000"/>
               </a:lnSpc>
@@ -26533,15 +25353,15 @@
               <a:buChar char="§"/>
             </a:pPr>
             <a:r>
-              <a:rPr lang="en-US" sz="2800" dirty="0">
+              <a:rPr lang="en-US" sz="2400" dirty="0">
                 <a:latin typeface="+mj-lt"/>
                 <a:cs typeface="Times New Roman" panose="02020603050405020304" pitchFamily="18" charset="0"/>
               </a:rPr>
-              <a:t>Kernel Principal Component Analysis</a:t>
+              <a:t>Rationale</a:t>
             </a:r>
           </a:p>
           <a:p>
-            <a:pPr marL="457200" indent="-457200" algn="l">
+            <a:pPr marL="914400" lvl="1" indent="-457200" algn="l">
               <a:lnSpc>
                 <a:spcPct val="100000"/>
               </a:lnSpc>
@@ -26549,11 +25369,27 @@
               <a:buChar char="§"/>
             </a:pPr>
             <a:r>
-              <a:rPr lang="en-US" sz="2800" dirty="0">
+              <a:rPr lang="en-US" sz="2400" dirty="0">
                 <a:latin typeface="+mj-lt"/>
                 <a:cs typeface="Times New Roman" panose="02020603050405020304" pitchFamily="18" charset="0"/>
               </a:rPr>
-              <a:t>Other dimensionality reduction techniques</a:t>
+              <a:t>Variance</a:t>
+            </a:r>
+          </a:p>
+          <a:p>
+            <a:pPr marL="914400" lvl="1" indent="-457200" algn="l">
+              <a:lnSpc>
+                <a:spcPct val="100000"/>
+              </a:lnSpc>
+              <a:buFont typeface="Wingdings" panose="05000000000000000000" pitchFamily="2" charset="2"/>
+              <a:buChar char="§"/>
+            </a:pPr>
+            <a:r>
+              <a:rPr lang="en-US" sz="2400" dirty="0">
+                <a:latin typeface="+mj-lt"/>
+                <a:cs typeface="Times New Roman" panose="02020603050405020304" pitchFamily="18" charset="0"/>
+              </a:rPr>
+              <a:t>Right number of components</a:t>
             </a:r>
           </a:p>
         </p:txBody>
@@ -28547,7 +27383,7 @@
         </p:blipFill>
         <p:spPr>
           <a:xfrm>
-            <a:off x="1355577" y="2531875"/>
+            <a:off x="1355577" y="2929110"/>
             <a:ext cx="4389129" cy="2855982"/>
           </a:xfrm>
           <a:prstGeom prst="rect">
@@ -28583,7 +27419,7 @@
         </p:blipFill>
         <p:spPr>
           <a:xfrm>
-            <a:off x="7098499" y="2470685"/>
+            <a:off x="7098499" y="2867920"/>
             <a:ext cx="3511391" cy="2978363"/>
           </a:xfrm>
           <a:prstGeom prst="rect">
@@ -28606,7 +27442,7 @@
         <p:spPr>
           <a:xfrm>
             <a:off x="927557" y="1920898"/>
-            <a:ext cx="10610987" cy="400110"/>
+            <a:ext cx="10610987" cy="707886"/>
           </a:xfrm>
           <a:prstGeom prst="rect">
             <a:avLst/>
@@ -28624,51 +27460,121 @@
               <a:buChar char="§"/>
             </a:pPr>
             <a:r>
+              <a:rPr lang="en-US" sz="2000" b="1" dirty="0">
+                <a:latin typeface="+mj-lt"/>
+              </a:rPr>
+              <a:t>Projection</a:t>
+            </a:r>
+            <a:r>
               <a:rPr lang="en-US" sz="2000" dirty="0">
                 <a:latin typeface="+mj-lt"/>
               </a:rPr>
-              <a:t>Projection (drop one dimension)</a:t>
+              <a:t>: In this case all training instances lie close to a plane. If we project every training instance perpendicularly onto this subspace we go from 3D to 2D</a:t>
             </a:r>
           </a:p>
         </p:txBody>
       </p:sp>
       <p:sp>
         <p:nvSpPr>
-          <p:cNvPr id="17" name="TextBox 16">
+          <p:cNvPr id="3" name="Oval 2">
             <a:extLst>
               <a:ext uri="{FF2B5EF4-FFF2-40B4-BE49-F238E27FC236}">
-                <a16:creationId xmlns:a16="http://schemas.microsoft.com/office/drawing/2014/main" id="{244D8090-B349-5945-C647-12C1D9809D40}"/>
+                <a16:creationId xmlns:a16="http://schemas.microsoft.com/office/drawing/2014/main" id="{1363874D-6B03-E8B8-21AD-92D5E492549D}"/>
               </a:ext>
             </a:extLst>
           </p:cNvPr>
-          <p:cNvSpPr txBox="1"/>
+          <p:cNvSpPr/>
           <p:nvPr/>
         </p:nvSpPr>
         <p:spPr>
           <a:xfrm>
-            <a:off x="2009411" y="5762694"/>
-            <a:ext cx="4210778" cy="338554"/>
+            <a:off x="6962931" y="3859967"/>
+            <a:ext cx="449705" cy="404735"/>
           </a:xfrm>
-          <a:prstGeom prst="rect">
+          <a:prstGeom prst="ellipse">
             <a:avLst/>
           </a:prstGeom>
           <a:noFill/>
+          <a:ln>
+            <a:solidFill>
+              <a:srgbClr val="FF0000"/>
+            </a:solidFill>
+          </a:ln>
         </p:spPr>
+        <p:style>
+          <a:lnRef idx="2">
+            <a:schemeClr val="accent1">
+              <a:shade val="15000"/>
+            </a:schemeClr>
+          </a:lnRef>
+          <a:fillRef idx="1">
+            <a:schemeClr val="accent1"/>
+          </a:fillRef>
+          <a:effectRef idx="0">
+            <a:schemeClr val="accent1"/>
+          </a:effectRef>
+          <a:fontRef idx="minor">
+            <a:schemeClr val="lt1"/>
+          </a:fontRef>
+        </p:style>
         <p:txBody>
-          <a:bodyPr wrap="square" rtlCol="0">
-            <a:spAutoFit/>
-          </a:bodyPr>
+          <a:bodyPr rtlCol="0" anchor="ctr"/>
           <a:lstStyle/>
           <a:p>
-            <a:r>
-              <a:rPr lang="en-US" sz="1600" b="1" dirty="0">
-                <a:solidFill>
-                  <a:srgbClr val="FF0000"/>
-                </a:solidFill>
-                <a:latin typeface="+mj-lt"/>
-              </a:rPr>
-              <a:t>all instances seem to lie close to a plane</a:t>
-            </a:r>
+            <a:pPr algn="ctr"/>
+            <a:endParaRPr lang="en-US"/>
+          </a:p>
+        </p:txBody>
+      </p:sp>
+      <p:sp>
+        <p:nvSpPr>
+          <p:cNvPr id="5" name="Oval 4">
+            <a:extLst>
+              <a:ext uri="{FF2B5EF4-FFF2-40B4-BE49-F238E27FC236}">
+                <a16:creationId xmlns:a16="http://schemas.microsoft.com/office/drawing/2014/main" id="{162B3E94-1C8C-4103-567F-16183FE4D170}"/>
+              </a:ext>
+            </a:extLst>
+          </p:cNvPr>
+          <p:cNvSpPr/>
+          <p:nvPr/>
+        </p:nvSpPr>
+        <p:spPr>
+          <a:xfrm>
+            <a:off x="8899160" y="5593830"/>
+            <a:ext cx="449705" cy="404735"/>
+          </a:xfrm>
+          <a:prstGeom prst="ellipse">
+            <a:avLst/>
+          </a:prstGeom>
+          <a:noFill/>
+          <a:ln>
+            <a:solidFill>
+              <a:srgbClr val="FF0000"/>
+            </a:solidFill>
+          </a:ln>
+        </p:spPr>
+        <p:style>
+          <a:lnRef idx="2">
+            <a:schemeClr val="accent1">
+              <a:shade val="15000"/>
+            </a:schemeClr>
+          </a:lnRef>
+          <a:fillRef idx="1">
+            <a:schemeClr val="accent1"/>
+          </a:fillRef>
+          <a:effectRef idx="0">
+            <a:schemeClr val="accent1"/>
+          </a:effectRef>
+          <a:fontRef idx="minor">
+            <a:schemeClr val="lt1"/>
+          </a:fontRef>
+        </p:style>
+        <p:txBody>
+          <a:bodyPr rtlCol="0" anchor="ctr"/>
+          <a:lstStyle/>
+          <a:p>
+            <a:pPr algn="ctr"/>
+            <a:endParaRPr lang="en-US"/>
           </a:p>
         </p:txBody>
       </p:sp>
@@ -28686,1056 +27592,6 @@
 </file>
 
 <file path=ppt/slides/slide6.xml><?xml version="1.0" encoding="utf-8"?>
-<p:sld xmlns:a="http://schemas.openxmlformats.org/drawingml/2006/main" xmlns:r="http://schemas.openxmlformats.org/officeDocument/2006/relationships" xmlns:p="http://schemas.openxmlformats.org/presentationml/2006/main">
-  <p:cSld>
-    <p:spTree>
-      <p:nvGrpSpPr>
-        <p:cNvPr id="1" name=""/>
-        <p:cNvGrpSpPr/>
-        <p:nvPr/>
-      </p:nvGrpSpPr>
-      <p:grpSpPr>
-        <a:xfrm>
-          <a:off x="0" y="0"/>
-          <a:ext cx="0" cy="0"/>
-          <a:chOff x="0" y="0"/>
-          <a:chExt cx="0" cy="0"/>
-        </a:xfrm>
-      </p:grpSpPr>
-      <p:sp>
-        <p:nvSpPr>
-          <p:cNvPr id="2" name="Title 1">
-            <a:extLst>
-              <a:ext uri="{FF2B5EF4-FFF2-40B4-BE49-F238E27FC236}">
-                <a16:creationId xmlns:a16="http://schemas.microsoft.com/office/drawing/2014/main" id="{31C29F6F-54A2-5964-F2B2-982952460386}"/>
-              </a:ext>
-            </a:extLst>
-          </p:cNvPr>
-          <p:cNvSpPr>
-            <a:spLocks noGrp="1"/>
-          </p:cNvSpPr>
-          <p:nvPr>
-            <p:ph type="title"/>
-          </p:nvPr>
-        </p:nvSpPr>
-        <p:spPr/>
-        <p:txBody>
-          <a:bodyPr>
-            <a:normAutofit/>
-          </a:bodyPr>
-          <a:lstStyle/>
-          <a:p>
-            <a:r>
-              <a:rPr lang="en-US" sz="4000" dirty="0"/>
-              <a:t>Dimensionality Reduction</a:t>
-            </a:r>
-          </a:p>
-        </p:txBody>
-      </p:sp>
-      <p:sp>
-        <p:nvSpPr>
-          <p:cNvPr id="4" name="Rectángulo 3">
-            <a:extLst>
-              <a:ext uri="{FF2B5EF4-FFF2-40B4-BE49-F238E27FC236}">
-                <a16:creationId xmlns:a16="http://schemas.microsoft.com/office/drawing/2014/main" id="{7BF95E35-4D9C-7F59-F308-C61FF9CD1B58}"/>
-              </a:ext>
-            </a:extLst>
-          </p:cNvPr>
-          <p:cNvSpPr/>
-          <p:nvPr/>
-        </p:nvSpPr>
-        <p:spPr>
-          <a:xfrm>
-            <a:off x="0" y="0"/>
-            <a:ext cx="374469" cy="6858000"/>
-          </a:xfrm>
-          <a:prstGeom prst="rect">
-            <a:avLst/>
-          </a:prstGeom>
-        </p:spPr>
-        <p:style>
-          <a:lnRef idx="2">
-            <a:schemeClr val="accent2">
-              <a:shade val="50000"/>
-            </a:schemeClr>
-          </a:lnRef>
-          <a:fillRef idx="1">
-            <a:schemeClr val="accent2"/>
-          </a:fillRef>
-          <a:effectRef idx="0">
-            <a:schemeClr val="accent2"/>
-          </a:effectRef>
-          <a:fontRef idx="minor">
-            <a:schemeClr val="lt1"/>
-          </a:fontRef>
-        </p:style>
-        <p:txBody>
-          <a:bodyPr rtlCol="0" anchor="ctr"/>
-          <a:lstStyle/>
-          <a:p>
-            <a:pPr algn="ctr"/>
-            <a:endParaRPr lang="es-ES"/>
-          </a:p>
-        </p:txBody>
-      </p:sp>
-      <p:sp>
-        <p:nvSpPr>
-          <p:cNvPr id="6" name="Rectangle 143">
-            <a:extLst>
-              <a:ext uri="{FF2B5EF4-FFF2-40B4-BE49-F238E27FC236}">
-                <a16:creationId xmlns:a16="http://schemas.microsoft.com/office/drawing/2014/main" id="{C9A975F5-C7DC-9274-20CA-B5939A2A86BD}"/>
-              </a:ext>
-            </a:extLst>
-          </p:cNvPr>
-          <p:cNvSpPr>
-            <a:spLocks noChangeArrowheads="1"/>
-          </p:cNvSpPr>
-          <p:nvPr/>
-        </p:nvSpPr>
-        <p:spPr bwMode="auto">
-          <a:xfrm>
-            <a:off x="448342" y="6549317"/>
-            <a:ext cx="5730175" cy="261610"/>
-          </a:xfrm>
-          <a:prstGeom prst="rect">
-            <a:avLst/>
-          </a:prstGeom>
-          <a:noFill/>
-          <a:ln>
-            <a:noFill/>
-          </a:ln>
-          <a:effectLst/>
-          <a:extLst>
-            <a:ext uri="{909E8E84-426E-40DD-AFC4-6F175D3DCCD1}">
-              <a14:hiddenFill xmlns:a14="http://schemas.microsoft.com/office/drawing/2010/main">
-                <a:solidFill>
-                  <a:schemeClr val="accent1"/>
-                </a:solidFill>
-              </a14:hiddenFill>
-            </a:ext>
-            <a:ext uri="{91240B29-F687-4F45-9708-019B960494DF}">
-              <a14:hiddenLine xmlns:a14="http://schemas.microsoft.com/office/drawing/2010/main" w="9525">
-                <a:solidFill>
-                  <a:schemeClr val="tx1"/>
-                </a:solidFill>
-                <a:miter lim="800000"/>
-                <a:headEnd/>
-                <a:tailEnd/>
-              </a14:hiddenLine>
-            </a:ext>
-            <a:ext uri="{AF507438-7753-43E0-B8FC-AC1667EBCBE1}">
-              <a14:hiddenEffects xmlns:a14="http://schemas.microsoft.com/office/drawing/2010/main">
-                <a:effectLst>
-                  <a:outerShdw dist="35921" dir="2700000" algn="ctr" rotWithShape="0">
-                    <a:schemeClr val="bg2"/>
-                  </a:outerShdw>
-                </a:effectLst>
-              </a14:hiddenEffects>
-            </a:ext>
-          </a:extLst>
-        </p:spPr>
-        <p:txBody>
-          <a:bodyPr vert="horz" wrap="square" lIns="91440" tIns="45720" rIns="91440" bIns="45720" numCol="1" anchor="ctr" anchorCtr="0" compatLnSpc="1">
-            <a:prstTxWarp prst="textNoShape">
-              <a:avLst/>
-            </a:prstTxWarp>
-            <a:spAutoFit/>
-          </a:bodyPr>
-          <a:lstStyle/>
-          <a:p>
-            <a:pPr marL="0" marR="0" lvl="0" indent="0" algn="l" defTabSz="914400" rtl="0" eaLnBrk="0" fontAlgn="base" latinLnBrk="0" hangingPunct="0">
-              <a:lnSpc>
-                <a:spcPct val="100000"/>
-              </a:lnSpc>
-              <a:spcBef>
-                <a:spcPct val="0"/>
-              </a:spcBef>
-              <a:spcAft>
-                <a:spcPct val="0"/>
-              </a:spcAft>
-              <a:buClrTx/>
-              <a:buSzTx/>
-              <a:buFontTx/>
-              <a:buNone/>
-              <a:tabLst/>
-            </a:pPr>
-            <a:r>
-              <a:rPr kumimoji="0" lang="en-US" altLang="es-ES" sz="1100" b="0" i="0" u="none" strike="noStrike" cap="none" normalizeH="0" baseline="0" dirty="0">
-                <a:ln>
-                  <a:noFill/>
-                </a:ln>
-                <a:solidFill>
-                  <a:srgbClr val="F4A200"/>
-                </a:solidFill>
-                <a:effectLst/>
-                <a:latin typeface="Arial" panose="020B0604020202020204" pitchFamily="34" charset="0"/>
-                <a:ea typeface="Myriad Pro Light"/>
-                <a:cs typeface="Times New Roman" panose="02020603050405020304" pitchFamily="18" charset="0"/>
-              </a:rPr>
-              <a:t>Master in Quantitative Economic Analysis </a:t>
-            </a:r>
-            <a:r>
-              <a:rPr kumimoji="0" lang="en-US" altLang="es-ES" sz="1100" b="0" i="0" u="none" strike="noStrike" cap="none" normalizeH="0" baseline="0" dirty="0" err="1">
-                <a:ln>
-                  <a:noFill/>
-                </a:ln>
-                <a:solidFill>
-                  <a:srgbClr val="F4A200"/>
-                </a:solidFill>
-                <a:effectLst/>
-                <a:latin typeface="Arial" panose="020B0604020202020204" pitchFamily="34" charset="0"/>
-                <a:ea typeface="Myriad Pro Light"/>
-                <a:cs typeface="Times New Roman" panose="02020603050405020304" pitchFamily="18" charset="0"/>
-              </a:rPr>
-              <a:t>MQuEA</a:t>
-            </a:r>
-            <a:endParaRPr kumimoji="0" lang="es-ES" altLang="es-ES" sz="300" b="0" i="0" u="none" strike="noStrike" cap="none" normalizeH="0" baseline="0" dirty="0">
-              <a:ln>
-                <a:noFill/>
-              </a:ln>
-              <a:solidFill>
-                <a:schemeClr val="tx1"/>
-              </a:solidFill>
-              <a:effectLst/>
-              <a:latin typeface="Arial" panose="020B0604020202020204" pitchFamily="34" charset="0"/>
-            </a:endParaRPr>
-          </a:p>
-        </p:txBody>
-      </p:sp>
-      <p:sp>
-        <p:nvSpPr>
-          <p:cNvPr id="7" name="Rectangle 143">
-            <a:extLst>
-              <a:ext uri="{FF2B5EF4-FFF2-40B4-BE49-F238E27FC236}">
-                <a16:creationId xmlns:a16="http://schemas.microsoft.com/office/drawing/2014/main" id="{2BE2E3EB-749E-E562-030D-C3F46E714169}"/>
-              </a:ext>
-            </a:extLst>
-          </p:cNvPr>
-          <p:cNvSpPr>
-            <a:spLocks noChangeArrowheads="1"/>
-          </p:cNvSpPr>
-          <p:nvPr/>
-        </p:nvSpPr>
-        <p:spPr bwMode="auto">
-          <a:xfrm>
-            <a:off x="6186394" y="6559955"/>
-            <a:ext cx="5730175" cy="261610"/>
-          </a:xfrm>
-          <a:prstGeom prst="rect">
-            <a:avLst/>
-          </a:prstGeom>
-          <a:noFill/>
-          <a:ln>
-            <a:noFill/>
-          </a:ln>
-          <a:effectLst/>
-          <a:extLst>
-            <a:ext uri="{909E8E84-426E-40DD-AFC4-6F175D3DCCD1}">
-              <a14:hiddenFill xmlns:a14="http://schemas.microsoft.com/office/drawing/2010/main">
-                <a:solidFill>
-                  <a:schemeClr val="accent1"/>
-                </a:solidFill>
-              </a14:hiddenFill>
-            </a:ext>
-            <a:ext uri="{91240B29-F687-4F45-9708-019B960494DF}">
-              <a14:hiddenLine xmlns:a14="http://schemas.microsoft.com/office/drawing/2010/main" w="9525">
-                <a:solidFill>
-                  <a:schemeClr val="tx1"/>
-                </a:solidFill>
-                <a:miter lim="800000"/>
-                <a:headEnd/>
-                <a:tailEnd/>
-              </a14:hiddenLine>
-            </a:ext>
-            <a:ext uri="{AF507438-7753-43E0-B8FC-AC1667EBCBE1}">
-              <a14:hiddenEffects xmlns:a14="http://schemas.microsoft.com/office/drawing/2010/main">
-                <a:effectLst>
-                  <a:outerShdw dist="35921" dir="2700000" algn="ctr" rotWithShape="0">
-                    <a:schemeClr val="bg2"/>
-                  </a:outerShdw>
-                </a:effectLst>
-              </a14:hiddenEffects>
-            </a:ext>
-          </a:extLst>
-        </p:spPr>
-        <p:txBody>
-          <a:bodyPr vert="horz" wrap="square" lIns="91440" tIns="45720" rIns="91440" bIns="45720" numCol="1" anchor="ctr" anchorCtr="0" compatLnSpc="1">
-            <a:prstTxWarp prst="textNoShape">
-              <a:avLst/>
-            </a:prstTxWarp>
-            <a:spAutoFit/>
-          </a:bodyPr>
-          <a:lstStyle/>
-          <a:p>
-            <a:pPr marL="0" marR="0" lvl="0" indent="0" algn="r" defTabSz="914400" rtl="0" eaLnBrk="0" fontAlgn="base" latinLnBrk="0" hangingPunct="0">
-              <a:lnSpc>
-                <a:spcPct val="100000"/>
-              </a:lnSpc>
-              <a:spcBef>
-                <a:spcPct val="0"/>
-              </a:spcBef>
-              <a:spcAft>
-                <a:spcPct val="0"/>
-              </a:spcAft>
-              <a:buClrTx/>
-              <a:buSzTx/>
-              <a:buFontTx/>
-              <a:buNone/>
-              <a:tabLst/>
-            </a:pPr>
-            <a:r>
-              <a:rPr kumimoji="0" lang="en-US" altLang="es-ES" sz="1100" b="0" i="0" u="none" strike="noStrike" cap="none" normalizeH="0" baseline="0" dirty="0">
-                <a:ln>
-                  <a:noFill/>
-                </a:ln>
-                <a:solidFill>
-                  <a:srgbClr val="F4A200"/>
-                </a:solidFill>
-                <a:effectLst/>
-                <a:latin typeface="Arial" panose="020B0604020202020204" pitchFamily="34" charset="0"/>
-                <a:ea typeface="Myriad Pro Light"/>
-                <a:cs typeface="Times New Roman" panose="02020603050405020304" pitchFamily="18" charset="0"/>
-              </a:rPr>
-              <a:t>Universidad </a:t>
-            </a:r>
-            <a:r>
-              <a:rPr kumimoji="0" lang="en-US" altLang="es-ES" sz="1100" b="0" i="0" u="none" strike="noStrike" cap="none" normalizeH="0" baseline="0" dirty="0" err="1">
-                <a:ln>
-                  <a:noFill/>
-                </a:ln>
-                <a:solidFill>
-                  <a:srgbClr val="F4A200"/>
-                </a:solidFill>
-                <a:effectLst/>
-                <a:latin typeface="Arial" panose="020B0604020202020204" pitchFamily="34" charset="0"/>
-                <a:ea typeface="Myriad Pro Light"/>
-                <a:cs typeface="Times New Roman" panose="02020603050405020304" pitchFamily="18" charset="0"/>
-              </a:rPr>
-              <a:t>Aut</a:t>
-            </a:r>
-            <a:r>
-              <a:rPr lang="en-US" altLang="es-ES" sz="1100" dirty="0" err="1">
-                <a:solidFill>
-                  <a:srgbClr val="F4A200"/>
-                </a:solidFill>
-                <a:latin typeface="Arial" panose="020B0604020202020204" pitchFamily="34" charset="0"/>
-                <a:ea typeface="Myriad Pro Light"/>
-                <a:cs typeface="Times New Roman" panose="02020603050405020304" pitchFamily="18" charset="0"/>
-              </a:rPr>
-              <a:t>ó</a:t>
-            </a:r>
-            <a:r>
-              <a:rPr kumimoji="0" lang="en-US" altLang="es-ES" sz="1100" b="0" i="0" u="none" strike="noStrike" cap="none" normalizeH="0" baseline="0" dirty="0" err="1">
-                <a:ln>
-                  <a:noFill/>
-                </a:ln>
-                <a:solidFill>
-                  <a:srgbClr val="F4A200"/>
-                </a:solidFill>
-                <a:effectLst/>
-                <a:latin typeface="Arial" panose="020B0604020202020204" pitchFamily="34" charset="0"/>
-                <a:ea typeface="Myriad Pro Light"/>
-                <a:cs typeface="Times New Roman" panose="02020603050405020304" pitchFamily="18" charset="0"/>
-              </a:rPr>
-              <a:t>noma</a:t>
-            </a:r>
-            <a:r>
-              <a:rPr kumimoji="0" lang="en-US" altLang="es-ES" sz="1100" b="0" i="0" u="none" strike="noStrike" cap="none" normalizeH="0" baseline="0" dirty="0">
-                <a:ln>
-                  <a:noFill/>
-                </a:ln>
-                <a:solidFill>
-                  <a:srgbClr val="F4A200"/>
-                </a:solidFill>
-                <a:effectLst/>
-                <a:latin typeface="Arial" panose="020B0604020202020204" pitchFamily="34" charset="0"/>
-                <a:ea typeface="Myriad Pro Light"/>
-                <a:cs typeface="Times New Roman" panose="02020603050405020304" pitchFamily="18" charset="0"/>
-              </a:rPr>
-              <a:t> de Madrid</a:t>
-            </a:r>
-            <a:endParaRPr kumimoji="0" lang="es-ES" altLang="es-ES" sz="300" b="0" i="0" u="none" strike="noStrike" cap="none" normalizeH="0" baseline="0" dirty="0">
-              <a:ln>
-                <a:noFill/>
-              </a:ln>
-              <a:solidFill>
-                <a:schemeClr val="tx1"/>
-              </a:solidFill>
-              <a:effectLst/>
-              <a:latin typeface="Arial" panose="020B0604020202020204" pitchFamily="34" charset="0"/>
-            </a:endParaRPr>
-          </a:p>
-        </p:txBody>
-      </p:sp>
-      <p:sp>
-        <p:nvSpPr>
-          <p:cNvPr id="3" name="TextBox 2">
-            <a:extLst>
-              <a:ext uri="{FF2B5EF4-FFF2-40B4-BE49-F238E27FC236}">
-                <a16:creationId xmlns:a16="http://schemas.microsoft.com/office/drawing/2014/main" id="{07C8DDDE-8C83-1AC8-8FA2-895D71DAD748}"/>
-              </a:ext>
-            </a:extLst>
-          </p:cNvPr>
-          <p:cNvSpPr txBox="1"/>
-          <p:nvPr/>
-        </p:nvSpPr>
-        <p:spPr>
-          <a:xfrm>
-            <a:off x="927557" y="1920898"/>
-            <a:ext cx="10610987" cy="400110"/>
-          </a:xfrm>
-          <a:prstGeom prst="rect">
-            <a:avLst/>
-          </a:prstGeom>
-          <a:noFill/>
-        </p:spPr>
-        <p:txBody>
-          <a:bodyPr wrap="square" rtlCol="0">
-            <a:spAutoFit/>
-          </a:bodyPr>
-          <a:lstStyle/>
-          <a:p>
-            <a:pPr marL="285750" indent="-285750">
-              <a:buFont typeface="Wingdings" panose="05000000000000000000" pitchFamily="2" charset="2"/>
-              <a:buChar char="§"/>
-            </a:pPr>
-            <a:r>
-              <a:rPr lang="en-US" sz="2000" dirty="0">
-                <a:latin typeface="+mj-lt"/>
-              </a:rPr>
-              <a:t>Manifold (unroll the dataset)</a:t>
-            </a:r>
-          </a:p>
-        </p:txBody>
-      </p:sp>
-      <p:pic>
-        <p:nvPicPr>
-          <p:cNvPr id="8" name="Picture 7" descr="Chart, scatter chart&#10;&#10;Description automatically generated">
-            <a:extLst>
-              <a:ext uri="{FF2B5EF4-FFF2-40B4-BE49-F238E27FC236}">
-                <a16:creationId xmlns:a16="http://schemas.microsoft.com/office/drawing/2014/main" id="{FABEA595-558B-FAA9-6BAD-25C57747E0A8}"/>
-              </a:ext>
-            </a:extLst>
-          </p:cNvPr>
-          <p:cNvPicPr>
-            <a:picLocks noChangeAspect="1"/>
-          </p:cNvPicPr>
-          <p:nvPr/>
-        </p:nvPicPr>
-        <p:blipFill>
-          <a:blip r:embed="rId2">
-            <a:extLst>
-              <a:ext uri="{28A0092B-C50C-407E-A947-70E740481C1C}">
-                <a14:useLocalDpi xmlns:a14="http://schemas.microsoft.com/office/drawing/2010/main" val="0"/>
-              </a:ext>
-            </a:extLst>
-          </a:blip>
-          <a:stretch>
-            <a:fillRect/>
-          </a:stretch>
-        </p:blipFill>
-        <p:spPr>
-          <a:xfrm>
-            <a:off x="625465" y="2672936"/>
-            <a:ext cx="4388965" cy="3380397"/>
-          </a:xfrm>
-          <a:prstGeom prst="rect">
-            <a:avLst/>
-          </a:prstGeom>
-        </p:spPr>
-      </p:pic>
-      <p:pic>
-        <p:nvPicPr>
-          <p:cNvPr id="10" name="Picture 9" descr="Chart, scatter chart&#10;&#10;Description automatically generated">
-            <a:extLst>
-              <a:ext uri="{FF2B5EF4-FFF2-40B4-BE49-F238E27FC236}">
-                <a16:creationId xmlns:a16="http://schemas.microsoft.com/office/drawing/2014/main" id="{629B76B9-77C6-5284-3141-79CB39BE682F}"/>
-              </a:ext>
-            </a:extLst>
-          </p:cNvPr>
-          <p:cNvPicPr>
-            <a:picLocks noChangeAspect="1"/>
-          </p:cNvPicPr>
-          <p:nvPr/>
-        </p:nvPicPr>
-        <p:blipFill>
-          <a:blip r:embed="rId3">
-            <a:extLst>
-              <a:ext uri="{28A0092B-C50C-407E-A947-70E740481C1C}">
-                <a14:useLocalDpi xmlns:a14="http://schemas.microsoft.com/office/drawing/2010/main" val="0"/>
-              </a:ext>
-            </a:extLst>
-          </a:blip>
-          <a:stretch>
-            <a:fillRect/>
-          </a:stretch>
-        </p:blipFill>
-        <p:spPr>
-          <a:xfrm>
-            <a:off x="5337447" y="3187237"/>
-            <a:ext cx="6579122" cy="2231141"/>
-          </a:xfrm>
-          <a:prstGeom prst="rect">
-            <a:avLst/>
-          </a:prstGeom>
-        </p:spPr>
-      </p:pic>
-      <p:sp>
-        <p:nvSpPr>
-          <p:cNvPr id="15" name="TextBox 14">
-            <a:extLst>
-              <a:ext uri="{FF2B5EF4-FFF2-40B4-BE49-F238E27FC236}">
-                <a16:creationId xmlns:a16="http://schemas.microsoft.com/office/drawing/2014/main" id="{2991CF89-8DCD-147B-9944-E4FA70756941}"/>
-              </a:ext>
-            </a:extLst>
-          </p:cNvPr>
-          <p:cNvSpPr txBox="1"/>
-          <p:nvPr/>
-        </p:nvSpPr>
-        <p:spPr>
-          <a:xfrm>
-            <a:off x="5681810" y="5884056"/>
-            <a:ext cx="2876018" cy="338554"/>
-          </a:xfrm>
-          <a:prstGeom prst="rect">
-            <a:avLst/>
-          </a:prstGeom>
-          <a:noFill/>
-        </p:spPr>
-        <p:txBody>
-          <a:bodyPr wrap="square" rtlCol="0">
-            <a:spAutoFit/>
-          </a:bodyPr>
-          <a:lstStyle/>
-          <a:p>
-            <a:r>
-              <a:rPr lang="en-US" sz="1600" b="1" dirty="0">
-                <a:solidFill>
-                  <a:srgbClr val="FF0000"/>
-                </a:solidFill>
-                <a:latin typeface="+mj-lt"/>
-              </a:rPr>
-              <a:t>the subspace seems to twist/turn</a:t>
-            </a:r>
-          </a:p>
-        </p:txBody>
-      </p:sp>
-    </p:spTree>
-    <p:extLst>
-      <p:ext uri="{BB962C8B-B14F-4D97-AF65-F5344CB8AC3E}">
-        <p14:creationId xmlns:p14="http://schemas.microsoft.com/office/powerpoint/2010/main" val="3051451219"/>
-      </p:ext>
-    </p:extLst>
-  </p:cSld>
-  <p:clrMapOvr>
-    <a:masterClrMapping/>
-  </p:clrMapOvr>
-</p:sld>
-</file>
-
-<file path=ppt/slides/slide7.xml><?xml version="1.0" encoding="utf-8"?>
-<p:sld xmlns:a="http://schemas.openxmlformats.org/drawingml/2006/main" xmlns:r="http://schemas.openxmlformats.org/officeDocument/2006/relationships" xmlns:p="http://schemas.openxmlformats.org/presentationml/2006/main">
-  <p:cSld>
-    <p:spTree>
-      <p:nvGrpSpPr>
-        <p:cNvPr id="1" name=""/>
-        <p:cNvGrpSpPr/>
-        <p:nvPr/>
-      </p:nvGrpSpPr>
-      <p:grpSpPr>
-        <a:xfrm>
-          <a:off x="0" y="0"/>
-          <a:ext cx="0" cy="0"/>
-          <a:chOff x="0" y="0"/>
-          <a:chExt cx="0" cy="0"/>
-        </a:xfrm>
-      </p:grpSpPr>
-      <p:sp>
-        <p:nvSpPr>
-          <p:cNvPr id="2" name="Title 1">
-            <a:extLst>
-              <a:ext uri="{FF2B5EF4-FFF2-40B4-BE49-F238E27FC236}">
-                <a16:creationId xmlns:a16="http://schemas.microsoft.com/office/drawing/2014/main" id="{31C29F6F-54A2-5964-F2B2-982952460386}"/>
-              </a:ext>
-            </a:extLst>
-          </p:cNvPr>
-          <p:cNvSpPr>
-            <a:spLocks noGrp="1"/>
-          </p:cNvSpPr>
-          <p:nvPr>
-            <p:ph type="title"/>
-          </p:nvPr>
-        </p:nvSpPr>
-        <p:spPr/>
-        <p:txBody>
-          <a:bodyPr>
-            <a:normAutofit/>
-          </a:bodyPr>
-          <a:lstStyle/>
-          <a:p>
-            <a:r>
-              <a:rPr lang="en-US" sz="4000" dirty="0"/>
-              <a:t>Dimensionality Reduction</a:t>
-            </a:r>
-          </a:p>
-        </p:txBody>
-      </p:sp>
-      <p:sp>
-        <p:nvSpPr>
-          <p:cNvPr id="4" name="Rectángulo 3">
-            <a:extLst>
-              <a:ext uri="{FF2B5EF4-FFF2-40B4-BE49-F238E27FC236}">
-                <a16:creationId xmlns:a16="http://schemas.microsoft.com/office/drawing/2014/main" id="{7BF95E35-4D9C-7F59-F308-C61FF9CD1B58}"/>
-              </a:ext>
-            </a:extLst>
-          </p:cNvPr>
-          <p:cNvSpPr/>
-          <p:nvPr/>
-        </p:nvSpPr>
-        <p:spPr>
-          <a:xfrm>
-            <a:off x="0" y="0"/>
-            <a:ext cx="374469" cy="6858000"/>
-          </a:xfrm>
-          <a:prstGeom prst="rect">
-            <a:avLst/>
-          </a:prstGeom>
-        </p:spPr>
-        <p:style>
-          <a:lnRef idx="2">
-            <a:schemeClr val="accent2">
-              <a:shade val="50000"/>
-            </a:schemeClr>
-          </a:lnRef>
-          <a:fillRef idx="1">
-            <a:schemeClr val="accent2"/>
-          </a:fillRef>
-          <a:effectRef idx="0">
-            <a:schemeClr val="accent2"/>
-          </a:effectRef>
-          <a:fontRef idx="minor">
-            <a:schemeClr val="lt1"/>
-          </a:fontRef>
-        </p:style>
-        <p:txBody>
-          <a:bodyPr rtlCol="0" anchor="ctr"/>
-          <a:lstStyle/>
-          <a:p>
-            <a:pPr algn="ctr"/>
-            <a:endParaRPr lang="es-ES"/>
-          </a:p>
-        </p:txBody>
-      </p:sp>
-      <p:sp>
-        <p:nvSpPr>
-          <p:cNvPr id="6" name="Rectangle 143">
-            <a:extLst>
-              <a:ext uri="{FF2B5EF4-FFF2-40B4-BE49-F238E27FC236}">
-                <a16:creationId xmlns:a16="http://schemas.microsoft.com/office/drawing/2014/main" id="{C9A975F5-C7DC-9274-20CA-B5939A2A86BD}"/>
-              </a:ext>
-            </a:extLst>
-          </p:cNvPr>
-          <p:cNvSpPr>
-            <a:spLocks noChangeArrowheads="1"/>
-          </p:cNvSpPr>
-          <p:nvPr/>
-        </p:nvSpPr>
-        <p:spPr bwMode="auto">
-          <a:xfrm>
-            <a:off x="448342" y="6549317"/>
-            <a:ext cx="5730175" cy="261610"/>
-          </a:xfrm>
-          <a:prstGeom prst="rect">
-            <a:avLst/>
-          </a:prstGeom>
-          <a:noFill/>
-          <a:ln>
-            <a:noFill/>
-          </a:ln>
-          <a:effectLst/>
-          <a:extLst>
-            <a:ext uri="{909E8E84-426E-40DD-AFC4-6F175D3DCCD1}">
-              <a14:hiddenFill xmlns:a14="http://schemas.microsoft.com/office/drawing/2010/main">
-                <a:solidFill>
-                  <a:schemeClr val="accent1"/>
-                </a:solidFill>
-              </a14:hiddenFill>
-            </a:ext>
-            <a:ext uri="{91240B29-F687-4F45-9708-019B960494DF}">
-              <a14:hiddenLine xmlns:a14="http://schemas.microsoft.com/office/drawing/2010/main" w="9525">
-                <a:solidFill>
-                  <a:schemeClr val="tx1"/>
-                </a:solidFill>
-                <a:miter lim="800000"/>
-                <a:headEnd/>
-                <a:tailEnd/>
-              </a14:hiddenLine>
-            </a:ext>
-            <a:ext uri="{AF507438-7753-43E0-B8FC-AC1667EBCBE1}">
-              <a14:hiddenEffects xmlns:a14="http://schemas.microsoft.com/office/drawing/2010/main">
-                <a:effectLst>
-                  <a:outerShdw dist="35921" dir="2700000" algn="ctr" rotWithShape="0">
-                    <a:schemeClr val="bg2"/>
-                  </a:outerShdw>
-                </a:effectLst>
-              </a14:hiddenEffects>
-            </a:ext>
-          </a:extLst>
-        </p:spPr>
-        <p:txBody>
-          <a:bodyPr vert="horz" wrap="square" lIns="91440" tIns="45720" rIns="91440" bIns="45720" numCol="1" anchor="ctr" anchorCtr="0" compatLnSpc="1">
-            <a:prstTxWarp prst="textNoShape">
-              <a:avLst/>
-            </a:prstTxWarp>
-            <a:spAutoFit/>
-          </a:bodyPr>
-          <a:lstStyle/>
-          <a:p>
-            <a:pPr marL="0" marR="0" lvl="0" indent="0" algn="l" defTabSz="914400" rtl="0" eaLnBrk="0" fontAlgn="base" latinLnBrk="0" hangingPunct="0">
-              <a:lnSpc>
-                <a:spcPct val="100000"/>
-              </a:lnSpc>
-              <a:spcBef>
-                <a:spcPct val="0"/>
-              </a:spcBef>
-              <a:spcAft>
-                <a:spcPct val="0"/>
-              </a:spcAft>
-              <a:buClrTx/>
-              <a:buSzTx/>
-              <a:buFontTx/>
-              <a:buNone/>
-              <a:tabLst/>
-            </a:pPr>
-            <a:r>
-              <a:rPr kumimoji="0" lang="en-US" altLang="es-ES" sz="1100" b="0" i="0" u="none" strike="noStrike" cap="none" normalizeH="0" baseline="0" dirty="0">
-                <a:ln>
-                  <a:noFill/>
-                </a:ln>
-                <a:solidFill>
-                  <a:srgbClr val="F4A200"/>
-                </a:solidFill>
-                <a:effectLst/>
-                <a:latin typeface="Arial" panose="020B0604020202020204" pitchFamily="34" charset="0"/>
-                <a:ea typeface="Myriad Pro Light"/>
-                <a:cs typeface="Times New Roman" panose="02020603050405020304" pitchFamily="18" charset="0"/>
-              </a:rPr>
-              <a:t>Master in Quantitative Economic Analysis </a:t>
-            </a:r>
-            <a:r>
-              <a:rPr kumimoji="0" lang="en-US" altLang="es-ES" sz="1100" b="0" i="0" u="none" strike="noStrike" cap="none" normalizeH="0" baseline="0" dirty="0" err="1">
-                <a:ln>
-                  <a:noFill/>
-                </a:ln>
-                <a:solidFill>
-                  <a:srgbClr val="F4A200"/>
-                </a:solidFill>
-                <a:effectLst/>
-                <a:latin typeface="Arial" panose="020B0604020202020204" pitchFamily="34" charset="0"/>
-                <a:ea typeface="Myriad Pro Light"/>
-                <a:cs typeface="Times New Roman" panose="02020603050405020304" pitchFamily="18" charset="0"/>
-              </a:rPr>
-              <a:t>MQuEA</a:t>
-            </a:r>
-            <a:endParaRPr kumimoji="0" lang="es-ES" altLang="es-ES" sz="300" b="0" i="0" u="none" strike="noStrike" cap="none" normalizeH="0" baseline="0" dirty="0">
-              <a:ln>
-                <a:noFill/>
-              </a:ln>
-              <a:solidFill>
-                <a:schemeClr val="tx1"/>
-              </a:solidFill>
-              <a:effectLst/>
-              <a:latin typeface="Arial" panose="020B0604020202020204" pitchFamily="34" charset="0"/>
-            </a:endParaRPr>
-          </a:p>
-        </p:txBody>
-      </p:sp>
-      <p:sp>
-        <p:nvSpPr>
-          <p:cNvPr id="7" name="Rectangle 143">
-            <a:extLst>
-              <a:ext uri="{FF2B5EF4-FFF2-40B4-BE49-F238E27FC236}">
-                <a16:creationId xmlns:a16="http://schemas.microsoft.com/office/drawing/2014/main" id="{2BE2E3EB-749E-E562-030D-C3F46E714169}"/>
-              </a:ext>
-            </a:extLst>
-          </p:cNvPr>
-          <p:cNvSpPr>
-            <a:spLocks noChangeArrowheads="1"/>
-          </p:cNvSpPr>
-          <p:nvPr/>
-        </p:nvSpPr>
-        <p:spPr bwMode="auto">
-          <a:xfrm>
-            <a:off x="6186394" y="6559955"/>
-            <a:ext cx="5730175" cy="261610"/>
-          </a:xfrm>
-          <a:prstGeom prst="rect">
-            <a:avLst/>
-          </a:prstGeom>
-          <a:noFill/>
-          <a:ln>
-            <a:noFill/>
-          </a:ln>
-          <a:effectLst/>
-          <a:extLst>
-            <a:ext uri="{909E8E84-426E-40DD-AFC4-6F175D3DCCD1}">
-              <a14:hiddenFill xmlns:a14="http://schemas.microsoft.com/office/drawing/2010/main">
-                <a:solidFill>
-                  <a:schemeClr val="accent1"/>
-                </a:solidFill>
-              </a14:hiddenFill>
-            </a:ext>
-            <a:ext uri="{91240B29-F687-4F45-9708-019B960494DF}">
-              <a14:hiddenLine xmlns:a14="http://schemas.microsoft.com/office/drawing/2010/main" w="9525">
-                <a:solidFill>
-                  <a:schemeClr val="tx1"/>
-                </a:solidFill>
-                <a:miter lim="800000"/>
-                <a:headEnd/>
-                <a:tailEnd/>
-              </a14:hiddenLine>
-            </a:ext>
-            <a:ext uri="{AF507438-7753-43E0-B8FC-AC1667EBCBE1}">
-              <a14:hiddenEffects xmlns:a14="http://schemas.microsoft.com/office/drawing/2010/main">
-                <a:effectLst>
-                  <a:outerShdw dist="35921" dir="2700000" algn="ctr" rotWithShape="0">
-                    <a:schemeClr val="bg2"/>
-                  </a:outerShdw>
-                </a:effectLst>
-              </a14:hiddenEffects>
-            </a:ext>
-          </a:extLst>
-        </p:spPr>
-        <p:txBody>
-          <a:bodyPr vert="horz" wrap="square" lIns="91440" tIns="45720" rIns="91440" bIns="45720" numCol="1" anchor="ctr" anchorCtr="0" compatLnSpc="1">
-            <a:prstTxWarp prst="textNoShape">
-              <a:avLst/>
-            </a:prstTxWarp>
-            <a:spAutoFit/>
-          </a:bodyPr>
-          <a:lstStyle/>
-          <a:p>
-            <a:pPr marL="0" marR="0" lvl="0" indent="0" algn="r" defTabSz="914400" rtl="0" eaLnBrk="0" fontAlgn="base" latinLnBrk="0" hangingPunct="0">
-              <a:lnSpc>
-                <a:spcPct val="100000"/>
-              </a:lnSpc>
-              <a:spcBef>
-                <a:spcPct val="0"/>
-              </a:spcBef>
-              <a:spcAft>
-                <a:spcPct val="0"/>
-              </a:spcAft>
-              <a:buClrTx/>
-              <a:buSzTx/>
-              <a:buFontTx/>
-              <a:buNone/>
-              <a:tabLst/>
-            </a:pPr>
-            <a:r>
-              <a:rPr kumimoji="0" lang="en-US" altLang="es-ES" sz="1100" b="0" i="0" u="none" strike="noStrike" cap="none" normalizeH="0" baseline="0" dirty="0">
-                <a:ln>
-                  <a:noFill/>
-                </a:ln>
-                <a:solidFill>
-                  <a:srgbClr val="F4A200"/>
-                </a:solidFill>
-                <a:effectLst/>
-                <a:latin typeface="Arial" panose="020B0604020202020204" pitchFamily="34" charset="0"/>
-                <a:ea typeface="Myriad Pro Light"/>
-                <a:cs typeface="Times New Roman" panose="02020603050405020304" pitchFamily="18" charset="0"/>
-              </a:rPr>
-              <a:t>Universidad </a:t>
-            </a:r>
-            <a:r>
-              <a:rPr kumimoji="0" lang="en-US" altLang="es-ES" sz="1100" b="0" i="0" u="none" strike="noStrike" cap="none" normalizeH="0" baseline="0" dirty="0" err="1">
-                <a:ln>
-                  <a:noFill/>
-                </a:ln>
-                <a:solidFill>
-                  <a:srgbClr val="F4A200"/>
-                </a:solidFill>
-                <a:effectLst/>
-                <a:latin typeface="Arial" panose="020B0604020202020204" pitchFamily="34" charset="0"/>
-                <a:ea typeface="Myriad Pro Light"/>
-                <a:cs typeface="Times New Roman" panose="02020603050405020304" pitchFamily="18" charset="0"/>
-              </a:rPr>
-              <a:t>Aut</a:t>
-            </a:r>
-            <a:r>
-              <a:rPr lang="en-US" altLang="es-ES" sz="1100" dirty="0" err="1">
-                <a:solidFill>
-                  <a:srgbClr val="F4A200"/>
-                </a:solidFill>
-                <a:latin typeface="Arial" panose="020B0604020202020204" pitchFamily="34" charset="0"/>
-                <a:ea typeface="Myriad Pro Light"/>
-                <a:cs typeface="Times New Roman" panose="02020603050405020304" pitchFamily="18" charset="0"/>
-              </a:rPr>
-              <a:t>ó</a:t>
-            </a:r>
-            <a:r>
-              <a:rPr kumimoji="0" lang="en-US" altLang="es-ES" sz="1100" b="0" i="0" u="none" strike="noStrike" cap="none" normalizeH="0" baseline="0" dirty="0" err="1">
-                <a:ln>
-                  <a:noFill/>
-                </a:ln>
-                <a:solidFill>
-                  <a:srgbClr val="F4A200"/>
-                </a:solidFill>
-                <a:effectLst/>
-                <a:latin typeface="Arial" panose="020B0604020202020204" pitchFamily="34" charset="0"/>
-                <a:ea typeface="Myriad Pro Light"/>
-                <a:cs typeface="Times New Roman" panose="02020603050405020304" pitchFamily="18" charset="0"/>
-              </a:rPr>
-              <a:t>noma</a:t>
-            </a:r>
-            <a:r>
-              <a:rPr kumimoji="0" lang="en-US" altLang="es-ES" sz="1100" b="0" i="0" u="none" strike="noStrike" cap="none" normalizeH="0" baseline="0" dirty="0">
-                <a:ln>
-                  <a:noFill/>
-                </a:ln>
-                <a:solidFill>
-                  <a:srgbClr val="F4A200"/>
-                </a:solidFill>
-                <a:effectLst/>
-                <a:latin typeface="Arial" panose="020B0604020202020204" pitchFamily="34" charset="0"/>
-                <a:ea typeface="Myriad Pro Light"/>
-                <a:cs typeface="Times New Roman" panose="02020603050405020304" pitchFamily="18" charset="0"/>
-              </a:rPr>
-              <a:t> de Madrid</a:t>
-            </a:r>
-            <a:endParaRPr kumimoji="0" lang="es-ES" altLang="es-ES" sz="300" b="0" i="0" u="none" strike="noStrike" cap="none" normalizeH="0" baseline="0" dirty="0">
-              <a:ln>
-                <a:noFill/>
-              </a:ln>
-              <a:solidFill>
-                <a:schemeClr val="tx1"/>
-              </a:solidFill>
-              <a:effectLst/>
-              <a:latin typeface="Arial" panose="020B0604020202020204" pitchFamily="34" charset="0"/>
-            </a:endParaRPr>
-          </a:p>
-        </p:txBody>
-      </p:sp>
-      <p:sp>
-        <p:nvSpPr>
-          <p:cNvPr id="3" name="TextBox 2">
-            <a:extLst>
-              <a:ext uri="{FF2B5EF4-FFF2-40B4-BE49-F238E27FC236}">
-                <a16:creationId xmlns:a16="http://schemas.microsoft.com/office/drawing/2014/main" id="{07C8DDDE-8C83-1AC8-8FA2-895D71DAD748}"/>
-              </a:ext>
-            </a:extLst>
-          </p:cNvPr>
-          <p:cNvSpPr txBox="1"/>
-          <p:nvPr/>
-        </p:nvSpPr>
-        <p:spPr>
-          <a:xfrm>
-            <a:off x="927557" y="1920898"/>
-            <a:ext cx="10610987" cy="1015663"/>
-          </a:xfrm>
-          <a:prstGeom prst="rect">
-            <a:avLst/>
-          </a:prstGeom>
-          <a:noFill/>
-        </p:spPr>
-        <p:txBody>
-          <a:bodyPr wrap="square" rtlCol="0">
-            <a:spAutoFit/>
-          </a:bodyPr>
-          <a:lstStyle/>
-          <a:p>
-            <a:pPr marL="285750" indent="-285750">
-              <a:buFont typeface="Wingdings" panose="05000000000000000000" pitchFamily="2" charset="2"/>
-              <a:buChar char="§"/>
-            </a:pPr>
-            <a:r>
-              <a:rPr lang="en-US" sz="2000" dirty="0">
-                <a:latin typeface="+mj-lt"/>
-              </a:rPr>
-              <a:t>Lots of high-dimensional datasets lie close to a much lower-dimensional manifold (this is the </a:t>
-            </a:r>
-            <a:r>
-              <a:rPr lang="en-US" sz="2000" b="1" i="1" dirty="0">
-                <a:latin typeface="+mj-lt"/>
-              </a:rPr>
-              <a:t>manifold hypothesis</a:t>
-            </a:r>
-            <a:r>
-              <a:rPr lang="en-US" sz="2000" i="1" dirty="0">
-                <a:latin typeface="+mj-lt"/>
-              </a:rPr>
-              <a:t>). </a:t>
-            </a:r>
-            <a:r>
-              <a:rPr lang="en-US" sz="2000" dirty="0">
-                <a:latin typeface="+mj-lt"/>
-              </a:rPr>
-              <a:t>Which is equivalent to say that </a:t>
-            </a:r>
-            <a:r>
-              <a:rPr lang="en-US" sz="2000" b="1" dirty="0">
-                <a:latin typeface="+mj-lt"/>
-              </a:rPr>
-              <a:t>a problem can be better explained in lower dimensions. </a:t>
-            </a:r>
-            <a:r>
-              <a:rPr lang="en-US" sz="2000" dirty="0">
-                <a:latin typeface="+mj-lt"/>
-              </a:rPr>
-              <a:t>But that might not be always the case, of course.</a:t>
-            </a:r>
-          </a:p>
-        </p:txBody>
-      </p:sp>
-      <p:pic>
-        <p:nvPicPr>
-          <p:cNvPr id="9" name="Picture 8" descr="Scatter chart&#10;&#10;Description automatically generated">
-            <a:extLst>
-              <a:ext uri="{FF2B5EF4-FFF2-40B4-BE49-F238E27FC236}">
-                <a16:creationId xmlns:a16="http://schemas.microsoft.com/office/drawing/2014/main" id="{1811B176-CECD-0685-EC46-2A5CC75FD2A0}"/>
-              </a:ext>
-            </a:extLst>
-          </p:cNvPr>
-          <p:cNvPicPr>
-            <a:picLocks noChangeAspect="1"/>
-          </p:cNvPicPr>
-          <p:nvPr/>
-        </p:nvPicPr>
-        <p:blipFill>
-          <a:blip r:embed="rId2">
-            <a:extLst>
-              <a:ext uri="{28A0092B-C50C-407E-A947-70E740481C1C}">
-                <a14:useLocalDpi xmlns:a14="http://schemas.microsoft.com/office/drawing/2010/main" val="0"/>
-              </a:ext>
-            </a:extLst>
-          </a:blip>
-          <a:stretch>
-            <a:fillRect/>
-          </a:stretch>
-        </p:blipFill>
-        <p:spPr>
-          <a:xfrm>
-            <a:off x="4036961" y="3087880"/>
-            <a:ext cx="4392177" cy="3310135"/>
-          </a:xfrm>
-          <a:prstGeom prst="rect">
-            <a:avLst/>
-          </a:prstGeom>
-        </p:spPr>
-      </p:pic>
-    </p:spTree>
-    <p:extLst>
-      <p:ext uri="{BB962C8B-B14F-4D97-AF65-F5344CB8AC3E}">
-        <p14:creationId xmlns:p14="http://schemas.microsoft.com/office/powerpoint/2010/main" val="1989458114"/>
-      </p:ext>
-    </p:extLst>
-  </p:cSld>
-  <p:clrMapOvr>
-    <a:masterClrMapping/>
-  </p:clrMapOvr>
-</p:sld>
-</file>
-
-<file path=ppt/slides/slide8.xml><?xml version="1.0" encoding="utf-8"?>
 <p:sld xmlns:a="http://schemas.openxmlformats.org/drawingml/2006/main" xmlns:r="http://schemas.openxmlformats.org/officeDocument/2006/relationships" xmlns:p="http://schemas.openxmlformats.org/presentationml/2006/main">
   <p:cSld>
     <p:spTree>
@@ -30132,7 +27988,7 @@
         <p:spPr>
           <a:xfrm>
             <a:off x="927557" y="1920898"/>
-            <a:ext cx="10610987" cy="1323439"/>
+            <a:ext cx="10610987" cy="1015663"/>
           </a:xfrm>
           <a:prstGeom prst="rect">
             <a:avLst/>
@@ -30153,7 +28009,7 @@
               <a:rPr lang="en-US" sz="2000" dirty="0">
                 <a:latin typeface="+mj-lt"/>
               </a:rPr>
-              <a:t>In a nutshell, PCA identifies a hyperplane that lies closest to the data, and then projects the data onto it</a:t>
+              <a:t>PCA identifies a hyperplane that lies closest to the data, and then projects the data onto it</a:t>
             </a:r>
           </a:p>
           <a:p>
@@ -30219,7 +28075,7 @@
 </p:sld>
 </file>
 
-<file path=ppt/slides/slide9.xml><?xml version="1.0" encoding="utf-8"?>
+<file path=ppt/slides/slide7.xml><?xml version="1.0" encoding="utf-8"?>
 <p:sld xmlns:a="http://schemas.openxmlformats.org/drawingml/2006/main" xmlns:r="http://schemas.openxmlformats.org/officeDocument/2006/relationships" xmlns:p="http://schemas.openxmlformats.org/presentationml/2006/main">
   <p:cSld>
     <p:spTree>
@@ -30706,6 +28562,2523 @@
     <p:extLst>
       <p:ext uri="{BB962C8B-B14F-4D97-AF65-F5344CB8AC3E}">
         <p14:creationId xmlns:p14="http://schemas.microsoft.com/office/powerpoint/2010/main" val="640680089"/>
+      </p:ext>
+    </p:extLst>
+  </p:cSld>
+  <p:clrMapOvr>
+    <a:masterClrMapping/>
+  </p:clrMapOvr>
+</p:sld>
+</file>
+
+<file path=ppt/slides/slide8.xml><?xml version="1.0" encoding="utf-8"?>
+<p:sld xmlns:a="http://schemas.openxmlformats.org/drawingml/2006/main" xmlns:r="http://schemas.openxmlformats.org/officeDocument/2006/relationships" xmlns:p="http://schemas.openxmlformats.org/presentationml/2006/main">
+  <p:cSld>
+    <p:spTree>
+      <p:nvGrpSpPr>
+        <p:cNvPr id="1" name=""/>
+        <p:cNvGrpSpPr/>
+        <p:nvPr/>
+      </p:nvGrpSpPr>
+      <p:grpSpPr>
+        <a:xfrm>
+          <a:off x="0" y="0"/>
+          <a:ext cx="0" cy="0"/>
+          <a:chOff x="0" y="0"/>
+          <a:chExt cx="0" cy="0"/>
+        </a:xfrm>
+      </p:grpSpPr>
+      <p:sp>
+        <p:nvSpPr>
+          <p:cNvPr id="2" name="Title 1">
+            <a:extLst>
+              <a:ext uri="{FF2B5EF4-FFF2-40B4-BE49-F238E27FC236}">
+                <a16:creationId xmlns:a16="http://schemas.microsoft.com/office/drawing/2014/main" id="{31C29F6F-54A2-5964-F2B2-982952460386}"/>
+              </a:ext>
+            </a:extLst>
+          </p:cNvPr>
+          <p:cNvSpPr>
+            <a:spLocks noGrp="1"/>
+          </p:cNvSpPr>
+          <p:nvPr>
+            <p:ph type="title"/>
+          </p:nvPr>
+        </p:nvSpPr>
+        <p:spPr/>
+        <p:txBody>
+          <a:bodyPr>
+            <a:normAutofit/>
+          </a:bodyPr>
+          <a:lstStyle/>
+          <a:p>
+            <a:r>
+              <a:rPr lang="en-US" sz="4000" dirty="0"/>
+              <a:t>Principal Component Analysis (PCA)</a:t>
+            </a:r>
+          </a:p>
+        </p:txBody>
+      </p:sp>
+      <p:sp>
+        <p:nvSpPr>
+          <p:cNvPr id="4" name="Rectángulo 3">
+            <a:extLst>
+              <a:ext uri="{FF2B5EF4-FFF2-40B4-BE49-F238E27FC236}">
+                <a16:creationId xmlns:a16="http://schemas.microsoft.com/office/drawing/2014/main" id="{7BF95E35-4D9C-7F59-F308-C61FF9CD1B58}"/>
+              </a:ext>
+            </a:extLst>
+          </p:cNvPr>
+          <p:cNvSpPr/>
+          <p:nvPr/>
+        </p:nvSpPr>
+        <p:spPr>
+          <a:xfrm>
+            <a:off x="0" y="0"/>
+            <a:ext cx="374469" cy="6858000"/>
+          </a:xfrm>
+          <a:prstGeom prst="rect">
+            <a:avLst/>
+          </a:prstGeom>
+        </p:spPr>
+        <p:style>
+          <a:lnRef idx="2">
+            <a:schemeClr val="accent2">
+              <a:shade val="50000"/>
+            </a:schemeClr>
+          </a:lnRef>
+          <a:fillRef idx="1">
+            <a:schemeClr val="accent2"/>
+          </a:fillRef>
+          <a:effectRef idx="0">
+            <a:schemeClr val="accent2"/>
+          </a:effectRef>
+          <a:fontRef idx="minor">
+            <a:schemeClr val="lt1"/>
+          </a:fontRef>
+        </p:style>
+        <p:txBody>
+          <a:bodyPr rtlCol="0" anchor="ctr"/>
+          <a:lstStyle/>
+          <a:p>
+            <a:pPr algn="ctr"/>
+            <a:endParaRPr lang="es-ES"/>
+          </a:p>
+        </p:txBody>
+      </p:sp>
+      <p:sp>
+        <p:nvSpPr>
+          <p:cNvPr id="6" name="Rectangle 143">
+            <a:extLst>
+              <a:ext uri="{FF2B5EF4-FFF2-40B4-BE49-F238E27FC236}">
+                <a16:creationId xmlns:a16="http://schemas.microsoft.com/office/drawing/2014/main" id="{C9A975F5-C7DC-9274-20CA-B5939A2A86BD}"/>
+              </a:ext>
+            </a:extLst>
+          </p:cNvPr>
+          <p:cNvSpPr>
+            <a:spLocks noChangeArrowheads="1"/>
+          </p:cNvSpPr>
+          <p:nvPr/>
+        </p:nvSpPr>
+        <p:spPr bwMode="auto">
+          <a:xfrm>
+            <a:off x="448342" y="6549317"/>
+            <a:ext cx="5730175" cy="261610"/>
+          </a:xfrm>
+          <a:prstGeom prst="rect">
+            <a:avLst/>
+          </a:prstGeom>
+          <a:noFill/>
+          <a:ln>
+            <a:noFill/>
+          </a:ln>
+          <a:effectLst/>
+          <a:extLst>
+            <a:ext uri="{909E8E84-426E-40DD-AFC4-6F175D3DCCD1}">
+              <a14:hiddenFill xmlns:a14="http://schemas.microsoft.com/office/drawing/2010/main">
+                <a:solidFill>
+                  <a:schemeClr val="accent1"/>
+                </a:solidFill>
+              </a14:hiddenFill>
+            </a:ext>
+            <a:ext uri="{91240B29-F687-4F45-9708-019B960494DF}">
+              <a14:hiddenLine xmlns:a14="http://schemas.microsoft.com/office/drawing/2010/main" w="9525">
+                <a:solidFill>
+                  <a:schemeClr val="tx1"/>
+                </a:solidFill>
+                <a:miter lim="800000"/>
+                <a:headEnd/>
+                <a:tailEnd/>
+              </a14:hiddenLine>
+            </a:ext>
+            <a:ext uri="{AF507438-7753-43E0-B8FC-AC1667EBCBE1}">
+              <a14:hiddenEffects xmlns:a14="http://schemas.microsoft.com/office/drawing/2010/main">
+                <a:effectLst>
+                  <a:outerShdw dist="35921" dir="2700000" algn="ctr" rotWithShape="0">
+                    <a:schemeClr val="bg2"/>
+                  </a:outerShdw>
+                </a:effectLst>
+              </a14:hiddenEffects>
+            </a:ext>
+          </a:extLst>
+        </p:spPr>
+        <p:txBody>
+          <a:bodyPr vert="horz" wrap="square" lIns="91440" tIns="45720" rIns="91440" bIns="45720" numCol="1" anchor="ctr" anchorCtr="0" compatLnSpc="1">
+            <a:prstTxWarp prst="textNoShape">
+              <a:avLst/>
+            </a:prstTxWarp>
+            <a:spAutoFit/>
+          </a:bodyPr>
+          <a:lstStyle/>
+          <a:p>
+            <a:pPr marL="0" marR="0" lvl="0" indent="0" algn="l" defTabSz="914400" rtl="0" eaLnBrk="0" fontAlgn="base" latinLnBrk="0" hangingPunct="0">
+              <a:lnSpc>
+                <a:spcPct val="100000"/>
+              </a:lnSpc>
+              <a:spcBef>
+                <a:spcPct val="0"/>
+              </a:spcBef>
+              <a:spcAft>
+                <a:spcPct val="0"/>
+              </a:spcAft>
+              <a:buClrTx/>
+              <a:buSzTx/>
+              <a:buFontTx/>
+              <a:buNone/>
+              <a:tabLst/>
+            </a:pPr>
+            <a:r>
+              <a:rPr kumimoji="0" lang="en-US" altLang="es-ES" sz="1100" b="0" i="0" u="none" strike="noStrike" cap="none" normalizeH="0" baseline="0" dirty="0">
+                <a:ln>
+                  <a:noFill/>
+                </a:ln>
+                <a:solidFill>
+                  <a:srgbClr val="F4A200"/>
+                </a:solidFill>
+                <a:effectLst/>
+                <a:latin typeface="Arial" panose="020B0604020202020204" pitchFamily="34" charset="0"/>
+                <a:ea typeface="Myriad Pro Light"/>
+                <a:cs typeface="Times New Roman" panose="02020603050405020304" pitchFamily="18" charset="0"/>
+              </a:rPr>
+              <a:t>Master in Quantitative Economic Analysis </a:t>
+            </a:r>
+            <a:r>
+              <a:rPr kumimoji="0" lang="en-US" altLang="es-ES" sz="1100" b="0" i="0" u="none" strike="noStrike" cap="none" normalizeH="0" baseline="0" dirty="0" err="1">
+                <a:ln>
+                  <a:noFill/>
+                </a:ln>
+                <a:solidFill>
+                  <a:srgbClr val="F4A200"/>
+                </a:solidFill>
+                <a:effectLst/>
+                <a:latin typeface="Arial" panose="020B0604020202020204" pitchFamily="34" charset="0"/>
+                <a:ea typeface="Myriad Pro Light"/>
+                <a:cs typeface="Times New Roman" panose="02020603050405020304" pitchFamily="18" charset="0"/>
+              </a:rPr>
+              <a:t>MQuEA</a:t>
+            </a:r>
+            <a:endParaRPr kumimoji="0" lang="es-ES" altLang="es-ES" sz="300" b="0" i="0" u="none" strike="noStrike" cap="none" normalizeH="0" baseline="0" dirty="0">
+              <a:ln>
+                <a:noFill/>
+              </a:ln>
+              <a:solidFill>
+                <a:schemeClr val="tx1"/>
+              </a:solidFill>
+              <a:effectLst/>
+              <a:latin typeface="Arial" panose="020B0604020202020204" pitchFamily="34" charset="0"/>
+            </a:endParaRPr>
+          </a:p>
+        </p:txBody>
+      </p:sp>
+      <p:sp>
+        <p:nvSpPr>
+          <p:cNvPr id="7" name="Rectangle 143">
+            <a:extLst>
+              <a:ext uri="{FF2B5EF4-FFF2-40B4-BE49-F238E27FC236}">
+                <a16:creationId xmlns:a16="http://schemas.microsoft.com/office/drawing/2014/main" id="{2BE2E3EB-749E-E562-030D-C3F46E714169}"/>
+              </a:ext>
+            </a:extLst>
+          </p:cNvPr>
+          <p:cNvSpPr>
+            <a:spLocks noChangeArrowheads="1"/>
+          </p:cNvSpPr>
+          <p:nvPr/>
+        </p:nvSpPr>
+        <p:spPr bwMode="auto">
+          <a:xfrm>
+            <a:off x="6186394" y="6559955"/>
+            <a:ext cx="5730175" cy="261610"/>
+          </a:xfrm>
+          <a:prstGeom prst="rect">
+            <a:avLst/>
+          </a:prstGeom>
+          <a:noFill/>
+          <a:ln>
+            <a:noFill/>
+          </a:ln>
+          <a:effectLst/>
+          <a:extLst>
+            <a:ext uri="{909E8E84-426E-40DD-AFC4-6F175D3DCCD1}">
+              <a14:hiddenFill xmlns:a14="http://schemas.microsoft.com/office/drawing/2010/main">
+                <a:solidFill>
+                  <a:schemeClr val="accent1"/>
+                </a:solidFill>
+              </a14:hiddenFill>
+            </a:ext>
+            <a:ext uri="{91240B29-F687-4F45-9708-019B960494DF}">
+              <a14:hiddenLine xmlns:a14="http://schemas.microsoft.com/office/drawing/2010/main" w="9525">
+                <a:solidFill>
+                  <a:schemeClr val="tx1"/>
+                </a:solidFill>
+                <a:miter lim="800000"/>
+                <a:headEnd/>
+                <a:tailEnd/>
+              </a14:hiddenLine>
+            </a:ext>
+            <a:ext uri="{AF507438-7753-43E0-B8FC-AC1667EBCBE1}">
+              <a14:hiddenEffects xmlns:a14="http://schemas.microsoft.com/office/drawing/2010/main">
+                <a:effectLst>
+                  <a:outerShdw dist="35921" dir="2700000" algn="ctr" rotWithShape="0">
+                    <a:schemeClr val="bg2"/>
+                  </a:outerShdw>
+                </a:effectLst>
+              </a14:hiddenEffects>
+            </a:ext>
+          </a:extLst>
+        </p:spPr>
+        <p:txBody>
+          <a:bodyPr vert="horz" wrap="square" lIns="91440" tIns="45720" rIns="91440" bIns="45720" numCol="1" anchor="ctr" anchorCtr="0" compatLnSpc="1">
+            <a:prstTxWarp prst="textNoShape">
+              <a:avLst/>
+            </a:prstTxWarp>
+            <a:spAutoFit/>
+          </a:bodyPr>
+          <a:lstStyle/>
+          <a:p>
+            <a:pPr marL="0" marR="0" lvl="0" indent="0" algn="r" defTabSz="914400" rtl="0" eaLnBrk="0" fontAlgn="base" latinLnBrk="0" hangingPunct="0">
+              <a:lnSpc>
+                <a:spcPct val="100000"/>
+              </a:lnSpc>
+              <a:spcBef>
+                <a:spcPct val="0"/>
+              </a:spcBef>
+              <a:spcAft>
+                <a:spcPct val="0"/>
+              </a:spcAft>
+              <a:buClrTx/>
+              <a:buSzTx/>
+              <a:buFontTx/>
+              <a:buNone/>
+              <a:tabLst/>
+            </a:pPr>
+            <a:r>
+              <a:rPr kumimoji="0" lang="en-US" altLang="es-ES" sz="1100" b="0" i="0" u="none" strike="noStrike" cap="none" normalizeH="0" baseline="0" dirty="0">
+                <a:ln>
+                  <a:noFill/>
+                </a:ln>
+                <a:solidFill>
+                  <a:srgbClr val="F4A200"/>
+                </a:solidFill>
+                <a:effectLst/>
+                <a:latin typeface="Arial" panose="020B0604020202020204" pitchFamily="34" charset="0"/>
+                <a:ea typeface="Myriad Pro Light"/>
+                <a:cs typeface="Times New Roman" panose="02020603050405020304" pitchFamily="18" charset="0"/>
+              </a:rPr>
+              <a:t>Universidad </a:t>
+            </a:r>
+            <a:r>
+              <a:rPr kumimoji="0" lang="en-US" altLang="es-ES" sz="1100" b="0" i="0" u="none" strike="noStrike" cap="none" normalizeH="0" baseline="0" dirty="0" err="1">
+                <a:ln>
+                  <a:noFill/>
+                </a:ln>
+                <a:solidFill>
+                  <a:srgbClr val="F4A200"/>
+                </a:solidFill>
+                <a:effectLst/>
+                <a:latin typeface="Arial" panose="020B0604020202020204" pitchFamily="34" charset="0"/>
+                <a:ea typeface="Myriad Pro Light"/>
+                <a:cs typeface="Times New Roman" panose="02020603050405020304" pitchFamily="18" charset="0"/>
+              </a:rPr>
+              <a:t>Aut</a:t>
+            </a:r>
+            <a:r>
+              <a:rPr lang="en-US" altLang="es-ES" sz="1100" dirty="0" err="1">
+                <a:solidFill>
+                  <a:srgbClr val="F4A200"/>
+                </a:solidFill>
+                <a:latin typeface="Arial" panose="020B0604020202020204" pitchFamily="34" charset="0"/>
+                <a:ea typeface="Myriad Pro Light"/>
+                <a:cs typeface="Times New Roman" panose="02020603050405020304" pitchFamily="18" charset="0"/>
+              </a:rPr>
+              <a:t>ó</a:t>
+            </a:r>
+            <a:r>
+              <a:rPr kumimoji="0" lang="en-US" altLang="es-ES" sz="1100" b="0" i="0" u="none" strike="noStrike" cap="none" normalizeH="0" baseline="0" dirty="0" err="1">
+                <a:ln>
+                  <a:noFill/>
+                </a:ln>
+                <a:solidFill>
+                  <a:srgbClr val="F4A200"/>
+                </a:solidFill>
+                <a:effectLst/>
+                <a:latin typeface="Arial" panose="020B0604020202020204" pitchFamily="34" charset="0"/>
+                <a:ea typeface="Myriad Pro Light"/>
+                <a:cs typeface="Times New Roman" panose="02020603050405020304" pitchFamily="18" charset="0"/>
+              </a:rPr>
+              <a:t>noma</a:t>
+            </a:r>
+            <a:r>
+              <a:rPr kumimoji="0" lang="en-US" altLang="es-ES" sz="1100" b="0" i="0" u="none" strike="noStrike" cap="none" normalizeH="0" baseline="0" dirty="0">
+                <a:ln>
+                  <a:noFill/>
+                </a:ln>
+                <a:solidFill>
+                  <a:srgbClr val="F4A200"/>
+                </a:solidFill>
+                <a:effectLst/>
+                <a:latin typeface="Arial" panose="020B0604020202020204" pitchFamily="34" charset="0"/>
+                <a:ea typeface="Myriad Pro Light"/>
+                <a:cs typeface="Times New Roman" panose="02020603050405020304" pitchFamily="18" charset="0"/>
+              </a:rPr>
+              <a:t> de Madrid</a:t>
+            </a:r>
+            <a:endParaRPr kumimoji="0" lang="es-ES" altLang="es-ES" sz="300" b="0" i="0" u="none" strike="noStrike" cap="none" normalizeH="0" baseline="0" dirty="0">
+              <a:ln>
+                <a:noFill/>
+              </a:ln>
+              <a:solidFill>
+                <a:schemeClr val="tx1"/>
+              </a:solidFill>
+              <a:effectLst/>
+              <a:latin typeface="Arial" panose="020B0604020202020204" pitchFamily="34" charset="0"/>
+            </a:endParaRPr>
+          </a:p>
+        </p:txBody>
+      </p:sp>
+      <mc:AlternateContent xmlns:mc="http://schemas.openxmlformats.org/markup-compatibility/2006" xmlns:a14="http://schemas.microsoft.com/office/drawing/2010/main">
+        <mc:Choice Requires="a14">
+          <p:sp>
+            <p:nvSpPr>
+              <p:cNvPr id="3" name="TextBox 2">
+                <a:extLst>
+                  <a:ext uri="{FF2B5EF4-FFF2-40B4-BE49-F238E27FC236}">
+                    <a16:creationId xmlns:a16="http://schemas.microsoft.com/office/drawing/2014/main" id="{07C8DDDE-8C83-1AC8-8FA2-895D71DAD748}"/>
+                  </a:ext>
+                </a:extLst>
+              </p:cNvPr>
+              <p:cNvSpPr txBox="1"/>
+              <p:nvPr/>
+            </p:nvSpPr>
+            <p:spPr>
+              <a:xfrm>
+                <a:off x="927557" y="1920898"/>
+                <a:ext cx="10610987" cy="3773469"/>
+              </a:xfrm>
+              <a:prstGeom prst="rect">
+                <a:avLst/>
+              </a:prstGeom>
+              <a:noFill/>
+            </p:spPr>
+            <p:txBody>
+              <a:bodyPr wrap="square" rtlCol="0">
+                <a:spAutoFit/>
+              </a:bodyPr>
+              <a:lstStyle/>
+              <a:p>
+                <a:pPr marL="285750" indent="-285750">
+                  <a:lnSpc>
+                    <a:spcPct val="150000"/>
+                  </a:lnSpc>
+                  <a:buFont typeface="Wingdings" panose="05000000000000000000" pitchFamily="2" charset="2"/>
+                  <a:buChar char="§"/>
+                </a:pPr>
+                <a:r>
+                  <a:rPr lang="en-US" sz="2000" dirty="0">
+                    <a:latin typeface="+mj-lt"/>
+                  </a:rPr>
+                  <a:t>Suppose we want to visualize </a:t>
+                </a:r>
+                <a:r>
+                  <a:rPr lang="en-US" sz="2000" i="1" dirty="0">
+                    <a:latin typeface="+mj-lt"/>
+                  </a:rPr>
+                  <a:t>n</a:t>
+                </a:r>
+                <a:r>
+                  <a:rPr lang="en-US" sz="2000" dirty="0">
+                    <a:latin typeface="+mj-lt"/>
+                  </a:rPr>
+                  <a:t> observations described by a set of </a:t>
+                </a:r>
+                <a:r>
+                  <a:rPr lang="en-US" sz="2000" i="1" dirty="0">
+                    <a:latin typeface="+mj-lt"/>
+                  </a:rPr>
+                  <a:t>p</a:t>
+                </a:r>
+                <a:r>
+                  <a:rPr lang="en-US" sz="2000" dirty="0">
+                    <a:latin typeface="+mj-lt"/>
+                  </a:rPr>
+                  <a:t> features </a:t>
+                </a:r>
+                <a14:m>
+                  <m:oMath xmlns:m="http://schemas.openxmlformats.org/officeDocument/2006/math">
+                    <m:sSub>
+                      <m:sSubPr>
+                        <m:ctrlPr>
+                          <a:rPr lang="en-US" sz="2000" i="1" smtClean="0">
+                            <a:latin typeface="Cambria Math" panose="02040503050406030204" pitchFamily="18" charset="0"/>
+                          </a:rPr>
+                        </m:ctrlPr>
+                      </m:sSubPr>
+                      <m:e>
+                        <m:r>
+                          <a:rPr lang="en-US" sz="2000" b="0" i="1" smtClean="0">
+                            <a:latin typeface="Cambria Math" panose="02040503050406030204" pitchFamily="18" charset="0"/>
+                          </a:rPr>
+                          <m:t>𝑋</m:t>
+                        </m:r>
+                      </m:e>
+                      <m:sub>
+                        <m:r>
+                          <a:rPr lang="en-US" sz="2000" b="0" i="1" smtClean="0">
+                            <a:latin typeface="Cambria Math" panose="02040503050406030204" pitchFamily="18" charset="0"/>
+                          </a:rPr>
+                          <m:t>1</m:t>
+                        </m:r>
+                      </m:sub>
+                    </m:sSub>
+                    <m:r>
+                      <a:rPr lang="en-US" sz="2000" b="0" i="1" smtClean="0">
+                        <a:latin typeface="Cambria Math" panose="02040503050406030204" pitchFamily="18" charset="0"/>
+                      </a:rPr>
+                      <m:t>,</m:t>
+                    </m:r>
+                    <m:sSub>
+                      <m:sSubPr>
+                        <m:ctrlPr>
+                          <a:rPr lang="en-US" sz="2000" i="1">
+                            <a:latin typeface="Cambria Math" panose="02040503050406030204" pitchFamily="18" charset="0"/>
+                          </a:rPr>
+                        </m:ctrlPr>
+                      </m:sSubPr>
+                      <m:e>
+                        <m:r>
+                          <a:rPr lang="en-US" sz="2000" i="1">
+                            <a:latin typeface="Cambria Math" panose="02040503050406030204" pitchFamily="18" charset="0"/>
+                          </a:rPr>
+                          <m:t>𝑋</m:t>
+                        </m:r>
+                      </m:e>
+                      <m:sub>
+                        <m:r>
+                          <a:rPr lang="en-US" sz="2000" b="0" i="1" smtClean="0">
+                            <a:latin typeface="Cambria Math" panose="02040503050406030204" pitchFamily="18" charset="0"/>
+                          </a:rPr>
+                          <m:t>2</m:t>
+                        </m:r>
+                      </m:sub>
+                    </m:sSub>
+                    <m:r>
+                      <a:rPr lang="en-US" sz="2000" b="0" i="1" smtClean="0">
+                        <a:latin typeface="Cambria Math" panose="02040503050406030204" pitchFamily="18" charset="0"/>
+                      </a:rPr>
+                      <m:t>,…,</m:t>
+                    </m:r>
+                    <m:sSub>
+                      <m:sSubPr>
+                        <m:ctrlPr>
+                          <a:rPr lang="en-US" sz="2000" i="1">
+                            <a:latin typeface="Cambria Math" panose="02040503050406030204" pitchFamily="18" charset="0"/>
+                          </a:rPr>
+                        </m:ctrlPr>
+                      </m:sSubPr>
+                      <m:e>
+                        <m:r>
+                          <a:rPr lang="en-US" sz="2000" i="1">
+                            <a:latin typeface="Cambria Math" panose="02040503050406030204" pitchFamily="18" charset="0"/>
+                          </a:rPr>
+                          <m:t>𝑋</m:t>
+                        </m:r>
+                      </m:e>
+                      <m:sub>
+                        <m:r>
+                          <a:rPr lang="en-US" sz="2000" b="0" i="1" smtClean="0">
+                            <a:latin typeface="Cambria Math" panose="02040503050406030204" pitchFamily="18" charset="0"/>
+                          </a:rPr>
+                          <m:t>𝑝</m:t>
+                        </m:r>
+                      </m:sub>
+                    </m:sSub>
+                  </m:oMath>
+                </a14:m>
+                <a:r>
+                  <a:rPr lang="en-US" sz="2000" dirty="0">
+                    <a:latin typeface="+mj-lt"/>
+                  </a:rPr>
+                  <a:t> using scatterplots. This task may become infeasible since there are </a:t>
+                </a:r>
+                <a14:m>
+                  <m:oMath xmlns:m="http://schemas.openxmlformats.org/officeDocument/2006/math">
+                    <m:r>
+                      <a:rPr lang="en-US" sz="2000" b="0" i="1" smtClean="0">
+                        <a:latin typeface="Cambria Math" panose="02040503050406030204" pitchFamily="18" charset="0"/>
+                      </a:rPr>
+                      <m:t>𝑝</m:t>
+                    </m:r>
+                    <m:r>
+                      <a:rPr lang="en-US" sz="2000" b="0" i="1" smtClean="0">
+                        <a:latin typeface="Cambria Math" panose="02040503050406030204" pitchFamily="18" charset="0"/>
+                      </a:rPr>
+                      <m:t>(</m:t>
+                    </m:r>
+                    <m:r>
+                      <a:rPr lang="en-US" sz="2000" b="0" i="1" smtClean="0">
+                        <a:latin typeface="Cambria Math" panose="02040503050406030204" pitchFamily="18" charset="0"/>
+                      </a:rPr>
+                      <m:t>𝑝</m:t>
+                    </m:r>
+                    <m:r>
+                      <a:rPr lang="en-US" sz="2000" b="0" i="1" smtClean="0">
+                        <a:latin typeface="Cambria Math" panose="02040503050406030204" pitchFamily="18" charset="0"/>
+                      </a:rPr>
+                      <m:t>−1)/2</m:t>
+                    </m:r>
+                  </m:oMath>
+                </a14:m>
+                <a:r>
+                  <a:rPr lang="en-US" sz="2000" dirty="0">
+                    <a:latin typeface="+mj-lt"/>
+                  </a:rPr>
+                  <a:t> scatterplots. For instance, if p =10, there would be 45 plots.</a:t>
+                </a:r>
+              </a:p>
+              <a:p>
+                <a:pPr marL="285750" indent="-285750">
+                  <a:lnSpc>
+                    <a:spcPct val="150000"/>
+                  </a:lnSpc>
+                  <a:buFont typeface="Wingdings" panose="05000000000000000000" pitchFamily="2" charset="2"/>
+                  <a:buChar char="§"/>
+                </a:pPr>
+                <a:r>
+                  <a:rPr lang="en-US" sz="2000" dirty="0">
+                    <a:latin typeface="+mj-lt"/>
+                  </a:rPr>
+                  <a:t>It would be great if we could capture a low-dimensional representation of the data that gathers as much information as possible. This is precisely what PCA does.</a:t>
+                </a:r>
+              </a:p>
+              <a:p>
+                <a:pPr marL="285750" indent="-285750">
+                  <a:lnSpc>
+                    <a:spcPct val="150000"/>
+                  </a:lnSpc>
+                  <a:buFont typeface="Wingdings" panose="05000000000000000000" pitchFamily="2" charset="2"/>
+                  <a:buChar char="§"/>
+                </a:pPr>
+                <a:r>
+                  <a:rPr lang="en-US" sz="2000" dirty="0">
+                    <a:latin typeface="+mj-lt"/>
+                  </a:rPr>
+                  <a:t>Again, the idea is that the </a:t>
+                </a:r>
+                <a:r>
+                  <a:rPr lang="en-US" sz="2000" i="1" dirty="0">
+                    <a:latin typeface="+mj-lt"/>
+                  </a:rPr>
+                  <a:t>n</a:t>
+                </a:r>
+                <a:r>
+                  <a:rPr lang="en-US" sz="2000" dirty="0">
+                    <a:latin typeface="+mj-lt"/>
+                  </a:rPr>
+                  <a:t> observations live in a </a:t>
+                </a:r>
+                <a:r>
+                  <a:rPr lang="en-US" sz="2000" i="1" dirty="0">
+                    <a:latin typeface="+mj-lt"/>
+                  </a:rPr>
+                  <a:t>p</a:t>
+                </a:r>
+                <a:r>
+                  <a:rPr lang="en-US" sz="2000" dirty="0">
+                    <a:latin typeface="+mj-lt"/>
+                  </a:rPr>
+                  <a:t>-dimensional space, but not all dimensions are equally interesting (a way of referring to the amount that the observations vary along each dimension).</a:t>
+                </a:r>
+              </a:p>
+            </p:txBody>
+          </p:sp>
+        </mc:Choice>
+        <mc:Fallback xmlns="">
+          <p:sp>
+            <p:nvSpPr>
+              <p:cNvPr id="3" name="TextBox 2">
+                <a:extLst>
+                  <a:ext uri="{FF2B5EF4-FFF2-40B4-BE49-F238E27FC236}">
+                    <a16:creationId xmlns:a16="http://schemas.microsoft.com/office/drawing/2014/main" id="{07C8DDDE-8C83-1AC8-8FA2-895D71DAD748}"/>
+                  </a:ext>
+                </a:extLst>
+              </p:cNvPr>
+              <p:cNvSpPr txBox="1">
+                <a:spLocks noRot="1" noChangeAspect="1" noMove="1" noResize="1" noEditPoints="1" noAdjustHandles="1" noChangeArrowheads="1" noChangeShapeType="1" noTextEdit="1"/>
+              </p:cNvSpPr>
+              <p:nvPr/>
+            </p:nvSpPr>
+            <p:spPr>
+              <a:xfrm>
+                <a:off x="927557" y="1920898"/>
+                <a:ext cx="10610987" cy="3773469"/>
+              </a:xfrm>
+              <a:prstGeom prst="rect">
+                <a:avLst/>
+              </a:prstGeom>
+              <a:blipFill>
+                <a:blip r:embed="rId2"/>
+                <a:stretch>
+                  <a:fillRect l="-517" r="-632" b="-1939"/>
+                </a:stretch>
+              </a:blipFill>
+            </p:spPr>
+            <p:txBody>
+              <a:bodyPr/>
+              <a:lstStyle/>
+              <a:p>
+                <a:r>
+                  <a:rPr lang="en-US">
+                    <a:noFill/>
+                  </a:rPr>
+                  <a:t> </a:t>
+                </a:r>
+              </a:p>
+            </p:txBody>
+          </p:sp>
+        </mc:Fallback>
+      </mc:AlternateContent>
+    </p:spTree>
+    <p:extLst>
+      <p:ext uri="{BB962C8B-B14F-4D97-AF65-F5344CB8AC3E}">
+        <p14:creationId xmlns:p14="http://schemas.microsoft.com/office/powerpoint/2010/main" val="3468408143"/>
+      </p:ext>
+    </p:extLst>
+  </p:cSld>
+  <p:clrMapOvr>
+    <a:masterClrMapping/>
+  </p:clrMapOvr>
+</p:sld>
+</file>
+
+<file path=ppt/slides/slide9.xml><?xml version="1.0" encoding="utf-8"?>
+<p:sld xmlns:a="http://schemas.openxmlformats.org/drawingml/2006/main" xmlns:r="http://schemas.openxmlformats.org/officeDocument/2006/relationships" xmlns:p="http://schemas.openxmlformats.org/presentationml/2006/main">
+  <p:cSld>
+    <p:spTree>
+      <p:nvGrpSpPr>
+        <p:cNvPr id="1" name=""/>
+        <p:cNvGrpSpPr/>
+        <p:nvPr/>
+      </p:nvGrpSpPr>
+      <p:grpSpPr>
+        <a:xfrm>
+          <a:off x="0" y="0"/>
+          <a:ext cx="0" cy="0"/>
+          <a:chOff x="0" y="0"/>
+          <a:chExt cx="0" cy="0"/>
+        </a:xfrm>
+      </p:grpSpPr>
+      <p:sp>
+        <p:nvSpPr>
+          <p:cNvPr id="2" name="Title 1">
+            <a:extLst>
+              <a:ext uri="{FF2B5EF4-FFF2-40B4-BE49-F238E27FC236}">
+                <a16:creationId xmlns:a16="http://schemas.microsoft.com/office/drawing/2014/main" id="{31C29F6F-54A2-5964-F2B2-982952460386}"/>
+              </a:ext>
+            </a:extLst>
+          </p:cNvPr>
+          <p:cNvSpPr>
+            <a:spLocks noGrp="1"/>
+          </p:cNvSpPr>
+          <p:nvPr>
+            <p:ph type="title"/>
+          </p:nvPr>
+        </p:nvSpPr>
+        <p:spPr/>
+        <p:txBody>
+          <a:bodyPr>
+            <a:normAutofit/>
+          </a:bodyPr>
+          <a:lstStyle/>
+          <a:p>
+            <a:r>
+              <a:rPr lang="en-US" sz="4000" dirty="0"/>
+              <a:t>Principal Component Analysis (PCA)</a:t>
+            </a:r>
+          </a:p>
+        </p:txBody>
+      </p:sp>
+      <p:sp>
+        <p:nvSpPr>
+          <p:cNvPr id="4" name="Rectángulo 3">
+            <a:extLst>
+              <a:ext uri="{FF2B5EF4-FFF2-40B4-BE49-F238E27FC236}">
+                <a16:creationId xmlns:a16="http://schemas.microsoft.com/office/drawing/2014/main" id="{7BF95E35-4D9C-7F59-F308-C61FF9CD1B58}"/>
+              </a:ext>
+            </a:extLst>
+          </p:cNvPr>
+          <p:cNvSpPr/>
+          <p:nvPr/>
+        </p:nvSpPr>
+        <p:spPr>
+          <a:xfrm>
+            <a:off x="0" y="0"/>
+            <a:ext cx="374469" cy="6858000"/>
+          </a:xfrm>
+          <a:prstGeom prst="rect">
+            <a:avLst/>
+          </a:prstGeom>
+        </p:spPr>
+        <p:style>
+          <a:lnRef idx="2">
+            <a:schemeClr val="accent2">
+              <a:shade val="50000"/>
+            </a:schemeClr>
+          </a:lnRef>
+          <a:fillRef idx="1">
+            <a:schemeClr val="accent2"/>
+          </a:fillRef>
+          <a:effectRef idx="0">
+            <a:schemeClr val="accent2"/>
+          </a:effectRef>
+          <a:fontRef idx="minor">
+            <a:schemeClr val="lt1"/>
+          </a:fontRef>
+        </p:style>
+        <p:txBody>
+          <a:bodyPr rtlCol="0" anchor="ctr"/>
+          <a:lstStyle/>
+          <a:p>
+            <a:pPr algn="ctr"/>
+            <a:endParaRPr lang="es-ES"/>
+          </a:p>
+        </p:txBody>
+      </p:sp>
+      <p:sp>
+        <p:nvSpPr>
+          <p:cNvPr id="6" name="Rectangle 143">
+            <a:extLst>
+              <a:ext uri="{FF2B5EF4-FFF2-40B4-BE49-F238E27FC236}">
+                <a16:creationId xmlns:a16="http://schemas.microsoft.com/office/drawing/2014/main" id="{C9A975F5-C7DC-9274-20CA-B5939A2A86BD}"/>
+              </a:ext>
+            </a:extLst>
+          </p:cNvPr>
+          <p:cNvSpPr>
+            <a:spLocks noChangeArrowheads="1"/>
+          </p:cNvSpPr>
+          <p:nvPr/>
+        </p:nvSpPr>
+        <p:spPr bwMode="auto">
+          <a:xfrm>
+            <a:off x="448342" y="6549317"/>
+            <a:ext cx="5730175" cy="261610"/>
+          </a:xfrm>
+          <a:prstGeom prst="rect">
+            <a:avLst/>
+          </a:prstGeom>
+          <a:noFill/>
+          <a:ln>
+            <a:noFill/>
+          </a:ln>
+          <a:effectLst/>
+          <a:extLst>
+            <a:ext uri="{909E8E84-426E-40DD-AFC4-6F175D3DCCD1}">
+              <a14:hiddenFill xmlns:a14="http://schemas.microsoft.com/office/drawing/2010/main">
+                <a:solidFill>
+                  <a:schemeClr val="accent1"/>
+                </a:solidFill>
+              </a14:hiddenFill>
+            </a:ext>
+            <a:ext uri="{91240B29-F687-4F45-9708-019B960494DF}">
+              <a14:hiddenLine xmlns:a14="http://schemas.microsoft.com/office/drawing/2010/main" w="9525">
+                <a:solidFill>
+                  <a:schemeClr val="tx1"/>
+                </a:solidFill>
+                <a:miter lim="800000"/>
+                <a:headEnd/>
+                <a:tailEnd/>
+              </a14:hiddenLine>
+            </a:ext>
+            <a:ext uri="{AF507438-7753-43E0-B8FC-AC1667EBCBE1}">
+              <a14:hiddenEffects xmlns:a14="http://schemas.microsoft.com/office/drawing/2010/main">
+                <a:effectLst>
+                  <a:outerShdw dist="35921" dir="2700000" algn="ctr" rotWithShape="0">
+                    <a:schemeClr val="bg2"/>
+                  </a:outerShdw>
+                </a:effectLst>
+              </a14:hiddenEffects>
+            </a:ext>
+          </a:extLst>
+        </p:spPr>
+        <p:txBody>
+          <a:bodyPr vert="horz" wrap="square" lIns="91440" tIns="45720" rIns="91440" bIns="45720" numCol="1" anchor="ctr" anchorCtr="0" compatLnSpc="1">
+            <a:prstTxWarp prst="textNoShape">
+              <a:avLst/>
+            </a:prstTxWarp>
+            <a:spAutoFit/>
+          </a:bodyPr>
+          <a:lstStyle/>
+          <a:p>
+            <a:pPr marL="0" marR="0" lvl="0" indent="0" algn="l" defTabSz="914400" rtl="0" eaLnBrk="0" fontAlgn="base" latinLnBrk="0" hangingPunct="0">
+              <a:lnSpc>
+                <a:spcPct val="100000"/>
+              </a:lnSpc>
+              <a:spcBef>
+                <a:spcPct val="0"/>
+              </a:spcBef>
+              <a:spcAft>
+                <a:spcPct val="0"/>
+              </a:spcAft>
+              <a:buClrTx/>
+              <a:buSzTx/>
+              <a:buFontTx/>
+              <a:buNone/>
+              <a:tabLst/>
+            </a:pPr>
+            <a:r>
+              <a:rPr kumimoji="0" lang="en-US" altLang="es-ES" sz="1100" b="0" i="0" u="none" strike="noStrike" cap="none" normalizeH="0" baseline="0" dirty="0">
+                <a:ln>
+                  <a:noFill/>
+                </a:ln>
+                <a:solidFill>
+                  <a:srgbClr val="F4A200"/>
+                </a:solidFill>
+                <a:effectLst/>
+                <a:latin typeface="Arial" panose="020B0604020202020204" pitchFamily="34" charset="0"/>
+                <a:ea typeface="Myriad Pro Light"/>
+                <a:cs typeface="Times New Roman" panose="02020603050405020304" pitchFamily="18" charset="0"/>
+              </a:rPr>
+              <a:t>Master in Quantitative Economic Analysis </a:t>
+            </a:r>
+            <a:r>
+              <a:rPr kumimoji="0" lang="en-US" altLang="es-ES" sz="1100" b="0" i="0" u="none" strike="noStrike" cap="none" normalizeH="0" baseline="0" dirty="0" err="1">
+                <a:ln>
+                  <a:noFill/>
+                </a:ln>
+                <a:solidFill>
+                  <a:srgbClr val="F4A200"/>
+                </a:solidFill>
+                <a:effectLst/>
+                <a:latin typeface="Arial" panose="020B0604020202020204" pitchFamily="34" charset="0"/>
+                <a:ea typeface="Myriad Pro Light"/>
+                <a:cs typeface="Times New Roman" panose="02020603050405020304" pitchFamily="18" charset="0"/>
+              </a:rPr>
+              <a:t>MQuEA</a:t>
+            </a:r>
+            <a:endParaRPr kumimoji="0" lang="es-ES" altLang="es-ES" sz="300" b="0" i="0" u="none" strike="noStrike" cap="none" normalizeH="0" baseline="0" dirty="0">
+              <a:ln>
+                <a:noFill/>
+              </a:ln>
+              <a:solidFill>
+                <a:schemeClr val="tx1"/>
+              </a:solidFill>
+              <a:effectLst/>
+              <a:latin typeface="Arial" panose="020B0604020202020204" pitchFamily="34" charset="0"/>
+            </a:endParaRPr>
+          </a:p>
+        </p:txBody>
+      </p:sp>
+      <p:sp>
+        <p:nvSpPr>
+          <p:cNvPr id="7" name="Rectangle 143">
+            <a:extLst>
+              <a:ext uri="{FF2B5EF4-FFF2-40B4-BE49-F238E27FC236}">
+                <a16:creationId xmlns:a16="http://schemas.microsoft.com/office/drawing/2014/main" id="{2BE2E3EB-749E-E562-030D-C3F46E714169}"/>
+              </a:ext>
+            </a:extLst>
+          </p:cNvPr>
+          <p:cNvSpPr>
+            <a:spLocks noChangeArrowheads="1"/>
+          </p:cNvSpPr>
+          <p:nvPr/>
+        </p:nvSpPr>
+        <p:spPr bwMode="auto">
+          <a:xfrm>
+            <a:off x="6186394" y="6559955"/>
+            <a:ext cx="5730175" cy="261610"/>
+          </a:xfrm>
+          <a:prstGeom prst="rect">
+            <a:avLst/>
+          </a:prstGeom>
+          <a:noFill/>
+          <a:ln>
+            <a:noFill/>
+          </a:ln>
+          <a:effectLst/>
+          <a:extLst>
+            <a:ext uri="{909E8E84-426E-40DD-AFC4-6F175D3DCCD1}">
+              <a14:hiddenFill xmlns:a14="http://schemas.microsoft.com/office/drawing/2010/main">
+                <a:solidFill>
+                  <a:schemeClr val="accent1"/>
+                </a:solidFill>
+              </a14:hiddenFill>
+            </a:ext>
+            <a:ext uri="{91240B29-F687-4F45-9708-019B960494DF}">
+              <a14:hiddenLine xmlns:a14="http://schemas.microsoft.com/office/drawing/2010/main" w="9525">
+                <a:solidFill>
+                  <a:schemeClr val="tx1"/>
+                </a:solidFill>
+                <a:miter lim="800000"/>
+                <a:headEnd/>
+                <a:tailEnd/>
+              </a14:hiddenLine>
+            </a:ext>
+            <a:ext uri="{AF507438-7753-43E0-B8FC-AC1667EBCBE1}">
+              <a14:hiddenEffects xmlns:a14="http://schemas.microsoft.com/office/drawing/2010/main">
+                <a:effectLst>
+                  <a:outerShdw dist="35921" dir="2700000" algn="ctr" rotWithShape="0">
+                    <a:schemeClr val="bg2"/>
+                  </a:outerShdw>
+                </a:effectLst>
+              </a14:hiddenEffects>
+            </a:ext>
+          </a:extLst>
+        </p:spPr>
+        <p:txBody>
+          <a:bodyPr vert="horz" wrap="square" lIns="91440" tIns="45720" rIns="91440" bIns="45720" numCol="1" anchor="ctr" anchorCtr="0" compatLnSpc="1">
+            <a:prstTxWarp prst="textNoShape">
+              <a:avLst/>
+            </a:prstTxWarp>
+            <a:spAutoFit/>
+          </a:bodyPr>
+          <a:lstStyle/>
+          <a:p>
+            <a:pPr marL="0" marR="0" lvl="0" indent="0" algn="r" defTabSz="914400" rtl="0" eaLnBrk="0" fontAlgn="base" latinLnBrk="0" hangingPunct="0">
+              <a:lnSpc>
+                <a:spcPct val="100000"/>
+              </a:lnSpc>
+              <a:spcBef>
+                <a:spcPct val="0"/>
+              </a:spcBef>
+              <a:spcAft>
+                <a:spcPct val="0"/>
+              </a:spcAft>
+              <a:buClrTx/>
+              <a:buSzTx/>
+              <a:buFontTx/>
+              <a:buNone/>
+              <a:tabLst/>
+            </a:pPr>
+            <a:r>
+              <a:rPr kumimoji="0" lang="en-US" altLang="es-ES" sz="1100" b="0" i="0" u="none" strike="noStrike" cap="none" normalizeH="0" baseline="0" dirty="0">
+                <a:ln>
+                  <a:noFill/>
+                </a:ln>
+                <a:solidFill>
+                  <a:srgbClr val="F4A200"/>
+                </a:solidFill>
+                <a:effectLst/>
+                <a:latin typeface="Arial" panose="020B0604020202020204" pitchFamily="34" charset="0"/>
+                <a:ea typeface="Myriad Pro Light"/>
+                <a:cs typeface="Times New Roman" panose="02020603050405020304" pitchFamily="18" charset="0"/>
+              </a:rPr>
+              <a:t>Universidad </a:t>
+            </a:r>
+            <a:r>
+              <a:rPr kumimoji="0" lang="en-US" altLang="es-ES" sz="1100" b="0" i="0" u="none" strike="noStrike" cap="none" normalizeH="0" baseline="0" dirty="0" err="1">
+                <a:ln>
+                  <a:noFill/>
+                </a:ln>
+                <a:solidFill>
+                  <a:srgbClr val="F4A200"/>
+                </a:solidFill>
+                <a:effectLst/>
+                <a:latin typeface="Arial" panose="020B0604020202020204" pitchFamily="34" charset="0"/>
+                <a:ea typeface="Myriad Pro Light"/>
+                <a:cs typeface="Times New Roman" panose="02020603050405020304" pitchFamily="18" charset="0"/>
+              </a:rPr>
+              <a:t>Aut</a:t>
+            </a:r>
+            <a:r>
+              <a:rPr lang="en-US" altLang="es-ES" sz="1100" dirty="0" err="1">
+                <a:solidFill>
+                  <a:srgbClr val="F4A200"/>
+                </a:solidFill>
+                <a:latin typeface="Arial" panose="020B0604020202020204" pitchFamily="34" charset="0"/>
+                <a:ea typeface="Myriad Pro Light"/>
+                <a:cs typeface="Times New Roman" panose="02020603050405020304" pitchFamily="18" charset="0"/>
+              </a:rPr>
+              <a:t>ó</a:t>
+            </a:r>
+            <a:r>
+              <a:rPr kumimoji="0" lang="en-US" altLang="es-ES" sz="1100" b="0" i="0" u="none" strike="noStrike" cap="none" normalizeH="0" baseline="0" dirty="0" err="1">
+                <a:ln>
+                  <a:noFill/>
+                </a:ln>
+                <a:solidFill>
+                  <a:srgbClr val="F4A200"/>
+                </a:solidFill>
+                <a:effectLst/>
+                <a:latin typeface="Arial" panose="020B0604020202020204" pitchFamily="34" charset="0"/>
+                <a:ea typeface="Myriad Pro Light"/>
+                <a:cs typeface="Times New Roman" panose="02020603050405020304" pitchFamily="18" charset="0"/>
+              </a:rPr>
+              <a:t>noma</a:t>
+            </a:r>
+            <a:r>
+              <a:rPr kumimoji="0" lang="en-US" altLang="es-ES" sz="1100" b="0" i="0" u="none" strike="noStrike" cap="none" normalizeH="0" baseline="0" dirty="0">
+                <a:ln>
+                  <a:noFill/>
+                </a:ln>
+                <a:solidFill>
+                  <a:srgbClr val="F4A200"/>
+                </a:solidFill>
+                <a:effectLst/>
+                <a:latin typeface="Arial" panose="020B0604020202020204" pitchFamily="34" charset="0"/>
+                <a:ea typeface="Myriad Pro Light"/>
+                <a:cs typeface="Times New Roman" panose="02020603050405020304" pitchFamily="18" charset="0"/>
+              </a:rPr>
+              <a:t> de Madrid</a:t>
+            </a:r>
+            <a:endParaRPr kumimoji="0" lang="es-ES" altLang="es-ES" sz="300" b="0" i="0" u="none" strike="noStrike" cap="none" normalizeH="0" baseline="0" dirty="0">
+              <a:ln>
+                <a:noFill/>
+              </a:ln>
+              <a:solidFill>
+                <a:schemeClr val="tx1"/>
+              </a:solidFill>
+              <a:effectLst/>
+              <a:latin typeface="Arial" panose="020B0604020202020204" pitchFamily="34" charset="0"/>
+            </a:endParaRPr>
+          </a:p>
+        </p:txBody>
+      </p:sp>
+      <mc:AlternateContent xmlns:mc="http://schemas.openxmlformats.org/markup-compatibility/2006">
+        <mc:Choice xmlns:a14="http://schemas.microsoft.com/office/drawing/2010/main" Requires="a14">
+          <p:sp>
+            <p:nvSpPr>
+              <p:cNvPr id="3" name="TextBox 2">
+                <a:extLst>
+                  <a:ext uri="{FF2B5EF4-FFF2-40B4-BE49-F238E27FC236}">
+                    <a16:creationId xmlns:a16="http://schemas.microsoft.com/office/drawing/2014/main" id="{07C8DDDE-8C83-1AC8-8FA2-895D71DAD748}"/>
+                  </a:ext>
+                </a:extLst>
+              </p:cNvPr>
+              <p:cNvSpPr txBox="1"/>
+              <p:nvPr/>
+            </p:nvSpPr>
+            <p:spPr>
+              <a:xfrm>
+                <a:off x="927557" y="1920898"/>
+                <a:ext cx="10610987" cy="4258345"/>
+              </a:xfrm>
+              <a:prstGeom prst="rect">
+                <a:avLst/>
+              </a:prstGeom>
+              <a:noFill/>
+            </p:spPr>
+            <p:txBody>
+              <a:bodyPr wrap="square" rtlCol="0">
+                <a:spAutoFit/>
+              </a:bodyPr>
+              <a:lstStyle/>
+              <a:p>
+                <a:pPr marL="285750" indent="-285750">
+                  <a:lnSpc>
+                    <a:spcPct val="150000"/>
+                  </a:lnSpc>
+                  <a:buFont typeface="Wingdings" panose="05000000000000000000" pitchFamily="2" charset="2"/>
+                  <a:buChar char="§"/>
+                </a:pPr>
+                <a:r>
+                  <a:rPr lang="en-US" sz="2000" dirty="0">
+                    <a:latin typeface="+mj-lt"/>
+                  </a:rPr>
+                  <a:t>Each of the dimensions found by PCA is a </a:t>
+                </a:r>
+                <a:r>
+                  <a:rPr lang="en-US" sz="2000" b="1" dirty="0">
+                    <a:latin typeface="+mj-lt"/>
+                  </a:rPr>
+                  <a:t>linear combination of the </a:t>
+                </a:r>
+                <a:r>
+                  <a:rPr lang="en-US" sz="2000" b="1" i="1" dirty="0">
+                    <a:latin typeface="+mj-lt"/>
+                  </a:rPr>
+                  <a:t>p</a:t>
+                </a:r>
+                <a:r>
+                  <a:rPr lang="en-US" sz="2000" b="1" dirty="0">
+                    <a:latin typeface="+mj-lt"/>
+                  </a:rPr>
+                  <a:t> features</a:t>
+                </a:r>
+              </a:p>
+              <a:p>
+                <a:pPr marL="285750" indent="-285750">
+                  <a:lnSpc>
+                    <a:spcPct val="150000"/>
+                  </a:lnSpc>
+                  <a:buFont typeface="Wingdings" panose="05000000000000000000" pitchFamily="2" charset="2"/>
+                  <a:buChar char="§"/>
+                </a:pPr>
+                <a:r>
+                  <a:rPr lang="en-US" sz="2000" dirty="0">
+                    <a:latin typeface="+mj-lt"/>
+                  </a:rPr>
+                  <a:t>The first principal component is the normalized linear combination of the features:</a:t>
+                </a:r>
+              </a:p>
+              <a:p>
+                <a:pPr algn="ctr">
+                  <a:lnSpc>
+                    <a:spcPct val="150000"/>
+                  </a:lnSpc>
+                </a:pPr>
+                <a14:m>
+                  <m:oMath xmlns:m="http://schemas.openxmlformats.org/officeDocument/2006/math">
+                    <m:sSub>
+                      <m:sSubPr>
+                        <m:ctrlPr>
+                          <a:rPr lang="en-US" sz="2000" b="1" i="1" smtClean="0">
+                            <a:latin typeface="Cambria Math" panose="02040503050406030204" pitchFamily="18" charset="0"/>
+                          </a:rPr>
+                        </m:ctrlPr>
+                      </m:sSubPr>
+                      <m:e>
+                        <m:r>
+                          <a:rPr lang="es-ES" sz="2000" b="1" i="1" smtClean="0">
+                            <a:latin typeface="Cambria Math" panose="02040503050406030204" pitchFamily="18" charset="0"/>
+                          </a:rPr>
+                          <m:t>𝒛</m:t>
+                        </m:r>
+                      </m:e>
+                      <m:sub>
+                        <m:r>
+                          <a:rPr lang="es-ES" sz="2000" b="1" i="1" smtClean="0">
+                            <a:latin typeface="Cambria Math" panose="02040503050406030204" pitchFamily="18" charset="0"/>
+                          </a:rPr>
+                          <m:t>𝒊</m:t>
+                        </m:r>
+                        <m:r>
+                          <a:rPr lang="en-US" sz="2000" b="1" i="1" smtClean="0">
+                            <a:latin typeface="Cambria Math" panose="02040503050406030204" pitchFamily="18" charset="0"/>
+                          </a:rPr>
+                          <m:t>𝟏</m:t>
+                        </m:r>
+                      </m:sub>
+                    </m:sSub>
+                    <m:r>
+                      <a:rPr lang="en-US" sz="2000" b="1" i="1" smtClean="0">
+                        <a:latin typeface="Cambria Math" panose="02040503050406030204" pitchFamily="18" charset="0"/>
+                      </a:rPr>
+                      <m:t>=</m:t>
+                    </m:r>
+                    <m:sSub>
+                      <m:sSubPr>
+                        <m:ctrlPr>
+                          <a:rPr lang="en-US" sz="2000" b="1" i="1">
+                            <a:latin typeface="Cambria Math" panose="02040503050406030204" pitchFamily="18" charset="0"/>
+                          </a:rPr>
+                        </m:ctrlPr>
+                      </m:sSubPr>
+                      <m:e>
+                        <m:r>
+                          <a:rPr lang="en-US" sz="2000" b="1" i="1" smtClean="0">
+                            <a:latin typeface="Cambria Math" panose="02040503050406030204" pitchFamily="18" charset="0"/>
+                            <a:sym typeface="Symbol" panose="05050102010706020507" pitchFamily="18" charset="2"/>
+                          </a:rPr>
+                          <m:t></m:t>
+                        </m:r>
+                      </m:e>
+                      <m:sub>
+                        <m:r>
+                          <a:rPr lang="en-US" sz="2000" b="1" i="1" smtClean="0">
+                            <a:latin typeface="Cambria Math" panose="02040503050406030204" pitchFamily="18" charset="0"/>
+                          </a:rPr>
+                          <m:t>𝟏</m:t>
+                        </m:r>
+                        <m:r>
+                          <a:rPr lang="en-US" sz="2000" b="1" i="1">
+                            <a:latin typeface="Cambria Math" panose="02040503050406030204" pitchFamily="18" charset="0"/>
+                          </a:rPr>
+                          <m:t>𝟏</m:t>
+                        </m:r>
+                      </m:sub>
+                    </m:sSub>
+                  </m:oMath>
+                </a14:m>
+                <a:r>
+                  <a:rPr lang="en-US" sz="2000" b="1" dirty="0"/>
+                  <a:t> </a:t>
+                </a:r>
+                <a14:m>
+                  <m:oMath xmlns:m="http://schemas.openxmlformats.org/officeDocument/2006/math">
+                    <m:sSub>
+                      <m:sSubPr>
+                        <m:ctrlPr>
+                          <a:rPr lang="en-US" sz="2000" b="1" i="1" smtClean="0">
+                            <a:latin typeface="Cambria Math" panose="02040503050406030204" pitchFamily="18" charset="0"/>
+                          </a:rPr>
+                        </m:ctrlPr>
+                      </m:sSubPr>
+                      <m:e>
+                        <m:r>
+                          <a:rPr lang="es-ES" sz="2000" b="1" i="1" smtClean="0">
+                            <a:latin typeface="Cambria Math" panose="02040503050406030204" pitchFamily="18" charset="0"/>
+                          </a:rPr>
+                          <m:t>𝒙</m:t>
+                        </m:r>
+                      </m:e>
+                      <m:sub>
+                        <m:r>
+                          <a:rPr lang="es-ES" sz="2000" b="1" i="1" smtClean="0">
+                            <a:latin typeface="Cambria Math" panose="02040503050406030204" pitchFamily="18" charset="0"/>
+                          </a:rPr>
+                          <m:t>𝒊</m:t>
+                        </m:r>
+                        <m:r>
+                          <a:rPr lang="en-US" sz="2000" b="1" i="1">
+                            <a:latin typeface="Cambria Math" panose="02040503050406030204" pitchFamily="18" charset="0"/>
+                          </a:rPr>
+                          <m:t>𝟏</m:t>
+                        </m:r>
+                      </m:sub>
+                    </m:sSub>
+                  </m:oMath>
+                </a14:m>
+                <a:r>
+                  <a:rPr lang="en-US" sz="2000" b="1" dirty="0">
+                    <a:latin typeface="+mj-lt"/>
+                  </a:rPr>
+                  <a:t>+</a:t>
+                </a:r>
+                <a14:m>
+                  <m:oMath xmlns:m="http://schemas.openxmlformats.org/officeDocument/2006/math">
+                    <m:sSub>
+                      <m:sSubPr>
+                        <m:ctrlPr>
+                          <a:rPr lang="en-US" sz="2000" b="1" i="1">
+                            <a:latin typeface="Cambria Math" panose="02040503050406030204" pitchFamily="18" charset="0"/>
+                          </a:rPr>
+                        </m:ctrlPr>
+                      </m:sSubPr>
+                      <m:e>
+                        <m:r>
+                          <a:rPr lang="en-US" sz="2000" b="1" i="1">
+                            <a:latin typeface="Cambria Math" panose="02040503050406030204" pitchFamily="18" charset="0"/>
+                            <a:sym typeface="Symbol" panose="05050102010706020507" pitchFamily="18" charset="2"/>
+                          </a:rPr>
+                          <m:t></m:t>
+                        </m:r>
+                      </m:e>
+                      <m:sub>
+                        <m:r>
+                          <a:rPr lang="en-US" sz="2000" b="1" i="1" smtClean="0">
+                            <a:latin typeface="Cambria Math" panose="02040503050406030204" pitchFamily="18" charset="0"/>
+                            <a:sym typeface="Symbol" panose="05050102010706020507" pitchFamily="18" charset="2"/>
+                          </a:rPr>
+                          <m:t>𝟐</m:t>
+                        </m:r>
+                        <m:r>
+                          <a:rPr lang="en-US" sz="2000" b="1" i="1">
+                            <a:latin typeface="Cambria Math" panose="02040503050406030204" pitchFamily="18" charset="0"/>
+                          </a:rPr>
+                          <m:t>𝟏</m:t>
+                        </m:r>
+                      </m:sub>
+                    </m:sSub>
+                    <m:sSub>
+                      <m:sSubPr>
+                        <m:ctrlPr>
+                          <a:rPr lang="en-US" sz="2000" b="1" i="1">
+                            <a:latin typeface="Cambria Math" panose="02040503050406030204" pitchFamily="18" charset="0"/>
+                          </a:rPr>
+                        </m:ctrlPr>
+                      </m:sSubPr>
+                      <m:e>
+                        <m:r>
+                          <a:rPr lang="es-ES" sz="2000" b="1" i="1" smtClean="0">
+                            <a:latin typeface="Cambria Math" panose="02040503050406030204" pitchFamily="18" charset="0"/>
+                          </a:rPr>
+                          <m:t>𝒙</m:t>
+                        </m:r>
+                      </m:e>
+                      <m:sub>
+                        <m:r>
+                          <a:rPr lang="es-ES" sz="2000" b="1" i="1" smtClean="0">
+                            <a:latin typeface="Cambria Math" panose="02040503050406030204" pitchFamily="18" charset="0"/>
+                          </a:rPr>
+                          <m:t>𝒊</m:t>
+                        </m:r>
+                        <m:r>
+                          <a:rPr lang="en-US" sz="2000" b="1" i="1" smtClean="0">
+                            <a:latin typeface="Cambria Math" panose="02040503050406030204" pitchFamily="18" charset="0"/>
+                          </a:rPr>
+                          <m:t>𝟐</m:t>
+                        </m:r>
+                      </m:sub>
+                    </m:sSub>
+                  </m:oMath>
+                </a14:m>
+                <a:r>
+                  <a:rPr lang="en-US" sz="2000" b="1" dirty="0">
+                    <a:latin typeface="+mj-lt"/>
+                  </a:rPr>
+                  <a:t>+…</a:t>
+                </a:r>
+                <a:r>
+                  <a:rPr lang="en-US" sz="2000" b="1" dirty="0"/>
+                  <a:t> </a:t>
+                </a:r>
+                <a14:m>
+                  <m:oMath xmlns:m="http://schemas.openxmlformats.org/officeDocument/2006/math">
+                    <m:sSub>
+                      <m:sSubPr>
+                        <m:ctrlPr>
+                          <a:rPr lang="en-US" sz="2000" b="1" i="1">
+                            <a:latin typeface="Cambria Math" panose="02040503050406030204" pitchFamily="18" charset="0"/>
+                          </a:rPr>
+                        </m:ctrlPr>
+                      </m:sSubPr>
+                      <m:e>
+                        <m:r>
+                          <a:rPr lang="en-US" sz="2000" b="1" i="1" smtClean="0">
+                            <a:latin typeface="Cambria Math" panose="02040503050406030204" pitchFamily="18" charset="0"/>
+                          </a:rPr>
+                          <m:t>+</m:t>
+                        </m:r>
+                        <m:r>
+                          <a:rPr lang="en-US" sz="2000" b="1" i="1">
+                            <a:latin typeface="Cambria Math" panose="02040503050406030204" pitchFamily="18" charset="0"/>
+                            <a:sym typeface="Symbol" panose="05050102010706020507" pitchFamily="18" charset="2"/>
+                          </a:rPr>
+                          <m:t></m:t>
+                        </m:r>
+                      </m:e>
+                      <m:sub>
+                        <m:r>
+                          <a:rPr lang="en-US" sz="2000" b="1" i="1" smtClean="0">
+                            <a:latin typeface="Cambria Math" panose="02040503050406030204" pitchFamily="18" charset="0"/>
+                            <a:sym typeface="Symbol" panose="05050102010706020507" pitchFamily="18" charset="2"/>
+                          </a:rPr>
+                          <m:t>𝒑</m:t>
+                        </m:r>
+                        <m:r>
+                          <a:rPr lang="en-US" sz="2000" b="1" i="1">
+                            <a:latin typeface="Cambria Math" panose="02040503050406030204" pitchFamily="18" charset="0"/>
+                          </a:rPr>
+                          <m:t>𝟏</m:t>
+                        </m:r>
+                      </m:sub>
+                    </m:sSub>
+                    <m:sSub>
+                      <m:sSubPr>
+                        <m:ctrlPr>
+                          <a:rPr lang="en-US" sz="2000" b="1" i="1">
+                            <a:latin typeface="Cambria Math" panose="02040503050406030204" pitchFamily="18" charset="0"/>
+                          </a:rPr>
+                        </m:ctrlPr>
+                      </m:sSubPr>
+                      <m:e>
+                        <m:r>
+                          <a:rPr lang="es-ES" sz="2000" b="1" i="1" smtClean="0">
+                            <a:latin typeface="Cambria Math" panose="02040503050406030204" pitchFamily="18" charset="0"/>
+                          </a:rPr>
+                          <m:t>𝒙</m:t>
+                        </m:r>
+                      </m:e>
+                      <m:sub>
+                        <m:r>
+                          <a:rPr lang="es-ES" sz="2000" b="1" i="1" smtClean="0">
+                            <a:latin typeface="Cambria Math" panose="02040503050406030204" pitchFamily="18" charset="0"/>
+                          </a:rPr>
+                          <m:t>𝒊</m:t>
+                        </m:r>
+                        <m:r>
+                          <a:rPr lang="en-US" sz="2000" b="1" i="1" smtClean="0">
+                            <a:latin typeface="Cambria Math" panose="02040503050406030204" pitchFamily="18" charset="0"/>
+                          </a:rPr>
+                          <m:t>𝒑</m:t>
+                        </m:r>
+                      </m:sub>
+                    </m:sSub>
+                  </m:oMath>
+                </a14:m>
+                <a:endParaRPr lang="en-US" sz="2000" b="1" dirty="0">
+                  <a:latin typeface="+mj-lt"/>
+                </a:endParaRPr>
+              </a:p>
+              <a:p>
+                <a:pPr>
+                  <a:lnSpc>
+                    <a:spcPct val="150000"/>
+                  </a:lnSpc>
+                </a:pPr>
+                <a:r>
+                  <a:rPr lang="en-US" sz="2000" dirty="0">
+                    <a:latin typeface="+mj-lt"/>
+                  </a:rPr>
+                  <a:t>that has the largest variance. Normalize means that </a:t>
+                </a:r>
+                <a14:m>
+                  <m:oMath xmlns:m="http://schemas.openxmlformats.org/officeDocument/2006/math">
+                    <m:nary>
+                      <m:naryPr>
+                        <m:chr m:val="∑"/>
+                        <m:limLoc m:val="subSup"/>
+                        <m:ctrlPr>
+                          <a:rPr lang="en-US" sz="2000" i="1" smtClean="0">
+                            <a:latin typeface="Cambria Math" panose="02040503050406030204" pitchFamily="18" charset="0"/>
+                          </a:rPr>
+                        </m:ctrlPr>
+                      </m:naryPr>
+                      <m:sub>
+                        <m:r>
+                          <m:rPr>
+                            <m:brk m:alnAt="25"/>
+                          </m:rPr>
+                          <a:rPr lang="en-US" sz="2000" b="0" i="1" smtClean="0">
+                            <a:latin typeface="Cambria Math" panose="02040503050406030204" pitchFamily="18" charset="0"/>
+                          </a:rPr>
+                          <m:t>𝑗</m:t>
+                        </m:r>
+                        <m:r>
+                          <a:rPr lang="en-US" sz="2000" b="0" i="1" smtClean="0">
+                            <a:latin typeface="Cambria Math" panose="02040503050406030204" pitchFamily="18" charset="0"/>
+                          </a:rPr>
+                          <m:t>=1</m:t>
+                        </m:r>
+                      </m:sub>
+                      <m:sup>
+                        <m:r>
+                          <a:rPr lang="en-US" sz="2000" b="0" i="1" smtClean="0">
+                            <a:latin typeface="Cambria Math" panose="02040503050406030204" pitchFamily="18" charset="0"/>
+                          </a:rPr>
+                          <m:t>𝑝</m:t>
+                        </m:r>
+                      </m:sup>
+                      <m:e>
+                        <m:sSubSup>
+                          <m:sSubSupPr>
+                            <m:ctrlPr>
+                              <a:rPr lang="en-US" sz="2000" i="1" smtClean="0">
+                                <a:latin typeface="Cambria Math" panose="02040503050406030204" pitchFamily="18" charset="0"/>
+                              </a:rPr>
+                            </m:ctrlPr>
+                          </m:sSubSupPr>
+                          <m:e>
+                            <m:r>
+                              <a:rPr lang="en-US" sz="2000" i="1" smtClean="0">
+                                <a:latin typeface="Cambria Math" panose="02040503050406030204" pitchFamily="18" charset="0"/>
+                                <a:sym typeface="Symbol" panose="05050102010706020507" pitchFamily="18" charset="2"/>
+                              </a:rPr>
+                              <m:t></m:t>
+                            </m:r>
+                          </m:e>
+                          <m:sub>
+                            <m:r>
+                              <a:rPr lang="en-US" sz="2000" b="0" i="1" smtClean="0">
+                                <a:latin typeface="Cambria Math" panose="02040503050406030204" pitchFamily="18" charset="0"/>
+                              </a:rPr>
+                              <m:t>𝑗</m:t>
+                            </m:r>
+                            <m:r>
+                              <a:rPr lang="en-US" sz="2000" b="0" i="1" smtClean="0">
+                                <a:latin typeface="Cambria Math" panose="02040503050406030204" pitchFamily="18" charset="0"/>
+                              </a:rPr>
+                              <m:t>1</m:t>
+                            </m:r>
+                          </m:sub>
+                          <m:sup>
+                            <m:r>
+                              <a:rPr lang="en-US" sz="2000" b="0" i="1" smtClean="0">
+                                <a:latin typeface="Cambria Math" panose="02040503050406030204" pitchFamily="18" charset="0"/>
+                              </a:rPr>
+                              <m:t>2</m:t>
+                            </m:r>
+                          </m:sup>
+                        </m:sSubSup>
+                        <m:r>
+                          <a:rPr lang="en-US" sz="2000" b="0" i="1" smtClean="0">
+                            <a:latin typeface="Cambria Math" panose="02040503050406030204" pitchFamily="18" charset="0"/>
+                          </a:rPr>
+                          <m:t>=1</m:t>
+                        </m:r>
+                      </m:e>
+                    </m:nary>
+                  </m:oMath>
+                </a14:m>
+                <a:endParaRPr lang="en-US" sz="2000" dirty="0">
+                  <a:latin typeface="+mj-lt"/>
+                </a:endParaRPr>
+              </a:p>
+              <a:p>
+                <a:pPr marL="342900" indent="-342900">
+                  <a:lnSpc>
+                    <a:spcPct val="150000"/>
+                  </a:lnSpc>
+                  <a:buFont typeface="Wingdings" panose="05000000000000000000" pitchFamily="2" charset="2"/>
+                  <a:buChar char="§"/>
+                </a:pPr>
+                <a:r>
+                  <a:rPr lang="en-US" sz="2000" dirty="0">
+                    <a:latin typeface="+mj-lt"/>
+                  </a:rPr>
+                  <a:t>To find the first principal component, the following optimization problem is solved:</a:t>
+                </a:r>
+              </a:p>
+              <a:p>
+                <a:pPr>
+                  <a:lnSpc>
+                    <a:spcPct val="150000"/>
+                  </a:lnSpc>
+                </a:pPr>
+                <a14:m>
+                  <m:oMathPara xmlns:m="http://schemas.openxmlformats.org/officeDocument/2006/math">
+                    <m:oMathParaPr>
+                      <m:jc m:val="centerGroup"/>
+                    </m:oMathParaPr>
+                    <m:oMath xmlns:m="http://schemas.openxmlformats.org/officeDocument/2006/math">
+                      <m:func>
+                        <m:funcPr>
+                          <m:ctrlPr>
+                            <a:rPr lang="en-US" sz="2000" i="1" smtClean="0">
+                              <a:latin typeface="Cambria Math" panose="02040503050406030204" pitchFamily="18" charset="0"/>
+                            </a:rPr>
+                          </m:ctrlPr>
+                        </m:funcPr>
+                        <m:fName>
+                          <m:limLow>
+                            <m:limLowPr>
+                              <m:ctrlPr>
+                                <a:rPr lang="en-US" sz="2000" i="1" smtClean="0">
+                                  <a:latin typeface="Cambria Math" panose="02040503050406030204" pitchFamily="18" charset="0"/>
+                                </a:rPr>
+                              </m:ctrlPr>
+                            </m:limLowPr>
+                            <m:e>
+                              <m:r>
+                                <m:rPr>
+                                  <m:sty m:val="p"/>
+                                </m:rPr>
+                                <a:rPr lang="en-US" sz="2000" i="0" smtClean="0">
+                                  <a:latin typeface="Cambria Math" panose="02040503050406030204" pitchFamily="18" charset="0"/>
+                                </a:rPr>
+                                <m:t>max</m:t>
+                              </m:r>
+                            </m:e>
+                            <m:lim>
+                              <m:sSub>
+                                <m:sSubPr>
+                                  <m:ctrlPr>
+                                    <a:rPr lang="en-US" sz="2000" b="1" i="1">
+                                      <a:latin typeface="Cambria Math" panose="02040503050406030204" pitchFamily="18" charset="0"/>
+                                    </a:rPr>
+                                  </m:ctrlPr>
+                                </m:sSubPr>
+                                <m:e>
+                                  <m:r>
+                                    <a:rPr lang="en-US" sz="2000" b="1" i="1">
+                                      <a:latin typeface="Cambria Math" panose="02040503050406030204" pitchFamily="18" charset="0"/>
+                                      <a:sym typeface="Symbol" panose="05050102010706020507" pitchFamily="18" charset="2"/>
+                                    </a:rPr>
+                                    <m:t></m:t>
+                                  </m:r>
+                                </m:e>
+                                <m:sub>
+                                  <m:r>
+                                    <a:rPr lang="en-US" sz="2000" b="1" i="1">
+                                      <a:latin typeface="Cambria Math" panose="02040503050406030204" pitchFamily="18" charset="0"/>
+                                    </a:rPr>
+                                    <m:t>𝟏𝟏</m:t>
+                                  </m:r>
+                                </m:sub>
+                              </m:sSub>
+                              <m:r>
+                                <a:rPr lang="en-US" sz="2000" b="0" i="1" smtClean="0">
+                                  <a:latin typeface="Cambria Math" panose="02040503050406030204" pitchFamily="18" charset="0"/>
+                                </a:rPr>
+                                <m:t>,</m:t>
+                              </m:r>
+                              <m:r>
+                                <a:rPr lang="en-US" sz="2000" b="1" i="1" smtClean="0">
+                                  <a:latin typeface="Cambria Math" panose="02040503050406030204" pitchFamily="18" charset="0"/>
+                                </a:rPr>
+                                <m:t>…,</m:t>
+                              </m:r>
+                              <m:sSub>
+                                <m:sSubPr>
+                                  <m:ctrlPr>
+                                    <a:rPr lang="en-US" sz="2000" b="1" i="1">
+                                      <a:latin typeface="Cambria Math" panose="02040503050406030204" pitchFamily="18" charset="0"/>
+                                    </a:rPr>
+                                  </m:ctrlPr>
+                                </m:sSubPr>
+                                <m:e>
+                                  <m:r>
+                                    <a:rPr lang="en-US" sz="2000" b="1" i="1">
+                                      <a:latin typeface="Cambria Math" panose="02040503050406030204" pitchFamily="18" charset="0"/>
+                                      <a:sym typeface="Symbol" panose="05050102010706020507" pitchFamily="18" charset="2"/>
+                                    </a:rPr>
+                                    <m:t></m:t>
+                                  </m:r>
+                                </m:e>
+                                <m:sub>
+                                  <m:r>
+                                    <a:rPr lang="en-US" sz="2000" b="1" i="1" smtClean="0">
+                                      <a:latin typeface="Cambria Math" panose="02040503050406030204" pitchFamily="18" charset="0"/>
+                                      <a:sym typeface="Symbol" panose="05050102010706020507" pitchFamily="18" charset="2"/>
+                                    </a:rPr>
+                                    <m:t>𝒑</m:t>
+                                  </m:r>
+                                  <m:r>
+                                    <a:rPr lang="en-US" sz="2000" b="1" i="1">
+                                      <a:latin typeface="Cambria Math" panose="02040503050406030204" pitchFamily="18" charset="0"/>
+                                    </a:rPr>
+                                    <m:t>𝟏</m:t>
+                                  </m:r>
+                                </m:sub>
+                              </m:sSub>
+                            </m:lim>
+                          </m:limLow>
+                        </m:fName>
+                        <m:e>
+                          <m:d>
+                            <m:dPr>
+                              <m:begChr m:val="{"/>
+                              <m:endChr m:val="}"/>
+                              <m:ctrlPr>
+                                <a:rPr lang="en-US" sz="2000" i="1" smtClean="0">
+                                  <a:latin typeface="Cambria Math" panose="02040503050406030204" pitchFamily="18" charset="0"/>
+                                </a:rPr>
+                              </m:ctrlPr>
+                            </m:dPr>
+                            <m:e>
+                              <m:f>
+                                <m:fPr>
+                                  <m:ctrlPr>
+                                    <a:rPr lang="en-US" sz="2000" i="1" smtClean="0">
+                                      <a:latin typeface="Cambria Math" panose="02040503050406030204" pitchFamily="18" charset="0"/>
+                                    </a:rPr>
+                                  </m:ctrlPr>
+                                </m:fPr>
+                                <m:num>
+                                  <m:r>
+                                    <a:rPr lang="en-US" sz="2000" b="0" i="1" smtClean="0">
+                                      <a:latin typeface="Cambria Math" panose="02040503050406030204" pitchFamily="18" charset="0"/>
+                                    </a:rPr>
+                                    <m:t>1</m:t>
+                                  </m:r>
+                                </m:num>
+                                <m:den>
+                                  <m:r>
+                                    <a:rPr lang="en-US" sz="2000" b="0" i="1" smtClean="0">
+                                      <a:latin typeface="Cambria Math" panose="02040503050406030204" pitchFamily="18" charset="0"/>
+                                    </a:rPr>
+                                    <m:t>𝑛</m:t>
+                                  </m:r>
+                                </m:den>
+                              </m:f>
+                              <m:nary>
+                                <m:naryPr>
+                                  <m:chr m:val="∑"/>
+                                  <m:ctrlPr>
+                                    <a:rPr lang="en-US" sz="2000" i="1" smtClean="0">
+                                      <a:latin typeface="Cambria Math" panose="02040503050406030204" pitchFamily="18" charset="0"/>
+                                    </a:rPr>
+                                  </m:ctrlPr>
+                                </m:naryPr>
+                                <m:sub>
+                                  <m:r>
+                                    <m:rPr>
+                                      <m:brk m:alnAt="23"/>
+                                    </m:rPr>
+                                    <a:rPr lang="en-US" sz="2000" b="0" i="1" smtClean="0">
+                                      <a:latin typeface="Cambria Math" panose="02040503050406030204" pitchFamily="18" charset="0"/>
+                                    </a:rPr>
+                                    <m:t>𝑛</m:t>
+                                  </m:r>
+                                  <m:r>
+                                    <a:rPr lang="en-US" sz="2000" b="0" i="1" smtClean="0">
+                                      <a:latin typeface="Cambria Math" panose="02040503050406030204" pitchFamily="18" charset="0"/>
+                                    </a:rPr>
+                                    <m:t>=1</m:t>
+                                  </m:r>
+                                </m:sub>
+                                <m:sup>
+                                  <m:r>
+                                    <a:rPr lang="en-US" sz="2000" b="0" i="1" smtClean="0">
+                                      <a:latin typeface="Cambria Math" panose="02040503050406030204" pitchFamily="18" charset="0"/>
+                                    </a:rPr>
+                                    <m:t>𝑛</m:t>
+                                  </m:r>
+                                </m:sup>
+                                <m:e>
+                                  <m:sSup>
+                                    <m:sSupPr>
+                                      <m:ctrlPr>
+                                        <a:rPr lang="en-US" sz="2000" i="1" smtClean="0">
+                                          <a:latin typeface="Cambria Math" panose="02040503050406030204" pitchFamily="18" charset="0"/>
+                                        </a:rPr>
+                                      </m:ctrlPr>
+                                    </m:sSupPr>
+                                    <m:e>
+                                      <m:d>
+                                        <m:dPr>
+                                          <m:ctrlPr>
+                                            <a:rPr lang="en-US" sz="2000" i="1" smtClean="0">
+                                              <a:latin typeface="Cambria Math" panose="02040503050406030204" pitchFamily="18" charset="0"/>
+                                            </a:rPr>
+                                          </m:ctrlPr>
+                                        </m:dPr>
+                                        <m:e>
+                                          <m:nary>
+                                            <m:naryPr>
+                                              <m:chr m:val="∑"/>
+                                              <m:ctrlPr>
+                                                <a:rPr lang="en-US" sz="2000" i="1" smtClean="0">
+                                                  <a:latin typeface="Cambria Math" panose="02040503050406030204" pitchFamily="18" charset="0"/>
+                                                </a:rPr>
+                                              </m:ctrlPr>
+                                            </m:naryPr>
+                                            <m:sub>
+                                              <m:r>
+                                                <m:rPr>
+                                                  <m:brk m:alnAt="23"/>
+                                                </m:rPr>
+                                                <a:rPr lang="en-US" sz="2000" b="0" i="1" smtClean="0">
+                                                  <a:latin typeface="Cambria Math" panose="02040503050406030204" pitchFamily="18" charset="0"/>
+                                                </a:rPr>
+                                                <m:t>𝑗</m:t>
+                                              </m:r>
+                                              <m:r>
+                                                <a:rPr lang="en-US" sz="2000" b="0" i="1" smtClean="0">
+                                                  <a:latin typeface="Cambria Math" panose="02040503050406030204" pitchFamily="18" charset="0"/>
+                                                </a:rPr>
+                                                <m:t>=1</m:t>
+                                              </m:r>
+                                            </m:sub>
+                                            <m:sup>
+                                              <m:r>
+                                                <a:rPr lang="en-US" sz="2000" b="0" i="1" smtClean="0">
+                                                  <a:latin typeface="Cambria Math" panose="02040503050406030204" pitchFamily="18" charset="0"/>
+                                                </a:rPr>
+                                                <m:t>𝑝</m:t>
+                                              </m:r>
+                                            </m:sup>
+                                            <m:e>
+                                              <m:sSub>
+                                                <m:sSubPr>
+                                                  <m:ctrlPr>
+                                                    <a:rPr lang="en-US" sz="2000" b="1" i="1">
+                                                      <a:latin typeface="Cambria Math" panose="02040503050406030204" pitchFamily="18" charset="0"/>
+                                                    </a:rPr>
+                                                  </m:ctrlPr>
+                                                </m:sSubPr>
+                                                <m:e>
+                                                  <m:r>
+                                                    <a:rPr lang="en-US" sz="2000" b="1" i="1">
+                                                      <a:latin typeface="Cambria Math" panose="02040503050406030204" pitchFamily="18" charset="0"/>
+                                                      <a:sym typeface="Symbol" panose="05050102010706020507" pitchFamily="18" charset="2"/>
+                                                    </a:rPr>
+                                                    <m:t></m:t>
+                                                  </m:r>
+                                                </m:e>
+                                                <m:sub>
+                                                  <m:r>
+                                                    <a:rPr lang="en-US" sz="2000" b="1" i="1" smtClean="0">
+                                                      <a:latin typeface="Cambria Math" panose="02040503050406030204" pitchFamily="18" charset="0"/>
+                                                      <a:sym typeface="Symbol" panose="05050102010706020507" pitchFamily="18" charset="2"/>
+                                                    </a:rPr>
+                                                    <m:t>𝒋</m:t>
+                                                  </m:r>
+                                                  <m:r>
+                                                    <a:rPr lang="en-US" sz="2000" b="1" i="1">
+                                                      <a:latin typeface="Cambria Math" panose="02040503050406030204" pitchFamily="18" charset="0"/>
+                                                    </a:rPr>
+                                                    <m:t>𝟏</m:t>
+                                                  </m:r>
+                                                </m:sub>
+                                              </m:sSub>
+                                              <m:sSub>
+                                                <m:sSubPr>
+                                                  <m:ctrlPr>
+                                                    <a:rPr lang="en-US" sz="2000" b="1" i="1">
+                                                      <a:latin typeface="Cambria Math" panose="02040503050406030204" pitchFamily="18" charset="0"/>
+                                                    </a:rPr>
+                                                  </m:ctrlPr>
+                                                </m:sSubPr>
+                                                <m:e>
+                                                  <m:r>
+                                                    <a:rPr lang="en-US" sz="2000" b="1" i="1" smtClean="0">
+                                                      <a:latin typeface="Cambria Math" panose="02040503050406030204" pitchFamily="18" charset="0"/>
+                                                    </a:rPr>
+                                                    <m:t>𝒙</m:t>
+                                                  </m:r>
+                                                </m:e>
+                                                <m:sub>
+                                                  <m:r>
+                                                    <a:rPr lang="en-US" sz="2000" b="1" i="1" smtClean="0">
+                                                      <a:latin typeface="Cambria Math" panose="02040503050406030204" pitchFamily="18" charset="0"/>
+                                                      <a:sym typeface="Symbol" panose="05050102010706020507" pitchFamily="18" charset="2"/>
+                                                    </a:rPr>
+                                                    <m:t>𝒊</m:t>
+                                                  </m:r>
+                                                  <m:r>
+                                                    <a:rPr lang="en-US" sz="2000" b="1" i="1" smtClean="0">
+                                                      <a:latin typeface="Cambria Math" panose="02040503050406030204" pitchFamily="18" charset="0"/>
+                                                      <a:sym typeface="Symbol" panose="05050102010706020507" pitchFamily="18" charset="2"/>
+                                                    </a:rPr>
+                                                    <m:t>𝒑</m:t>
+                                                  </m:r>
+                                                </m:sub>
+                                              </m:sSub>
+                                            </m:e>
+                                          </m:nary>
+                                        </m:e>
+                                      </m:d>
+                                    </m:e>
+                                    <m:sup>
+                                      <m:r>
+                                        <a:rPr lang="en-US" sz="2000" b="0" i="1" smtClean="0">
+                                          <a:latin typeface="Cambria Math" panose="02040503050406030204" pitchFamily="18" charset="0"/>
+                                        </a:rPr>
+                                        <m:t>2</m:t>
+                                      </m:r>
+                                    </m:sup>
+                                  </m:sSup>
+                                </m:e>
+                              </m:nary>
+                            </m:e>
+                          </m:d>
+                        </m:e>
+                      </m:func>
+                      <m:r>
+                        <a:rPr lang="en-US" sz="2000" b="0" i="1" smtClean="0">
+                          <a:latin typeface="Cambria Math" panose="02040503050406030204" pitchFamily="18" charset="0"/>
+                        </a:rPr>
+                        <m:t>𝑠𝑢𝑏𝑗𝑒𝑐𝑡</m:t>
+                      </m:r>
+                      <m:r>
+                        <a:rPr lang="en-US" sz="2000" b="0" i="1" smtClean="0">
+                          <a:latin typeface="Cambria Math" panose="02040503050406030204" pitchFamily="18" charset="0"/>
+                        </a:rPr>
+                        <m:t> </m:t>
+                      </m:r>
+                      <m:r>
+                        <a:rPr lang="en-US" sz="2000" b="0" i="1" smtClean="0">
+                          <a:latin typeface="Cambria Math" panose="02040503050406030204" pitchFamily="18" charset="0"/>
+                        </a:rPr>
+                        <m:t>𝑡𝑜</m:t>
+                      </m:r>
+                      <m:nary>
+                        <m:naryPr>
+                          <m:chr m:val="∑"/>
+                          <m:limLoc m:val="subSup"/>
+                          <m:ctrlPr>
+                            <a:rPr lang="en-US" sz="2000" i="1">
+                              <a:latin typeface="Cambria Math" panose="02040503050406030204" pitchFamily="18" charset="0"/>
+                            </a:rPr>
+                          </m:ctrlPr>
+                        </m:naryPr>
+                        <m:sub>
+                          <m:r>
+                            <m:rPr>
+                              <m:brk m:alnAt="25"/>
+                            </m:rPr>
+                            <a:rPr lang="en-US" sz="2000" i="1">
+                              <a:latin typeface="Cambria Math" panose="02040503050406030204" pitchFamily="18" charset="0"/>
+                            </a:rPr>
+                            <m:t>𝑗</m:t>
+                          </m:r>
+                          <m:r>
+                            <a:rPr lang="en-US" sz="2000" i="1">
+                              <a:latin typeface="Cambria Math" panose="02040503050406030204" pitchFamily="18" charset="0"/>
+                            </a:rPr>
+                            <m:t>=1</m:t>
+                          </m:r>
+                        </m:sub>
+                        <m:sup>
+                          <m:r>
+                            <a:rPr lang="en-US" sz="2000" i="1">
+                              <a:latin typeface="Cambria Math" panose="02040503050406030204" pitchFamily="18" charset="0"/>
+                            </a:rPr>
+                            <m:t>𝑝</m:t>
+                          </m:r>
+                        </m:sup>
+                        <m:e>
+                          <m:sSubSup>
+                            <m:sSubSupPr>
+                              <m:ctrlPr>
+                                <a:rPr lang="en-US" sz="2000" i="1">
+                                  <a:latin typeface="Cambria Math" panose="02040503050406030204" pitchFamily="18" charset="0"/>
+                                </a:rPr>
+                              </m:ctrlPr>
+                            </m:sSubSupPr>
+                            <m:e>
+                              <m:r>
+                                <a:rPr lang="en-US" sz="2000" i="1">
+                                  <a:latin typeface="Cambria Math" panose="02040503050406030204" pitchFamily="18" charset="0"/>
+                                  <a:sym typeface="Symbol" panose="05050102010706020507" pitchFamily="18" charset="2"/>
+                                </a:rPr>
+                                <m:t></m:t>
+                              </m:r>
+                            </m:e>
+                            <m:sub>
+                              <m:r>
+                                <a:rPr lang="en-US" sz="2000" i="1">
+                                  <a:latin typeface="Cambria Math" panose="02040503050406030204" pitchFamily="18" charset="0"/>
+                                </a:rPr>
+                                <m:t>𝑗</m:t>
+                              </m:r>
+                              <m:r>
+                                <a:rPr lang="en-US" sz="2000" i="1">
+                                  <a:latin typeface="Cambria Math" panose="02040503050406030204" pitchFamily="18" charset="0"/>
+                                </a:rPr>
+                                <m:t>1</m:t>
+                              </m:r>
+                            </m:sub>
+                            <m:sup>
+                              <m:r>
+                                <a:rPr lang="en-US" sz="2000" i="1">
+                                  <a:latin typeface="Cambria Math" panose="02040503050406030204" pitchFamily="18" charset="0"/>
+                                </a:rPr>
+                                <m:t>2</m:t>
+                              </m:r>
+                            </m:sup>
+                          </m:sSubSup>
+                          <m:r>
+                            <a:rPr lang="en-US" sz="2000" i="1">
+                              <a:latin typeface="Cambria Math" panose="02040503050406030204" pitchFamily="18" charset="0"/>
+                            </a:rPr>
+                            <m:t>=1</m:t>
+                          </m:r>
+                        </m:e>
+                      </m:nary>
+                    </m:oMath>
+                  </m:oMathPara>
+                </a14:m>
+                <a:endParaRPr lang="en-US" sz="2000" dirty="0">
+                  <a:latin typeface="+mj-lt"/>
+                </a:endParaRPr>
+              </a:p>
+            </p:txBody>
+          </p:sp>
+        </mc:Choice>
+        <mc:Fallback>
+          <p:sp>
+            <p:nvSpPr>
+              <p:cNvPr id="3" name="TextBox 2">
+                <a:extLst>
+                  <a:ext uri="{FF2B5EF4-FFF2-40B4-BE49-F238E27FC236}">
+                    <a16:creationId xmlns:a16="http://schemas.microsoft.com/office/drawing/2014/main" id="{07C8DDDE-8C83-1AC8-8FA2-895D71DAD748}"/>
+                  </a:ext>
+                </a:extLst>
+              </p:cNvPr>
+              <p:cNvSpPr txBox="1">
+                <a:spLocks noRot="1" noChangeAspect="1" noMove="1" noResize="1" noEditPoints="1" noAdjustHandles="1" noChangeArrowheads="1" noChangeShapeType="1" noTextEdit="1"/>
+              </p:cNvSpPr>
+              <p:nvPr/>
+            </p:nvSpPr>
+            <p:spPr>
+              <a:xfrm>
+                <a:off x="927557" y="1920898"/>
+                <a:ext cx="10610987" cy="4258345"/>
+              </a:xfrm>
+              <a:prstGeom prst="rect">
+                <a:avLst/>
+              </a:prstGeom>
+              <a:blipFill>
+                <a:blip r:embed="rId2"/>
+                <a:stretch>
+                  <a:fillRect l="-574"/>
+                </a:stretch>
+              </a:blipFill>
+            </p:spPr>
+            <p:txBody>
+              <a:bodyPr/>
+              <a:lstStyle/>
+              <a:p>
+                <a:r>
+                  <a:rPr lang="en-US">
+                    <a:noFill/>
+                  </a:rPr>
+                  <a:t> </a:t>
+                </a:r>
+              </a:p>
+            </p:txBody>
+          </p:sp>
+        </mc:Fallback>
+      </mc:AlternateContent>
+      <p:cxnSp>
+        <p:nvCxnSpPr>
+          <p:cNvPr id="8" name="Straight Arrow Connector 7">
+            <a:extLst>
+              <a:ext uri="{FF2B5EF4-FFF2-40B4-BE49-F238E27FC236}">
+                <a16:creationId xmlns:a16="http://schemas.microsoft.com/office/drawing/2014/main" id="{E78D6BB9-A238-FD33-A925-FB07E58A7116}"/>
+              </a:ext>
+            </a:extLst>
+          </p:cNvPr>
+          <p:cNvCxnSpPr/>
+          <p:nvPr/>
+        </p:nvCxnSpPr>
+        <p:spPr>
+          <a:xfrm>
+            <a:off x="2341916" y="4808820"/>
+            <a:ext cx="1526193" cy="223666"/>
+          </a:xfrm>
+          <a:prstGeom prst="straightConnector1">
+            <a:avLst/>
+          </a:prstGeom>
+          <a:ln>
+            <a:solidFill>
+              <a:srgbClr val="FF0000"/>
+            </a:solidFill>
+            <a:tailEnd type="triangle"/>
+          </a:ln>
+        </p:spPr>
+        <p:style>
+          <a:lnRef idx="1">
+            <a:schemeClr val="accent1"/>
+          </a:lnRef>
+          <a:fillRef idx="0">
+            <a:schemeClr val="accent1"/>
+          </a:fillRef>
+          <a:effectRef idx="0">
+            <a:schemeClr val="accent1"/>
+          </a:effectRef>
+          <a:fontRef idx="minor">
+            <a:schemeClr val="tx1"/>
+          </a:fontRef>
+        </p:style>
+      </p:cxnSp>
+      <p:sp>
+        <p:nvSpPr>
+          <p:cNvPr id="9" name="TextBox 8">
+            <a:extLst>
+              <a:ext uri="{FF2B5EF4-FFF2-40B4-BE49-F238E27FC236}">
+                <a16:creationId xmlns:a16="http://schemas.microsoft.com/office/drawing/2014/main" id="{AED52BA1-913E-8452-C64A-2852B1BC2DA8}"/>
+              </a:ext>
+            </a:extLst>
+          </p:cNvPr>
+          <p:cNvSpPr txBox="1"/>
+          <p:nvPr/>
+        </p:nvSpPr>
+        <p:spPr>
+          <a:xfrm>
+            <a:off x="574624" y="4486477"/>
+            <a:ext cx="1734290" cy="1600438"/>
+          </a:xfrm>
+          <a:prstGeom prst="rect">
+            <a:avLst/>
+          </a:prstGeom>
+          <a:noFill/>
+        </p:spPr>
+        <p:txBody>
+          <a:bodyPr wrap="square" rtlCol="0">
+            <a:spAutoFit/>
+          </a:bodyPr>
+          <a:lstStyle/>
+          <a:p>
+            <a:pPr algn="ctr"/>
+            <a:r>
+              <a:rPr lang="es-ES" sz="1400" dirty="0" err="1">
+                <a:solidFill>
+                  <a:srgbClr val="FF0000"/>
+                </a:solidFill>
+              </a:rPr>
+              <a:t>sample</a:t>
+            </a:r>
+            <a:r>
+              <a:rPr lang="es-ES" sz="1400" dirty="0">
+                <a:solidFill>
+                  <a:srgbClr val="FF0000"/>
+                </a:solidFill>
+              </a:rPr>
+              <a:t> </a:t>
+            </a:r>
+            <a:r>
+              <a:rPr lang="es-ES" sz="1400" dirty="0" err="1">
+                <a:solidFill>
+                  <a:srgbClr val="FF0000"/>
+                </a:solidFill>
+              </a:rPr>
+              <a:t>variance</a:t>
+            </a:r>
+            <a:r>
+              <a:rPr lang="es-ES" sz="1400" dirty="0">
+                <a:solidFill>
+                  <a:srgbClr val="FF0000"/>
+                </a:solidFill>
+              </a:rPr>
+              <a:t> </a:t>
+            </a:r>
+            <a:r>
+              <a:rPr lang="es-ES" sz="1400" dirty="0" err="1">
+                <a:solidFill>
+                  <a:srgbClr val="FF0000"/>
+                </a:solidFill>
+              </a:rPr>
+              <a:t>of</a:t>
+            </a:r>
+            <a:r>
+              <a:rPr lang="es-ES" sz="1400" dirty="0">
+                <a:solidFill>
+                  <a:srgbClr val="FF0000"/>
+                </a:solidFill>
+              </a:rPr>
+              <a:t> </a:t>
+            </a:r>
+            <a:r>
+              <a:rPr lang="es-ES" sz="1400" dirty="0" err="1">
+                <a:solidFill>
+                  <a:srgbClr val="FF0000"/>
+                </a:solidFill>
+              </a:rPr>
+              <a:t>the</a:t>
+            </a:r>
+            <a:r>
+              <a:rPr lang="es-ES" sz="1400" dirty="0">
+                <a:solidFill>
+                  <a:srgbClr val="FF0000"/>
+                </a:solidFill>
+              </a:rPr>
+              <a:t> n </a:t>
+            </a:r>
+            <a:r>
+              <a:rPr lang="es-ES" sz="1400" dirty="0" err="1">
+                <a:solidFill>
+                  <a:srgbClr val="FF0000"/>
+                </a:solidFill>
+              </a:rPr>
+              <a:t>values</a:t>
+            </a:r>
+            <a:r>
+              <a:rPr lang="es-ES" sz="1400" dirty="0">
+                <a:solidFill>
+                  <a:srgbClr val="FF0000"/>
+                </a:solidFill>
+              </a:rPr>
+              <a:t> </a:t>
+            </a:r>
+            <a:r>
+              <a:rPr lang="es-ES" sz="1400" dirty="0" err="1">
+                <a:solidFill>
+                  <a:srgbClr val="FF0000"/>
+                </a:solidFill>
+              </a:rPr>
+              <a:t>of</a:t>
+            </a:r>
+            <a:r>
+              <a:rPr lang="es-ES" sz="1400" dirty="0">
+                <a:solidFill>
+                  <a:srgbClr val="FF0000"/>
+                </a:solidFill>
+              </a:rPr>
+              <a:t> zi1</a:t>
+            </a:r>
+          </a:p>
+          <a:p>
+            <a:pPr algn="ctr"/>
+            <a:r>
+              <a:rPr lang="es-ES" sz="1400" dirty="0">
+                <a:solidFill>
+                  <a:srgbClr val="FF0000"/>
+                </a:solidFill>
+              </a:rPr>
+              <a:t>(</a:t>
+            </a:r>
+            <a:r>
+              <a:rPr lang="es-ES" sz="1400" dirty="0" err="1">
+                <a:solidFill>
+                  <a:srgbClr val="FF0000"/>
+                </a:solidFill>
+              </a:rPr>
+              <a:t>becuase</a:t>
+            </a:r>
+            <a:r>
+              <a:rPr lang="es-ES" sz="1400" dirty="0">
+                <a:solidFill>
+                  <a:srgbClr val="FF0000"/>
+                </a:solidFill>
+              </a:rPr>
+              <a:t> z has </a:t>
+            </a:r>
+            <a:r>
+              <a:rPr lang="es-ES" sz="1400" dirty="0" err="1">
+                <a:solidFill>
+                  <a:srgbClr val="FF0000"/>
+                </a:solidFill>
+              </a:rPr>
+              <a:t>zero</a:t>
+            </a:r>
+            <a:r>
+              <a:rPr lang="es-ES" sz="1400" dirty="0">
+                <a:solidFill>
+                  <a:srgbClr val="FF0000"/>
+                </a:solidFill>
+              </a:rPr>
+              <a:t> mean as </a:t>
+            </a:r>
+            <a:r>
+              <a:rPr lang="es-ES" sz="1400" dirty="0" err="1">
+                <a:solidFill>
+                  <a:srgbClr val="FF0000"/>
+                </a:solidFill>
+              </a:rPr>
+              <a:t>it</a:t>
+            </a:r>
+            <a:r>
+              <a:rPr lang="es-ES" sz="1400" dirty="0">
+                <a:solidFill>
+                  <a:srgbClr val="FF0000"/>
+                </a:solidFill>
+              </a:rPr>
+              <a:t> comes </a:t>
+            </a:r>
+            <a:r>
+              <a:rPr lang="es-ES" sz="1400" dirty="0" err="1">
+                <a:solidFill>
+                  <a:srgbClr val="FF0000"/>
+                </a:solidFill>
+              </a:rPr>
+              <a:t>from</a:t>
+            </a:r>
+            <a:r>
+              <a:rPr lang="es-ES" sz="1400" dirty="0">
+                <a:solidFill>
+                  <a:srgbClr val="FF0000"/>
+                </a:solidFill>
+              </a:rPr>
+              <a:t> </a:t>
+            </a:r>
+            <a:r>
+              <a:rPr lang="es-ES" sz="1400" dirty="0" err="1">
+                <a:solidFill>
+                  <a:srgbClr val="FF0000"/>
+                </a:solidFill>
+              </a:rPr>
+              <a:t>x’s</a:t>
+            </a:r>
+            <a:r>
+              <a:rPr lang="es-ES" sz="1400" dirty="0">
+                <a:solidFill>
+                  <a:srgbClr val="FF0000"/>
+                </a:solidFill>
+              </a:rPr>
+              <a:t> </a:t>
+            </a:r>
+            <a:r>
+              <a:rPr lang="es-ES" sz="1400" dirty="0" err="1">
+                <a:solidFill>
+                  <a:srgbClr val="FF0000"/>
+                </a:solidFill>
+              </a:rPr>
+              <a:t>that</a:t>
+            </a:r>
+            <a:r>
+              <a:rPr lang="es-ES" sz="1400" dirty="0">
+                <a:solidFill>
+                  <a:srgbClr val="FF0000"/>
+                </a:solidFill>
+              </a:rPr>
+              <a:t> </a:t>
+            </a:r>
+            <a:r>
+              <a:rPr lang="es-ES" sz="1400" dirty="0" err="1">
+                <a:solidFill>
+                  <a:srgbClr val="FF0000"/>
+                </a:solidFill>
+              </a:rPr>
+              <a:t>have</a:t>
+            </a:r>
+            <a:r>
+              <a:rPr lang="es-ES" sz="1400" dirty="0">
+                <a:solidFill>
+                  <a:srgbClr val="FF0000"/>
+                </a:solidFill>
+              </a:rPr>
+              <a:t> </a:t>
+            </a:r>
+            <a:r>
+              <a:rPr lang="es-ES" sz="1400" dirty="0" err="1">
+                <a:solidFill>
+                  <a:srgbClr val="FF0000"/>
+                </a:solidFill>
+              </a:rPr>
+              <a:t>zero</a:t>
+            </a:r>
+            <a:r>
+              <a:rPr lang="es-ES" sz="1400" dirty="0">
+                <a:solidFill>
+                  <a:srgbClr val="FF0000"/>
+                </a:solidFill>
+              </a:rPr>
+              <a:t> mean)</a:t>
+            </a:r>
+            <a:endParaRPr lang="en-US" sz="1400" dirty="0">
+              <a:solidFill>
+                <a:srgbClr val="FF0000"/>
+              </a:solidFill>
+            </a:endParaRPr>
+          </a:p>
+        </p:txBody>
+      </p:sp>
+      <p:cxnSp>
+        <p:nvCxnSpPr>
+          <p:cNvPr id="5" name="Straight Arrow Connector 4">
+            <a:extLst>
+              <a:ext uri="{FF2B5EF4-FFF2-40B4-BE49-F238E27FC236}">
+                <a16:creationId xmlns:a16="http://schemas.microsoft.com/office/drawing/2014/main" id="{D909AEAD-0F8C-2DE5-3BB2-E9AA6BF2F711}"/>
+              </a:ext>
+            </a:extLst>
+          </p:cNvPr>
+          <p:cNvCxnSpPr>
+            <a:cxnSpLocks/>
+          </p:cNvCxnSpPr>
+          <p:nvPr/>
+        </p:nvCxnSpPr>
+        <p:spPr>
+          <a:xfrm flipH="1">
+            <a:off x="7127823" y="3260361"/>
+            <a:ext cx="1296649" cy="374754"/>
+          </a:xfrm>
+          <a:prstGeom prst="straightConnector1">
+            <a:avLst/>
+          </a:prstGeom>
+          <a:ln>
+            <a:solidFill>
+              <a:srgbClr val="FF0000"/>
+            </a:solidFill>
+            <a:tailEnd type="triangle"/>
+          </a:ln>
+        </p:spPr>
+        <p:style>
+          <a:lnRef idx="1">
+            <a:schemeClr val="accent1"/>
+          </a:lnRef>
+          <a:fillRef idx="0">
+            <a:schemeClr val="accent1"/>
+          </a:fillRef>
+          <a:effectRef idx="0">
+            <a:schemeClr val="accent1"/>
+          </a:effectRef>
+          <a:fontRef idx="minor">
+            <a:schemeClr val="tx1"/>
+          </a:fontRef>
+        </p:style>
+      </p:cxnSp>
+      <p:sp>
+        <p:nvSpPr>
+          <p:cNvPr id="12" name="TextBox 11">
+            <a:extLst>
+              <a:ext uri="{FF2B5EF4-FFF2-40B4-BE49-F238E27FC236}">
+                <a16:creationId xmlns:a16="http://schemas.microsoft.com/office/drawing/2014/main" id="{72CC70DC-81FF-4A12-B63C-A1CF19BD06BF}"/>
+              </a:ext>
+            </a:extLst>
+          </p:cNvPr>
+          <p:cNvSpPr txBox="1"/>
+          <p:nvPr/>
+        </p:nvSpPr>
+        <p:spPr>
+          <a:xfrm>
+            <a:off x="8389143" y="3081196"/>
+            <a:ext cx="889965" cy="954107"/>
+          </a:xfrm>
+          <a:prstGeom prst="rect">
+            <a:avLst/>
+          </a:prstGeom>
+          <a:noFill/>
+        </p:spPr>
+        <p:txBody>
+          <a:bodyPr wrap="square" rtlCol="0">
+            <a:spAutoFit/>
+          </a:bodyPr>
+          <a:lstStyle/>
+          <a:p>
+            <a:pPr algn="ctr"/>
+            <a:r>
+              <a:rPr lang="es-ES" sz="1400" dirty="0">
+                <a:solidFill>
+                  <a:srgbClr val="FF0000"/>
+                </a:solidFill>
+              </a:rPr>
+              <a:t>Phi </a:t>
+            </a:r>
+            <a:r>
+              <a:rPr lang="es-ES" sz="1400" dirty="0" err="1">
+                <a:solidFill>
+                  <a:srgbClr val="FF0000"/>
+                </a:solidFill>
+              </a:rPr>
+              <a:t>is</a:t>
+            </a:r>
+            <a:r>
+              <a:rPr lang="es-ES" sz="1400" dirty="0">
+                <a:solidFill>
+                  <a:srgbClr val="FF0000"/>
+                </a:solidFill>
+              </a:rPr>
+              <a:t> </a:t>
+            </a:r>
+            <a:r>
+              <a:rPr lang="es-ES" sz="1400" dirty="0" err="1">
+                <a:solidFill>
+                  <a:srgbClr val="FF0000"/>
+                </a:solidFill>
+              </a:rPr>
+              <a:t>called</a:t>
+            </a:r>
+            <a:r>
+              <a:rPr lang="es-ES" sz="1400" dirty="0">
+                <a:solidFill>
+                  <a:srgbClr val="FF0000"/>
+                </a:solidFill>
+              </a:rPr>
+              <a:t> </a:t>
+            </a:r>
+            <a:r>
+              <a:rPr lang="es-ES" sz="1400" i="1" dirty="0">
+                <a:solidFill>
+                  <a:srgbClr val="FF0000"/>
+                </a:solidFill>
+              </a:rPr>
+              <a:t>vector </a:t>
+            </a:r>
+            <a:r>
+              <a:rPr lang="es-ES" sz="1400" i="1" dirty="0" err="1">
+                <a:solidFill>
+                  <a:srgbClr val="FF0000"/>
+                </a:solidFill>
+              </a:rPr>
+              <a:t>of</a:t>
+            </a:r>
+            <a:r>
+              <a:rPr lang="es-ES" sz="1400" i="1" dirty="0">
+                <a:solidFill>
+                  <a:srgbClr val="FF0000"/>
+                </a:solidFill>
+              </a:rPr>
+              <a:t> </a:t>
+            </a:r>
+            <a:r>
+              <a:rPr lang="es-ES" sz="1400" i="1" dirty="0" err="1">
+                <a:solidFill>
+                  <a:srgbClr val="FF0000"/>
+                </a:solidFill>
+              </a:rPr>
+              <a:t>loadings</a:t>
+            </a:r>
+            <a:endParaRPr lang="en-US" sz="1400" dirty="0">
+              <a:solidFill>
+                <a:srgbClr val="FF0000"/>
+              </a:solidFill>
+            </a:endParaRPr>
+          </a:p>
+        </p:txBody>
+      </p:sp>
+    </p:spTree>
+    <p:extLst>
+      <p:ext uri="{BB962C8B-B14F-4D97-AF65-F5344CB8AC3E}">
+        <p14:creationId xmlns:p14="http://schemas.microsoft.com/office/powerpoint/2010/main" val="144432870"/>
       </p:ext>
     </p:extLst>
   </p:cSld>

--- a/Course content/Slides/Topic 7 - Dimensionality reduction.pptx
+++ b/Course content/Slides/Topic 7 - Dimensionality reduction.pptx
@@ -151,8 +151,8 @@
 <pc:chgInfo xmlns:a="http://schemas.openxmlformats.org/drawingml/2006/main" xmlns:r="http://schemas.openxmlformats.org/officeDocument/2006/relationships" xmlns:ac="http://schemas.microsoft.com/office/drawing/2013/main/command" xmlns:pc="http://schemas.microsoft.com/office/powerpoint/2013/main/command">
   <pc:docChgLst>
     <pc:chgData name="Javier Bas Vicente" userId="96bf8a96-3310-496c-8c7e-8a087f977faa" providerId="ADAL" clId="{C6B80D17-39A7-49D1-A96C-D7F73E9814D9}"/>
-    <pc:docChg chg="undo redo custSel addSld delSld modSld">
-      <pc:chgData name="Javier Bas Vicente" userId="96bf8a96-3310-496c-8c7e-8a087f977faa" providerId="ADAL" clId="{C6B80D17-39A7-49D1-A96C-D7F73E9814D9}" dt="2023-11-15T13:16:46.321" v="1329" actId="404"/>
+    <pc:docChg chg="undo redo custSel addSld delSld modSld sldOrd">
+      <pc:chgData name="Javier Bas Vicente" userId="96bf8a96-3310-496c-8c7e-8a087f977faa" providerId="ADAL" clId="{C6B80D17-39A7-49D1-A96C-D7F73E9814D9}" dt="2023-11-20T18:01:16.942" v="1333"/>
       <pc:docMkLst>
         <pc:docMk/>
       </pc:docMkLst>
@@ -264,8 +264,8 @@
           <pc:sldMk cId="1989458114" sldId="283"/>
         </pc:sldMkLst>
       </pc:sldChg>
-      <pc:sldChg chg="modSp mod">
-        <pc:chgData name="Javier Bas Vicente" userId="96bf8a96-3310-496c-8c7e-8a087f977faa" providerId="ADAL" clId="{C6B80D17-39A7-49D1-A96C-D7F73E9814D9}" dt="2023-11-15T11:02:46.865" v="3" actId="20577"/>
+      <pc:sldChg chg="modSp mod ord">
+        <pc:chgData name="Javier Bas Vicente" userId="96bf8a96-3310-496c-8c7e-8a087f977faa" providerId="ADAL" clId="{C6B80D17-39A7-49D1-A96C-D7F73E9814D9}" dt="2023-11-20T18:01:16.942" v="1333"/>
         <pc:sldMkLst>
           <pc:docMk/>
           <pc:sldMk cId="190966088" sldId="284"/>
@@ -543,7 +543,7 @@
           <a:p>
             <a:fld id="{B9B1DC7F-8587-4047-9A5D-1FCB6614CAE0}" type="datetimeFigureOut">
               <a:rPr lang="en-US" smtClean="0"/>
-              <a:t>11/15/2023</a:t>
+              <a:t>11/20/2023</a:t>
             </a:fld>
             <a:endParaRPr lang="en-US"/>
           </a:p>
@@ -957,7 +957,7 @@
           <a:p>
             <a:fld id="{A7DB5662-7327-465C-9A70-AD96B7A8D67A}" type="datetimeFigureOut">
               <a:rPr lang="en-US" smtClean="0"/>
-              <a:t>11/15/2023</a:t>
+              <a:t>11/20/2023</a:t>
             </a:fld>
             <a:endParaRPr lang="en-US"/>
           </a:p>
@@ -1155,7 +1155,7 @@
           <a:p>
             <a:fld id="{A7DB5662-7327-465C-9A70-AD96B7A8D67A}" type="datetimeFigureOut">
               <a:rPr lang="en-US" smtClean="0"/>
-              <a:t>11/15/2023</a:t>
+              <a:t>11/20/2023</a:t>
             </a:fld>
             <a:endParaRPr lang="en-US"/>
           </a:p>
@@ -1363,7 +1363,7 @@
           <a:p>
             <a:fld id="{A7DB5662-7327-465C-9A70-AD96B7A8D67A}" type="datetimeFigureOut">
               <a:rPr lang="en-US" smtClean="0"/>
-              <a:t>11/15/2023</a:t>
+              <a:t>11/20/2023</a:t>
             </a:fld>
             <a:endParaRPr lang="en-US"/>
           </a:p>
@@ -1561,7 +1561,7 @@
           <a:p>
             <a:fld id="{A7DB5662-7327-465C-9A70-AD96B7A8D67A}" type="datetimeFigureOut">
               <a:rPr lang="en-US" smtClean="0"/>
-              <a:t>11/15/2023</a:t>
+              <a:t>11/20/2023</a:t>
             </a:fld>
             <a:endParaRPr lang="en-US"/>
           </a:p>
@@ -1836,7 +1836,7 @@
           <a:p>
             <a:fld id="{A7DB5662-7327-465C-9A70-AD96B7A8D67A}" type="datetimeFigureOut">
               <a:rPr lang="en-US" smtClean="0"/>
-              <a:t>11/15/2023</a:t>
+              <a:t>11/20/2023</a:t>
             </a:fld>
             <a:endParaRPr lang="en-US"/>
           </a:p>
@@ -2101,7 +2101,7 @@
           <a:p>
             <a:fld id="{A7DB5662-7327-465C-9A70-AD96B7A8D67A}" type="datetimeFigureOut">
               <a:rPr lang="en-US" smtClean="0"/>
-              <a:t>11/15/2023</a:t>
+              <a:t>11/20/2023</a:t>
             </a:fld>
             <a:endParaRPr lang="en-US"/>
           </a:p>
@@ -2513,7 +2513,7 @@
           <a:p>
             <a:fld id="{A7DB5662-7327-465C-9A70-AD96B7A8D67A}" type="datetimeFigureOut">
               <a:rPr lang="en-US" smtClean="0"/>
-              <a:t>11/15/2023</a:t>
+              <a:t>11/20/2023</a:t>
             </a:fld>
             <a:endParaRPr lang="en-US"/>
           </a:p>
@@ -2654,7 +2654,7 @@
           <a:p>
             <a:fld id="{A7DB5662-7327-465C-9A70-AD96B7A8D67A}" type="datetimeFigureOut">
               <a:rPr lang="en-US" smtClean="0"/>
-              <a:t>11/15/2023</a:t>
+              <a:t>11/20/2023</a:t>
             </a:fld>
             <a:endParaRPr lang="en-US"/>
           </a:p>
@@ -2767,7 +2767,7 @@
           <a:p>
             <a:fld id="{A7DB5662-7327-465C-9A70-AD96B7A8D67A}" type="datetimeFigureOut">
               <a:rPr lang="en-US" smtClean="0"/>
-              <a:t>11/15/2023</a:t>
+              <a:t>11/20/2023</a:t>
             </a:fld>
             <a:endParaRPr lang="en-US"/>
           </a:p>
@@ -3078,7 +3078,7 @@
           <a:p>
             <a:fld id="{A7DB5662-7327-465C-9A70-AD96B7A8D67A}" type="datetimeFigureOut">
               <a:rPr lang="en-US" smtClean="0"/>
-              <a:t>11/15/2023</a:t>
+              <a:t>11/20/2023</a:t>
             </a:fld>
             <a:endParaRPr lang="en-US"/>
           </a:p>
@@ -3366,7 +3366,7 @@
           <a:p>
             <a:fld id="{A7DB5662-7327-465C-9A70-AD96B7A8D67A}" type="datetimeFigureOut">
               <a:rPr lang="en-US" smtClean="0"/>
-              <a:t>11/15/2023</a:t>
+              <a:t>11/20/2023</a:t>
             </a:fld>
             <a:endParaRPr lang="en-US"/>
           </a:p>
@@ -3607,7 +3607,7 @@
           <a:p>
             <a:fld id="{A7DB5662-7327-465C-9A70-AD96B7A8D67A}" type="datetimeFigureOut">
               <a:rPr lang="en-US" smtClean="0"/>
-              <a:t>11/15/2023</a:t>
+              <a:t>11/20/2023</a:t>
             </a:fld>
             <a:endParaRPr lang="en-US"/>
           </a:p>
@@ -29649,8 +29649,8 @@
           </a:p>
         </p:txBody>
       </p:sp>
-      <mc:AlternateContent xmlns:mc="http://schemas.openxmlformats.org/markup-compatibility/2006">
-        <mc:Choice xmlns:a14="http://schemas.microsoft.com/office/drawing/2010/main" Requires="a14">
+      <mc:AlternateContent xmlns:mc="http://schemas.openxmlformats.org/markup-compatibility/2006" xmlns:a14="http://schemas.microsoft.com/office/drawing/2010/main">
+        <mc:Choice Requires="a14">
           <p:sp>
             <p:nvSpPr>
               <p:cNvPr id="3" name="TextBox 2">
@@ -30420,14 +30420,7 @@
                                                       <a:latin typeface="Cambria Math" panose="02040503050406030204" pitchFamily="18" charset="0"/>
                                                       <a:sym typeface="Symbol" panose="05050102010706020507" pitchFamily="18" charset="2"/>
                                                     </a:rPr>
-                                                    <m:t>𝒊</m:t>
-                                                  </m:r>
-                                                  <m:r>
-                                                    <a:rPr lang="en-US" sz="2000" b="1" i="1" smtClean="0">
-                                                      <a:latin typeface="Cambria Math" panose="02040503050406030204" pitchFamily="18" charset="0"/>
-                                                      <a:sym typeface="Symbol" panose="05050102010706020507" pitchFamily="18" charset="2"/>
-                                                    </a:rPr>
-                                                    <m:t>𝒑</m:t>
+                                                    <m:t>𝒊𝒑</m:t>
                                                   </m:r>
                                                 </m:sub>
                                               </m:sSub>
@@ -30563,7 +30556,7 @@
             </p:txBody>
           </p:sp>
         </mc:Choice>
-        <mc:Fallback>
+        <mc:Fallback xmlns="">
           <p:sp>
             <p:nvSpPr>
               <p:cNvPr id="3" name="TextBox 2">

--- a/Course content/Slides/Topic 7 - Dimensionality reduction.pptx
+++ b/Course content/Slides/Topic 7 - Dimensionality reduction.pptx
@@ -137,14 +137,6 @@
     </p:ext>
   </p:extLst>
 </p:presentation>
-</file>
-
-<file path=ppt/revisionInfo.xml><?xml version="1.0" encoding="utf-8"?>
-<p1510:revInfo xmlns:a="http://schemas.openxmlformats.org/drawingml/2006/main" xmlns:r="http://schemas.openxmlformats.org/officeDocument/2006/relationships" xmlns:p1510="http://schemas.microsoft.com/office/powerpoint/2015/10/main">
-  <p1510:revLst>
-    <p1510:client id="{C6B80D17-39A7-49D1-A96C-D7F73E9814D9}" v="53" dt="2023-11-15T13:09:48.104"/>
-  </p1510:revLst>
-</p1510:revInfo>
 </file>
 
 <file path=ppt/changesInfos/changesInfo1.xml><?xml version="1.0" encoding="utf-8"?>
@@ -458,6 +450,30 @@
       </pc:sldChg>
     </pc:docChg>
   </pc:docChgLst>
+  <pc:docChgLst>
+    <pc:chgData name="Javier Bas Vicente" userId="96bf8a96-3310-496c-8c7e-8a087f977faa" providerId="ADAL" clId="{86DF582A-03A2-4713-920B-191B6E3592AE}"/>
+    <pc:docChg chg="modSld">
+      <pc:chgData name="Javier Bas Vicente" userId="96bf8a96-3310-496c-8c7e-8a087f977faa" providerId="ADAL" clId="{86DF582A-03A2-4713-920B-191B6E3592AE}" dt="2024-11-25T16:11:11.805" v="0" actId="6549"/>
+      <pc:docMkLst>
+        <pc:docMk/>
+      </pc:docMkLst>
+      <pc:sldChg chg="modSp mod">
+        <pc:chgData name="Javier Bas Vicente" userId="96bf8a96-3310-496c-8c7e-8a087f977faa" providerId="ADAL" clId="{86DF582A-03A2-4713-920B-191B6E3592AE}" dt="2024-11-25T16:11:11.805" v="0" actId="6549"/>
+        <pc:sldMkLst>
+          <pc:docMk/>
+          <pc:sldMk cId="2149080833" sldId="278"/>
+        </pc:sldMkLst>
+        <pc:spChg chg="mod">
+          <ac:chgData name="Javier Bas Vicente" userId="96bf8a96-3310-496c-8c7e-8a087f977faa" providerId="ADAL" clId="{86DF582A-03A2-4713-920B-191B6E3592AE}" dt="2024-11-25T16:11:11.805" v="0" actId="6549"/>
+          <ac:spMkLst>
+            <pc:docMk/>
+            <pc:sldMk cId="2149080833" sldId="278"/>
+            <ac:spMk id="3" creationId="{6866AA87-E000-52D2-F65D-4B414B00BBE5}"/>
+          </ac:spMkLst>
+        </pc:spChg>
+      </pc:sldChg>
+    </pc:docChg>
+  </pc:docChgLst>
 </pc:chgInfo>
 </file>
 
@@ -543,7 +559,7 @@
           <a:p>
             <a:fld id="{B9B1DC7F-8587-4047-9A5D-1FCB6614CAE0}" type="datetimeFigureOut">
               <a:rPr lang="en-US" smtClean="0"/>
-              <a:t>11/20/2023</a:t>
+              <a:t>11/25/2024</a:t>
             </a:fld>
             <a:endParaRPr lang="en-US"/>
           </a:p>
@@ -957,7 +973,7 @@
           <a:p>
             <a:fld id="{A7DB5662-7327-465C-9A70-AD96B7A8D67A}" type="datetimeFigureOut">
               <a:rPr lang="en-US" smtClean="0"/>
-              <a:t>11/20/2023</a:t>
+              <a:t>11/25/2024</a:t>
             </a:fld>
             <a:endParaRPr lang="en-US"/>
           </a:p>
@@ -1155,7 +1171,7 @@
           <a:p>
             <a:fld id="{A7DB5662-7327-465C-9A70-AD96B7A8D67A}" type="datetimeFigureOut">
               <a:rPr lang="en-US" smtClean="0"/>
-              <a:t>11/20/2023</a:t>
+              <a:t>11/25/2024</a:t>
             </a:fld>
             <a:endParaRPr lang="en-US"/>
           </a:p>
@@ -1363,7 +1379,7 @@
           <a:p>
             <a:fld id="{A7DB5662-7327-465C-9A70-AD96B7A8D67A}" type="datetimeFigureOut">
               <a:rPr lang="en-US" smtClean="0"/>
-              <a:t>11/20/2023</a:t>
+              <a:t>11/25/2024</a:t>
             </a:fld>
             <a:endParaRPr lang="en-US"/>
           </a:p>
@@ -1561,7 +1577,7 @@
           <a:p>
             <a:fld id="{A7DB5662-7327-465C-9A70-AD96B7A8D67A}" type="datetimeFigureOut">
               <a:rPr lang="en-US" smtClean="0"/>
-              <a:t>11/20/2023</a:t>
+              <a:t>11/25/2024</a:t>
             </a:fld>
             <a:endParaRPr lang="en-US"/>
           </a:p>
@@ -1836,7 +1852,7 @@
           <a:p>
             <a:fld id="{A7DB5662-7327-465C-9A70-AD96B7A8D67A}" type="datetimeFigureOut">
               <a:rPr lang="en-US" smtClean="0"/>
-              <a:t>11/20/2023</a:t>
+              <a:t>11/25/2024</a:t>
             </a:fld>
             <a:endParaRPr lang="en-US"/>
           </a:p>
@@ -2101,7 +2117,7 @@
           <a:p>
             <a:fld id="{A7DB5662-7327-465C-9A70-AD96B7A8D67A}" type="datetimeFigureOut">
               <a:rPr lang="en-US" smtClean="0"/>
-              <a:t>11/20/2023</a:t>
+              <a:t>11/25/2024</a:t>
             </a:fld>
             <a:endParaRPr lang="en-US"/>
           </a:p>
@@ -2513,7 +2529,7 @@
           <a:p>
             <a:fld id="{A7DB5662-7327-465C-9A70-AD96B7A8D67A}" type="datetimeFigureOut">
               <a:rPr lang="en-US" smtClean="0"/>
-              <a:t>11/20/2023</a:t>
+              <a:t>11/25/2024</a:t>
             </a:fld>
             <a:endParaRPr lang="en-US"/>
           </a:p>
@@ -2654,7 +2670,7 @@
           <a:p>
             <a:fld id="{A7DB5662-7327-465C-9A70-AD96B7A8D67A}" type="datetimeFigureOut">
               <a:rPr lang="en-US" smtClean="0"/>
-              <a:t>11/20/2023</a:t>
+              <a:t>11/25/2024</a:t>
             </a:fld>
             <a:endParaRPr lang="en-US"/>
           </a:p>
@@ -2767,7 +2783,7 @@
           <a:p>
             <a:fld id="{A7DB5662-7327-465C-9A70-AD96B7A8D67A}" type="datetimeFigureOut">
               <a:rPr lang="en-US" smtClean="0"/>
-              <a:t>11/20/2023</a:t>
+              <a:t>11/25/2024</a:t>
             </a:fld>
             <a:endParaRPr lang="en-US"/>
           </a:p>
@@ -3078,7 +3094,7 @@
           <a:p>
             <a:fld id="{A7DB5662-7327-465C-9A70-AD96B7A8D67A}" type="datetimeFigureOut">
               <a:rPr lang="en-US" smtClean="0"/>
-              <a:t>11/20/2023</a:t>
+              <a:t>11/25/2024</a:t>
             </a:fld>
             <a:endParaRPr lang="en-US"/>
           </a:p>
@@ -3366,7 +3382,7 @@
           <a:p>
             <a:fld id="{A7DB5662-7327-465C-9A70-AD96B7A8D67A}" type="datetimeFigureOut">
               <a:rPr lang="en-US" smtClean="0"/>
-              <a:t>11/20/2023</a:t>
+              <a:t>11/25/2024</a:t>
             </a:fld>
             <a:endParaRPr lang="en-US"/>
           </a:p>
@@ -3607,7 +3623,7 @@
           <a:p>
             <a:fld id="{A7DB5662-7327-465C-9A70-AD96B7A8D67A}" type="datetimeFigureOut">
               <a:rPr lang="en-US" smtClean="0"/>
-              <a:t>11/20/2023</a:t>
+              <a:t>11/25/2024</a:t>
             </a:fld>
             <a:endParaRPr lang="en-US"/>
           </a:p>
@@ -4150,13 +4166,6 @@
             </a:r>
           </a:p>
           <a:p>
-            <a:r>
-              <a:rPr lang="es-ES" sz="2000" dirty="0">
-                <a:latin typeface="+mj-lt"/>
-                <a:cs typeface="Times New Roman" panose="02020603050405020304" pitchFamily="18" charset="0"/>
-              </a:rPr>
-              <a:t>2022/2023</a:t>
-            </a:r>
             <a:endParaRPr lang="en-US" sz="2000" dirty="0">
               <a:latin typeface="+mj-lt"/>
               <a:cs typeface="Times New Roman" panose="02020603050405020304" pitchFamily="18" charset="0"/>
